--- a/outputs/shinsegae-ai4pm-0626-3h-workshop.pptx
+++ b/outputs/shinsegae-ai4pm-0626-3h-workshop.pptx
@@ -2,39 +2,39 @@
 <file path=ppt/presentation.xml><?xml version="1.0" encoding="utf-8"?>
 <p:presentation xmlns:p="http://schemas.openxmlformats.org/presentationml/2006/main">
   <p:sldMasterIdLst>
-    <p:sldMasterId xmlns:r="http://schemas.openxmlformats.org/officeDocument/2006/relationships" id="2147483648" r:id="Rc819ed7cf95c419d"/>
+    <p:sldMasterId xmlns:r="http://schemas.openxmlformats.org/officeDocument/2006/relationships" id="2147483648" r:id="R9633c8c022cf4f74"/>
   </p:sldMasterIdLst>
   <p:notesMasterIdLst>
-    <p:notesMasterId xmlns:r="http://schemas.openxmlformats.org/officeDocument/2006/relationships" r:id="Rfbf19fb20a96425c"/>
+    <p:notesMasterId xmlns:r="http://schemas.openxmlformats.org/officeDocument/2006/relationships" r:id="R7b14ed3dbe0e44f8"/>
   </p:notesMasterIdLst>
   <p:sldIdLst>
-    <p:sldId xmlns:r="http://schemas.openxmlformats.org/officeDocument/2006/relationships" id="256" r:id="R30625f9fe1b84ba7"/>
-    <p:sldId xmlns:r="http://schemas.openxmlformats.org/officeDocument/2006/relationships" id="257" r:id="Rc87080629e92440d"/>
-    <p:sldId xmlns:r="http://schemas.openxmlformats.org/officeDocument/2006/relationships" id="258" r:id="R2cb0f3040fc14b38"/>
-    <p:sldId xmlns:r="http://schemas.openxmlformats.org/officeDocument/2006/relationships" id="259" r:id="Rf6fb8376356443b7"/>
-    <p:sldId xmlns:r="http://schemas.openxmlformats.org/officeDocument/2006/relationships" id="260" r:id="R00b446ded7d346dc"/>
-    <p:sldId xmlns:r="http://schemas.openxmlformats.org/officeDocument/2006/relationships" id="261" r:id="R9cc727d52b384d53"/>
-    <p:sldId xmlns:r="http://schemas.openxmlformats.org/officeDocument/2006/relationships" id="262" r:id="Rae32fa5f5a2e4217"/>
-    <p:sldId xmlns:r="http://schemas.openxmlformats.org/officeDocument/2006/relationships" id="263" r:id="Rae776f030cf24e5f"/>
-    <p:sldId xmlns:r="http://schemas.openxmlformats.org/officeDocument/2006/relationships" id="264" r:id="R3287c4209afa4ed0"/>
-    <p:sldId xmlns:r="http://schemas.openxmlformats.org/officeDocument/2006/relationships" id="265" r:id="Rec125becface4611"/>
-    <p:sldId xmlns:r="http://schemas.openxmlformats.org/officeDocument/2006/relationships" id="266" r:id="Rd9edf5806d204489"/>
-    <p:sldId xmlns:r="http://schemas.openxmlformats.org/officeDocument/2006/relationships" id="267" r:id="R6cdccd9e761a4c71"/>
-    <p:sldId xmlns:r="http://schemas.openxmlformats.org/officeDocument/2006/relationships" id="268" r:id="Rb36293a9d3bf4634"/>
-    <p:sldId xmlns:r="http://schemas.openxmlformats.org/officeDocument/2006/relationships" id="269" r:id="R90983999a9bb4705"/>
-    <p:sldId xmlns:r="http://schemas.openxmlformats.org/officeDocument/2006/relationships" id="270" r:id="R2c47139659ee4637"/>
-    <p:sldId xmlns:r="http://schemas.openxmlformats.org/officeDocument/2006/relationships" id="271" r:id="Ra4766225857c4e8c"/>
-    <p:sldId xmlns:r="http://schemas.openxmlformats.org/officeDocument/2006/relationships" id="272" r:id="R40a6cd357fac46b3"/>
-    <p:sldId xmlns:r="http://schemas.openxmlformats.org/officeDocument/2006/relationships" id="273" r:id="R227aa80882bf4d68"/>
-    <p:sldId xmlns:r="http://schemas.openxmlformats.org/officeDocument/2006/relationships" id="274" r:id="Raa3cc3b450e64613"/>
-    <p:sldId xmlns:r="http://schemas.openxmlformats.org/officeDocument/2006/relationships" id="275" r:id="R4bcf22c68b3b4bcd"/>
-    <p:sldId xmlns:r="http://schemas.openxmlformats.org/officeDocument/2006/relationships" id="276" r:id="R18f042403ad54a39"/>
-    <p:sldId xmlns:r="http://schemas.openxmlformats.org/officeDocument/2006/relationships" id="277" r:id="Rf9891988c5104e41"/>
-    <p:sldId xmlns:r="http://schemas.openxmlformats.org/officeDocument/2006/relationships" id="278" r:id="Rd086a67073da4bd1"/>
-    <p:sldId xmlns:r="http://schemas.openxmlformats.org/officeDocument/2006/relationships" id="279" r:id="R1f7ae47a577c4f81"/>
-    <p:sldId xmlns:r="http://schemas.openxmlformats.org/officeDocument/2006/relationships" id="280" r:id="R6233204c3d8d41e9"/>
-    <p:sldId xmlns:r="http://schemas.openxmlformats.org/officeDocument/2006/relationships" id="281" r:id="R556e5b92560044ff"/>
-    <p:sldId xmlns:r="http://schemas.openxmlformats.org/officeDocument/2006/relationships" id="282" r:id="R7c6b746f67264c6d"/>
+    <p:sldId xmlns:r="http://schemas.openxmlformats.org/officeDocument/2006/relationships" id="256" r:id="R184347c8baf24c52"/>
+    <p:sldId xmlns:r="http://schemas.openxmlformats.org/officeDocument/2006/relationships" id="257" r:id="R15aceac7cda24836"/>
+    <p:sldId xmlns:r="http://schemas.openxmlformats.org/officeDocument/2006/relationships" id="258" r:id="R916fdad78bc840ab"/>
+    <p:sldId xmlns:r="http://schemas.openxmlformats.org/officeDocument/2006/relationships" id="259" r:id="R229f748e13094acc"/>
+    <p:sldId xmlns:r="http://schemas.openxmlformats.org/officeDocument/2006/relationships" id="260" r:id="Rb6245f0298904dda"/>
+    <p:sldId xmlns:r="http://schemas.openxmlformats.org/officeDocument/2006/relationships" id="261" r:id="R5f2e14855a07471a"/>
+    <p:sldId xmlns:r="http://schemas.openxmlformats.org/officeDocument/2006/relationships" id="262" r:id="R0e351e8b0c184331"/>
+    <p:sldId xmlns:r="http://schemas.openxmlformats.org/officeDocument/2006/relationships" id="263" r:id="Rb8fa36d3fcef45db"/>
+    <p:sldId xmlns:r="http://schemas.openxmlformats.org/officeDocument/2006/relationships" id="264" r:id="Rd47d14225fb146ff"/>
+    <p:sldId xmlns:r="http://schemas.openxmlformats.org/officeDocument/2006/relationships" id="265" r:id="Rd22e89e89d4643e5"/>
+    <p:sldId xmlns:r="http://schemas.openxmlformats.org/officeDocument/2006/relationships" id="266" r:id="Rb23de1b899a14137"/>
+    <p:sldId xmlns:r="http://schemas.openxmlformats.org/officeDocument/2006/relationships" id="267" r:id="R155ff1a27c514030"/>
+    <p:sldId xmlns:r="http://schemas.openxmlformats.org/officeDocument/2006/relationships" id="268" r:id="R3de92e4b6b464832"/>
+    <p:sldId xmlns:r="http://schemas.openxmlformats.org/officeDocument/2006/relationships" id="269" r:id="Rc692ac41ea8f430a"/>
+    <p:sldId xmlns:r="http://schemas.openxmlformats.org/officeDocument/2006/relationships" id="270" r:id="R5c9caba7c8884df0"/>
+    <p:sldId xmlns:r="http://schemas.openxmlformats.org/officeDocument/2006/relationships" id="271" r:id="R98f479c679b84616"/>
+    <p:sldId xmlns:r="http://schemas.openxmlformats.org/officeDocument/2006/relationships" id="272" r:id="Re2c73d37ba9a4e3a"/>
+    <p:sldId xmlns:r="http://schemas.openxmlformats.org/officeDocument/2006/relationships" id="273" r:id="R31e1fa7df08c4daa"/>
+    <p:sldId xmlns:r="http://schemas.openxmlformats.org/officeDocument/2006/relationships" id="274" r:id="Rdfad3b86ef9443bf"/>
+    <p:sldId xmlns:r="http://schemas.openxmlformats.org/officeDocument/2006/relationships" id="275" r:id="Red5c6b6e28564981"/>
+    <p:sldId xmlns:r="http://schemas.openxmlformats.org/officeDocument/2006/relationships" id="276" r:id="R0c68216789ef4af6"/>
+    <p:sldId xmlns:r="http://schemas.openxmlformats.org/officeDocument/2006/relationships" id="277" r:id="Rd4862ae47e0544e7"/>
+    <p:sldId xmlns:r="http://schemas.openxmlformats.org/officeDocument/2006/relationships" id="278" r:id="R15e7c831a65d45c3"/>
+    <p:sldId xmlns:r="http://schemas.openxmlformats.org/officeDocument/2006/relationships" id="279" r:id="R3ad6ce7efa4a414f"/>
+    <p:sldId xmlns:r="http://schemas.openxmlformats.org/officeDocument/2006/relationships" id="280" r:id="Rbaae21d39b6e4c85"/>
+    <p:sldId xmlns:r="http://schemas.openxmlformats.org/officeDocument/2006/relationships" id="281" r:id="R5198f3212f08400d"/>
+    <p:sldId xmlns:r="http://schemas.openxmlformats.org/officeDocument/2006/relationships" id="282" r:id="R83d85892d74d4541"/>
   </p:sldIdLst>
   <p:sldSz cx="12192000" cy="6858000"/>
   <p:notesSz cx="6858000" cy="9144000"/>
@@ -2626,7 +2626,7 @@
   </p:cSld>
   <p:clrMap bg1="lt1" tx1="dk1" bg2="lt2" tx2="dk2" accent1="accent1" accent2="accent2" accent3="accent3" accent4="accent4" accent5="accent5" accent6="accent6" hlink="hlink" folHlink="folHlink"/>
   <p:sldLayoutIdLst>
-    <p:sldLayoutId xmlns:r="http://schemas.openxmlformats.org/officeDocument/2006/relationships" id="2147483649" r:id="Re0cb07a3eda44d9d"/>
+    <p:sldLayoutId xmlns:r="http://schemas.openxmlformats.org/officeDocument/2006/relationships" id="2147483649" r:id="R0c196421bcc5435f"/>
   </p:sldLayoutIdLst>
   <p:txStyles>
     <p:titleStyle>
@@ -3185,7 +3185,7 @@
           <p:cNvPr id="1" name="cover-ring-1">
             <a:extLst xmlns:a="http://schemas.openxmlformats.org/drawingml/2006/main">
               <a:ext uri="{FF2B5EF4-FFF2-40B4-BE49-F238E27FC236}">
-                <a16:creationId xmlns:a16="http://schemas.microsoft.com/office/drawing/2014/main" id="{8A91350A-C46C-4DDB-ACDA-BDF359882870}"/>
+                <a16:creationId xmlns:a16="http://schemas.microsoft.com/office/drawing/2014/main" id="{CF0815B8-78DF-4302-A5C6-4596791E1B59}"/>
               </a:ext>
             </a:extLst>
           </p:cNvPr>
@@ -3216,7 +3216,7 @@
           <p:cNvPr id="2" name="cover-ring-2">
             <a:extLst xmlns:a="http://schemas.openxmlformats.org/drawingml/2006/main">
               <a:ext uri="{FF2B5EF4-FFF2-40B4-BE49-F238E27FC236}">
-                <a16:creationId xmlns:a16="http://schemas.microsoft.com/office/drawing/2014/main" id="{ADB6AFB4-8EF8-47F8-A369-DA5CF0DF9A80}"/>
+                <a16:creationId xmlns:a16="http://schemas.microsoft.com/office/drawing/2014/main" id="{D97E1287-4ED1-47F0-9FE7-367D3E7854D5}"/>
               </a:ext>
             </a:extLst>
           </p:cNvPr>
@@ -3247,7 +3247,7 @@
           <p:cNvPr id="3" name="cover-orb-1">
             <a:extLst xmlns:a="http://schemas.openxmlformats.org/drawingml/2006/main">
               <a:ext uri="{FF2B5EF4-FFF2-40B4-BE49-F238E27FC236}">
-                <a16:creationId xmlns:a16="http://schemas.microsoft.com/office/drawing/2014/main" id="{2039E510-9EF5-4365-85CE-A23A82CD19C0}"/>
+                <a16:creationId xmlns:a16="http://schemas.microsoft.com/office/drawing/2014/main" id="{40605E6E-8AB7-43AA-A09A-7043D82F361D}"/>
               </a:ext>
             </a:extLst>
           </p:cNvPr>
@@ -3278,7 +3278,7 @@
           <p:cNvPr id="4" name="cover-orb-2">
             <a:extLst xmlns:a="http://schemas.openxmlformats.org/drawingml/2006/main">
               <a:ext uri="{FF2B5EF4-FFF2-40B4-BE49-F238E27FC236}">
-                <a16:creationId xmlns:a16="http://schemas.microsoft.com/office/drawing/2014/main" id="{5118E661-65AB-4780-BB0C-5C14387286BC}"/>
+                <a16:creationId xmlns:a16="http://schemas.microsoft.com/office/drawing/2014/main" id="{3831BC65-CECA-49F0-A858-8D13E4B618C8}"/>
               </a:ext>
             </a:extLst>
           </p:cNvPr>
@@ -3309,7 +3309,7 @@
           <p:cNvPr id="5" name="logo-backplate">
             <a:extLst xmlns:a="http://schemas.openxmlformats.org/drawingml/2006/main">
               <a:ext uri="{FF2B5EF4-FFF2-40B4-BE49-F238E27FC236}">
-                <a16:creationId xmlns:a16="http://schemas.microsoft.com/office/drawing/2014/main" id="{A4E2B6D9-CE0B-425E-BE35-16DCE29BCB01}"/>
+                <a16:creationId xmlns:a16="http://schemas.microsoft.com/office/drawing/2014/main" id="{CEAD62AA-AE25-43F7-AA07-22BF6E559062}"/>
               </a:ext>
             </a:extLst>
           </p:cNvPr>
@@ -3346,7 +3346,7 @@
           <p:nvPr/>
         </p:nvPicPr>
         <p:blipFill>
-          <a:blip xmlns:r="http://schemas.openxmlformats.org/officeDocument/2006/relationships" xmlns:a="http://schemas.openxmlformats.org/drawingml/2006/main" r:embed="R1803412fc1984451"/>
+          <a:blip xmlns:r="http://schemas.openxmlformats.org/officeDocument/2006/relationships" xmlns:a="http://schemas.openxmlformats.org/drawingml/2006/main" r:embed="Rc0d0c4d024e5465d"/>
           <a:stretch xmlns:a="http://schemas.openxmlformats.org/drawingml/2006/main"/>
         </p:blipFill>
         <p:spPr>
@@ -3364,7 +3364,7 @@
           <p:cNvPr id="7" name="cover-kicker">
             <a:extLst xmlns:a="http://schemas.openxmlformats.org/drawingml/2006/main">
               <a:ext uri="{FF2B5EF4-FFF2-40B4-BE49-F238E27FC236}">
-                <a16:creationId xmlns:a16="http://schemas.microsoft.com/office/drawing/2014/main" id="{DB57F6EE-62E6-48B2-AEDF-F16DA31B82C3}"/>
+                <a16:creationId xmlns:a16="http://schemas.microsoft.com/office/drawing/2014/main" id="{A62833DC-F37B-4211-BB70-F4BDF7CA009D}"/>
               </a:ext>
             </a:extLst>
           </p:cNvPr>
@@ -3420,7 +3420,7 @@
           <p:cNvPr id="8" name="cover-title">
             <a:extLst xmlns:a="http://schemas.openxmlformats.org/drawingml/2006/main">
               <a:ext uri="{FF2B5EF4-FFF2-40B4-BE49-F238E27FC236}">
-                <a16:creationId xmlns:a16="http://schemas.microsoft.com/office/drawing/2014/main" id="{4756685E-5970-4BCE-B569-64A4BD8A1E39}"/>
+                <a16:creationId xmlns:a16="http://schemas.microsoft.com/office/drawing/2014/main" id="{78A2675D-8F35-4369-901E-FC7A9DB4E51F}"/>
               </a:ext>
             </a:extLst>
           </p:cNvPr>
@@ -3522,7 +3522,7 @@
           <p:cNvPr id="9" name="cover-line">
             <a:extLst xmlns:a="http://schemas.openxmlformats.org/drawingml/2006/main">
               <a:ext uri="{FF2B5EF4-FFF2-40B4-BE49-F238E27FC236}">
-                <a16:creationId xmlns:a16="http://schemas.microsoft.com/office/drawing/2014/main" id="{29B54574-7DB7-4891-977D-784978245556}"/>
+                <a16:creationId xmlns:a16="http://schemas.microsoft.com/office/drawing/2014/main" id="{FBE38037-833D-4B2B-9477-5603824B841D}"/>
               </a:ext>
             </a:extLst>
           </p:cNvPr>
@@ -3553,7 +3553,7 @@
           <p:cNvPr id="10" name="cover-subtitle">
             <a:extLst xmlns:a="http://schemas.openxmlformats.org/drawingml/2006/main">
               <a:ext uri="{FF2B5EF4-FFF2-40B4-BE49-F238E27FC236}">
-                <a16:creationId xmlns:a16="http://schemas.microsoft.com/office/drawing/2014/main" id="{A3ACFB81-660D-4A7C-88CB-B0CB2D3B6A3B}"/>
+                <a16:creationId xmlns:a16="http://schemas.microsoft.com/office/drawing/2014/main" id="{37D63437-0728-4C26-8F0F-B11AB630F168}"/>
               </a:ext>
             </a:extLst>
           </p:cNvPr>
@@ -3632,7 +3632,7 @@
           <p:cNvPr id="11" name="cover-panel">
             <a:extLst xmlns:a="http://schemas.openxmlformats.org/drawingml/2006/main">
               <a:ext uri="{FF2B5EF4-FFF2-40B4-BE49-F238E27FC236}">
-                <a16:creationId xmlns:a16="http://schemas.microsoft.com/office/drawing/2014/main" id="{39FBBFFD-5A5B-4558-90FD-D3C195219801}"/>
+                <a16:creationId xmlns:a16="http://schemas.microsoft.com/office/drawing/2014/main" id="{D8638185-9E6A-4F9E-8574-BB30B6D96202}"/>
               </a:ext>
             </a:extLst>
           </p:cNvPr>
@@ -3671,7 +3671,7 @@
           <p:cNvPr id="12" name="cover-metric">
             <a:extLst xmlns:a="http://schemas.openxmlformats.org/drawingml/2006/main">
               <a:ext uri="{FF2B5EF4-FFF2-40B4-BE49-F238E27FC236}">
-                <a16:creationId xmlns:a16="http://schemas.microsoft.com/office/drawing/2014/main" id="{DCA61422-7A9B-4FB6-B146-77338DC2F981}"/>
+                <a16:creationId xmlns:a16="http://schemas.microsoft.com/office/drawing/2014/main" id="{3C96123E-55AF-48F6-802F-9D96FDA5AC35}"/>
               </a:ext>
             </a:extLst>
           </p:cNvPr>
@@ -3773,7 +3773,7 @@
           <p:cNvPr id="13" name="cover-note">
             <a:extLst xmlns:a="http://schemas.openxmlformats.org/drawingml/2006/main">
               <a:ext uri="{FF2B5EF4-FFF2-40B4-BE49-F238E27FC236}">
-                <a16:creationId xmlns:a16="http://schemas.microsoft.com/office/drawing/2014/main" id="{202179CE-C4DA-41C0-9D54-BF52A94D2A06}"/>
+                <a16:creationId xmlns:a16="http://schemas.microsoft.com/office/drawing/2014/main" id="{59FF180A-579F-411F-B53F-8925D6611CBC}"/>
               </a:ext>
             </a:extLst>
           </p:cNvPr>
@@ -3819,7 +3819,7 @@
                 <a:ea typeface="Pretendard"/>
                 <a:cs typeface="Pretendard"/>
               </a:rPr>
-              <a:t>오늘의 목적은 아이디어 확장이 아니라</a:t>
+              <a:t>오늘의 목적은 아이디어</a:t>
             </a:r>
           </a:p>
           <a:p xmlns:a="http://schemas.openxmlformats.org/drawingml/2006/main">
@@ -3842,7 +3842,53 @@
                 <a:ea typeface="Pretendard"/>
                 <a:cs typeface="Pretendard"/>
               </a:rPr>
-              <a:t>8월 21일에 구현할 업무 과제 확정입니다.</a:t>
+              <a:t>확장이 아니라</a:t>
+            </a:r>
+          </a:p>
+          <a:p xmlns:a="http://schemas.openxmlformats.org/drawingml/2006/main">
+            <a:pPr algn="l">
+              <a:defRPr sz="1275" b="0">
+                <a:solidFill>
+                  <a:srgbClr val="4B5563"/>
+                </a:solidFill>
+                <a:latin typeface="Pretendard"/>
+                <a:ea typeface="Pretendard"/>
+                <a:cs typeface="Pretendard"/>
+              </a:defRPr>
+            </a:pPr>
+            <a:r>
+              <a:rPr sz="1275" b="0">
+                <a:solidFill>
+                  <a:srgbClr val="4B5563"/>
+                </a:solidFill>
+                <a:latin typeface="Pretendard"/>
+                <a:ea typeface="Pretendard"/>
+                <a:cs typeface="Pretendard"/>
+              </a:rPr>
+              <a:t>8월 21일에 구현할 업무</a:t>
+            </a:r>
+          </a:p>
+          <a:p xmlns:a="http://schemas.openxmlformats.org/drawingml/2006/main">
+            <a:pPr algn="l">
+              <a:defRPr sz="1275" b="0">
+                <a:solidFill>
+                  <a:srgbClr val="4B5563"/>
+                </a:solidFill>
+                <a:latin typeface="Pretendard"/>
+                <a:ea typeface="Pretendard"/>
+                <a:cs typeface="Pretendard"/>
+              </a:defRPr>
+            </a:pPr>
+            <a:r>
+              <a:rPr sz="1275" b="0">
+                <a:solidFill>
+                  <a:srgbClr val="4B5563"/>
+                </a:solidFill>
+                <a:latin typeface="Pretendard"/>
+                <a:ea typeface="Pretendard"/>
+                <a:cs typeface="Pretendard"/>
+              </a:rPr>
+              <a:t>과제 확정입니다.</a:t>
             </a:r>
           </a:p>
         </p:txBody>
@@ -3852,7 +3898,7 @@
           <p:cNvPr id="14" name="footer-number">
             <a:extLst xmlns:a="http://schemas.openxmlformats.org/drawingml/2006/main">
               <a:ext uri="{FF2B5EF4-FFF2-40B4-BE49-F238E27FC236}">
-                <a16:creationId xmlns:a16="http://schemas.microsoft.com/office/drawing/2014/main" id="{B18D8BF2-1884-48F2-8B18-3BE56F860961}"/>
+                <a16:creationId xmlns:a16="http://schemas.microsoft.com/office/drawing/2014/main" id="{4328CECC-6ED3-4889-AD78-31B1B31901D9}"/>
               </a:ext>
             </a:extLst>
           </p:cNvPr>
@@ -3906,7 +3952,7 @@
     </p:spTree>
     <p:extLst>
       <p:ext uri="{BB962C8B-B14F-4D97-AF65-F5344CB8AC3E}">
-        <p14:creationId xmlns:p14="http://schemas.microsoft.com/office/powerpoint/2010/main" val="1302735410"/>
+        <p14:creationId xmlns:p14="http://schemas.microsoft.com/office/powerpoint/2010/main" val="1650625797"/>
       </p:ext>
     </p:extLst>
   </p:cSld>
@@ -3937,7 +3983,7 @@
           <p:cNvPr id="1" name="decor-ring-1">
             <a:extLst xmlns:a="http://schemas.openxmlformats.org/drawingml/2006/main">
               <a:ext uri="{FF2B5EF4-FFF2-40B4-BE49-F238E27FC236}">
-                <a16:creationId xmlns:a16="http://schemas.microsoft.com/office/drawing/2014/main" id="{92F13F35-2FA7-4477-B3E0-788AA0AF7ABC}"/>
+                <a16:creationId xmlns:a16="http://schemas.microsoft.com/office/drawing/2014/main" id="{3F77B4D2-5DD0-4A80-B391-170900BF6306}"/>
               </a:ext>
             </a:extLst>
           </p:cNvPr>
@@ -3968,7 +4014,7 @@
           <p:cNvPr id="2" name="decor-ring-2">
             <a:extLst xmlns:a="http://schemas.openxmlformats.org/drawingml/2006/main">
               <a:ext uri="{FF2B5EF4-FFF2-40B4-BE49-F238E27FC236}">
-                <a16:creationId xmlns:a16="http://schemas.microsoft.com/office/drawing/2014/main" id="{13F52C4A-B960-4158-ACE2-61FA8CA1BCE6}"/>
+                <a16:creationId xmlns:a16="http://schemas.microsoft.com/office/drawing/2014/main" id="{2499DA2D-DDCB-452F-9139-EE85A93EB80E}"/>
               </a:ext>
             </a:extLst>
           </p:cNvPr>
@@ -3999,7 +4045,7 @@
           <p:cNvPr id="3" name="decor-orb-1">
             <a:extLst xmlns:a="http://schemas.openxmlformats.org/drawingml/2006/main">
               <a:ext uri="{FF2B5EF4-FFF2-40B4-BE49-F238E27FC236}">
-                <a16:creationId xmlns:a16="http://schemas.microsoft.com/office/drawing/2014/main" id="{0F7B45A3-2FC3-4DED-A15A-20A3B22A0DBB}"/>
+                <a16:creationId xmlns:a16="http://schemas.microsoft.com/office/drawing/2014/main" id="{9E533347-6A96-4C48-94BF-E651300E1880}"/>
               </a:ext>
             </a:extLst>
           </p:cNvPr>
@@ -4030,7 +4076,7 @@
           <p:cNvPr id="4" name="decor-orb-2">
             <a:extLst xmlns:a="http://schemas.openxmlformats.org/drawingml/2006/main">
               <a:ext uri="{FF2B5EF4-FFF2-40B4-BE49-F238E27FC236}">
-                <a16:creationId xmlns:a16="http://schemas.microsoft.com/office/drawing/2014/main" id="{D9AE1423-5086-468D-99DF-E32DA2DB0791}"/>
+                <a16:creationId xmlns:a16="http://schemas.microsoft.com/office/drawing/2014/main" id="{95331BB0-E085-44BD-8BC6-4F0D8361BE95}"/>
               </a:ext>
             </a:extLst>
           </p:cNvPr>
@@ -4061,7 +4107,7 @@
           <p:cNvPr id="5" name="title-bar">
             <a:extLst xmlns:a="http://schemas.openxmlformats.org/drawingml/2006/main">
               <a:ext uri="{FF2B5EF4-FFF2-40B4-BE49-F238E27FC236}">
-                <a16:creationId xmlns:a16="http://schemas.microsoft.com/office/drawing/2014/main" id="{47FA957B-5406-46F7-B6B2-DFB2565B7209}"/>
+                <a16:creationId xmlns:a16="http://schemas.microsoft.com/office/drawing/2014/main" id="{9698B345-91DA-4C93-9944-60139E440FC8}"/>
               </a:ext>
             </a:extLst>
           </p:cNvPr>
@@ -4092,7 +4138,7 @@
           <p:cNvPr id="6" name="kicker">
             <a:extLst xmlns:a="http://schemas.openxmlformats.org/drawingml/2006/main">
               <a:ext uri="{FF2B5EF4-FFF2-40B4-BE49-F238E27FC236}">
-                <a16:creationId xmlns:a16="http://schemas.microsoft.com/office/drawing/2014/main" id="{3C45CB3A-2AF5-4685-8ED5-0F9D2E7D88D5}"/>
+                <a16:creationId xmlns:a16="http://schemas.microsoft.com/office/drawing/2014/main" id="{25CB801D-54C5-4B4B-A8E0-6E66B37FF521}"/>
               </a:ext>
             </a:extLst>
           </p:cNvPr>
@@ -4148,7 +4194,7 @@
           <p:cNvPr id="7" name="title">
             <a:extLst xmlns:a="http://schemas.openxmlformats.org/drawingml/2006/main">
               <a:ext uri="{FF2B5EF4-FFF2-40B4-BE49-F238E27FC236}">
-                <a16:creationId xmlns:a16="http://schemas.microsoft.com/office/drawing/2014/main" id="{295A3CC7-F795-42B5-AB8F-84CF4E013721}"/>
+                <a16:creationId xmlns:a16="http://schemas.microsoft.com/office/drawing/2014/main" id="{13FDD28C-285A-424A-95B3-8763BBFCA630}"/>
               </a:ext>
             </a:extLst>
           </p:cNvPr>
@@ -4204,7 +4250,7 @@
           <p:cNvPr id="8" name="subtitle">
             <a:extLst xmlns:a="http://schemas.openxmlformats.org/drawingml/2006/main">
               <a:ext uri="{FF2B5EF4-FFF2-40B4-BE49-F238E27FC236}">
-                <a16:creationId xmlns:a16="http://schemas.microsoft.com/office/drawing/2014/main" id="{1C834702-556F-4F17-9650-AFD06D0E0AC3}"/>
+                <a16:creationId xmlns:a16="http://schemas.microsoft.com/office/drawing/2014/main" id="{0634F1BF-313A-49FF-8BE9-6CE366C3B85F}"/>
               </a:ext>
             </a:extLst>
           </p:cNvPr>
@@ -4264,7 +4310,7 @@
           <p:nvPr/>
         </p:nvPicPr>
         <p:blipFill>
-          <a:blip xmlns:r="http://schemas.openxmlformats.org/officeDocument/2006/relationships" xmlns:a="http://schemas.openxmlformats.org/drawingml/2006/main" r:embed="R94af523481d44a82"/>
+          <a:blip xmlns:r="http://schemas.openxmlformats.org/officeDocument/2006/relationships" xmlns:a="http://schemas.openxmlformats.org/drawingml/2006/main" r:embed="R6cee41ba834e4daf"/>
           <a:stretch xmlns:a="http://schemas.openxmlformats.org/drawingml/2006/main"/>
         </p:blipFill>
         <p:spPr>
@@ -4282,7 +4328,7 @@
           <p:cNvPr id="10" name="footer-number">
             <a:extLst xmlns:a="http://schemas.openxmlformats.org/drawingml/2006/main">
               <a:ext uri="{FF2B5EF4-FFF2-40B4-BE49-F238E27FC236}">
-                <a16:creationId xmlns:a16="http://schemas.microsoft.com/office/drawing/2014/main" id="{561DBE3D-32F2-422B-BD61-5B66F6B84BD6}"/>
+                <a16:creationId xmlns:a16="http://schemas.microsoft.com/office/drawing/2014/main" id="{9CDDFB1E-E85F-441C-A1EB-DD8A7B42C820}"/>
               </a:ext>
             </a:extLst>
           </p:cNvPr>
@@ -4338,7 +4384,7 @@
           <p:cNvPr id="11" name="score-header">
             <a:extLst xmlns:a="http://schemas.openxmlformats.org/drawingml/2006/main">
               <a:ext uri="{FF2B5EF4-FFF2-40B4-BE49-F238E27FC236}">
-                <a16:creationId xmlns:a16="http://schemas.microsoft.com/office/drawing/2014/main" id="{514D9924-135D-4F7F-9581-1B9E27A8ADF1}"/>
+                <a16:creationId xmlns:a16="http://schemas.microsoft.com/office/drawing/2014/main" id="{6A2F4803-6DBC-4182-8C38-79418621C107}"/>
               </a:ext>
             </a:extLst>
           </p:cNvPr>
@@ -4371,7 +4417,7 @@
           <p:cNvPr id="12" name="score-head-text">
             <a:extLst xmlns:a="http://schemas.openxmlformats.org/drawingml/2006/main">
               <a:ext uri="{FF2B5EF4-FFF2-40B4-BE49-F238E27FC236}">
-                <a16:creationId xmlns:a16="http://schemas.microsoft.com/office/drawing/2014/main" id="{D62C523D-D5E9-4E70-BFCE-6A95CC01D166}"/>
+                <a16:creationId xmlns:a16="http://schemas.microsoft.com/office/drawing/2014/main" id="{05691AE4-E3FD-48D6-AA83-347AED001E09}"/>
               </a:ext>
             </a:extLst>
           </p:cNvPr>
@@ -4427,7 +4473,7 @@
           <p:cNvPr id="13" name="score-header">
             <a:extLst xmlns:a="http://schemas.openxmlformats.org/drawingml/2006/main">
               <a:ext uri="{FF2B5EF4-FFF2-40B4-BE49-F238E27FC236}">
-                <a16:creationId xmlns:a16="http://schemas.microsoft.com/office/drawing/2014/main" id="{D34C64A3-E430-4E9B-A3CB-FD5D37A63ED0}"/>
+                <a16:creationId xmlns:a16="http://schemas.microsoft.com/office/drawing/2014/main" id="{50E8C4BE-0DAB-4E54-9067-E89B52499F46}"/>
               </a:ext>
             </a:extLst>
           </p:cNvPr>
@@ -4460,7 +4506,7 @@
           <p:cNvPr id="14" name="score-head-text">
             <a:extLst xmlns:a="http://schemas.openxmlformats.org/drawingml/2006/main">
               <a:ext uri="{FF2B5EF4-FFF2-40B4-BE49-F238E27FC236}">
-                <a16:creationId xmlns:a16="http://schemas.microsoft.com/office/drawing/2014/main" id="{AF1D6648-B274-4895-AC96-8970F9FD48D1}"/>
+                <a16:creationId xmlns:a16="http://schemas.microsoft.com/office/drawing/2014/main" id="{B172217F-AA5B-483F-B042-6F4E583DAF06}"/>
               </a:ext>
             </a:extLst>
           </p:cNvPr>
@@ -4516,7 +4562,7 @@
           <p:cNvPr id="15" name="score-header">
             <a:extLst xmlns:a="http://schemas.openxmlformats.org/drawingml/2006/main">
               <a:ext uri="{FF2B5EF4-FFF2-40B4-BE49-F238E27FC236}">
-                <a16:creationId xmlns:a16="http://schemas.microsoft.com/office/drawing/2014/main" id="{B7376B98-8832-479C-8AF8-0BA87ADDBB21}"/>
+                <a16:creationId xmlns:a16="http://schemas.microsoft.com/office/drawing/2014/main" id="{B32889B8-762C-4CA6-83EA-0E480F409D90}"/>
               </a:ext>
             </a:extLst>
           </p:cNvPr>
@@ -4549,7 +4595,7 @@
           <p:cNvPr id="16" name="score-head-text">
             <a:extLst xmlns:a="http://schemas.openxmlformats.org/drawingml/2006/main">
               <a:ext uri="{FF2B5EF4-FFF2-40B4-BE49-F238E27FC236}">
-                <a16:creationId xmlns:a16="http://schemas.microsoft.com/office/drawing/2014/main" id="{644FE05B-4F6F-4117-9925-5532276BF818}"/>
+                <a16:creationId xmlns:a16="http://schemas.microsoft.com/office/drawing/2014/main" id="{D2497371-D1EF-4C46-AE19-0EFA95A8CA6B}"/>
               </a:ext>
             </a:extLst>
           </p:cNvPr>
@@ -4605,7 +4651,7 @@
           <p:cNvPr id="17" name="score-header">
             <a:extLst xmlns:a="http://schemas.openxmlformats.org/drawingml/2006/main">
               <a:ext uri="{FF2B5EF4-FFF2-40B4-BE49-F238E27FC236}">
-                <a16:creationId xmlns:a16="http://schemas.microsoft.com/office/drawing/2014/main" id="{FDC43067-42A7-4B35-BA83-F4C009DE2A6B}"/>
+                <a16:creationId xmlns:a16="http://schemas.microsoft.com/office/drawing/2014/main" id="{A2DAC177-C930-4923-BED7-84BB58022255}"/>
               </a:ext>
             </a:extLst>
           </p:cNvPr>
@@ -4638,7 +4684,7 @@
           <p:cNvPr id="18" name="score-head-text">
             <a:extLst xmlns:a="http://schemas.openxmlformats.org/drawingml/2006/main">
               <a:ext uri="{FF2B5EF4-FFF2-40B4-BE49-F238E27FC236}">
-                <a16:creationId xmlns:a16="http://schemas.microsoft.com/office/drawing/2014/main" id="{8E06BD17-BA76-4896-AE6F-A333E0139D9C}"/>
+                <a16:creationId xmlns:a16="http://schemas.microsoft.com/office/drawing/2014/main" id="{AA29D7FB-6009-4A94-843D-359300FF6397}"/>
               </a:ext>
             </a:extLst>
           </p:cNvPr>
@@ -4694,7 +4740,7 @@
           <p:cNvPr id="19" name="score-header">
             <a:extLst xmlns:a="http://schemas.openxmlformats.org/drawingml/2006/main">
               <a:ext uri="{FF2B5EF4-FFF2-40B4-BE49-F238E27FC236}">
-                <a16:creationId xmlns:a16="http://schemas.microsoft.com/office/drawing/2014/main" id="{E13F19F5-954E-4A5B-BB29-DC7526A0882E}"/>
+                <a16:creationId xmlns:a16="http://schemas.microsoft.com/office/drawing/2014/main" id="{77BA3889-41AF-4B73-99EC-766205AC4EC2}"/>
               </a:ext>
             </a:extLst>
           </p:cNvPr>
@@ -4727,7 +4773,7 @@
           <p:cNvPr id="20" name="score-head-text">
             <a:extLst xmlns:a="http://schemas.openxmlformats.org/drawingml/2006/main">
               <a:ext uri="{FF2B5EF4-FFF2-40B4-BE49-F238E27FC236}">
-                <a16:creationId xmlns:a16="http://schemas.microsoft.com/office/drawing/2014/main" id="{BDB426B6-D3AE-4553-85E3-4E6BCAB5B190}"/>
+                <a16:creationId xmlns:a16="http://schemas.microsoft.com/office/drawing/2014/main" id="{2ECCEB6B-2866-410B-91E1-D4C9F8F2FD27}"/>
               </a:ext>
             </a:extLst>
           </p:cNvPr>
@@ -4783,7 +4829,7 @@
           <p:cNvPr id="21" name="score-header">
             <a:extLst xmlns:a="http://schemas.openxmlformats.org/drawingml/2006/main">
               <a:ext uri="{FF2B5EF4-FFF2-40B4-BE49-F238E27FC236}">
-                <a16:creationId xmlns:a16="http://schemas.microsoft.com/office/drawing/2014/main" id="{D2882C0C-C516-4AD3-B883-C2E5E60EE8CD}"/>
+                <a16:creationId xmlns:a16="http://schemas.microsoft.com/office/drawing/2014/main" id="{1F5FE144-E711-4BF4-B1A4-D44CAB79B09A}"/>
               </a:ext>
             </a:extLst>
           </p:cNvPr>
@@ -4816,7 +4862,7 @@
           <p:cNvPr id="22" name="score-head-text">
             <a:extLst xmlns:a="http://schemas.openxmlformats.org/drawingml/2006/main">
               <a:ext uri="{FF2B5EF4-FFF2-40B4-BE49-F238E27FC236}">
-                <a16:creationId xmlns:a16="http://schemas.microsoft.com/office/drawing/2014/main" id="{5BEC3778-54DF-4DDC-8F6F-631BFB75C868}"/>
+                <a16:creationId xmlns:a16="http://schemas.microsoft.com/office/drawing/2014/main" id="{C620CA78-DC4E-4584-B573-9E0E0E152D11}"/>
               </a:ext>
             </a:extLst>
           </p:cNvPr>
@@ -4872,7 +4918,7 @@
           <p:cNvPr id="23" name="score-header">
             <a:extLst xmlns:a="http://schemas.openxmlformats.org/drawingml/2006/main">
               <a:ext uri="{FF2B5EF4-FFF2-40B4-BE49-F238E27FC236}">
-                <a16:creationId xmlns:a16="http://schemas.microsoft.com/office/drawing/2014/main" id="{92C5C30B-7CF5-4953-B4E3-D91A67129908}"/>
+                <a16:creationId xmlns:a16="http://schemas.microsoft.com/office/drawing/2014/main" id="{7B6DCFF9-AFD8-4FD8-B53C-92E24A6CAC9A}"/>
               </a:ext>
             </a:extLst>
           </p:cNvPr>
@@ -4905,7 +4951,7 @@
           <p:cNvPr id="24" name="score-head-text">
             <a:extLst xmlns:a="http://schemas.openxmlformats.org/drawingml/2006/main">
               <a:ext uri="{FF2B5EF4-FFF2-40B4-BE49-F238E27FC236}">
-                <a16:creationId xmlns:a16="http://schemas.microsoft.com/office/drawing/2014/main" id="{570603D1-E7E1-47CE-B086-FA5ABE0E1D03}"/>
+                <a16:creationId xmlns:a16="http://schemas.microsoft.com/office/drawing/2014/main" id="{75AFD630-11C5-4441-87FE-98C2091669D4}"/>
               </a:ext>
             </a:extLst>
           </p:cNvPr>
@@ -4961,7 +5007,7 @@
           <p:cNvPr id="25" name="score-cell">
             <a:extLst xmlns:a="http://schemas.openxmlformats.org/drawingml/2006/main">
               <a:ext uri="{FF2B5EF4-FFF2-40B4-BE49-F238E27FC236}">
-                <a16:creationId xmlns:a16="http://schemas.microsoft.com/office/drawing/2014/main" id="{409D59C1-1276-4CF8-9187-F2CC8EE1BFFA}"/>
+                <a16:creationId xmlns:a16="http://schemas.microsoft.com/office/drawing/2014/main" id="{A27259B1-4A52-457A-B152-E0BA690C7E8C}"/>
               </a:ext>
             </a:extLst>
           </p:cNvPr>
@@ -4994,7 +5040,7 @@
           <p:cNvPr id="26" name="candidate-placeholder">
             <a:extLst xmlns:a="http://schemas.openxmlformats.org/drawingml/2006/main">
               <a:ext uri="{FF2B5EF4-FFF2-40B4-BE49-F238E27FC236}">
-                <a16:creationId xmlns:a16="http://schemas.microsoft.com/office/drawing/2014/main" id="{C5D19323-AC8A-4923-81E7-CEE0E4533301}"/>
+                <a16:creationId xmlns:a16="http://schemas.microsoft.com/office/drawing/2014/main" id="{9D276DA0-4041-4B4E-AA20-51E5C1813280}"/>
               </a:ext>
             </a:extLst>
           </p:cNvPr>
@@ -5050,7 +5096,7 @@
           <p:cNvPr id="27" name="score-cell">
             <a:extLst xmlns:a="http://schemas.openxmlformats.org/drawingml/2006/main">
               <a:ext uri="{FF2B5EF4-FFF2-40B4-BE49-F238E27FC236}">
-                <a16:creationId xmlns:a16="http://schemas.microsoft.com/office/drawing/2014/main" id="{B608A07B-76DB-46AF-BAD8-149D51B5DCEC}"/>
+                <a16:creationId xmlns:a16="http://schemas.microsoft.com/office/drawing/2014/main" id="{D2C41932-7D47-4FE4-944C-DE7EF37DB6AC}"/>
               </a:ext>
             </a:extLst>
           </p:cNvPr>
@@ -5083,7 +5129,7 @@
           <p:cNvPr id="28" name="score-cell">
             <a:extLst xmlns:a="http://schemas.openxmlformats.org/drawingml/2006/main">
               <a:ext uri="{FF2B5EF4-FFF2-40B4-BE49-F238E27FC236}">
-                <a16:creationId xmlns:a16="http://schemas.microsoft.com/office/drawing/2014/main" id="{82881C91-EF9E-4181-B801-CAF16E914101}"/>
+                <a16:creationId xmlns:a16="http://schemas.microsoft.com/office/drawing/2014/main" id="{1B1AC91D-1389-4D51-AB46-7E221B6B8F6F}"/>
               </a:ext>
             </a:extLst>
           </p:cNvPr>
@@ -5116,7 +5162,7 @@
           <p:cNvPr id="29" name="score-cell">
             <a:extLst xmlns:a="http://schemas.openxmlformats.org/drawingml/2006/main">
               <a:ext uri="{FF2B5EF4-FFF2-40B4-BE49-F238E27FC236}">
-                <a16:creationId xmlns:a16="http://schemas.microsoft.com/office/drawing/2014/main" id="{CD8F21B0-9BB6-4DDF-A337-3E1C626CACA1}"/>
+                <a16:creationId xmlns:a16="http://schemas.microsoft.com/office/drawing/2014/main" id="{4C7D08AC-30DA-4D7E-A13E-12BC2914F92C}"/>
               </a:ext>
             </a:extLst>
           </p:cNvPr>
@@ -5149,7 +5195,7 @@
           <p:cNvPr id="30" name="score-cell">
             <a:extLst xmlns:a="http://schemas.openxmlformats.org/drawingml/2006/main">
               <a:ext uri="{FF2B5EF4-FFF2-40B4-BE49-F238E27FC236}">
-                <a16:creationId xmlns:a16="http://schemas.microsoft.com/office/drawing/2014/main" id="{999E4DDA-8434-430C-AC39-B14F03872218}"/>
+                <a16:creationId xmlns:a16="http://schemas.microsoft.com/office/drawing/2014/main" id="{002F6F20-847D-47C3-8017-F00DB81358E7}"/>
               </a:ext>
             </a:extLst>
           </p:cNvPr>
@@ -5182,7 +5228,7 @@
           <p:cNvPr id="31" name="score-cell">
             <a:extLst xmlns:a="http://schemas.openxmlformats.org/drawingml/2006/main">
               <a:ext uri="{FF2B5EF4-FFF2-40B4-BE49-F238E27FC236}">
-                <a16:creationId xmlns:a16="http://schemas.microsoft.com/office/drawing/2014/main" id="{5A20FBB4-D7AC-4581-B756-2BA3841DA7CB}"/>
+                <a16:creationId xmlns:a16="http://schemas.microsoft.com/office/drawing/2014/main" id="{96A609A2-90D0-4B34-9DB1-F3E92AE3C2DE}"/>
               </a:ext>
             </a:extLst>
           </p:cNvPr>
@@ -5215,7 +5261,7 @@
           <p:cNvPr id="32" name="score-cell">
             <a:extLst xmlns:a="http://schemas.openxmlformats.org/drawingml/2006/main">
               <a:ext uri="{FF2B5EF4-FFF2-40B4-BE49-F238E27FC236}">
-                <a16:creationId xmlns:a16="http://schemas.microsoft.com/office/drawing/2014/main" id="{1CF9DDAD-28CA-44CE-BFAE-67AA03DF8C63}"/>
+                <a16:creationId xmlns:a16="http://schemas.microsoft.com/office/drawing/2014/main" id="{E26EDB1D-B895-47B6-802F-BC308FE9E85C}"/>
               </a:ext>
             </a:extLst>
           </p:cNvPr>
@@ -5248,7 +5294,7 @@
           <p:cNvPr id="33" name="score-cell">
             <a:extLst xmlns:a="http://schemas.openxmlformats.org/drawingml/2006/main">
               <a:ext uri="{FF2B5EF4-FFF2-40B4-BE49-F238E27FC236}">
-                <a16:creationId xmlns:a16="http://schemas.microsoft.com/office/drawing/2014/main" id="{05FDA8FB-DE19-4E9A-8512-EFBDA26A6DBE}"/>
+                <a16:creationId xmlns:a16="http://schemas.microsoft.com/office/drawing/2014/main" id="{C977E6C4-2DA3-4BC9-A1EE-2DDB18AB05B5}"/>
               </a:ext>
             </a:extLst>
           </p:cNvPr>
@@ -5281,7 +5327,7 @@
           <p:cNvPr id="34" name="candidate-placeholder">
             <a:extLst xmlns:a="http://schemas.openxmlformats.org/drawingml/2006/main">
               <a:ext uri="{FF2B5EF4-FFF2-40B4-BE49-F238E27FC236}">
-                <a16:creationId xmlns:a16="http://schemas.microsoft.com/office/drawing/2014/main" id="{E795FAFC-7557-4F96-87A5-177F52C5CE62}"/>
+                <a16:creationId xmlns:a16="http://schemas.microsoft.com/office/drawing/2014/main" id="{E6056661-5F18-45FD-B25C-538912EBA701}"/>
               </a:ext>
             </a:extLst>
           </p:cNvPr>
@@ -5337,7 +5383,7 @@
           <p:cNvPr id="35" name="score-cell">
             <a:extLst xmlns:a="http://schemas.openxmlformats.org/drawingml/2006/main">
               <a:ext uri="{FF2B5EF4-FFF2-40B4-BE49-F238E27FC236}">
-                <a16:creationId xmlns:a16="http://schemas.microsoft.com/office/drawing/2014/main" id="{8A439958-6E3E-4864-A3CF-284738FF730D}"/>
+                <a16:creationId xmlns:a16="http://schemas.microsoft.com/office/drawing/2014/main" id="{5FA0982C-B3DF-4972-B7FF-79343B57E6D4}"/>
               </a:ext>
             </a:extLst>
           </p:cNvPr>
@@ -5370,7 +5416,7 @@
           <p:cNvPr id="36" name="score-cell">
             <a:extLst xmlns:a="http://schemas.openxmlformats.org/drawingml/2006/main">
               <a:ext uri="{FF2B5EF4-FFF2-40B4-BE49-F238E27FC236}">
-                <a16:creationId xmlns:a16="http://schemas.microsoft.com/office/drawing/2014/main" id="{3EE60E41-7989-47D1-953C-DDEBE03CE9CF}"/>
+                <a16:creationId xmlns:a16="http://schemas.microsoft.com/office/drawing/2014/main" id="{8B36D6EB-3F07-4EAA-AC22-F3B087A8C86F}"/>
               </a:ext>
             </a:extLst>
           </p:cNvPr>
@@ -5403,7 +5449,7 @@
           <p:cNvPr id="37" name="score-cell">
             <a:extLst xmlns:a="http://schemas.openxmlformats.org/drawingml/2006/main">
               <a:ext uri="{FF2B5EF4-FFF2-40B4-BE49-F238E27FC236}">
-                <a16:creationId xmlns:a16="http://schemas.microsoft.com/office/drawing/2014/main" id="{D77F2975-1832-4E33-8A6B-BE66A318F6B6}"/>
+                <a16:creationId xmlns:a16="http://schemas.microsoft.com/office/drawing/2014/main" id="{F1F3A153-8E8D-4794-B6F5-39E88334EA5E}"/>
               </a:ext>
             </a:extLst>
           </p:cNvPr>
@@ -5436,7 +5482,7 @@
           <p:cNvPr id="38" name="score-cell">
             <a:extLst xmlns:a="http://schemas.openxmlformats.org/drawingml/2006/main">
               <a:ext uri="{FF2B5EF4-FFF2-40B4-BE49-F238E27FC236}">
-                <a16:creationId xmlns:a16="http://schemas.microsoft.com/office/drawing/2014/main" id="{795ABB9C-FA48-4BA0-8379-ABB66EA62F49}"/>
+                <a16:creationId xmlns:a16="http://schemas.microsoft.com/office/drawing/2014/main" id="{02CA135F-C3BA-4120-BA63-8A69BE0DC7EE}"/>
               </a:ext>
             </a:extLst>
           </p:cNvPr>
@@ -5469,7 +5515,7 @@
           <p:cNvPr id="39" name="score-cell">
             <a:extLst xmlns:a="http://schemas.openxmlformats.org/drawingml/2006/main">
               <a:ext uri="{FF2B5EF4-FFF2-40B4-BE49-F238E27FC236}">
-                <a16:creationId xmlns:a16="http://schemas.microsoft.com/office/drawing/2014/main" id="{5F48B741-7A58-4D03-A8A9-CEAF77BDB3F5}"/>
+                <a16:creationId xmlns:a16="http://schemas.microsoft.com/office/drawing/2014/main" id="{AFC9426D-2FA9-4954-A10D-942E5B201637}"/>
               </a:ext>
             </a:extLst>
           </p:cNvPr>
@@ -5502,7 +5548,7 @@
           <p:cNvPr id="40" name="score-cell">
             <a:extLst xmlns:a="http://schemas.openxmlformats.org/drawingml/2006/main">
               <a:ext uri="{FF2B5EF4-FFF2-40B4-BE49-F238E27FC236}">
-                <a16:creationId xmlns:a16="http://schemas.microsoft.com/office/drawing/2014/main" id="{B3C5DD3F-F9EB-449C-AC07-38DB8284F994}"/>
+                <a16:creationId xmlns:a16="http://schemas.microsoft.com/office/drawing/2014/main" id="{2E437F59-9781-4427-9BDA-835307A15073}"/>
               </a:ext>
             </a:extLst>
           </p:cNvPr>
@@ -5535,7 +5581,7 @@
           <p:cNvPr id="41" name="score-cell">
             <a:extLst xmlns:a="http://schemas.openxmlformats.org/drawingml/2006/main">
               <a:ext uri="{FF2B5EF4-FFF2-40B4-BE49-F238E27FC236}">
-                <a16:creationId xmlns:a16="http://schemas.microsoft.com/office/drawing/2014/main" id="{579FB8F5-8DB3-4F96-98C7-30228C602AA8}"/>
+                <a16:creationId xmlns:a16="http://schemas.microsoft.com/office/drawing/2014/main" id="{33A3A669-B440-40F7-A921-88FBBBA153E3}"/>
               </a:ext>
             </a:extLst>
           </p:cNvPr>
@@ -5568,7 +5614,7 @@
           <p:cNvPr id="42" name="candidate-placeholder">
             <a:extLst xmlns:a="http://schemas.openxmlformats.org/drawingml/2006/main">
               <a:ext uri="{FF2B5EF4-FFF2-40B4-BE49-F238E27FC236}">
-                <a16:creationId xmlns:a16="http://schemas.microsoft.com/office/drawing/2014/main" id="{01470A52-8B0B-4395-BAF4-1B00390DA718}"/>
+                <a16:creationId xmlns:a16="http://schemas.microsoft.com/office/drawing/2014/main" id="{859463D2-8F36-442F-972F-551EB5FAFB58}"/>
               </a:ext>
             </a:extLst>
           </p:cNvPr>
@@ -5624,7 +5670,7 @@
           <p:cNvPr id="43" name="score-cell">
             <a:extLst xmlns:a="http://schemas.openxmlformats.org/drawingml/2006/main">
               <a:ext uri="{FF2B5EF4-FFF2-40B4-BE49-F238E27FC236}">
-                <a16:creationId xmlns:a16="http://schemas.microsoft.com/office/drawing/2014/main" id="{5A9A66D7-3EBB-4FB5-9C5A-93AEA7BB1FD8}"/>
+                <a16:creationId xmlns:a16="http://schemas.microsoft.com/office/drawing/2014/main" id="{6FD12E8F-4BE9-4595-BCEA-E534EBB4D4CB}"/>
               </a:ext>
             </a:extLst>
           </p:cNvPr>
@@ -5657,7 +5703,7 @@
           <p:cNvPr id="44" name="score-cell">
             <a:extLst xmlns:a="http://schemas.openxmlformats.org/drawingml/2006/main">
               <a:ext uri="{FF2B5EF4-FFF2-40B4-BE49-F238E27FC236}">
-                <a16:creationId xmlns:a16="http://schemas.microsoft.com/office/drawing/2014/main" id="{30FE332D-1417-47C1-BABA-3635C5CE4004}"/>
+                <a16:creationId xmlns:a16="http://schemas.microsoft.com/office/drawing/2014/main" id="{4E600155-7029-443B-A478-287D26C58DAE}"/>
               </a:ext>
             </a:extLst>
           </p:cNvPr>
@@ -5690,7 +5736,7 @@
           <p:cNvPr id="45" name="score-cell">
             <a:extLst xmlns:a="http://schemas.openxmlformats.org/drawingml/2006/main">
               <a:ext uri="{FF2B5EF4-FFF2-40B4-BE49-F238E27FC236}">
-                <a16:creationId xmlns:a16="http://schemas.microsoft.com/office/drawing/2014/main" id="{E486DC10-ED3A-401B-A522-A5BECD0F17B9}"/>
+                <a16:creationId xmlns:a16="http://schemas.microsoft.com/office/drawing/2014/main" id="{EEA20940-39DF-43EE-BD3E-B00C3194769C}"/>
               </a:ext>
             </a:extLst>
           </p:cNvPr>
@@ -5723,7 +5769,7 @@
           <p:cNvPr id="46" name="score-cell">
             <a:extLst xmlns:a="http://schemas.openxmlformats.org/drawingml/2006/main">
               <a:ext uri="{FF2B5EF4-FFF2-40B4-BE49-F238E27FC236}">
-                <a16:creationId xmlns:a16="http://schemas.microsoft.com/office/drawing/2014/main" id="{140B54DC-4ED3-49FC-B4C7-2F172139DA28}"/>
+                <a16:creationId xmlns:a16="http://schemas.microsoft.com/office/drawing/2014/main" id="{D3B04536-9628-4BBB-9480-8E0A9A45C6CE}"/>
               </a:ext>
             </a:extLst>
           </p:cNvPr>
@@ -5756,7 +5802,7 @@
           <p:cNvPr id="47" name="score-cell">
             <a:extLst xmlns:a="http://schemas.openxmlformats.org/drawingml/2006/main">
               <a:ext uri="{FF2B5EF4-FFF2-40B4-BE49-F238E27FC236}">
-                <a16:creationId xmlns:a16="http://schemas.microsoft.com/office/drawing/2014/main" id="{E2B80F14-B543-4F68-A31D-00820B382002}"/>
+                <a16:creationId xmlns:a16="http://schemas.microsoft.com/office/drawing/2014/main" id="{8C0836A2-D88B-4F6B-A489-E284F7EBCF4B}"/>
               </a:ext>
             </a:extLst>
           </p:cNvPr>
@@ -5789,7 +5835,7 @@
           <p:cNvPr id="48" name="score-cell">
             <a:extLst xmlns:a="http://schemas.openxmlformats.org/drawingml/2006/main">
               <a:ext uri="{FF2B5EF4-FFF2-40B4-BE49-F238E27FC236}">
-                <a16:creationId xmlns:a16="http://schemas.microsoft.com/office/drawing/2014/main" id="{0559CA1E-418B-43FC-82C8-86FA9D8692F1}"/>
+                <a16:creationId xmlns:a16="http://schemas.microsoft.com/office/drawing/2014/main" id="{6B93995B-FB5B-4D99-9CE4-FB169AA9E0A6}"/>
               </a:ext>
             </a:extLst>
           </p:cNvPr>
@@ -5822,7 +5868,7 @@
           <p:cNvPr id="49" name="score-cell">
             <a:extLst xmlns:a="http://schemas.openxmlformats.org/drawingml/2006/main">
               <a:ext uri="{FF2B5EF4-FFF2-40B4-BE49-F238E27FC236}">
-                <a16:creationId xmlns:a16="http://schemas.microsoft.com/office/drawing/2014/main" id="{18357027-02F6-4040-B11C-C7291A6BEE89}"/>
+                <a16:creationId xmlns:a16="http://schemas.microsoft.com/office/drawing/2014/main" id="{CB231B92-E30F-46C8-AA03-DB1A22027DBB}"/>
               </a:ext>
             </a:extLst>
           </p:cNvPr>
@@ -5855,7 +5901,7 @@
           <p:cNvPr id="50" name="candidate-placeholder">
             <a:extLst xmlns:a="http://schemas.openxmlformats.org/drawingml/2006/main">
               <a:ext uri="{FF2B5EF4-FFF2-40B4-BE49-F238E27FC236}">
-                <a16:creationId xmlns:a16="http://schemas.microsoft.com/office/drawing/2014/main" id="{614EB21E-6B96-45D5-BF4F-076429CBF08C}"/>
+                <a16:creationId xmlns:a16="http://schemas.microsoft.com/office/drawing/2014/main" id="{42D0C5DB-CBC8-4C62-813D-8F7F1122C23D}"/>
               </a:ext>
             </a:extLst>
           </p:cNvPr>
@@ -5911,7 +5957,7 @@
           <p:cNvPr id="51" name="score-cell">
             <a:extLst xmlns:a="http://schemas.openxmlformats.org/drawingml/2006/main">
               <a:ext uri="{FF2B5EF4-FFF2-40B4-BE49-F238E27FC236}">
-                <a16:creationId xmlns:a16="http://schemas.microsoft.com/office/drawing/2014/main" id="{4FE51DE5-0F9D-4E7D-A6C6-E34B4C51D455}"/>
+                <a16:creationId xmlns:a16="http://schemas.microsoft.com/office/drawing/2014/main" id="{280ECC9A-1145-46BA-B864-608EE49A1E97}"/>
               </a:ext>
             </a:extLst>
           </p:cNvPr>
@@ -5944,7 +5990,7 @@
           <p:cNvPr id="52" name="score-cell">
             <a:extLst xmlns:a="http://schemas.openxmlformats.org/drawingml/2006/main">
               <a:ext uri="{FF2B5EF4-FFF2-40B4-BE49-F238E27FC236}">
-                <a16:creationId xmlns:a16="http://schemas.microsoft.com/office/drawing/2014/main" id="{A221B21A-920D-4F29-8323-901D348531CA}"/>
+                <a16:creationId xmlns:a16="http://schemas.microsoft.com/office/drawing/2014/main" id="{B75218DD-385D-4FF7-964A-533B17F49031}"/>
               </a:ext>
             </a:extLst>
           </p:cNvPr>
@@ -5977,7 +6023,7 @@
           <p:cNvPr id="53" name="score-cell">
             <a:extLst xmlns:a="http://schemas.openxmlformats.org/drawingml/2006/main">
               <a:ext uri="{FF2B5EF4-FFF2-40B4-BE49-F238E27FC236}">
-                <a16:creationId xmlns:a16="http://schemas.microsoft.com/office/drawing/2014/main" id="{E7F62861-3F97-4988-A39B-8BAE06D7C98E}"/>
+                <a16:creationId xmlns:a16="http://schemas.microsoft.com/office/drawing/2014/main" id="{5BC02CEB-03E3-40D1-87F1-E379354B1439}"/>
               </a:ext>
             </a:extLst>
           </p:cNvPr>
@@ -6010,7 +6056,7 @@
           <p:cNvPr id="54" name="score-cell">
             <a:extLst xmlns:a="http://schemas.openxmlformats.org/drawingml/2006/main">
               <a:ext uri="{FF2B5EF4-FFF2-40B4-BE49-F238E27FC236}">
-                <a16:creationId xmlns:a16="http://schemas.microsoft.com/office/drawing/2014/main" id="{6F28D974-C518-404B-9831-B09EBA511EA1}"/>
+                <a16:creationId xmlns:a16="http://schemas.microsoft.com/office/drawing/2014/main" id="{32870E9F-D7E6-4295-9550-DA8120E4C678}"/>
               </a:ext>
             </a:extLst>
           </p:cNvPr>
@@ -6043,7 +6089,7 @@
           <p:cNvPr id="55" name="score-cell">
             <a:extLst xmlns:a="http://schemas.openxmlformats.org/drawingml/2006/main">
               <a:ext uri="{FF2B5EF4-FFF2-40B4-BE49-F238E27FC236}">
-                <a16:creationId xmlns:a16="http://schemas.microsoft.com/office/drawing/2014/main" id="{00F9A5FD-65B0-4437-A2F0-0B76ACC815BB}"/>
+                <a16:creationId xmlns:a16="http://schemas.microsoft.com/office/drawing/2014/main" id="{74ACEBB2-C933-4412-8B64-651635D413E6}"/>
               </a:ext>
             </a:extLst>
           </p:cNvPr>
@@ -6076,7 +6122,7 @@
           <p:cNvPr id="56" name="score-cell">
             <a:extLst xmlns:a="http://schemas.openxmlformats.org/drawingml/2006/main">
               <a:ext uri="{FF2B5EF4-FFF2-40B4-BE49-F238E27FC236}">
-                <a16:creationId xmlns:a16="http://schemas.microsoft.com/office/drawing/2014/main" id="{A845EB93-7B3C-468E-9D06-93ABEAED22FA}"/>
+                <a16:creationId xmlns:a16="http://schemas.microsoft.com/office/drawing/2014/main" id="{BFD486E5-C121-4178-864A-EABFECCBC118}"/>
               </a:ext>
             </a:extLst>
           </p:cNvPr>
@@ -6109,7 +6155,7 @@
           <p:cNvPr id="57" name="score-cell">
             <a:extLst xmlns:a="http://schemas.openxmlformats.org/drawingml/2006/main">
               <a:ext uri="{FF2B5EF4-FFF2-40B4-BE49-F238E27FC236}">
-                <a16:creationId xmlns:a16="http://schemas.microsoft.com/office/drawing/2014/main" id="{07E1E004-B3B5-424F-AD1F-80074F6DB239}"/>
+                <a16:creationId xmlns:a16="http://schemas.microsoft.com/office/drawing/2014/main" id="{69FAEA7C-208B-456C-965B-43E8541EFD20}"/>
               </a:ext>
             </a:extLst>
           </p:cNvPr>
@@ -6142,7 +6188,7 @@
           <p:cNvPr id="58" name="candidate-placeholder">
             <a:extLst xmlns:a="http://schemas.openxmlformats.org/drawingml/2006/main">
               <a:ext uri="{FF2B5EF4-FFF2-40B4-BE49-F238E27FC236}">
-                <a16:creationId xmlns:a16="http://schemas.microsoft.com/office/drawing/2014/main" id="{B1291083-E8EB-4693-8EA6-FE652C56C1BE}"/>
+                <a16:creationId xmlns:a16="http://schemas.microsoft.com/office/drawing/2014/main" id="{75D704F3-0494-4C32-8A9B-6E01533649F6}"/>
               </a:ext>
             </a:extLst>
           </p:cNvPr>
@@ -6198,7 +6244,7 @@
           <p:cNvPr id="59" name="score-cell">
             <a:extLst xmlns:a="http://schemas.openxmlformats.org/drawingml/2006/main">
               <a:ext uri="{FF2B5EF4-FFF2-40B4-BE49-F238E27FC236}">
-                <a16:creationId xmlns:a16="http://schemas.microsoft.com/office/drawing/2014/main" id="{304691AA-99D0-4177-91F2-256C0EA75487}"/>
+                <a16:creationId xmlns:a16="http://schemas.microsoft.com/office/drawing/2014/main" id="{40AF30A5-A5E7-4861-B867-7D8C3847046A}"/>
               </a:ext>
             </a:extLst>
           </p:cNvPr>
@@ -6231,7 +6277,7 @@
           <p:cNvPr id="60" name="score-cell">
             <a:extLst xmlns:a="http://schemas.openxmlformats.org/drawingml/2006/main">
               <a:ext uri="{FF2B5EF4-FFF2-40B4-BE49-F238E27FC236}">
-                <a16:creationId xmlns:a16="http://schemas.microsoft.com/office/drawing/2014/main" id="{817F54BC-F517-49CB-A28F-3B4C4FF53B20}"/>
+                <a16:creationId xmlns:a16="http://schemas.microsoft.com/office/drawing/2014/main" id="{25C71923-85D0-445E-8F08-0AACD3C4A7EF}"/>
               </a:ext>
             </a:extLst>
           </p:cNvPr>
@@ -6264,7 +6310,7 @@
           <p:cNvPr id="61" name="score-cell">
             <a:extLst xmlns:a="http://schemas.openxmlformats.org/drawingml/2006/main">
               <a:ext uri="{FF2B5EF4-FFF2-40B4-BE49-F238E27FC236}">
-                <a16:creationId xmlns:a16="http://schemas.microsoft.com/office/drawing/2014/main" id="{13C9CFB8-8A05-412E-9C9D-186BAC8DD6CF}"/>
+                <a16:creationId xmlns:a16="http://schemas.microsoft.com/office/drawing/2014/main" id="{1DF16AC2-6EBD-4778-A108-7786AFE80204}"/>
               </a:ext>
             </a:extLst>
           </p:cNvPr>
@@ -6297,7 +6343,7 @@
           <p:cNvPr id="62" name="score-cell">
             <a:extLst xmlns:a="http://schemas.openxmlformats.org/drawingml/2006/main">
               <a:ext uri="{FF2B5EF4-FFF2-40B4-BE49-F238E27FC236}">
-                <a16:creationId xmlns:a16="http://schemas.microsoft.com/office/drawing/2014/main" id="{8991AD77-7E7E-436B-89C4-7584ACF048EE}"/>
+                <a16:creationId xmlns:a16="http://schemas.microsoft.com/office/drawing/2014/main" id="{D6363A21-0250-47AC-A3BE-23FE386BEC9E}"/>
               </a:ext>
             </a:extLst>
           </p:cNvPr>
@@ -6330,7 +6376,7 @@
           <p:cNvPr id="63" name="score-cell">
             <a:extLst xmlns:a="http://schemas.openxmlformats.org/drawingml/2006/main">
               <a:ext uri="{FF2B5EF4-FFF2-40B4-BE49-F238E27FC236}">
-                <a16:creationId xmlns:a16="http://schemas.microsoft.com/office/drawing/2014/main" id="{D7057121-B735-40D5-BFF8-85DEF3626212}"/>
+                <a16:creationId xmlns:a16="http://schemas.microsoft.com/office/drawing/2014/main" id="{B5A000CA-1BE2-4051-9316-8579278A649D}"/>
               </a:ext>
             </a:extLst>
           </p:cNvPr>
@@ -6363,7 +6409,7 @@
           <p:cNvPr id="64" name="score-cell">
             <a:extLst xmlns:a="http://schemas.openxmlformats.org/drawingml/2006/main">
               <a:ext uri="{FF2B5EF4-FFF2-40B4-BE49-F238E27FC236}">
-                <a16:creationId xmlns:a16="http://schemas.microsoft.com/office/drawing/2014/main" id="{62C399EF-82F7-476C-80EB-B5B2739DEF16}"/>
+                <a16:creationId xmlns:a16="http://schemas.microsoft.com/office/drawing/2014/main" id="{F8A19892-69A1-48CC-9455-9CD51A0A2BFD}"/>
               </a:ext>
             </a:extLst>
           </p:cNvPr>
@@ -6396,7 +6442,7 @@
           <p:cNvPr id="65" name="drop-rule">
             <a:extLst xmlns:a="http://schemas.openxmlformats.org/drawingml/2006/main">
               <a:ext uri="{FF2B5EF4-FFF2-40B4-BE49-F238E27FC236}">
-                <a16:creationId xmlns:a16="http://schemas.microsoft.com/office/drawing/2014/main" id="{463191F3-1862-4D76-9FFA-506556FFC0EA}"/>
+                <a16:creationId xmlns:a16="http://schemas.microsoft.com/office/drawing/2014/main" id="{A0149CCB-AB22-47DE-AB4F-17F2E229412B}"/>
               </a:ext>
             </a:extLst>
           </p:cNvPr>
@@ -6450,7 +6496,7 @@
     </p:spTree>
     <p:extLst>
       <p:ext uri="{BB962C8B-B14F-4D97-AF65-F5344CB8AC3E}">
-        <p14:creationId xmlns:p14="http://schemas.microsoft.com/office/powerpoint/2010/main" val="1000611917"/>
+        <p14:creationId xmlns:p14="http://schemas.microsoft.com/office/powerpoint/2010/main" val="825579152"/>
       </p:ext>
     </p:extLst>
   </p:cSld>
@@ -6481,7 +6527,7 @@
           <p:cNvPr id="1" name="decor-ring-1">
             <a:extLst xmlns:a="http://schemas.openxmlformats.org/drawingml/2006/main">
               <a:ext uri="{FF2B5EF4-FFF2-40B4-BE49-F238E27FC236}">
-                <a16:creationId xmlns:a16="http://schemas.microsoft.com/office/drawing/2014/main" id="{8E28E932-392F-4E1D-AB3F-6DDA5EEDF441}"/>
+                <a16:creationId xmlns:a16="http://schemas.microsoft.com/office/drawing/2014/main" id="{8E3714A0-96C4-458C-BD0F-BFD567B33259}"/>
               </a:ext>
             </a:extLst>
           </p:cNvPr>
@@ -6512,7 +6558,7 @@
           <p:cNvPr id="2" name="decor-ring-2">
             <a:extLst xmlns:a="http://schemas.openxmlformats.org/drawingml/2006/main">
               <a:ext uri="{FF2B5EF4-FFF2-40B4-BE49-F238E27FC236}">
-                <a16:creationId xmlns:a16="http://schemas.microsoft.com/office/drawing/2014/main" id="{5806E778-2B5D-456C-8E12-9558194D7984}"/>
+                <a16:creationId xmlns:a16="http://schemas.microsoft.com/office/drawing/2014/main" id="{13B472AC-16AA-49F6-8016-67AB95FB6337}"/>
               </a:ext>
             </a:extLst>
           </p:cNvPr>
@@ -6543,7 +6589,7 @@
           <p:cNvPr id="3" name="decor-orb-1">
             <a:extLst xmlns:a="http://schemas.openxmlformats.org/drawingml/2006/main">
               <a:ext uri="{FF2B5EF4-FFF2-40B4-BE49-F238E27FC236}">
-                <a16:creationId xmlns:a16="http://schemas.microsoft.com/office/drawing/2014/main" id="{0B11F8E9-6E6E-4850-AE10-9DFA57D2FBBF}"/>
+                <a16:creationId xmlns:a16="http://schemas.microsoft.com/office/drawing/2014/main" id="{8C9E63A3-45BC-4E7B-988D-E7089CFFA522}"/>
               </a:ext>
             </a:extLst>
           </p:cNvPr>
@@ -6574,7 +6620,7 @@
           <p:cNvPr id="4" name="decor-orb-2">
             <a:extLst xmlns:a="http://schemas.openxmlformats.org/drawingml/2006/main">
               <a:ext uri="{FF2B5EF4-FFF2-40B4-BE49-F238E27FC236}">
-                <a16:creationId xmlns:a16="http://schemas.microsoft.com/office/drawing/2014/main" id="{D5FCF089-96FD-46EC-974C-02E730976100}"/>
+                <a16:creationId xmlns:a16="http://schemas.microsoft.com/office/drawing/2014/main" id="{24DD9892-F67A-4934-8CC4-74155417A6BC}"/>
               </a:ext>
             </a:extLst>
           </p:cNvPr>
@@ -6605,7 +6651,7 @@
           <p:cNvPr id="5" name="title-bar">
             <a:extLst xmlns:a="http://schemas.openxmlformats.org/drawingml/2006/main">
               <a:ext uri="{FF2B5EF4-FFF2-40B4-BE49-F238E27FC236}">
-                <a16:creationId xmlns:a16="http://schemas.microsoft.com/office/drawing/2014/main" id="{C3FAE289-A2C3-4E05-A4EF-057E005009AC}"/>
+                <a16:creationId xmlns:a16="http://schemas.microsoft.com/office/drawing/2014/main" id="{62FF444F-AB67-4BF8-97BC-3E02B7BE7598}"/>
               </a:ext>
             </a:extLst>
           </p:cNvPr>
@@ -6636,7 +6682,7 @@
           <p:cNvPr id="6" name="kicker">
             <a:extLst xmlns:a="http://schemas.openxmlformats.org/drawingml/2006/main">
               <a:ext uri="{FF2B5EF4-FFF2-40B4-BE49-F238E27FC236}">
-                <a16:creationId xmlns:a16="http://schemas.microsoft.com/office/drawing/2014/main" id="{A7043947-9267-4326-99EB-C238FEAA1CEA}"/>
+                <a16:creationId xmlns:a16="http://schemas.microsoft.com/office/drawing/2014/main" id="{37C43307-9B33-4B40-8B89-D50846C05F91}"/>
               </a:ext>
             </a:extLst>
           </p:cNvPr>
@@ -6692,7 +6738,7 @@
           <p:cNvPr id="7" name="title">
             <a:extLst xmlns:a="http://schemas.openxmlformats.org/drawingml/2006/main">
               <a:ext uri="{FF2B5EF4-FFF2-40B4-BE49-F238E27FC236}">
-                <a16:creationId xmlns:a16="http://schemas.microsoft.com/office/drawing/2014/main" id="{66F09BBA-C73A-4E80-86C4-9927A01F7BE6}"/>
+                <a16:creationId xmlns:a16="http://schemas.microsoft.com/office/drawing/2014/main" id="{3A53711D-10E8-448E-8288-E1047A7795CC}"/>
               </a:ext>
             </a:extLst>
           </p:cNvPr>
@@ -6748,7 +6794,7 @@
           <p:cNvPr id="8" name="subtitle">
             <a:extLst xmlns:a="http://schemas.openxmlformats.org/drawingml/2006/main">
               <a:ext uri="{FF2B5EF4-FFF2-40B4-BE49-F238E27FC236}">
-                <a16:creationId xmlns:a16="http://schemas.microsoft.com/office/drawing/2014/main" id="{27C5C6C7-C91E-4974-AC8E-A953FC72E991}"/>
+                <a16:creationId xmlns:a16="http://schemas.microsoft.com/office/drawing/2014/main" id="{79D3B68B-21DC-4C34-8752-C6BBB6D68ABF}"/>
               </a:ext>
             </a:extLst>
           </p:cNvPr>
@@ -6808,7 +6854,7 @@
           <p:nvPr/>
         </p:nvPicPr>
         <p:blipFill>
-          <a:blip xmlns:r="http://schemas.openxmlformats.org/officeDocument/2006/relationships" xmlns:a="http://schemas.openxmlformats.org/drawingml/2006/main" r:embed="R9fa576c58aea425f"/>
+          <a:blip xmlns:r="http://schemas.openxmlformats.org/officeDocument/2006/relationships" xmlns:a="http://schemas.openxmlformats.org/drawingml/2006/main" r:embed="Rd235ba45b72e46d4"/>
           <a:stretch xmlns:a="http://schemas.openxmlformats.org/drawingml/2006/main"/>
         </p:blipFill>
         <p:spPr>
@@ -6826,7 +6872,7 @@
           <p:cNvPr id="10" name="footer-number">
             <a:extLst xmlns:a="http://schemas.openxmlformats.org/drawingml/2006/main">
               <a:ext uri="{FF2B5EF4-FFF2-40B4-BE49-F238E27FC236}">
-                <a16:creationId xmlns:a16="http://schemas.microsoft.com/office/drawing/2014/main" id="{4FFAB0BA-CCED-4846-979D-28D9F625B212}"/>
+                <a16:creationId xmlns:a16="http://schemas.microsoft.com/office/drawing/2014/main" id="{14CE22EE-EDF8-48FC-92A8-16BB4E4955F7}"/>
               </a:ext>
             </a:extLst>
           </p:cNvPr>
@@ -6882,7 +6928,7 @@
           <p:cNvPr id="11" name="card-진행 방법">
             <a:extLst xmlns:a="http://schemas.openxmlformats.org/drawingml/2006/main">
               <a:ext uri="{FF2B5EF4-FFF2-40B4-BE49-F238E27FC236}">
-                <a16:creationId xmlns:a16="http://schemas.microsoft.com/office/drawing/2014/main" id="{41AEF340-A694-4C10-90E6-781CDCE11C15}"/>
+                <a16:creationId xmlns:a16="http://schemas.microsoft.com/office/drawing/2014/main" id="{D205ED30-ED5C-4DB5-A583-63DD9450FA66}"/>
               </a:ext>
             </a:extLst>
           </p:cNvPr>
@@ -6923,7 +6969,7 @@
           <p:cNvPr id="12" name="card-accent">
             <a:extLst xmlns:a="http://schemas.openxmlformats.org/drawingml/2006/main">
               <a:ext uri="{FF2B5EF4-FFF2-40B4-BE49-F238E27FC236}">
-                <a16:creationId xmlns:a16="http://schemas.microsoft.com/office/drawing/2014/main" id="{5D8F92DE-C009-4C64-A87C-4F0252CA1ECC}"/>
+                <a16:creationId xmlns:a16="http://schemas.microsoft.com/office/drawing/2014/main" id="{EC169B31-F87B-46F2-9FE6-B7A34828C5A9}"/>
               </a:ext>
             </a:extLst>
           </p:cNvPr>
@@ -6954,7 +7000,7 @@
           <p:cNvPr id="13" name="card-label">
             <a:extLst xmlns:a="http://schemas.openxmlformats.org/drawingml/2006/main">
               <a:ext uri="{FF2B5EF4-FFF2-40B4-BE49-F238E27FC236}">
-                <a16:creationId xmlns:a16="http://schemas.microsoft.com/office/drawing/2014/main" id="{32DF74EB-B414-4FA7-B3C6-C6E44AAAD23D}"/>
+                <a16:creationId xmlns:a16="http://schemas.microsoft.com/office/drawing/2014/main" id="{D403E258-A0BB-4012-9525-F265964FAB1C}"/>
               </a:ext>
             </a:extLst>
           </p:cNvPr>
@@ -7010,7 +7056,7 @@
           <p:cNvPr id="14" name="card-title">
             <a:extLst xmlns:a="http://schemas.openxmlformats.org/drawingml/2006/main">
               <a:ext uri="{FF2B5EF4-FFF2-40B4-BE49-F238E27FC236}">
-                <a16:creationId xmlns:a16="http://schemas.microsoft.com/office/drawing/2014/main" id="{6C27878D-25DA-46C2-AE63-2375C01472D5}"/>
+                <a16:creationId xmlns:a16="http://schemas.microsoft.com/office/drawing/2014/main" id="{8C56AD92-F5C5-46D3-ACE3-2893275A938B}"/>
               </a:ext>
             </a:extLst>
           </p:cNvPr>
@@ -7066,7 +7112,7 @@
           <p:cNvPr id="15" name="card-body">
             <a:extLst xmlns:a="http://schemas.openxmlformats.org/drawingml/2006/main">
               <a:ext uri="{FF2B5EF4-FFF2-40B4-BE49-F238E27FC236}">
-                <a16:creationId xmlns:a16="http://schemas.microsoft.com/office/drawing/2014/main" id="{94EC3008-B5FA-4F12-92DE-244798A1C0EA}"/>
+                <a16:creationId xmlns:a16="http://schemas.microsoft.com/office/drawing/2014/main" id="{FAB18B2A-2A20-4C17-866C-8B76578607E1}"/>
               </a:ext>
             </a:extLst>
           </p:cNvPr>
@@ -7112,7 +7158,7 @@
                 <a:ea typeface="Pretendard"/>
                 <a:cs typeface="Pretendard"/>
               </a:rPr>
-              <a:t>업무 오너, 구현 담당, 검증·발표 담당을 먼저</a:t>
+              <a:t>업무 오너, 구현 담당, 검증·발표</a:t>
             </a:r>
           </a:p>
           <a:p xmlns:a="http://schemas.openxmlformats.org/drawingml/2006/main">
@@ -7135,7 +7181,7 @@
                 <a:ea typeface="Pretendard"/>
                 <a:cs typeface="Pretendard"/>
               </a:rPr>
-              <a:t>정하고 주제 축을 선택</a:t>
+              <a:t>담당을 먼저 정하고 주제 축을 선택</a:t>
             </a:r>
           </a:p>
         </p:txBody>
@@ -7145,7 +7191,7 @@
           <p:cNvPr id="16" name="card-결과물">
             <a:extLst xmlns:a="http://schemas.openxmlformats.org/drawingml/2006/main">
               <a:ext uri="{FF2B5EF4-FFF2-40B4-BE49-F238E27FC236}">
-                <a16:creationId xmlns:a16="http://schemas.microsoft.com/office/drawing/2014/main" id="{06652036-6E53-438A-BF3F-FBD5456F8F16}"/>
+                <a16:creationId xmlns:a16="http://schemas.microsoft.com/office/drawing/2014/main" id="{0AE0A957-6DFE-4AAA-8A11-E2A7D0AD98DF}"/>
               </a:ext>
             </a:extLst>
           </p:cNvPr>
@@ -7186,7 +7232,7 @@
           <p:cNvPr id="17" name="card-accent">
             <a:extLst xmlns:a="http://schemas.openxmlformats.org/drawingml/2006/main">
               <a:ext uri="{FF2B5EF4-FFF2-40B4-BE49-F238E27FC236}">
-                <a16:creationId xmlns:a16="http://schemas.microsoft.com/office/drawing/2014/main" id="{67A1A1E6-FE49-4490-894C-E15478660526}"/>
+                <a16:creationId xmlns:a16="http://schemas.microsoft.com/office/drawing/2014/main" id="{E494EDC5-FC1E-4D30-95DB-8495F910AFEF}"/>
               </a:ext>
             </a:extLst>
           </p:cNvPr>
@@ -7217,7 +7263,7 @@
           <p:cNvPr id="18" name="card-label">
             <a:extLst xmlns:a="http://schemas.openxmlformats.org/drawingml/2006/main">
               <a:ext uri="{FF2B5EF4-FFF2-40B4-BE49-F238E27FC236}">
-                <a16:creationId xmlns:a16="http://schemas.microsoft.com/office/drawing/2014/main" id="{808E81C5-6DE9-4739-A2C8-FD789A22B4A8}"/>
+                <a16:creationId xmlns:a16="http://schemas.microsoft.com/office/drawing/2014/main" id="{30879938-8B79-4E4C-A7C1-81FC718A5ED9}"/>
               </a:ext>
             </a:extLst>
           </p:cNvPr>
@@ -7273,7 +7319,7 @@
           <p:cNvPr id="19" name="card-title">
             <a:extLst xmlns:a="http://schemas.openxmlformats.org/drawingml/2006/main">
               <a:ext uri="{FF2B5EF4-FFF2-40B4-BE49-F238E27FC236}">
-                <a16:creationId xmlns:a16="http://schemas.microsoft.com/office/drawing/2014/main" id="{B9D829E2-E3B2-4D7E-A752-2DF4E42E0A85}"/>
+                <a16:creationId xmlns:a16="http://schemas.microsoft.com/office/drawing/2014/main" id="{CD07E9AF-8824-4B3D-A4E4-CF1515667973}"/>
               </a:ext>
             </a:extLst>
           </p:cNvPr>
@@ -7329,7 +7375,7 @@
           <p:cNvPr id="20" name="card-body">
             <a:extLst xmlns:a="http://schemas.openxmlformats.org/drawingml/2006/main">
               <a:ext uri="{FF2B5EF4-FFF2-40B4-BE49-F238E27FC236}">
-                <a16:creationId xmlns:a16="http://schemas.microsoft.com/office/drawing/2014/main" id="{0747CFCF-5B45-4F6E-B96D-20E3030FC2DE}"/>
+                <a16:creationId xmlns:a16="http://schemas.microsoft.com/office/drawing/2014/main" id="{ABFA9F81-E8C4-4BB8-87E5-ADAD0E9C6D04}"/>
               </a:ext>
             </a:extLst>
           </p:cNvPr>
@@ -7385,7 +7431,7 @@
           <p:cNvPr id="21" name="card-운영 팁">
             <a:extLst xmlns:a="http://schemas.openxmlformats.org/drawingml/2006/main">
               <a:ext uri="{FF2B5EF4-FFF2-40B4-BE49-F238E27FC236}">
-                <a16:creationId xmlns:a16="http://schemas.microsoft.com/office/drawing/2014/main" id="{240DF16F-D01D-40D4-B4E2-82668DE2D6EA}"/>
+                <a16:creationId xmlns:a16="http://schemas.microsoft.com/office/drawing/2014/main" id="{151DD480-EDC3-4916-B039-4DDCFF4FB8C8}"/>
               </a:ext>
             </a:extLst>
           </p:cNvPr>
@@ -7426,7 +7472,7 @@
           <p:cNvPr id="22" name="card-accent">
             <a:extLst xmlns:a="http://schemas.openxmlformats.org/drawingml/2006/main">
               <a:ext uri="{FF2B5EF4-FFF2-40B4-BE49-F238E27FC236}">
-                <a16:creationId xmlns:a16="http://schemas.microsoft.com/office/drawing/2014/main" id="{ED8ACDF8-FE12-417C-8759-D76B2DD78D10}"/>
+                <a16:creationId xmlns:a16="http://schemas.microsoft.com/office/drawing/2014/main" id="{7A712A7F-9467-441E-A608-0FAD2065306E}"/>
               </a:ext>
             </a:extLst>
           </p:cNvPr>
@@ -7457,7 +7503,7 @@
           <p:cNvPr id="23" name="card-label">
             <a:extLst xmlns:a="http://schemas.openxmlformats.org/drawingml/2006/main">
               <a:ext uri="{FF2B5EF4-FFF2-40B4-BE49-F238E27FC236}">
-                <a16:creationId xmlns:a16="http://schemas.microsoft.com/office/drawing/2014/main" id="{A7EC977E-4296-4E2B-A8B8-260641753245}"/>
+                <a16:creationId xmlns:a16="http://schemas.microsoft.com/office/drawing/2014/main" id="{612649D8-7C3D-4080-95DD-50D82FB16AC9}"/>
               </a:ext>
             </a:extLst>
           </p:cNvPr>
@@ -7513,7 +7559,7 @@
           <p:cNvPr id="24" name="card-title">
             <a:extLst xmlns:a="http://schemas.openxmlformats.org/drawingml/2006/main">
               <a:ext uri="{FF2B5EF4-FFF2-40B4-BE49-F238E27FC236}">
-                <a16:creationId xmlns:a16="http://schemas.microsoft.com/office/drawing/2014/main" id="{21A42E3F-2623-4B6D-8ADB-1F430AB360C9}"/>
+                <a16:creationId xmlns:a16="http://schemas.microsoft.com/office/drawing/2014/main" id="{B8BE3396-8B54-4B5D-BF01-A5BBD313DC39}"/>
               </a:ext>
             </a:extLst>
           </p:cNvPr>
@@ -7569,7 +7615,7 @@
           <p:cNvPr id="25" name="card-body">
             <a:extLst xmlns:a="http://schemas.openxmlformats.org/drawingml/2006/main">
               <a:ext uri="{FF2B5EF4-FFF2-40B4-BE49-F238E27FC236}">
-                <a16:creationId xmlns:a16="http://schemas.microsoft.com/office/drawing/2014/main" id="{78F7CC3F-BA67-4427-96A6-37B541E7DE76}"/>
+                <a16:creationId xmlns:a16="http://schemas.microsoft.com/office/drawing/2014/main" id="{C285794A-74E3-41D9-84B4-8026BA05A862}"/>
               </a:ext>
             </a:extLst>
           </p:cNvPr>
@@ -7615,7 +7661,7 @@
                 <a:ea typeface="Pretendard"/>
                 <a:cs typeface="Pretendard"/>
               </a:rPr>
-              <a:t>타이머를 보이게 두고, 각 팀의 산출물은</a:t>
+              <a:t>타이머를 보이게 두고, 각 팀의</a:t>
             </a:r>
           </a:p>
           <a:p xmlns:a="http://schemas.openxmlformats.org/drawingml/2006/main">
@@ -7638,7 +7684,30 @@
                 <a:ea typeface="Pretendard"/>
                 <a:cs typeface="Pretendard"/>
               </a:rPr>
-              <a:t>다음 단계 장표에 바로 옮겨 적게 합니다.</a:t>
+              <a:t>산출물은 다음 단계 장표에 바로</a:t>
+            </a:r>
+          </a:p>
+          <a:p xmlns:a="http://schemas.openxmlformats.org/drawingml/2006/main">
+            <a:pPr algn="l">
+              <a:defRPr sz="1350" b="0">
+                <a:solidFill>
+                  <a:srgbClr val="4B5563"/>
+                </a:solidFill>
+                <a:latin typeface="Pretendard"/>
+                <a:ea typeface="Pretendard"/>
+                <a:cs typeface="Pretendard"/>
+              </a:defRPr>
+            </a:pPr>
+            <a:r>
+              <a:rPr sz="1350" b="0">
+                <a:solidFill>
+                  <a:srgbClr val="4B5563"/>
+                </a:solidFill>
+                <a:latin typeface="Pretendard"/>
+                <a:ea typeface="Pretendard"/>
+                <a:cs typeface="Pretendard"/>
+              </a:rPr>
+              <a:t>옮겨 적게 합니다.</a:t>
             </a:r>
           </a:p>
         </p:txBody>
@@ -7646,7 +7715,7 @@
     </p:spTree>
     <p:extLst>
       <p:ext uri="{BB962C8B-B14F-4D97-AF65-F5344CB8AC3E}">
-        <p14:creationId xmlns:p14="http://schemas.microsoft.com/office/powerpoint/2010/main" val="999723449"/>
+        <p14:creationId xmlns:p14="http://schemas.microsoft.com/office/powerpoint/2010/main" val="524326035"/>
       </p:ext>
     </p:extLst>
   </p:cSld>
@@ -7677,7 +7746,7 @@
           <p:cNvPr id="1" name="decor-ring-1">
             <a:extLst xmlns:a="http://schemas.openxmlformats.org/drawingml/2006/main">
               <a:ext uri="{FF2B5EF4-FFF2-40B4-BE49-F238E27FC236}">
-                <a16:creationId xmlns:a16="http://schemas.microsoft.com/office/drawing/2014/main" id="{A673341B-B08C-46E0-AFED-989126BE8F71}"/>
+                <a16:creationId xmlns:a16="http://schemas.microsoft.com/office/drawing/2014/main" id="{E26210F5-4AF0-4977-B968-609C1055BAAF}"/>
               </a:ext>
             </a:extLst>
           </p:cNvPr>
@@ -7708,7 +7777,7 @@
           <p:cNvPr id="2" name="decor-ring-2">
             <a:extLst xmlns:a="http://schemas.openxmlformats.org/drawingml/2006/main">
               <a:ext uri="{FF2B5EF4-FFF2-40B4-BE49-F238E27FC236}">
-                <a16:creationId xmlns:a16="http://schemas.microsoft.com/office/drawing/2014/main" id="{6C9059CF-C24C-4C2C-AFB5-F946B210961E}"/>
+                <a16:creationId xmlns:a16="http://schemas.microsoft.com/office/drawing/2014/main" id="{130D971B-50CA-49CD-B900-596CB4087364}"/>
               </a:ext>
             </a:extLst>
           </p:cNvPr>
@@ -7739,7 +7808,7 @@
           <p:cNvPr id="3" name="decor-orb-1">
             <a:extLst xmlns:a="http://schemas.openxmlformats.org/drawingml/2006/main">
               <a:ext uri="{FF2B5EF4-FFF2-40B4-BE49-F238E27FC236}">
-                <a16:creationId xmlns:a16="http://schemas.microsoft.com/office/drawing/2014/main" id="{EE2B062E-2A78-4087-9068-81D18E1384C1}"/>
+                <a16:creationId xmlns:a16="http://schemas.microsoft.com/office/drawing/2014/main" id="{0BE4405C-F503-4DAE-859B-5309F69F9E2D}"/>
               </a:ext>
             </a:extLst>
           </p:cNvPr>
@@ -7770,7 +7839,7 @@
           <p:cNvPr id="4" name="decor-orb-2">
             <a:extLst xmlns:a="http://schemas.openxmlformats.org/drawingml/2006/main">
               <a:ext uri="{FF2B5EF4-FFF2-40B4-BE49-F238E27FC236}">
-                <a16:creationId xmlns:a16="http://schemas.microsoft.com/office/drawing/2014/main" id="{ECB252AF-BEF0-4321-8801-05D1410C9F51}"/>
+                <a16:creationId xmlns:a16="http://schemas.microsoft.com/office/drawing/2014/main" id="{B58B6B97-549C-4D3A-BCCB-2925F009682A}"/>
               </a:ext>
             </a:extLst>
           </p:cNvPr>
@@ -7801,7 +7870,7 @@
           <p:cNvPr id="5" name="title-bar">
             <a:extLst xmlns:a="http://schemas.openxmlformats.org/drawingml/2006/main">
               <a:ext uri="{FF2B5EF4-FFF2-40B4-BE49-F238E27FC236}">
-                <a16:creationId xmlns:a16="http://schemas.microsoft.com/office/drawing/2014/main" id="{C28C291B-EB0F-4666-A39C-3FB39F08D855}"/>
+                <a16:creationId xmlns:a16="http://schemas.microsoft.com/office/drawing/2014/main" id="{ABABF753-D18E-466D-8DB9-38C135348BFA}"/>
               </a:ext>
             </a:extLst>
           </p:cNvPr>
@@ -7832,7 +7901,7 @@
           <p:cNvPr id="6" name="kicker">
             <a:extLst xmlns:a="http://schemas.openxmlformats.org/drawingml/2006/main">
               <a:ext uri="{FF2B5EF4-FFF2-40B4-BE49-F238E27FC236}">
-                <a16:creationId xmlns:a16="http://schemas.microsoft.com/office/drawing/2014/main" id="{46BABF68-5874-4E2E-AE53-90BD0D2C58ED}"/>
+                <a16:creationId xmlns:a16="http://schemas.microsoft.com/office/drawing/2014/main" id="{B83E3BFD-3D9D-4A1D-A4A9-64C0F62A5C53}"/>
               </a:ext>
             </a:extLst>
           </p:cNvPr>
@@ -7888,7 +7957,7 @@
           <p:cNvPr id="7" name="title">
             <a:extLst xmlns:a="http://schemas.openxmlformats.org/drawingml/2006/main">
               <a:ext uri="{FF2B5EF4-FFF2-40B4-BE49-F238E27FC236}">
-                <a16:creationId xmlns:a16="http://schemas.microsoft.com/office/drawing/2014/main" id="{A4D664B2-E6BC-465D-821D-48B4574DEF59}"/>
+                <a16:creationId xmlns:a16="http://schemas.microsoft.com/office/drawing/2014/main" id="{FE7E8324-30B0-4935-9D1C-D4B37A264FD9}"/>
               </a:ext>
             </a:extLst>
           </p:cNvPr>
@@ -7944,7 +8013,7 @@
           <p:cNvPr id="8" name="subtitle">
             <a:extLst xmlns:a="http://schemas.openxmlformats.org/drawingml/2006/main">
               <a:ext uri="{FF2B5EF4-FFF2-40B4-BE49-F238E27FC236}">
-                <a16:creationId xmlns:a16="http://schemas.microsoft.com/office/drawing/2014/main" id="{88E82DDB-5268-4C58-A4C8-3AFFE1EB57BB}"/>
+                <a16:creationId xmlns:a16="http://schemas.microsoft.com/office/drawing/2014/main" id="{266C1291-C2F6-4D5D-8CB1-091ED36A4C20}"/>
               </a:ext>
             </a:extLst>
           </p:cNvPr>
@@ -8004,7 +8073,7 @@
           <p:nvPr/>
         </p:nvPicPr>
         <p:blipFill>
-          <a:blip xmlns:r="http://schemas.openxmlformats.org/officeDocument/2006/relationships" xmlns:a="http://schemas.openxmlformats.org/drawingml/2006/main" r:embed="R7dcb7ccb5fc640be"/>
+          <a:blip xmlns:r="http://schemas.openxmlformats.org/officeDocument/2006/relationships" xmlns:a="http://schemas.openxmlformats.org/drawingml/2006/main" r:embed="R9eec182604734ebb"/>
           <a:stretch xmlns:a="http://schemas.openxmlformats.org/drawingml/2006/main"/>
         </p:blipFill>
         <p:spPr>
@@ -8022,7 +8091,7 @@
           <p:cNvPr id="10" name="footer-number">
             <a:extLst xmlns:a="http://schemas.openxmlformats.org/drawingml/2006/main">
               <a:ext uri="{FF2B5EF4-FFF2-40B4-BE49-F238E27FC236}">
-                <a16:creationId xmlns:a16="http://schemas.microsoft.com/office/drawing/2014/main" id="{C91FC7AA-42C2-4F51-B564-9940AEE553AF}"/>
+                <a16:creationId xmlns:a16="http://schemas.microsoft.com/office/drawing/2014/main" id="{539E34BB-589F-49BB-AEF1-463B871757AE}"/>
               </a:ext>
             </a:extLst>
           </p:cNvPr>
@@ -8078,7 +8147,7 @@
           <p:cNvPr id="11" name="field-label">
             <a:extLst xmlns:a="http://schemas.openxmlformats.org/drawingml/2006/main">
               <a:ext uri="{FF2B5EF4-FFF2-40B4-BE49-F238E27FC236}">
-                <a16:creationId xmlns:a16="http://schemas.microsoft.com/office/drawing/2014/main" id="{5EF3D9CC-A161-42E7-9C37-EC6AEA438ADA}"/>
+                <a16:creationId xmlns:a16="http://schemas.microsoft.com/office/drawing/2014/main" id="{2958D1BF-744E-4148-B9B9-3C915DA42957}"/>
               </a:ext>
             </a:extLst>
           </p:cNvPr>
@@ -8134,7 +8203,7 @@
           <p:cNvPr id="12" name="field-팀명 / 주제 축">
             <a:extLst xmlns:a="http://schemas.openxmlformats.org/drawingml/2006/main">
               <a:ext uri="{FF2B5EF4-FFF2-40B4-BE49-F238E27FC236}">
-                <a16:creationId xmlns:a16="http://schemas.microsoft.com/office/drawing/2014/main" id="{072937A9-2B67-407D-B799-41E6691EDCF7}"/>
+                <a16:creationId xmlns:a16="http://schemas.microsoft.com/office/drawing/2014/main" id="{DF41F14D-5E31-4E88-95D3-1915BF611E05}"/>
               </a:ext>
             </a:extLst>
           </p:cNvPr>
@@ -8169,7 +8238,7 @@
           <p:cNvPr id="13" name="field-hint">
             <a:extLst xmlns:a="http://schemas.openxmlformats.org/drawingml/2006/main">
               <a:ext uri="{FF2B5EF4-FFF2-40B4-BE49-F238E27FC236}">
-                <a16:creationId xmlns:a16="http://schemas.microsoft.com/office/drawing/2014/main" id="{8D30EE98-3E01-4AFF-8AEE-FECF9872F4A7}"/>
+                <a16:creationId xmlns:a16="http://schemas.microsoft.com/office/drawing/2014/main" id="{5218E32F-32F2-42AD-BA26-7EF5D6A5629C}"/>
               </a:ext>
             </a:extLst>
           </p:cNvPr>
@@ -8225,7 +8294,7 @@
           <p:cNvPr id="14" name="field-label">
             <a:extLst xmlns:a="http://schemas.openxmlformats.org/drawingml/2006/main">
               <a:ext uri="{FF2B5EF4-FFF2-40B4-BE49-F238E27FC236}">
-                <a16:creationId xmlns:a16="http://schemas.microsoft.com/office/drawing/2014/main" id="{E47844AE-CB78-46D6-AC4A-E11E6CBC7731}"/>
+                <a16:creationId xmlns:a16="http://schemas.microsoft.com/office/drawing/2014/main" id="{6AADEB77-18A7-413E-A57F-F8962963036F}"/>
               </a:ext>
             </a:extLst>
           </p:cNvPr>
@@ -8281,7 +8350,7 @@
           <p:cNvPr id="15" name="field-업무 오너">
             <a:extLst xmlns:a="http://schemas.openxmlformats.org/drawingml/2006/main">
               <a:ext uri="{FF2B5EF4-FFF2-40B4-BE49-F238E27FC236}">
-                <a16:creationId xmlns:a16="http://schemas.microsoft.com/office/drawing/2014/main" id="{C508387F-9853-48E7-9B40-D652055D381C}"/>
+                <a16:creationId xmlns:a16="http://schemas.microsoft.com/office/drawing/2014/main" id="{09C8A27C-DBDB-4D20-88EF-6F1314650439}"/>
               </a:ext>
             </a:extLst>
           </p:cNvPr>
@@ -8316,7 +8385,7 @@
           <p:cNvPr id="16" name="field-hint">
             <a:extLst xmlns:a="http://schemas.openxmlformats.org/drawingml/2006/main">
               <a:ext uri="{FF2B5EF4-FFF2-40B4-BE49-F238E27FC236}">
-                <a16:creationId xmlns:a16="http://schemas.microsoft.com/office/drawing/2014/main" id="{EF61E257-5B9A-44CE-8A67-C2292C6439F3}"/>
+                <a16:creationId xmlns:a16="http://schemas.microsoft.com/office/drawing/2014/main" id="{1174C819-BA19-46D6-8FF2-AFF81702BE64}"/>
               </a:ext>
             </a:extLst>
           </p:cNvPr>
@@ -8372,7 +8441,7 @@
           <p:cNvPr id="17" name="field-label">
             <a:extLst xmlns:a="http://schemas.openxmlformats.org/drawingml/2006/main">
               <a:ext uri="{FF2B5EF4-FFF2-40B4-BE49-F238E27FC236}">
-                <a16:creationId xmlns:a16="http://schemas.microsoft.com/office/drawing/2014/main" id="{E299FFD1-6D48-4346-980A-B5C86132E9DB}"/>
+                <a16:creationId xmlns:a16="http://schemas.microsoft.com/office/drawing/2014/main" id="{2C4E0DC2-5283-44BA-83E1-FC48D1935686}"/>
               </a:ext>
             </a:extLst>
           </p:cNvPr>
@@ -8428,7 +8497,7 @@
           <p:cNvPr id="18" name="field-구현 담당">
             <a:extLst xmlns:a="http://schemas.openxmlformats.org/drawingml/2006/main">
               <a:ext uri="{FF2B5EF4-FFF2-40B4-BE49-F238E27FC236}">
-                <a16:creationId xmlns:a16="http://schemas.microsoft.com/office/drawing/2014/main" id="{7D13238B-7A2B-4980-8C78-40F740D982CD}"/>
+                <a16:creationId xmlns:a16="http://schemas.microsoft.com/office/drawing/2014/main" id="{43CBF238-8432-4B94-978C-C249A9EC913A}"/>
               </a:ext>
             </a:extLst>
           </p:cNvPr>
@@ -8463,7 +8532,7 @@
           <p:cNvPr id="19" name="field-hint">
             <a:extLst xmlns:a="http://schemas.openxmlformats.org/drawingml/2006/main">
               <a:ext uri="{FF2B5EF4-FFF2-40B4-BE49-F238E27FC236}">
-                <a16:creationId xmlns:a16="http://schemas.microsoft.com/office/drawing/2014/main" id="{FF2A59F1-E587-44A2-A70B-F15A506CE5D2}"/>
+                <a16:creationId xmlns:a16="http://schemas.microsoft.com/office/drawing/2014/main" id="{4767EA39-AFA2-4CB2-A7F4-06CBA24F8636}"/>
               </a:ext>
             </a:extLst>
           </p:cNvPr>
@@ -8519,7 +8588,7 @@
           <p:cNvPr id="20" name="field-label">
             <a:extLst xmlns:a="http://schemas.openxmlformats.org/drawingml/2006/main">
               <a:ext uri="{FF2B5EF4-FFF2-40B4-BE49-F238E27FC236}">
-                <a16:creationId xmlns:a16="http://schemas.microsoft.com/office/drawing/2014/main" id="{0A1F9687-5694-466B-B2DF-13D7504C98F3}"/>
+                <a16:creationId xmlns:a16="http://schemas.microsoft.com/office/drawing/2014/main" id="{D8C2A4E3-C2DD-4E66-8CB5-660D938640DE}"/>
               </a:ext>
             </a:extLst>
           </p:cNvPr>
@@ -8575,7 +8644,7 @@
           <p:cNvPr id="21" name="field-검증·발표 담당">
             <a:extLst xmlns:a="http://schemas.openxmlformats.org/drawingml/2006/main">
               <a:ext uri="{FF2B5EF4-FFF2-40B4-BE49-F238E27FC236}">
-                <a16:creationId xmlns:a16="http://schemas.microsoft.com/office/drawing/2014/main" id="{5145DB84-8C5A-4438-B368-4EB4A3B0A5B7}"/>
+                <a16:creationId xmlns:a16="http://schemas.microsoft.com/office/drawing/2014/main" id="{9898A4CE-0F6F-4F65-A094-EDDDFC93DD0F}"/>
               </a:ext>
             </a:extLst>
           </p:cNvPr>
@@ -8610,7 +8679,7 @@
           <p:cNvPr id="22" name="field-hint">
             <a:extLst xmlns:a="http://schemas.openxmlformats.org/drawingml/2006/main">
               <a:ext uri="{FF2B5EF4-FFF2-40B4-BE49-F238E27FC236}">
-                <a16:creationId xmlns:a16="http://schemas.microsoft.com/office/drawing/2014/main" id="{FF051968-552A-454D-814C-BEDD9177D9E3}"/>
+                <a16:creationId xmlns:a16="http://schemas.microsoft.com/office/drawing/2014/main" id="{0A2D24F3-BBDC-49B2-B75E-1651A56B2AF2}"/>
               </a:ext>
             </a:extLst>
           </p:cNvPr>
@@ -8666,7 +8735,7 @@
           <p:cNvPr id="23" name="field-label">
             <a:extLst xmlns:a="http://schemas.openxmlformats.org/drawingml/2006/main">
               <a:ext uri="{FF2B5EF4-FFF2-40B4-BE49-F238E27FC236}">
-                <a16:creationId xmlns:a16="http://schemas.microsoft.com/office/drawing/2014/main" id="{AE2737B9-DDA9-4D5E-9D5D-E71748142179}"/>
+                <a16:creationId xmlns:a16="http://schemas.microsoft.com/office/drawing/2014/main" id="{2AAA6AD7-91CE-49DF-90AB-798B881727D8}"/>
               </a:ext>
             </a:extLst>
           </p:cNvPr>
@@ -8722,7 +8791,7 @@
           <p:cNvPr id="24" name="field-팀의 1순위 업무 문제">
             <a:extLst xmlns:a="http://schemas.openxmlformats.org/drawingml/2006/main">
               <a:ext uri="{FF2B5EF4-FFF2-40B4-BE49-F238E27FC236}">
-                <a16:creationId xmlns:a16="http://schemas.microsoft.com/office/drawing/2014/main" id="{E20F91D4-6CD0-48B5-9881-DC5C2678E6F5}"/>
+                <a16:creationId xmlns:a16="http://schemas.microsoft.com/office/drawing/2014/main" id="{2AB25707-B53F-47F4-8DA9-D56545D1A308}"/>
               </a:ext>
             </a:extLst>
           </p:cNvPr>
@@ -8757,7 +8826,7 @@
           <p:cNvPr id="25" name="field-hint">
             <a:extLst xmlns:a="http://schemas.openxmlformats.org/drawingml/2006/main">
               <a:ext uri="{FF2B5EF4-FFF2-40B4-BE49-F238E27FC236}">
-                <a16:creationId xmlns:a16="http://schemas.microsoft.com/office/drawing/2014/main" id="{298FFFED-1D40-4B38-A9AA-DD20FE7EDA83}"/>
+                <a16:creationId xmlns:a16="http://schemas.microsoft.com/office/drawing/2014/main" id="{A7B7725F-9A31-4FE0-AADD-8D35BB992DF5}"/>
               </a:ext>
             </a:extLst>
           </p:cNvPr>
@@ -8811,7 +8880,7 @@
     </p:spTree>
     <p:extLst>
       <p:ext uri="{BB962C8B-B14F-4D97-AF65-F5344CB8AC3E}">
-        <p14:creationId xmlns:p14="http://schemas.microsoft.com/office/powerpoint/2010/main" val="1643297218"/>
+        <p14:creationId xmlns:p14="http://schemas.microsoft.com/office/powerpoint/2010/main" val="1190928080"/>
       </p:ext>
     </p:extLst>
   </p:cSld>
@@ -8842,7 +8911,7 @@
           <p:cNvPr id="1" name="decor-ring-1">
             <a:extLst xmlns:a="http://schemas.openxmlformats.org/drawingml/2006/main">
               <a:ext uri="{FF2B5EF4-FFF2-40B4-BE49-F238E27FC236}">
-                <a16:creationId xmlns:a16="http://schemas.microsoft.com/office/drawing/2014/main" id="{9B9A2457-AE6A-4D8B-A2B9-67B4A4245841}"/>
+                <a16:creationId xmlns:a16="http://schemas.microsoft.com/office/drawing/2014/main" id="{2C280170-935F-4C26-BBC3-9702470CAC8E}"/>
               </a:ext>
             </a:extLst>
           </p:cNvPr>
@@ -8873,7 +8942,7 @@
           <p:cNvPr id="2" name="decor-ring-2">
             <a:extLst xmlns:a="http://schemas.openxmlformats.org/drawingml/2006/main">
               <a:ext uri="{FF2B5EF4-FFF2-40B4-BE49-F238E27FC236}">
-                <a16:creationId xmlns:a16="http://schemas.microsoft.com/office/drawing/2014/main" id="{9EE10123-2F9F-465A-AE5F-B35E6885827F}"/>
+                <a16:creationId xmlns:a16="http://schemas.microsoft.com/office/drawing/2014/main" id="{D1DD1E3B-DD67-45B8-94E7-3B91868CCFD2}"/>
               </a:ext>
             </a:extLst>
           </p:cNvPr>
@@ -8904,7 +8973,7 @@
           <p:cNvPr id="3" name="decor-orb-1">
             <a:extLst xmlns:a="http://schemas.openxmlformats.org/drawingml/2006/main">
               <a:ext uri="{FF2B5EF4-FFF2-40B4-BE49-F238E27FC236}">
-                <a16:creationId xmlns:a16="http://schemas.microsoft.com/office/drawing/2014/main" id="{8EE486A2-4C24-4814-AEBD-6E376787268E}"/>
+                <a16:creationId xmlns:a16="http://schemas.microsoft.com/office/drawing/2014/main" id="{F445AFBE-8E71-446A-B089-3DB57104E2A0}"/>
               </a:ext>
             </a:extLst>
           </p:cNvPr>
@@ -8935,7 +9004,7 @@
           <p:cNvPr id="4" name="decor-orb-2">
             <a:extLst xmlns:a="http://schemas.openxmlformats.org/drawingml/2006/main">
               <a:ext uri="{FF2B5EF4-FFF2-40B4-BE49-F238E27FC236}">
-                <a16:creationId xmlns:a16="http://schemas.microsoft.com/office/drawing/2014/main" id="{D528F244-91E5-4B0B-80D7-47FFCDBC8B7C}"/>
+                <a16:creationId xmlns:a16="http://schemas.microsoft.com/office/drawing/2014/main" id="{D29FF49A-DA31-4E84-B3D3-0F82A4A294E6}"/>
               </a:ext>
             </a:extLst>
           </p:cNvPr>
@@ -8966,7 +9035,7 @@
           <p:cNvPr id="5" name="title-bar">
             <a:extLst xmlns:a="http://schemas.openxmlformats.org/drawingml/2006/main">
               <a:ext uri="{FF2B5EF4-FFF2-40B4-BE49-F238E27FC236}">
-                <a16:creationId xmlns:a16="http://schemas.microsoft.com/office/drawing/2014/main" id="{728BFE59-0020-45EA-94BE-A06BF7172E95}"/>
+                <a16:creationId xmlns:a16="http://schemas.microsoft.com/office/drawing/2014/main" id="{FB519540-8CBA-4D73-8898-C4D0645C8F72}"/>
               </a:ext>
             </a:extLst>
           </p:cNvPr>
@@ -8997,7 +9066,7 @@
           <p:cNvPr id="6" name="kicker">
             <a:extLst xmlns:a="http://schemas.openxmlformats.org/drawingml/2006/main">
               <a:ext uri="{FF2B5EF4-FFF2-40B4-BE49-F238E27FC236}">
-                <a16:creationId xmlns:a16="http://schemas.microsoft.com/office/drawing/2014/main" id="{A4D61A14-F730-4034-8DF6-045A5F1956E8}"/>
+                <a16:creationId xmlns:a16="http://schemas.microsoft.com/office/drawing/2014/main" id="{36FC7E2B-6C87-42C0-B902-4A9503FD7848}"/>
               </a:ext>
             </a:extLst>
           </p:cNvPr>
@@ -9053,7 +9122,7 @@
           <p:cNvPr id="7" name="title">
             <a:extLst xmlns:a="http://schemas.openxmlformats.org/drawingml/2006/main">
               <a:ext uri="{FF2B5EF4-FFF2-40B4-BE49-F238E27FC236}">
-                <a16:creationId xmlns:a16="http://schemas.microsoft.com/office/drawing/2014/main" id="{C2A56E92-513E-4BA1-908F-2434F042E4A8}"/>
+                <a16:creationId xmlns:a16="http://schemas.microsoft.com/office/drawing/2014/main" id="{82FFB058-26CB-49FD-A738-6C960A6F1B54}"/>
               </a:ext>
             </a:extLst>
           </p:cNvPr>
@@ -9109,7 +9178,7 @@
           <p:cNvPr id="8" name="subtitle">
             <a:extLst xmlns:a="http://schemas.openxmlformats.org/drawingml/2006/main">
               <a:ext uri="{FF2B5EF4-FFF2-40B4-BE49-F238E27FC236}">
-                <a16:creationId xmlns:a16="http://schemas.microsoft.com/office/drawing/2014/main" id="{56539DA3-12AB-49AE-BFDB-41EB2296518A}"/>
+                <a16:creationId xmlns:a16="http://schemas.microsoft.com/office/drawing/2014/main" id="{E6608290-FF78-42F3-8B6F-A80755D80ADD}"/>
               </a:ext>
             </a:extLst>
           </p:cNvPr>
@@ -9169,7 +9238,7 @@
           <p:nvPr/>
         </p:nvPicPr>
         <p:blipFill>
-          <a:blip xmlns:r="http://schemas.openxmlformats.org/officeDocument/2006/relationships" xmlns:a="http://schemas.openxmlformats.org/drawingml/2006/main" r:embed="R0468036be6fd49a0"/>
+          <a:blip xmlns:r="http://schemas.openxmlformats.org/officeDocument/2006/relationships" xmlns:a="http://schemas.openxmlformats.org/drawingml/2006/main" r:embed="Re44870c70f994a0e"/>
           <a:stretch xmlns:a="http://schemas.openxmlformats.org/drawingml/2006/main"/>
         </p:blipFill>
         <p:spPr>
@@ -9187,7 +9256,7 @@
           <p:cNvPr id="10" name="footer-number">
             <a:extLst xmlns:a="http://schemas.openxmlformats.org/drawingml/2006/main">
               <a:ext uri="{FF2B5EF4-FFF2-40B4-BE49-F238E27FC236}">
-                <a16:creationId xmlns:a16="http://schemas.microsoft.com/office/drawing/2014/main" id="{EE1C6B4D-05A8-4703-A592-2FF08A848AED}"/>
+                <a16:creationId xmlns:a16="http://schemas.microsoft.com/office/drawing/2014/main" id="{239D0ABB-097F-48B3-AF9A-7803C6C562C0}"/>
               </a:ext>
             </a:extLst>
           </p:cNvPr>
@@ -9243,7 +9312,7 @@
           <p:cNvPr id="11" name="card-CANVAS 1">
             <a:extLst xmlns:a="http://schemas.openxmlformats.org/drawingml/2006/main">
               <a:ext uri="{FF2B5EF4-FFF2-40B4-BE49-F238E27FC236}">
-                <a16:creationId xmlns:a16="http://schemas.microsoft.com/office/drawing/2014/main" id="{DF8D6065-8233-4D6E-98D8-738FA3BD3578}"/>
+                <a16:creationId xmlns:a16="http://schemas.microsoft.com/office/drawing/2014/main" id="{7CB5F55B-22A3-4BC1-8B39-38DA2517C875}"/>
               </a:ext>
             </a:extLst>
           </p:cNvPr>
@@ -9284,7 +9353,7 @@
           <p:cNvPr id="12" name="card-accent">
             <a:extLst xmlns:a="http://schemas.openxmlformats.org/drawingml/2006/main">
               <a:ext uri="{FF2B5EF4-FFF2-40B4-BE49-F238E27FC236}">
-                <a16:creationId xmlns:a16="http://schemas.microsoft.com/office/drawing/2014/main" id="{948FBF70-89F3-4C74-8397-298E783EEDCB}"/>
+                <a16:creationId xmlns:a16="http://schemas.microsoft.com/office/drawing/2014/main" id="{C1EC4DF6-E0AA-4E8F-9737-0B46772FBCFF}"/>
               </a:ext>
             </a:extLst>
           </p:cNvPr>
@@ -9315,7 +9384,7 @@
           <p:cNvPr id="13" name="card-label">
             <a:extLst xmlns:a="http://schemas.openxmlformats.org/drawingml/2006/main">
               <a:ext uri="{FF2B5EF4-FFF2-40B4-BE49-F238E27FC236}">
-                <a16:creationId xmlns:a16="http://schemas.microsoft.com/office/drawing/2014/main" id="{03BDA471-8AD5-44F3-B6DA-728263FFFA37}"/>
+                <a16:creationId xmlns:a16="http://schemas.microsoft.com/office/drawing/2014/main" id="{4F944F72-45E0-4AC4-9131-E81C5514286C}"/>
               </a:ext>
             </a:extLst>
           </p:cNvPr>
@@ -9371,7 +9440,7 @@
           <p:cNvPr id="14" name="card-title">
             <a:extLst xmlns:a="http://schemas.openxmlformats.org/drawingml/2006/main">
               <a:ext uri="{FF2B5EF4-FFF2-40B4-BE49-F238E27FC236}">
-                <a16:creationId xmlns:a16="http://schemas.microsoft.com/office/drawing/2014/main" id="{8D555BB9-BFFC-4CB0-82B8-34C02063F055}"/>
+                <a16:creationId xmlns:a16="http://schemas.microsoft.com/office/drawing/2014/main" id="{F811B704-81C1-4F2B-A40E-B4627E534AD7}"/>
               </a:ext>
             </a:extLst>
           </p:cNvPr>
@@ -9427,7 +9496,7 @@
           <p:cNvPr id="15" name="card-body">
             <a:extLst xmlns:a="http://schemas.openxmlformats.org/drawingml/2006/main">
               <a:ext uri="{FF2B5EF4-FFF2-40B4-BE49-F238E27FC236}">
-                <a16:creationId xmlns:a16="http://schemas.microsoft.com/office/drawing/2014/main" id="{BCC7FE26-C76C-4ECA-985A-118948AC255A}"/>
+                <a16:creationId xmlns:a16="http://schemas.microsoft.com/office/drawing/2014/main" id="{B6E624D5-7589-48EE-990C-BFACE312815F}"/>
               </a:ext>
             </a:extLst>
           </p:cNvPr>
@@ -9483,7 +9552,7 @@
           <p:cNvPr id="16" name="card-CANVAS 2">
             <a:extLst xmlns:a="http://schemas.openxmlformats.org/drawingml/2006/main">
               <a:ext uri="{FF2B5EF4-FFF2-40B4-BE49-F238E27FC236}">
-                <a16:creationId xmlns:a16="http://schemas.microsoft.com/office/drawing/2014/main" id="{D6424F7E-EDB1-4149-9B21-20A434622E65}"/>
+                <a16:creationId xmlns:a16="http://schemas.microsoft.com/office/drawing/2014/main" id="{77D1A9B0-F1B4-4574-A31A-F00D97B59821}"/>
               </a:ext>
             </a:extLst>
           </p:cNvPr>
@@ -9524,7 +9593,7 @@
           <p:cNvPr id="17" name="card-accent">
             <a:extLst xmlns:a="http://schemas.openxmlformats.org/drawingml/2006/main">
               <a:ext uri="{FF2B5EF4-FFF2-40B4-BE49-F238E27FC236}">
-                <a16:creationId xmlns:a16="http://schemas.microsoft.com/office/drawing/2014/main" id="{A87CC693-DF93-4237-927F-775A56008D98}"/>
+                <a16:creationId xmlns:a16="http://schemas.microsoft.com/office/drawing/2014/main" id="{A015FE8B-3973-43F9-8AE4-0078C753B18C}"/>
               </a:ext>
             </a:extLst>
           </p:cNvPr>
@@ -9555,7 +9624,7 @@
           <p:cNvPr id="18" name="card-label">
             <a:extLst xmlns:a="http://schemas.openxmlformats.org/drawingml/2006/main">
               <a:ext uri="{FF2B5EF4-FFF2-40B4-BE49-F238E27FC236}">
-                <a16:creationId xmlns:a16="http://schemas.microsoft.com/office/drawing/2014/main" id="{66F571E3-30D4-4F63-9DB6-25B6AA1E295D}"/>
+                <a16:creationId xmlns:a16="http://schemas.microsoft.com/office/drawing/2014/main" id="{47E7E164-B65B-4A86-8B0D-BB80240F0A0B}"/>
               </a:ext>
             </a:extLst>
           </p:cNvPr>
@@ -9611,7 +9680,7 @@
           <p:cNvPr id="19" name="card-title">
             <a:extLst xmlns:a="http://schemas.openxmlformats.org/drawingml/2006/main">
               <a:ext uri="{FF2B5EF4-FFF2-40B4-BE49-F238E27FC236}">
-                <a16:creationId xmlns:a16="http://schemas.microsoft.com/office/drawing/2014/main" id="{5EFF79B8-2E7F-44F3-A58B-F30F2A5E9210}"/>
+                <a16:creationId xmlns:a16="http://schemas.microsoft.com/office/drawing/2014/main" id="{497F8F7A-FD82-4FD6-960A-C99D2E5DD44E}"/>
               </a:ext>
             </a:extLst>
           </p:cNvPr>
@@ -9667,7 +9736,7 @@
           <p:cNvPr id="20" name="card-body">
             <a:extLst xmlns:a="http://schemas.openxmlformats.org/drawingml/2006/main">
               <a:ext uri="{FF2B5EF4-FFF2-40B4-BE49-F238E27FC236}">
-                <a16:creationId xmlns:a16="http://schemas.microsoft.com/office/drawing/2014/main" id="{F137A749-C7D8-417A-8941-F5C4E17DA835}"/>
+                <a16:creationId xmlns:a16="http://schemas.microsoft.com/office/drawing/2014/main" id="{56F12A04-2421-4EF4-AAC1-0E3247E07DD5}"/>
               </a:ext>
             </a:extLst>
           </p:cNvPr>
@@ -9723,7 +9792,7 @@
           <p:cNvPr id="21" name="card-CANVAS 3">
             <a:extLst xmlns:a="http://schemas.openxmlformats.org/drawingml/2006/main">
               <a:ext uri="{FF2B5EF4-FFF2-40B4-BE49-F238E27FC236}">
-                <a16:creationId xmlns:a16="http://schemas.microsoft.com/office/drawing/2014/main" id="{FF1C6300-9DBE-4A1F-86FB-58505C3911D4}"/>
+                <a16:creationId xmlns:a16="http://schemas.microsoft.com/office/drawing/2014/main" id="{5115159B-4F91-43B5-B92E-3561CDCB3826}"/>
               </a:ext>
             </a:extLst>
           </p:cNvPr>
@@ -9764,7 +9833,7 @@
           <p:cNvPr id="22" name="card-accent">
             <a:extLst xmlns:a="http://schemas.openxmlformats.org/drawingml/2006/main">
               <a:ext uri="{FF2B5EF4-FFF2-40B4-BE49-F238E27FC236}">
-                <a16:creationId xmlns:a16="http://schemas.microsoft.com/office/drawing/2014/main" id="{B8678F3C-0668-4791-8B05-22550C39D42A}"/>
+                <a16:creationId xmlns:a16="http://schemas.microsoft.com/office/drawing/2014/main" id="{7B85F683-E590-4044-AEF0-6A02C8BF925E}"/>
               </a:ext>
             </a:extLst>
           </p:cNvPr>
@@ -9795,7 +9864,7 @@
           <p:cNvPr id="23" name="card-label">
             <a:extLst xmlns:a="http://schemas.openxmlformats.org/drawingml/2006/main">
               <a:ext uri="{FF2B5EF4-FFF2-40B4-BE49-F238E27FC236}">
-                <a16:creationId xmlns:a16="http://schemas.microsoft.com/office/drawing/2014/main" id="{F0F7FEFC-42A4-4EDC-A405-C648A32C8E23}"/>
+                <a16:creationId xmlns:a16="http://schemas.microsoft.com/office/drawing/2014/main" id="{C219B574-1E9E-44FB-8838-1E70105924CB}"/>
               </a:ext>
             </a:extLst>
           </p:cNvPr>
@@ -9851,7 +9920,7 @@
           <p:cNvPr id="24" name="card-title">
             <a:extLst xmlns:a="http://schemas.openxmlformats.org/drawingml/2006/main">
               <a:ext uri="{FF2B5EF4-FFF2-40B4-BE49-F238E27FC236}">
-                <a16:creationId xmlns:a16="http://schemas.microsoft.com/office/drawing/2014/main" id="{01ECE21C-9381-4339-980A-C27D48B983D1}"/>
+                <a16:creationId xmlns:a16="http://schemas.microsoft.com/office/drawing/2014/main" id="{09148225-A125-4F9A-B43B-C9C68FFD7C81}"/>
               </a:ext>
             </a:extLst>
           </p:cNvPr>
@@ -9907,7 +9976,7 @@
           <p:cNvPr id="25" name="card-body">
             <a:extLst xmlns:a="http://schemas.openxmlformats.org/drawingml/2006/main">
               <a:ext uri="{FF2B5EF4-FFF2-40B4-BE49-F238E27FC236}">
-                <a16:creationId xmlns:a16="http://schemas.microsoft.com/office/drawing/2014/main" id="{D1E8F5AB-3BCA-4234-8214-32FC5B10E538}"/>
+                <a16:creationId xmlns:a16="http://schemas.microsoft.com/office/drawing/2014/main" id="{6C3FAE65-2FD6-4BDA-A912-1803D0C37FAC}"/>
               </a:ext>
             </a:extLst>
           </p:cNvPr>
@@ -9963,7 +10032,7 @@
           <p:cNvPr id="26" name="card-CANVAS 4">
             <a:extLst xmlns:a="http://schemas.openxmlformats.org/drawingml/2006/main">
               <a:ext uri="{FF2B5EF4-FFF2-40B4-BE49-F238E27FC236}">
-                <a16:creationId xmlns:a16="http://schemas.microsoft.com/office/drawing/2014/main" id="{DEBF6ED0-998B-4E68-AE47-DE4B967C54F6}"/>
+                <a16:creationId xmlns:a16="http://schemas.microsoft.com/office/drawing/2014/main" id="{E4E44535-B7FB-4270-A180-1BF950253F3D}"/>
               </a:ext>
             </a:extLst>
           </p:cNvPr>
@@ -10004,7 +10073,7 @@
           <p:cNvPr id="27" name="card-accent">
             <a:extLst xmlns:a="http://schemas.openxmlformats.org/drawingml/2006/main">
               <a:ext uri="{FF2B5EF4-FFF2-40B4-BE49-F238E27FC236}">
-                <a16:creationId xmlns:a16="http://schemas.microsoft.com/office/drawing/2014/main" id="{19AF7826-4791-4AF4-9D32-F3F83D9B38B6}"/>
+                <a16:creationId xmlns:a16="http://schemas.microsoft.com/office/drawing/2014/main" id="{B8FE59DB-9DC0-44B1-9DC8-93A20D2081D2}"/>
               </a:ext>
             </a:extLst>
           </p:cNvPr>
@@ -10035,7 +10104,7 @@
           <p:cNvPr id="28" name="card-label">
             <a:extLst xmlns:a="http://schemas.openxmlformats.org/drawingml/2006/main">
               <a:ext uri="{FF2B5EF4-FFF2-40B4-BE49-F238E27FC236}">
-                <a16:creationId xmlns:a16="http://schemas.microsoft.com/office/drawing/2014/main" id="{1F9E7573-D0A1-45C6-95CE-9B175A062973}"/>
+                <a16:creationId xmlns:a16="http://schemas.microsoft.com/office/drawing/2014/main" id="{2F1A87EE-26F7-41E7-9D0B-7B3C30284C98}"/>
               </a:ext>
             </a:extLst>
           </p:cNvPr>
@@ -10091,7 +10160,7 @@
           <p:cNvPr id="29" name="card-title">
             <a:extLst xmlns:a="http://schemas.openxmlformats.org/drawingml/2006/main">
               <a:ext uri="{FF2B5EF4-FFF2-40B4-BE49-F238E27FC236}">
-                <a16:creationId xmlns:a16="http://schemas.microsoft.com/office/drawing/2014/main" id="{5ECA59DF-7F37-4A7C-B73C-AB952FA311BC}"/>
+                <a16:creationId xmlns:a16="http://schemas.microsoft.com/office/drawing/2014/main" id="{7AAB2666-83E2-46FD-9109-A015C669CBA8}"/>
               </a:ext>
             </a:extLst>
           </p:cNvPr>
@@ -10147,7 +10216,7 @@
           <p:cNvPr id="30" name="card-body">
             <a:extLst xmlns:a="http://schemas.openxmlformats.org/drawingml/2006/main">
               <a:ext uri="{FF2B5EF4-FFF2-40B4-BE49-F238E27FC236}">
-                <a16:creationId xmlns:a16="http://schemas.microsoft.com/office/drawing/2014/main" id="{3116F70A-3D50-4E19-9E8C-C558474D57F6}"/>
+                <a16:creationId xmlns:a16="http://schemas.microsoft.com/office/drawing/2014/main" id="{16F0BDB8-1037-4CF3-A6F6-2168CC9CB914}"/>
               </a:ext>
             </a:extLst>
           </p:cNvPr>
@@ -10203,7 +10272,7 @@
           <p:cNvPr id="31" name="card-CANVAS 5">
             <a:extLst xmlns:a="http://schemas.openxmlformats.org/drawingml/2006/main">
               <a:ext uri="{FF2B5EF4-FFF2-40B4-BE49-F238E27FC236}">
-                <a16:creationId xmlns:a16="http://schemas.microsoft.com/office/drawing/2014/main" id="{A9A0F4B0-6970-4FB4-ACF9-036DECCB2600}"/>
+                <a16:creationId xmlns:a16="http://schemas.microsoft.com/office/drawing/2014/main" id="{404B5898-EA8C-4351-A281-3069D713913B}"/>
               </a:ext>
             </a:extLst>
           </p:cNvPr>
@@ -10244,7 +10313,7 @@
           <p:cNvPr id="32" name="card-accent">
             <a:extLst xmlns:a="http://schemas.openxmlformats.org/drawingml/2006/main">
               <a:ext uri="{FF2B5EF4-FFF2-40B4-BE49-F238E27FC236}">
-                <a16:creationId xmlns:a16="http://schemas.microsoft.com/office/drawing/2014/main" id="{45424F58-AE2F-4A39-945C-C908F67D46F5}"/>
+                <a16:creationId xmlns:a16="http://schemas.microsoft.com/office/drawing/2014/main" id="{D8275970-E2CB-4D04-9932-1B6994DAF9A4}"/>
               </a:ext>
             </a:extLst>
           </p:cNvPr>
@@ -10275,7 +10344,7 @@
           <p:cNvPr id="33" name="card-label">
             <a:extLst xmlns:a="http://schemas.openxmlformats.org/drawingml/2006/main">
               <a:ext uri="{FF2B5EF4-FFF2-40B4-BE49-F238E27FC236}">
-                <a16:creationId xmlns:a16="http://schemas.microsoft.com/office/drawing/2014/main" id="{E5C79FDF-2632-4B49-B237-3F956A1AB011}"/>
+                <a16:creationId xmlns:a16="http://schemas.microsoft.com/office/drawing/2014/main" id="{4A1CECE4-FBDC-4310-8F72-BE8738416B44}"/>
               </a:ext>
             </a:extLst>
           </p:cNvPr>
@@ -10331,7 +10400,7 @@
           <p:cNvPr id="34" name="card-title">
             <a:extLst xmlns:a="http://schemas.openxmlformats.org/drawingml/2006/main">
               <a:ext uri="{FF2B5EF4-FFF2-40B4-BE49-F238E27FC236}">
-                <a16:creationId xmlns:a16="http://schemas.microsoft.com/office/drawing/2014/main" id="{D655B352-22C4-47E2-B13E-BB72E1F5CC23}"/>
+                <a16:creationId xmlns:a16="http://schemas.microsoft.com/office/drawing/2014/main" id="{183DDE53-A7A1-474E-A703-F854C002DF87}"/>
               </a:ext>
             </a:extLst>
           </p:cNvPr>
@@ -10387,7 +10456,7 @@
           <p:cNvPr id="35" name="card-body">
             <a:extLst xmlns:a="http://schemas.openxmlformats.org/drawingml/2006/main">
               <a:ext uri="{FF2B5EF4-FFF2-40B4-BE49-F238E27FC236}">
-                <a16:creationId xmlns:a16="http://schemas.microsoft.com/office/drawing/2014/main" id="{2521C69E-51B7-4400-B5D2-0110DE0A5B6A}"/>
+                <a16:creationId xmlns:a16="http://schemas.microsoft.com/office/drawing/2014/main" id="{D8549C3D-DC29-4ED2-9172-90C0673349E8}"/>
               </a:ext>
             </a:extLst>
           </p:cNvPr>
@@ -10443,7 +10512,7 @@
           <p:cNvPr id="36" name="card-CANVAS 6">
             <a:extLst xmlns:a="http://schemas.openxmlformats.org/drawingml/2006/main">
               <a:ext uri="{FF2B5EF4-FFF2-40B4-BE49-F238E27FC236}">
-                <a16:creationId xmlns:a16="http://schemas.microsoft.com/office/drawing/2014/main" id="{9B5A3BB8-CF2E-42DD-A49E-99078977A25E}"/>
+                <a16:creationId xmlns:a16="http://schemas.microsoft.com/office/drawing/2014/main" id="{DDBFB1CB-7008-49F6-80F7-D632CAC218FC}"/>
               </a:ext>
             </a:extLst>
           </p:cNvPr>
@@ -10484,7 +10553,7 @@
           <p:cNvPr id="37" name="card-accent">
             <a:extLst xmlns:a="http://schemas.openxmlformats.org/drawingml/2006/main">
               <a:ext uri="{FF2B5EF4-FFF2-40B4-BE49-F238E27FC236}">
-                <a16:creationId xmlns:a16="http://schemas.microsoft.com/office/drawing/2014/main" id="{6BA0E8F6-7EFE-4E2B-A828-9BF74E469AED}"/>
+                <a16:creationId xmlns:a16="http://schemas.microsoft.com/office/drawing/2014/main" id="{9ABF5A73-631D-4C76-AF43-4EF02CAA6F49}"/>
               </a:ext>
             </a:extLst>
           </p:cNvPr>
@@ -10515,7 +10584,7 @@
           <p:cNvPr id="38" name="card-label">
             <a:extLst xmlns:a="http://schemas.openxmlformats.org/drawingml/2006/main">
               <a:ext uri="{FF2B5EF4-FFF2-40B4-BE49-F238E27FC236}">
-                <a16:creationId xmlns:a16="http://schemas.microsoft.com/office/drawing/2014/main" id="{2E6AEDA3-E181-457C-9B24-8998B99FB0CE}"/>
+                <a16:creationId xmlns:a16="http://schemas.microsoft.com/office/drawing/2014/main" id="{CB5E328B-D8A2-4344-B108-79FCA3405122}"/>
               </a:ext>
             </a:extLst>
           </p:cNvPr>
@@ -10571,7 +10640,7 @@
           <p:cNvPr id="39" name="card-title">
             <a:extLst xmlns:a="http://schemas.openxmlformats.org/drawingml/2006/main">
               <a:ext uri="{FF2B5EF4-FFF2-40B4-BE49-F238E27FC236}">
-                <a16:creationId xmlns:a16="http://schemas.microsoft.com/office/drawing/2014/main" id="{806B5512-1DC3-4A6B-97B4-679537C23D8F}"/>
+                <a16:creationId xmlns:a16="http://schemas.microsoft.com/office/drawing/2014/main" id="{97CB1337-EC7C-46A3-ADF6-54D0A050B5A5}"/>
               </a:ext>
             </a:extLst>
           </p:cNvPr>
@@ -10627,7 +10696,7 @@
           <p:cNvPr id="40" name="card-body">
             <a:extLst xmlns:a="http://schemas.openxmlformats.org/drawingml/2006/main">
               <a:ext uri="{FF2B5EF4-FFF2-40B4-BE49-F238E27FC236}">
-                <a16:creationId xmlns:a16="http://schemas.microsoft.com/office/drawing/2014/main" id="{AB5FA129-4BF8-4D5A-BF99-A210A811226C}"/>
+                <a16:creationId xmlns:a16="http://schemas.microsoft.com/office/drawing/2014/main" id="{A31EB140-896E-4497-AB85-2797ED208F68}"/>
               </a:ext>
             </a:extLst>
           </p:cNvPr>
@@ -10681,7 +10750,7 @@
     </p:spTree>
     <p:extLst>
       <p:ext uri="{BB962C8B-B14F-4D97-AF65-F5344CB8AC3E}">
-        <p14:creationId xmlns:p14="http://schemas.microsoft.com/office/powerpoint/2010/main" val="924240090"/>
+        <p14:creationId xmlns:p14="http://schemas.microsoft.com/office/powerpoint/2010/main" val="1905624399"/>
       </p:ext>
     </p:extLst>
   </p:cSld>
@@ -10712,7 +10781,7 @@
           <p:cNvPr id="1" name="decor-ring-1">
             <a:extLst xmlns:a="http://schemas.openxmlformats.org/drawingml/2006/main">
               <a:ext uri="{FF2B5EF4-FFF2-40B4-BE49-F238E27FC236}">
-                <a16:creationId xmlns:a16="http://schemas.microsoft.com/office/drawing/2014/main" id="{FA0662AF-D5F8-4EA8-A2F4-27C076DEA39B}"/>
+                <a16:creationId xmlns:a16="http://schemas.microsoft.com/office/drawing/2014/main" id="{2C4EFC36-6F4D-4E8D-A956-2CAEE2049A07}"/>
               </a:ext>
             </a:extLst>
           </p:cNvPr>
@@ -10743,7 +10812,7 @@
           <p:cNvPr id="2" name="decor-ring-2">
             <a:extLst xmlns:a="http://schemas.openxmlformats.org/drawingml/2006/main">
               <a:ext uri="{FF2B5EF4-FFF2-40B4-BE49-F238E27FC236}">
-                <a16:creationId xmlns:a16="http://schemas.microsoft.com/office/drawing/2014/main" id="{85E5F190-C618-40DA-A5C5-73205F47486D}"/>
+                <a16:creationId xmlns:a16="http://schemas.microsoft.com/office/drawing/2014/main" id="{B6F6E14B-5E22-4DE3-B091-80AAB3B8ADF4}"/>
               </a:ext>
             </a:extLst>
           </p:cNvPr>
@@ -10774,7 +10843,7 @@
           <p:cNvPr id="3" name="decor-orb-1">
             <a:extLst xmlns:a="http://schemas.openxmlformats.org/drawingml/2006/main">
               <a:ext uri="{FF2B5EF4-FFF2-40B4-BE49-F238E27FC236}">
-                <a16:creationId xmlns:a16="http://schemas.microsoft.com/office/drawing/2014/main" id="{5F2C4DC4-788A-4A2F-AF17-A35D51826022}"/>
+                <a16:creationId xmlns:a16="http://schemas.microsoft.com/office/drawing/2014/main" id="{85D1CDE6-A03A-4811-B3B1-8D742EE358B9}"/>
               </a:ext>
             </a:extLst>
           </p:cNvPr>
@@ -10805,7 +10874,7 @@
           <p:cNvPr id="4" name="decor-orb-2">
             <a:extLst xmlns:a="http://schemas.openxmlformats.org/drawingml/2006/main">
               <a:ext uri="{FF2B5EF4-FFF2-40B4-BE49-F238E27FC236}">
-                <a16:creationId xmlns:a16="http://schemas.microsoft.com/office/drawing/2014/main" id="{C20B6C17-3451-4552-84A8-91967BC9FCC5}"/>
+                <a16:creationId xmlns:a16="http://schemas.microsoft.com/office/drawing/2014/main" id="{7F8C2C34-2E7F-41A2-82AA-2F5D7B45D4BD}"/>
               </a:ext>
             </a:extLst>
           </p:cNvPr>
@@ -10836,7 +10905,7 @@
           <p:cNvPr id="5" name="title-bar">
             <a:extLst xmlns:a="http://schemas.openxmlformats.org/drawingml/2006/main">
               <a:ext uri="{FF2B5EF4-FFF2-40B4-BE49-F238E27FC236}">
-                <a16:creationId xmlns:a16="http://schemas.microsoft.com/office/drawing/2014/main" id="{0E977E97-80C3-4584-94BF-2496BBB500D8}"/>
+                <a16:creationId xmlns:a16="http://schemas.microsoft.com/office/drawing/2014/main" id="{C7B80D88-6E36-4403-A604-AC6C8BC730BF}"/>
               </a:ext>
             </a:extLst>
           </p:cNvPr>
@@ -10867,7 +10936,7 @@
           <p:cNvPr id="6" name="kicker">
             <a:extLst xmlns:a="http://schemas.openxmlformats.org/drawingml/2006/main">
               <a:ext uri="{FF2B5EF4-FFF2-40B4-BE49-F238E27FC236}">
-                <a16:creationId xmlns:a16="http://schemas.microsoft.com/office/drawing/2014/main" id="{DA5592DA-7291-488C-A717-E3AAF74ADD2A}"/>
+                <a16:creationId xmlns:a16="http://schemas.microsoft.com/office/drawing/2014/main" id="{8397586C-56D4-4011-A42C-A3E260E76E17}"/>
               </a:ext>
             </a:extLst>
           </p:cNvPr>
@@ -10923,7 +10992,7 @@
           <p:cNvPr id="7" name="title">
             <a:extLst xmlns:a="http://schemas.openxmlformats.org/drawingml/2006/main">
               <a:ext uri="{FF2B5EF4-FFF2-40B4-BE49-F238E27FC236}">
-                <a16:creationId xmlns:a16="http://schemas.microsoft.com/office/drawing/2014/main" id="{D52734ED-39EA-4AB7-96B2-FEA09EDE5D14}"/>
+                <a16:creationId xmlns:a16="http://schemas.microsoft.com/office/drawing/2014/main" id="{FE7A4006-2F63-4742-A20D-42AEC694D98D}"/>
               </a:ext>
             </a:extLst>
           </p:cNvPr>
@@ -10979,7 +11048,7 @@
           <p:cNvPr id="8" name="subtitle">
             <a:extLst xmlns:a="http://schemas.openxmlformats.org/drawingml/2006/main">
               <a:ext uri="{FF2B5EF4-FFF2-40B4-BE49-F238E27FC236}">
-                <a16:creationId xmlns:a16="http://schemas.microsoft.com/office/drawing/2014/main" id="{D6F215A8-DB59-47FC-9B5E-DA0E96577057}"/>
+                <a16:creationId xmlns:a16="http://schemas.microsoft.com/office/drawing/2014/main" id="{DED7E7AA-D6EC-4464-AB7B-BD5067483E78}"/>
               </a:ext>
             </a:extLst>
           </p:cNvPr>
@@ -11039,7 +11108,7 @@
           <p:nvPr/>
         </p:nvPicPr>
         <p:blipFill>
-          <a:blip xmlns:r="http://schemas.openxmlformats.org/officeDocument/2006/relationships" xmlns:a="http://schemas.openxmlformats.org/drawingml/2006/main" r:embed="R794a2f141c5a4562"/>
+          <a:blip xmlns:r="http://schemas.openxmlformats.org/officeDocument/2006/relationships" xmlns:a="http://schemas.openxmlformats.org/drawingml/2006/main" r:embed="R5bc7840933b749dc"/>
           <a:stretch xmlns:a="http://schemas.openxmlformats.org/drawingml/2006/main"/>
         </p:blipFill>
         <p:spPr>
@@ -11057,7 +11126,7 @@
           <p:cNvPr id="10" name="footer-number">
             <a:extLst xmlns:a="http://schemas.openxmlformats.org/drawingml/2006/main">
               <a:ext uri="{FF2B5EF4-FFF2-40B4-BE49-F238E27FC236}">
-                <a16:creationId xmlns:a16="http://schemas.microsoft.com/office/drawing/2014/main" id="{4C241AC8-BC4D-4C86-873F-F0D390D1690C}"/>
+                <a16:creationId xmlns:a16="http://schemas.microsoft.com/office/drawing/2014/main" id="{BF884F7F-C60A-4745-9C2E-4111226D0CBB}"/>
               </a:ext>
             </a:extLst>
           </p:cNvPr>
@@ -11113,7 +11182,7 @@
           <p:cNvPr id="11" name="card-진행 방법">
             <a:extLst xmlns:a="http://schemas.openxmlformats.org/drawingml/2006/main">
               <a:ext uri="{FF2B5EF4-FFF2-40B4-BE49-F238E27FC236}">
-                <a16:creationId xmlns:a16="http://schemas.microsoft.com/office/drawing/2014/main" id="{EE275949-07AD-445D-B4C6-94817397EFA7}"/>
+                <a16:creationId xmlns:a16="http://schemas.microsoft.com/office/drawing/2014/main" id="{0F025827-A0FE-4471-AB12-BFA6DBFD5818}"/>
               </a:ext>
             </a:extLst>
           </p:cNvPr>
@@ -11154,7 +11223,7 @@
           <p:cNvPr id="12" name="card-accent">
             <a:extLst xmlns:a="http://schemas.openxmlformats.org/drawingml/2006/main">
               <a:ext uri="{FF2B5EF4-FFF2-40B4-BE49-F238E27FC236}">
-                <a16:creationId xmlns:a16="http://schemas.microsoft.com/office/drawing/2014/main" id="{564337B0-03C0-4A20-A90C-4F5835331B3B}"/>
+                <a16:creationId xmlns:a16="http://schemas.microsoft.com/office/drawing/2014/main" id="{E70A2640-AB75-4150-9426-10E7B8B1869A}"/>
               </a:ext>
             </a:extLst>
           </p:cNvPr>
@@ -11185,7 +11254,7 @@
           <p:cNvPr id="13" name="card-label">
             <a:extLst xmlns:a="http://schemas.openxmlformats.org/drawingml/2006/main">
               <a:ext uri="{FF2B5EF4-FFF2-40B4-BE49-F238E27FC236}">
-                <a16:creationId xmlns:a16="http://schemas.microsoft.com/office/drawing/2014/main" id="{0C22A1D4-9AF2-43D9-88D4-191457432FA2}"/>
+                <a16:creationId xmlns:a16="http://schemas.microsoft.com/office/drawing/2014/main" id="{92BB9D75-D564-45C3-8907-13CDD432101E}"/>
               </a:ext>
             </a:extLst>
           </p:cNvPr>
@@ -11241,7 +11310,7 @@
           <p:cNvPr id="14" name="card-title">
             <a:extLst xmlns:a="http://schemas.openxmlformats.org/drawingml/2006/main">
               <a:ext uri="{FF2B5EF4-FFF2-40B4-BE49-F238E27FC236}">
-                <a16:creationId xmlns:a16="http://schemas.microsoft.com/office/drawing/2014/main" id="{F85E4694-2205-4EA9-8F8C-493BE839B3A3}"/>
+                <a16:creationId xmlns:a16="http://schemas.microsoft.com/office/drawing/2014/main" id="{5245BFF4-024D-45ED-BF2F-2A9963D8C131}"/>
               </a:ext>
             </a:extLst>
           </p:cNvPr>
@@ -11297,7 +11366,7 @@
           <p:cNvPr id="15" name="card-body">
             <a:extLst xmlns:a="http://schemas.openxmlformats.org/drawingml/2006/main">
               <a:ext uri="{FF2B5EF4-FFF2-40B4-BE49-F238E27FC236}">
-                <a16:creationId xmlns:a16="http://schemas.microsoft.com/office/drawing/2014/main" id="{F2AEF8BF-1586-4DEA-B0D4-3A9F382B5AE7}"/>
+                <a16:creationId xmlns:a16="http://schemas.microsoft.com/office/drawing/2014/main" id="{AB8912E6-5056-45C7-8EBD-B94CC66B485C}"/>
               </a:ext>
             </a:extLst>
           </p:cNvPr>
@@ -11343,7 +11412,7 @@
                 <a:ea typeface="Pretendard"/>
                 <a:cs typeface="Pretendard"/>
               </a:rPr>
-              <a:t>팀 토론 20분 → 업무 문제 한 문장 확정 →</a:t>
+              <a:t>팀 토론 20분 → 업무 문제 한 문장</a:t>
             </a:r>
           </a:p>
           <a:p xmlns:a="http://schemas.openxmlformats.org/drawingml/2006/main">
@@ -11366,7 +11435,7 @@
                 <a:ea typeface="Pretendard"/>
                 <a:cs typeface="Pretendard"/>
               </a:rPr>
-              <a:t>현재 입력/출력/병목 정리</a:t>
+              <a:t>확정 → 현재 입력/출력/병목 정리</a:t>
             </a:r>
           </a:p>
         </p:txBody>
@@ -11376,7 +11445,7 @@
           <p:cNvPr id="16" name="card-결과물">
             <a:extLst xmlns:a="http://schemas.openxmlformats.org/drawingml/2006/main">
               <a:ext uri="{FF2B5EF4-FFF2-40B4-BE49-F238E27FC236}">
-                <a16:creationId xmlns:a16="http://schemas.microsoft.com/office/drawing/2014/main" id="{15AECAAC-D888-4B31-A0CC-6020765E9DED}"/>
+                <a16:creationId xmlns:a16="http://schemas.microsoft.com/office/drawing/2014/main" id="{0FAB2A6B-CCCD-4BD0-8892-73477494380E}"/>
               </a:ext>
             </a:extLst>
           </p:cNvPr>
@@ -11417,7 +11486,7 @@
           <p:cNvPr id="17" name="card-accent">
             <a:extLst xmlns:a="http://schemas.openxmlformats.org/drawingml/2006/main">
               <a:ext uri="{FF2B5EF4-FFF2-40B4-BE49-F238E27FC236}">
-                <a16:creationId xmlns:a16="http://schemas.microsoft.com/office/drawing/2014/main" id="{3F77FCFF-F6B2-4340-B3C8-E193831B9761}"/>
+                <a16:creationId xmlns:a16="http://schemas.microsoft.com/office/drawing/2014/main" id="{8E27B1A9-A68B-4E0D-99A0-66FC0E24D4C4}"/>
               </a:ext>
             </a:extLst>
           </p:cNvPr>
@@ -11448,7 +11517,7 @@
           <p:cNvPr id="18" name="card-label">
             <a:extLst xmlns:a="http://schemas.openxmlformats.org/drawingml/2006/main">
               <a:ext uri="{FF2B5EF4-FFF2-40B4-BE49-F238E27FC236}">
-                <a16:creationId xmlns:a16="http://schemas.microsoft.com/office/drawing/2014/main" id="{0FBCDB42-8B30-482B-A757-5092D976963D}"/>
+                <a16:creationId xmlns:a16="http://schemas.microsoft.com/office/drawing/2014/main" id="{6D8CCE48-3239-48FC-81E3-F4C642922FEC}"/>
               </a:ext>
             </a:extLst>
           </p:cNvPr>
@@ -11504,7 +11573,7 @@
           <p:cNvPr id="19" name="card-title">
             <a:extLst xmlns:a="http://schemas.openxmlformats.org/drawingml/2006/main">
               <a:ext uri="{FF2B5EF4-FFF2-40B4-BE49-F238E27FC236}">
-                <a16:creationId xmlns:a16="http://schemas.microsoft.com/office/drawing/2014/main" id="{92598297-6B58-4103-90DA-171E1CC645A2}"/>
+                <a16:creationId xmlns:a16="http://schemas.microsoft.com/office/drawing/2014/main" id="{F7A0ECE0-9A1F-4A33-9E54-8B56801D0434}"/>
               </a:ext>
             </a:extLst>
           </p:cNvPr>
@@ -11560,7 +11629,7 @@
           <p:cNvPr id="20" name="card-body">
             <a:extLst xmlns:a="http://schemas.openxmlformats.org/drawingml/2006/main">
               <a:ext uri="{FF2B5EF4-FFF2-40B4-BE49-F238E27FC236}">
-                <a16:creationId xmlns:a16="http://schemas.microsoft.com/office/drawing/2014/main" id="{E071C47E-9160-4213-8F7B-5DC94A985947}"/>
+                <a16:creationId xmlns:a16="http://schemas.microsoft.com/office/drawing/2014/main" id="{242DF5EB-DEE4-4406-898E-8005FBBE9450}"/>
               </a:ext>
             </a:extLst>
           </p:cNvPr>
@@ -11606,7 +11675,30 @@
                 <a:ea typeface="Pretendard"/>
                 <a:cs typeface="Pretendard"/>
               </a:rPr>
-              <a:t>업무 문제, 현재 방식, 병목, 산출물 정의</a:t>
+              <a:t>업무 문제, 현재 방식, 병목,</a:t>
+            </a:r>
+          </a:p>
+          <a:p xmlns:a="http://schemas.openxmlformats.org/drawingml/2006/main">
+            <a:pPr algn="l">
+              <a:defRPr sz="1350" b="0">
+                <a:solidFill>
+                  <a:srgbClr val="4B5563"/>
+                </a:solidFill>
+                <a:latin typeface="Pretendard"/>
+                <a:ea typeface="Pretendard"/>
+                <a:cs typeface="Pretendard"/>
+              </a:defRPr>
+            </a:pPr>
+            <a:r>
+              <a:rPr sz="1350" b="0">
+                <a:solidFill>
+                  <a:srgbClr val="4B5563"/>
+                </a:solidFill>
+                <a:latin typeface="Pretendard"/>
+                <a:ea typeface="Pretendard"/>
+                <a:cs typeface="Pretendard"/>
+              </a:rPr>
+              <a:t>산출물 정의</a:t>
             </a:r>
           </a:p>
         </p:txBody>
@@ -11616,7 +11708,7 @@
           <p:cNvPr id="21" name="card-운영 팁">
             <a:extLst xmlns:a="http://schemas.openxmlformats.org/drawingml/2006/main">
               <a:ext uri="{FF2B5EF4-FFF2-40B4-BE49-F238E27FC236}">
-                <a16:creationId xmlns:a16="http://schemas.microsoft.com/office/drawing/2014/main" id="{D71EA8CE-156D-4788-9B20-236067CF201B}"/>
+                <a16:creationId xmlns:a16="http://schemas.microsoft.com/office/drawing/2014/main" id="{FED58E52-75D3-4BCF-ABFD-7F9C37FF40A1}"/>
               </a:ext>
             </a:extLst>
           </p:cNvPr>
@@ -11657,7 +11749,7 @@
           <p:cNvPr id="22" name="card-accent">
             <a:extLst xmlns:a="http://schemas.openxmlformats.org/drawingml/2006/main">
               <a:ext uri="{FF2B5EF4-FFF2-40B4-BE49-F238E27FC236}">
-                <a16:creationId xmlns:a16="http://schemas.microsoft.com/office/drawing/2014/main" id="{1E4E0249-87DA-4361-851E-600982E3B940}"/>
+                <a16:creationId xmlns:a16="http://schemas.microsoft.com/office/drawing/2014/main" id="{5E51AB25-46E1-44F1-9E39-F31F0C85864E}"/>
               </a:ext>
             </a:extLst>
           </p:cNvPr>
@@ -11688,7 +11780,7 @@
           <p:cNvPr id="23" name="card-label">
             <a:extLst xmlns:a="http://schemas.openxmlformats.org/drawingml/2006/main">
               <a:ext uri="{FF2B5EF4-FFF2-40B4-BE49-F238E27FC236}">
-                <a16:creationId xmlns:a16="http://schemas.microsoft.com/office/drawing/2014/main" id="{F28F4AAF-BD8C-4970-A9B1-C5E924826A98}"/>
+                <a16:creationId xmlns:a16="http://schemas.microsoft.com/office/drawing/2014/main" id="{693F1856-022A-461B-AA5E-49F5C5C5ACC8}"/>
               </a:ext>
             </a:extLst>
           </p:cNvPr>
@@ -11744,7 +11836,7 @@
           <p:cNvPr id="24" name="card-title">
             <a:extLst xmlns:a="http://schemas.openxmlformats.org/drawingml/2006/main">
               <a:ext uri="{FF2B5EF4-FFF2-40B4-BE49-F238E27FC236}">
-                <a16:creationId xmlns:a16="http://schemas.microsoft.com/office/drawing/2014/main" id="{5D58822D-48DA-426A-8C4B-C26D20025780}"/>
+                <a16:creationId xmlns:a16="http://schemas.microsoft.com/office/drawing/2014/main" id="{19339773-3AF7-46F7-83F2-FE65F446B7C9}"/>
               </a:ext>
             </a:extLst>
           </p:cNvPr>
@@ -11800,7 +11892,7 @@
           <p:cNvPr id="25" name="card-body">
             <a:extLst xmlns:a="http://schemas.openxmlformats.org/drawingml/2006/main">
               <a:ext uri="{FF2B5EF4-FFF2-40B4-BE49-F238E27FC236}">
-                <a16:creationId xmlns:a16="http://schemas.microsoft.com/office/drawing/2014/main" id="{75A1D727-1AD7-496E-8EA2-B66ADA3838DB}"/>
+                <a16:creationId xmlns:a16="http://schemas.microsoft.com/office/drawing/2014/main" id="{F92CC754-B556-4685-BD2E-96E826E53596}"/>
               </a:ext>
             </a:extLst>
           </p:cNvPr>
@@ -11846,7 +11938,7 @@
                 <a:ea typeface="Pretendard"/>
                 <a:cs typeface="Pretendard"/>
               </a:rPr>
-              <a:t>타이머를 보이게 두고, 각 팀의 산출물은</a:t>
+              <a:t>타이머를 보이게 두고, 각 팀의</a:t>
             </a:r>
           </a:p>
           <a:p xmlns:a="http://schemas.openxmlformats.org/drawingml/2006/main">
@@ -11869,7 +11961,30 @@
                 <a:ea typeface="Pretendard"/>
                 <a:cs typeface="Pretendard"/>
               </a:rPr>
-              <a:t>다음 단계 장표에 바로 옮겨 적게 합니다.</a:t>
+              <a:t>산출물은 다음 단계 장표에 바로</a:t>
+            </a:r>
+          </a:p>
+          <a:p xmlns:a="http://schemas.openxmlformats.org/drawingml/2006/main">
+            <a:pPr algn="l">
+              <a:defRPr sz="1350" b="0">
+                <a:solidFill>
+                  <a:srgbClr val="4B5563"/>
+                </a:solidFill>
+                <a:latin typeface="Pretendard"/>
+                <a:ea typeface="Pretendard"/>
+                <a:cs typeface="Pretendard"/>
+              </a:defRPr>
+            </a:pPr>
+            <a:r>
+              <a:rPr sz="1350" b="0">
+                <a:solidFill>
+                  <a:srgbClr val="4B5563"/>
+                </a:solidFill>
+                <a:latin typeface="Pretendard"/>
+                <a:ea typeface="Pretendard"/>
+                <a:cs typeface="Pretendard"/>
+              </a:rPr>
+              <a:t>옮겨 적게 합니다.</a:t>
             </a:r>
           </a:p>
         </p:txBody>
@@ -11877,7 +11992,7 @@
     </p:spTree>
     <p:extLst>
       <p:ext uri="{BB962C8B-B14F-4D97-AF65-F5344CB8AC3E}">
-        <p14:creationId xmlns:p14="http://schemas.microsoft.com/office/powerpoint/2010/main" val="1830510455"/>
+        <p14:creationId xmlns:p14="http://schemas.microsoft.com/office/powerpoint/2010/main" val="1407840968"/>
       </p:ext>
     </p:extLst>
   </p:cSld>
@@ -11908,7 +12023,7 @@
           <p:cNvPr id="1" name="decor-ring-1">
             <a:extLst xmlns:a="http://schemas.openxmlformats.org/drawingml/2006/main">
               <a:ext uri="{FF2B5EF4-FFF2-40B4-BE49-F238E27FC236}">
-                <a16:creationId xmlns:a16="http://schemas.microsoft.com/office/drawing/2014/main" id="{2D0F1CEC-334D-4E71-AD33-5466A4B8BB4C}"/>
+                <a16:creationId xmlns:a16="http://schemas.microsoft.com/office/drawing/2014/main" id="{9638DEE8-303E-4ADE-B09D-FF3998F9554B}"/>
               </a:ext>
             </a:extLst>
           </p:cNvPr>
@@ -11939,7 +12054,7 @@
           <p:cNvPr id="2" name="decor-ring-2">
             <a:extLst xmlns:a="http://schemas.openxmlformats.org/drawingml/2006/main">
               <a:ext uri="{FF2B5EF4-FFF2-40B4-BE49-F238E27FC236}">
-                <a16:creationId xmlns:a16="http://schemas.microsoft.com/office/drawing/2014/main" id="{4DFEA838-6EBA-4093-AA5A-76930BCD7533}"/>
+                <a16:creationId xmlns:a16="http://schemas.microsoft.com/office/drawing/2014/main" id="{A0BE7FA3-B96D-40D3-BF08-66A3C18BF5E0}"/>
               </a:ext>
             </a:extLst>
           </p:cNvPr>
@@ -11970,7 +12085,7 @@
           <p:cNvPr id="3" name="decor-orb-1">
             <a:extLst xmlns:a="http://schemas.openxmlformats.org/drawingml/2006/main">
               <a:ext uri="{FF2B5EF4-FFF2-40B4-BE49-F238E27FC236}">
-                <a16:creationId xmlns:a16="http://schemas.microsoft.com/office/drawing/2014/main" id="{F148E2B6-7CE1-40F8-B1E3-FCB2B0EC25B1}"/>
+                <a16:creationId xmlns:a16="http://schemas.microsoft.com/office/drawing/2014/main" id="{42494CB8-790E-4FF6-A8E5-ED4844CAA0AD}"/>
               </a:ext>
             </a:extLst>
           </p:cNvPr>
@@ -12001,7 +12116,7 @@
           <p:cNvPr id="4" name="decor-orb-2">
             <a:extLst xmlns:a="http://schemas.openxmlformats.org/drawingml/2006/main">
               <a:ext uri="{FF2B5EF4-FFF2-40B4-BE49-F238E27FC236}">
-                <a16:creationId xmlns:a16="http://schemas.microsoft.com/office/drawing/2014/main" id="{3C2EC389-9BC0-4A79-8BD0-EA035223C1DE}"/>
+                <a16:creationId xmlns:a16="http://schemas.microsoft.com/office/drawing/2014/main" id="{F218620C-2B81-42ED-B254-9518DC0324D6}"/>
               </a:ext>
             </a:extLst>
           </p:cNvPr>
@@ -12032,7 +12147,7 @@
           <p:cNvPr id="5" name="title-bar">
             <a:extLst xmlns:a="http://schemas.openxmlformats.org/drawingml/2006/main">
               <a:ext uri="{FF2B5EF4-FFF2-40B4-BE49-F238E27FC236}">
-                <a16:creationId xmlns:a16="http://schemas.microsoft.com/office/drawing/2014/main" id="{89D35221-2557-47F8-BC4B-CF44B71338AD}"/>
+                <a16:creationId xmlns:a16="http://schemas.microsoft.com/office/drawing/2014/main" id="{50119650-AB5F-4FB9-B31B-3B47367D74A4}"/>
               </a:ext>
             </a:extLst>
           </p:cNvPr>
@@ -12063,7 +12178,7 @@
           <p:cNvPr id="6" name="kicker">
             <a:extLst xmlns:a="http://schemas.openxmlformats.org/drawingml/2006/main">
               <a:ext uri="{FF2B5EF4-FFF2-40B4-BE49-F238E27FC236}">
-                <a16:creationId xmlns:a16="http://schemas.microsoft.com/office/drawing/2014/main" id="{D7D3FF4E-1FFE-4FC7-82DB-23DB03739AD5}"/>
+                <a16:creationId xmlns:a16="http://schemas.microsoft.com/office/drawing/2014/main" id="{3331BA52-5452-48D4-A527-02F8C0AF3CA2}"/>
               </a:ext>
             </a:extLst>
           </p:cNvPr>
@@ -12119,7 +12234,7 @@
           <p:cNvPr id="7" name="title">
             <a:extLst xmlns:a="http://schemas.openxmlformats.org/drawingml/2006/main">
               <a:ext uri="{FF2B5EF4-FFF2-40B4-BE49-F238E27FC236}">
-                <a16:creationId xmlns:a16="http://schemas.microsoft.com/office/drawing/2014/main" id="{A3E60B2B-4E48-49FE-BBA6-993A461AF3C4}"/>
+                <a16:creationId xmlns:a16="http://schemas.microsoft.com/office/drawing/2014/main" id="{AEB4E49F-C31F-4A9B-BBDA-C57872C14E13}"/>
               </a:ext>
             </a:extLst>
           </p:cNvPr>
@@ -12175,7 +12290,7 @@
           <p:cNvPr id="8" name="subtitle">
             <a:extLst xmlns:a="http://schemas.openxmlformats.org/drawingml/2006/main">
               <a:ext uri="{FF2B5EF4-FFF2-40B4-BE49-F238E27FC236}">
-                <a16:creationId xmlns:a16="http://schemas.microsoft.com/office/drawing/2014/main" id="{94CB1118-B99C-4249-93DE-6F56F754B93D}"/>
+                <a16:creationId xmlns:a16="http://schemas.microsoft.com/office/drawing/2014/main" id="{75049CC5-DE1C-4ECC-925A-72019C5A86DA}"/>
               </a:ext>
             </a:extLst>
           </p:cNvPr>
@@ -12235,7 +12350,7 @@
           <p:nvPr/>
         </p:nvPicPr>
         <p:blipFill>
-          <a:blip xmlns:r="http://schemas.openxmlformats.org/officeDocument/2006/relationships" xmlns:a="http://schemas.openxmlformats.org/drawingml/2006/main" r:embed="R4db4400e7bad42f2"/>
+          <a:blip xmlns:r="http://schemas.openxmlformats.org/officeDocument/2006/relationships" xmlns:a="http://schemas.openxmlformats.org/drawingml/2006/main" r:embed="R0ce4a7ba763d49c1"/>
           <a:stretch xmlns:a="http://schemas.openxmlformats.org/drawingml/2006/main"/>
         </p:blipFill>
         <p:spPr>
@@ -12253,7 +12368,7 @@
           <p:cNvPr id="10" name="footer-number">
             <a:extLst xmlns:a="http://schemas.openxmlformats.org/drawingml/2006/main">
               <a:ext uri="{FF2B5EF4-FFF2-40B4-BE49-F238E27FC236}">
-                <a16:creationId xmlns:a16="http://schemas.microsoft.com/office/drawing/2014/main" id="{3A9D62AE-6340-4DD6-AB65-BF86CE106548}"/>
+                <a16:creationId xmlns:a16="http://schemas.microsoft.com/office/drawing/2014/main" id="{6830CFE5-908B-4579-81B9-7A2029F913B3}"/>
               </a:ext>
             </a:extLst>
           </p:cNvPr>
@@ -12309,7 +12424,7 @@
           <p:cNvPr id="11" name="field-label">
             <a:extLst xmlns:a="http://schemas.openxmlformats.org/drawingml/2006/main">
               <a:ext uri="{FF2B5EF4-FFF2-40B4-BE49-F238E27FC236}">
-                <a16:creationId xmlns:a16="http://schemas.microsoft.com/office/drawing/2014/main" id="{91814FAA-F6EA-419F-AE60-72032FE07179}"/>
+                <a16:creationId xmlns:a16="http://schemas.microsoft.com/office/drawing/2014/main" id="{9C61D8E5-5281-4A77-9E68-F305EF6B03AC}"/>
               </a:ext>
             </a:extLst>
           </p:cNvPr>
@@ -12365,7 +12480,7 @@
           <p:cNvPr id="12" name="field-업무 문제 한 문장">
             <a:extLst xmlns:a="http://schemas.openxmlformats.org/drawingml/2006/main">
               <a:ext uri="{FF2B5EF4-FFF2-40B4-BE49-F238E27FC236}">
-                <a16:creationId xmlns:a16="http://schemas.microsoft.com/office/drawing/2014/main" id="{CE624EBB-37AB-460F-B918-4972150E1410}"/>
+                <a16:creationId xmlns:a16="http://schemas.microsoft.com/office/drawing/2014/main" id="{5CF7EB32-CAF1-4671-A292-69A1EC1BF166}"/>
               </a:ext>
             </a:extLst>
           </p:cNvPr>
@@ -12400,7 +12515,7 @@
           <p:cNvPr id="13" name="field-hint">
             <a:extLst xmlns:a="http://schemas.openxmlformats.org/drawingml/2006/main">
               <a:ext uri="{FF2B5EF4-FFF2-40B4-BE49-F238E27FC236}">
-                <a16:creationId xmlns:a16="http://schemas.microsoft.com/office/drawing/2014/main" id="{7B5E9CB6-7CA1-454E-849D-2BAC60A65BF2}"/>
+                <a16:creationId xmlns:a16="http://schemas.microsoft.com/office/drawing/2014/main" id="{0E1450D0-A114-4D4A-8C9C-3C4EF2FB45E4}"/>
               </a:ext>
             </a:extLst>
           </p:cNvPr>
@@ -12456,7 +12571,7 @@
           <p:cNvPr id="14" name="field-label">
             <a:extLst xmlns:a="http://schemas.openxmlformats.org/drawingml/2006/main">
               <a:ext uri="{FF2B5EF4-FFF2-40B4-BE49-F238E27FC236}">
-                <a16:creationId xmlns:a16="http://schemas.microsoft.com/office/drawing/2014/main" id="{C375C5E7-CB29-44AF-A05E-CAED2A38545D}"/>
+                <a16:creationId xmlns:a16="http://schemas.microsoft.com/office/drawing/2014/main" id="{04462D67-CEA0-4E11-9417-EA9A2792D10D}"/>
               </a:ext>
             </a:extLst>
           </p:cNvPr>
@@ -12512,7 +12627,7 @@
           <p:cNvPr id="15" name="field-현재 산출물">
             <a:extLst xmlns:a="http://schemas.openxmlformats.org/drawingml/2006/main">
               <a:ext uri="{FF2B5EF4-FFF2-40B4-BE49-F238E27FC236}">
-                <a16:creationId xmlns:a16="http://schemas.microsoft.com/office/drawing/2014/main" id="{A21C0877-5FD0-4D0A-8911-1E364482D5AE}"/>
+                <a16:creationId xmlns:a16="http://schemas.microsoft.com/office/drawing/2014/main" id="{FDDF7CAE-94BC-4314-BD03-6246BF8E9204}"/>
               </a:ext>
             </a:extLst>
           </p:cNvPr>
@@ -12547,7 +12662,7 @@
           <p:cNvPr id="16" name="field-hint">
             <a:extLst xmlns:a="http://schemas.openxmlformats.org/drawingml/2006/main">
               <a:ext uri="{FF2B5EF4-FFF2-40B4-BE49-F238E27FC236}">
-                <a16:creationId xmlns:a16="http://schemas.microsoft.com/office/drawing/2014/main" id="{89FBBB04-1202-45DE-844B-1CE9D14A35B9}"/>
+                <a16:creationId xmlns:a16="http://schemas.microsoft.com/office/drawing/2014/main" id="{96889069-BCFD-4DF9-B497-B7EDC954EF8F}"/>
               </a:ext>
             </a:extLst>
           </p:cNvPr>
@@ -12603,7 +12718,7 @@
           <p:cNvPr id="17" name="field-label">
             <a:extLst xmlns:a="http://schemas.openxmlformats.org/drawingml/2006/main">
               <a:ext uri="{FF2B5EF4-FFF2-40B4-BE49-F238E27FC236}">
-                <a16:creationId xmlns:a16="http://schemas.microsoft.com/office/drawing/2014/main" id="{6DE4B319-9859-45A3-ADB0-4996286457BB}"/>
+                <a16:creationId xmlns:a16="http://schemas.microsoft.com/office/drawing/2014/main" id="{C8F493BC-0090-4162-A136-93E9E6D8A73A}"/>
               </a:ext>
             </a:extLst>
           </p:cNvPr>
@@ -12659,7 +12774,7 @@
           <p:cNvPr id="18" name="field-현재 입력 자료">
             <a:extLst xmlns:a="http://schemas.openxmlformats.org/drawingml/2006/main">
               <a:ext uri="{FF2B5EF4-FFF2-40B4-BE49-F238E27FC236}">
-                <a16:creationId xmlns:a16="http://schemas.microsoft.com/office/drawing/2014/main" id="{60986859-F657-4B78-8BDE-881766399D44}"/>
+                <a16:creationId xmlns:a16="http://schemas.microsoft.com/office/drawing/2014/main" id="{74691AC0-BA80-4222-9D82-73B573886171}"/>
               </a:ext>
             </a:extLst>
           </p:cNvPr>
@@ -12694,7 +12809,7 @@
           <p:cNvPr id="19" name="field-hint">
             <a:extLst xmlns:a="http://schemas.openxmlformats.org/drawingml/2006/main">
               <a:ext uri="{FF2B5EF4-FFF2-40B4-BE49-F238E27FC236}">
-                <a16:creationId xmlns:a16="http://schemas.microsoft.com/office/drawing/2014/main" id="{D4C93668-7DA3-4A01-A0EE-22DAD0345EB4}"/>
+                <a16:creationId xmlns:a16="http://schemas.microsoft.com/office/drawing/2014/main" id="{222FB8C0-F1EA-4752-8158-0505DC66D9EE}"/>
               </a:ext>
             </a:extLst>
           </p:cNvPr>
@@ -12750,7 +12865,7 @@
           <p:cNvPr id="20" name="field-label">
             <a:extLst xmlns:a="http://schemas.openxmlformats.org/drawingml/2006/main">
               <a:ext uri="{FF2B5EF4-FFF2-40B4-BE49-F238E27FC236}">
-                <a16:creationId xmlns:a16="http://schemas.microsoft.com/office/drawing/2014/main" id="{F2FDA7C6-BD84-4EEE-ACBB-284153EE23B7}"/>
+                <a16:creationId xmlns:a16="http://schemas.microsoft.com/office/drawing/2014/main" id="{851F4EC0-B825-4E6F-A1DC-14CEBD40CBE1}"/>
               </a:ext>
             </a:extLst>
           </p:cNvPr>
@@ -12806,7 +12921,7 @@
           <p:cNvPr id="21" name="field-판단 기준">
             <a:extLst xmlns:a="http://schemas.openxmlformats.org/drawingml/2006/main">
               <a:ext uri="{FF2B5EF4-FFF2-40B4-BE49-F238E27FC236}">
-                <a16:creationId xmlns:a16="http://schemas.microsoft.com/office/drawing/2014/main" id="{A2B63BF6-7D31-4038-87D6-065C91AF8026}"/>
+                <a16:creationId xmlns:a16="http://schemas.microsoft.com/office/drawing/2014/main" id="{2D194A85-439B-40C8-9F01-16428C7AF711}"/>
               </a:ext>
             </a:extLst>
           </p:cNvPr>
@@ -12841,7 +12956,7 @@
           <p:cNvPr id="22" name="field-hint">
             <a:extLst xmlns:a="http://schemas.openxmlformats.org/drawingml/2006/main">
               <a:ext uri="{FF2B5EF4-FFF2-40B4-BE49-F238E27FC236}">
-                <a16:creationId xmlns:a16="http://schemas.microsoft.com/office/drawing/2014/main" id="{75962C83-B13B-42CE-B173-DB0BB4A1685D}"/>
+                <a16:creationId xmlns:a16="http://schemas.microsoft.com/office/drawing/2014/main" id="{39357822-313F-472B-81F2-39268E9F7D31}"/>
               </a:ext>
             </a:extLst>
           </p:cNvPr>
@@ -12897,7 +13012,7 @@
           <p:cNvPr id="23" name="field-label">
             <a:extLst xmlns:a="http://schemas.openxmlformats.org/drawingml/2006/main">
               <a:ext uri="{FF2B5EF4-FFF2-40B4-BE49-F238E27FC236}">
-                <a16:creationId xmlns:a16="http://schemas.microsoft.com/office/drawing/2014/main" id="{69220E25-829C-475C-9349-5F864C660EC0}"/>
+                <a16:creationId xmlns:a16="http://schemas.microsoft.com/office/drawing/2014/main" id="{8C947F39-0E9E-40F6-B25B-6876FC5CDEA1}"/>
               </a:ext>
             </a:extLst>
           </p:cNvPr>
@@ -12953,7 +13068,7 @@
           <p:cNvPr id="24" name="field-현재 병목">
             <a:extLst xmlns:a="http://schemas.openxmlformats.org/drawingml/2006/main">
               <a:ext uri="{FF2B5EF4-FFF2-40B4-BE49-F238E27FC236}">
-                <a16:creationId xmlns:a16="http://schemas.microsoft.com/office/drawing/2014/main" id="{7BFE944A-2850-4965-B4F4-A6673EAB4D98}"/>
+                <a16:creationId xmlns:a16="http://schemas.microsoft.com/office/drawing/2014/main" id="{40E85425-0950-4A8E-ACEA-6F24A06BD504}"/>
               </a:ext>
             </a:extLst>
           </p:cNvPr>
@@ -12988,7 +13103,7 @@
           <p:cNvPr id="25" name="field-hint">
             <a:extLst xmlns:a="http://schemas.openxmlformats.org/drawingml/2006/main">
               <a:ext uri="{FF2B5EF4-FFF2-40B4-BE49-F238E27FC236}">
-                <a16:creationId xmlns:a16="http://schemas.microsoft.com/office/drawing/2014/main" id="{2321B7E4-CC94-40FD-9BB9-1B5E15B72EC6}"/>
+                <a16:creationId xmlns:a16="http://schemas.microsoft.com/office/drawing/2014/main" id="{8493E1BC-66C6-4A4C-8F81-A4F2FD85421C}"/>
               </a:ext>
             </a:extLst>
           </p:cNvPr>
@@ -13034,7 +13149,30 @@
                 <a:ea typeface="Pretendard"/>
                 <a:cs typeface="Pretendard"/>
               </a:rPr>
-              <a:t>시간, 정확도, 누락, 반복, 검색, 승인 중 어디가 문제인가?</a:t>
+              <a:t>시간, 정확도, 누락, 반복, 검색, 승인 중</a:t>
+            </a:r>
+          </a:p>
+          <a:p xmlns:a="http://schemas.openxmlformats.org/drawingml/2006/main">
+            <a:pPr algn="l">
+              <a:defRPr sz="1125" b="0">
+                <a:solidFill>
+                  <a:srgbClr val="4B5563"/>
+                </a:solidFill>
+                <a:latin typeface="Pretendard"/>
+                <a:ea typeface="Pretendard"/>
+                <a:cs typeface="Pretendard"/>
+              </a:defRPr>
+            </a:pPr>
+            <a:r>
+              <a:rPr sz="1125" b="0">
+                <a:solidFill>
+                  <a:srgbClr val="4B5563"/>
+                </a:solidFill>
+                <a:latin typeface="Pretendard"/>
+                <a:ea typeface="Pretendard"/>
+                <a:cs typeface="Pretendard"/>
+              </a:rPr>
+              <a:t>어디가 문제인가?</a:t>
             </a:r>
           </a:p>
         </p:txBody>
@@ -13042,7 +13180,7 @@
     </p:spTree>
     <p:extLst>
       <p:ext uri="{BB962C8B-B14F-4D97-AF65-F5344CB8AC3E}">
-        <p14:creationId xmlns:p14="http://schemas.microsoft.com/office/powerpoint/2010/main" val="687969765"/>
+        <p14:creationId xmlns:p14="http://schemas.microsoft.com/office/powerpoint/2010/main" val="985015601"/>
       </p:ext>
     </p:extLst>
   </p:cSld>
@@ -13073,7 +13211,7 @@
           <p:cNvPr id="1" name="decor-ring-1">
             <a:extLst xmlns:a="http://schemas.openxmlformats.org/drawingml/2006/main">
               <a:ext uri="{FF2B5EF4-FFF2-40B4-BE49-F238E27FC236}">
-                <a16:creationId xmlns:a16="http://schemas.microsoft.com/office/drawing/2014/main" id="{4446EA1A-590D-44CE-8731-AE023C1EDCC5}"/>
+                <a16:creationId xmlns:a16="http://schemas.microsoft.com/office/drawing/2014/main" id="{AA2B12A8-8FAD-414E-A459-6F5E64A28E82}"/>
               </a:ext>
             </a:extLst>
           </p:cNvPr>
@@ -13104,7 +13242,7 @@
           <p:cNvPr id="2" name="decor-ring-2">
             <a:extLst xmlns:a="http://schemas.openxmlformats.org/drawingml/2006/main">
               <a:ext uri="{FF2B5EF4-FFF2-40B4-BE49-F238E27FC236}">
-                <a16:creationId xmlns:a16="http://schemas.microsoft.com/office/drawing/2014/main" id="{64C8A82A-515D-478A-A571-8E081274C6DA}"/>
+                <a16:creationId xmlns:a16="http://schemas.microsoft.com/office/drawing/2014/main" id="{59306B57-E298-4348-AB54-5EA5BA0B229A}"/>
               </a:ext>
             </a:extLst>
           </p:cNvPr>
@@ -13135,7 +13273,7 @@
           <p:cNvPr id="3" name="decor-orb-1">
             <a:extLst xmlns:a="http://schemas.openxmlformats.org/drawingml/2006/main">
               <a:ext uri="{FF2B5EF4-FFF2-40B4-BE49-F238E27FC236}">
-                <a16:creationId xmlns:a16="http://schemas.microsoft.com/office/drawing/2014/main" id="{7A104220-0F0D-4955-BE21-8F22D2FD83C7}"/>
+                <a16:creationId xmlns:a16="http://schemas.microsoft.com/office/drawing/2014/main" id="{61DB6880-4D0E-4687-82C9-4BD90C20D2B6}"/>
               </a:ext>
             </a:extLst>
           </p:cNvPr>
@@ -13166,7 +13304,7 @@
           <p:cNvPr id="4" name="decor-orb-2">
             <a:extLst xmlns:a="http://schemas.openxmlformats.org/drawingml/2006/main">
               <a:ext uri="{FF2B5EF4-FFF2-40B4-BE49-F238E27FC236}">
-                <a16:creationId xmlns:a16="http://schemas.microsoft.com/office/drawing/2014/main" id="{A4041DDD-DC64-4D16-8367-0F2124C8DC3D}"/>
+                <a16:creationId xmlns:a16="http://schemas.microsoft.com/office/drawing/2014/main" id="{3CD87F62-E3D9-4945-9DE7-584AF31E50CE}"/>
               </a:ext>
             </a:extLst>
           </p:cNvPr>
@@ -13197,7 +13335,7 @@
           <p:cNvPr id="5" name="title-bar">
             <a:extLst xmlns:a="http://schemas.openxmlformats.org/drawingml/2006/main">
               <a:ext uri="{FF2B5EF4-FFF2-40B4-BE49-F238E27FC236}">
-                <a16:creationId xmlns:a16="http://schemas.microsoft.com/office/drawing/2014/main" id="{B3CB2BDE-4E99-4F5F-8243-D3AF9D34C239}"/>
+                <a16:creationId xmlns:a16="http://schemas.microsoft.com/office/drawing/2014/main" id="{EFF86F6A-BABC-4573-9397-4BF6DF30F851}"/>
               </a:ext>
             </a:extLst>
           </p:cNvPr>
@@ -13228,7 +13366,7 @@
           <p:cNvPr id="6" name="kicker">
             <a:extLst xmlns:a="http://schemas.openxmlformats.org/drawingml/2006/main">
               <a:ext uri="{FF2B5EF4-FFF2-40B4-BE49-F238E27FC236}">
-                <a16:creationId xmlns:a16="http://schemas.microsoft.com/office/drawing/2014/main" id="{63E15AA9-A832-49DB-AF40-53D8585B4158}"/>
+                <a16:creationId xmlns:a16="http://schemas.microsoft.com/office/drawing/2014/main" id="{8C99BDCA-374C-4C5C-B080-EA07DA5C6366}"/>
               </a:ext>
             </a:extLst>
           </p:cNvPr>
@@ -13284,7 +13422,7 @@
           <p:cNvPr id="7" name="title">
             <a:extLst xmlns:a="http://schemas.openxmlformats.org/drawingml/2006/main">
               <a:ext uri="{FF2B5EF4-FFF2-40B4-BE49-F238E27FC236}">
-                <a16:creationId xmlns:a16="http://schemas.microsoft.com/office/drawing/2014/main" id="{4A03B0C9-1084-4AC9-968B-D77B936C0980}"/>
+                <a16:creationId xmlns:a16="http://schemas.microsoft.com/office/drawing/2014/main" id="{9840956F-2605-47B1-965B-829D78104DDB}"/>
               </a:ext>
             </a:extLst>
           </p:cNvPr>
@@ -13340,7 +13478,7 @@
           <p:cNvPr id="8" name="subtitle">
             <a:extLst xmlns:a="http://schemas.openxmlformats.org/drawingml/2006/main">
               <a:ext uri="{FF2B5EF4-FFF2-40B4-BE49-F238E27FC236}">
-                <a16:creationId xmlns:a16="http://schemas.microsoft.com/office/drawing/2014/main" id="{A2698CA1-6FB6-48B3-9009-3712D7B4EF49}"/>
+                <a16:creationId xmlns:a16="http://schemas.microsoft.com/office/drawing/2014/main" id="{867FB269-25B4-4A63-BC01-183648A8F0DC}"/>
               </a:ext>
             </a:extLst>
           </p:cNvPr>
@@ -13400,7 +13538,7 @@
           <p:nvPr/>
         </p:nvPicPr>
         <p:blipFill>
-          <a:blip xmlns:r="http://schemas.openxmlformats.org/officeDocument/2006/relationships" xmlns:a="http://schemas.openxmlformats.org/drawingml/2006/main" r:embed="R21906a9cbe1e4b35"/>
+          <a:blip xmlns:r="http://schemas.openxmlformats.org/officeDocument/2006/relationships" xmlns:a="http://schemas.openxmlformats.org/drawingml/2006/main" r:embed="Rcaa1eee98b694b31"/>
           <a:stretch xmlns:a="http://schemas.openxmlformats.org/drawingml/2006/main"/>
         </p:blipFill>
         <p:spPr>
@@ -13418,7 +13556,7 @@
           <p:cNvPr id="10" name="footer-number">
             <a:extLst xmlns:a="http://schemas.openxmlformats.org/drawingml/2006/main">
               <a:ext uri="{FF2B5EF4-FFF2-40B4-BE49-F238E27FC236}">
-                <a16:creationId xmlns:a16="http://schemas.microsoft.com/office/drawing/2014/main" id="{0B8A003D-E8AB-4BD5-B93F-7B4ACB2F63DF}"/>
+                <a16:creationId xmlns:a16="http://schemas.microsoft.com/office/drawing/2014/main" id="{C0FE81BD-5268-40AA-AA89-166D099244A5}"/>
               </a:ext>
             </a:extLst>
           </p:cNvPr>
@@ -13474,7 +13612,7 @@
           <p:cNvPr id="11" name="card-진행 방법">
             <a:extLst xmlns:a="http://schemas.openxmlformats.org/drawingml/2006/main">
               <a:ext uri="{FF2B5EF4-FFF2-40B4-BE49-F238E27FC236}">
-                <a16:creationId xmlns:a16="http://schemas.microsoft.com/office/drawing/2014/main" id="{F483BCCB-D2E3-46F3-96DC-6DACA8515CAE}"/>
+                <a16:creationId xmlns:a16="http://schemas.microsoft.com/office/drawing/2014/main" id="{322782BD-A97B-4F12-A576-41C144A27210}"/>
               </a:ext>
             </a:extLst>
           </p:cNvPr>
@@ -13515,7 +13653,7 @@
           <p:cNvPr id="12" name="card-accent">
             <a:extLst xmlns:a="http://schemas.openxmlformats.org/drawingml/2006/main">
               <a:ext uri="{FF2B5EF4-FFF2-40B4-BE49-F238E27FC236}">
-                <a16:creationId xmlns:a16="http://schemas.microsoft.com/office/drawing/2014/main" id="{FF6132AE-799B-4C3C-9C7F-D422DF3D4320}"/>
+                <a16:creationId xmlns:a16="http://schemas.microsoft.com/office/drawing/2014/main" id="{11E585E8-873C-4072-A33C-BBCA439C4E02}"/>
               </a:ext>
             </a:extLst>
           </p:cNvPr>
@@ -13546,7 +13684,7 @@
           <p:cNvPr id="13" name="card-label">
             <a:extLst xmlns:a="http://schemas.openxmlformats.org/drawingml/2006/main">
               <a:ext uri="{FF2B5EF4-FFF2-40B4-BE49-F238E27FC236}">
-                <a16:creationId xmlns:a16="http://schemas.microsoft.com/office/drawing/2014/main" id="{E6610C18-BCA4-48C0-9EF0-FACE1AD01B6B}"/>
+                <a16:creationId xmlns:a16="http://schemas.microsoft.com/office/drawing/2014/main" id="{A90394DE-2A7E-4AC8-B0E6-DB85BAF512BA}"/>
               </a:ext>
             </a:extLst>
           </p:cNvPr>
@@ -13602,7 +13740,7 @@
           <p:cNvPr id="14" name="card-title">
             <a:extLst xmlns:a="http://schemas.openxmlformats.org/drawingml/2006/main">
               <a:ext uri="{FF2B5EF4-FFF2-40B4-BE49-F238E27FC236}">
-                <a16:creationId xmlns:a16="http://schemas.microsoft.com/office/drawing/2014/main" id="{270262F5-F70D-4689-8876-16D3BCB44C4F}"/>
+                <a16:creationId xmlns:a16="http://schemas.microsoft.com/office/drawing/2014/main" id="{B4305C7D-4AE3-4617-AE45-7A96AC0CD73E}"/>
               </a:ext>
             </a:extLst>
           </p:cNvPr>
@@ -13658,7 +13796,7 @@
           <p:cNvPr id="15" name="card-body">
             <a:extLst xmlns:a="http://schemas.openxmlformats.org/drawingml/2006/main">
               <a:ext uri="{FF2B5EF4-FFF2-40B4-BE49-F238E27FC236}">
-                <a16:creationId xmlns:a16="http://schemas.microsoft.com/office/drawing/2014/main" id="{279E7BC3-B863-4362-B0AD-8BBE971E72E2}"/>
+                <a16:creationId xmlns:a16="http://schemas.microsoft.com/office/drawing/2014/main" id="{49CCEB41-0429-4401-9605-AD6796CF8429}"/>
               </a:ext>
             </a:extLst>
           </p:cNvPr>
@@ -13704,7 +13842,7 @@
                 <a:ea typeface="Pretendard"/>
                 <a:cs typeface="Pretendard"/>
               </a:rPr>
-              <a:t>AI 역할 선택 → 사용 금지 자료 표시 →</a:t>
+              <a:t>AI 역할 선택 → 사용 금지 자료 표시</a:t>
             </a:r>
           </a:p>
           <a:p xmlns:a="http://schemas.openxmlformats.org/drawingml/2006/main">
@@ -13727,7 +13865,7 @@
                 <a:ea typeface="Pretendard"/>
                 <a:cs typeface="Pretendard"/>
               </a:rPr>
-              <a:t>품질·보안·승인 기준 작성</a:t>
+              <a:t>→ 품질·보안·승인 기준 작성</a:t>
             </a:r>
           </a:p>
         </p:txBody>
@@ -13737,7 +13875,7 @@
           <p:cNvPr id="16" name="card-결과물">
             <a:extLst xmlns:a="http://schemas.openxmlformats.org/drawingml/2006/main">
               <a:ext uri="{FF2B5EF4-FFF2-40B4-BE49-F238E27FC236}">
-                <a16:creationId xmlns:a16="http://schemas.microsoft.com/office/drawing/2014/main" id="{606AF87B-7D7C-44A8-9AEA-20A5320F77B2}"/>
+                <a16:creationId xmlns:a16="http://schemas.microsoft.com/office/drawing/2014/main" id="{AE6889D8-4301-4E07-A0DB-E2E49FB40AC9}"/>
               </a:ext>
             </a:extLst>
           </p:cNvPr>
@@ -13778,7 +13916,7 @@
           <p:cNvPr id="17" name="card-accent">
             <a:extLst xmlns:a="http://schemas.openxmlformats.org/drawingml/2006/main">
               <a:ext uri="{FF2B5EF4-FFF2-40B4-BE49-F238E27FC236}">
-                <a16:creationId xmlns:a16="http://schemas.microsoft.com/office/drawing/2014/main" id="{2B524A98-C3DA-4323-AB0A-A0978AE8BDB8}"/>
+                <a16:creationId xmlns:a16="http://schemas.microsoft.com/office/drawing/2014/main" id="{997FE4B2-91C6-4BE6-89BB-972FC5B913C5}"/>
               </a:ext>
             </a:extLst>
           </p:cNvPr>
@@ -13809,7 +13947,7 @@
           <p:cNvPr id="18" name="card-label">
             <a:extLst xmlns:a="http://schemas.openxmlformats.org/drawingml/2006/main">
               <a:ext uri="{FF2B5EF4-FFF2-40B4-BE49-F238E27FC236}">
-                <a16:creationId xmlns:a16="http://schemas.microsoft.com/office/drawing/2014/main" id="{83513040-96F3-46E8-A176-FB9656CD9C87}"/>
+                <a16:creationId xmlns:a16="http://schemas.microsoft.com/office/drawing/2014/main" id="{40A2B640-EDA1-4FCB-AF1E-AE61EC89FB1B}"/>
               </a:ext>
             </a:extLst>
           </p:cNvPr>
@@ -13865,7 +14003,7 @@
           <p:cNvPr id="19" name="card-title">
             <a:extLst xmlns:a="http://schemas.openxmlformats.org/drawingml/2006/main">
               <a:ext uri="{FF2B5EF4-FFF2-40B4-BE49-F238E27FC236}">
-                <a16:creationId xmlns:a16="http://schemas.microsoft.com/office/drawing/2014/main" id="{C07B2E80-3482-4C00-BE64-38353396ED67}"/>
+                <a16:creationId xmlns:a16="http://schemas.microsoft.com/office/drawing/2014/main" id="{776184EF-8879-490C-88EA-2AD437BCBD47}"/>
               </a:ext>
             </a:extLst>
           </p:cNvPr>
@@ -13921,7 +14059,7 @@
           <p:cNvPr id="20" name="card-body">
             <a:extLst xmlns:a="http://schemas.openxmlformats.org/drawingml/2006/main">
               <a:ext uri="{FF2B5EF4-FFF2-40B4-BE49-F238E27FC236}">
-                <a16:creationId xmlns:a16="http://schemas.microsoft.com/office/drawing/2014/main" id="{28EAB84A-0F15-41FC-8F62-63A9FBB82127}"/>
+                <a16:creationId xmlns:a16="http://schemas.microsoft.com/office/drawing/2014/main" id="{D189EFDD-FAB3-4F9F-9DA9-BD25E271A4AC}"/>
               </a:ext>
             </a:extLst>
           </p:cNvPr>
@@ -13977,7 +14115,7 @@
           <p:cNvPr id="21" name="card-운영 팁">
             <a:extLst xmlns:a="http://schemas.openxmlformats.org/drawingml/2006/main">
               <a:ext uri="{FF2B5EF4-FFF2-40B4-BE49-F238E27FC236}">
-                <a16:creationId xmlns:a16="http://schemas.microsoft.com/office/drawing/2014/main" id="{C8C46E92-C368-4CB2-9343-182D27356E21}"/>
+                <a16:creationId xmlns:a16="http://schemas.microsoft.com/office/drawing/2014/main" id="{21255FBB-8686-4DFC-B490-98BD3D2FE718}"/>
               </a:ext>
             </a:extLst>
           </p:cNvPr>
@@ -14018,7 +14156,7 @@
           <p:cNvPr id="22" name="card-accent">
             <a:extLst xmlns:a="http://schemas.openxmlformats.org/drawingml/2006/main">
               <a:ext uri="{FF2B5EF4-FFF2-40B4-BE49-F238E27FC236}">
-                <a16:creationId xmlns:a16="http://schemas.microsoft.com/office/drawing/2014/main" id="{D54BEAA3-8271-43B1-A840-9F4AFE1479D9}"/>
+                <a16:creationId xmlns:a16="http://schemas.microsoft.com/office/drawing/2014/main" id="{CA232424-0DCF-471B-B637-E79560751BCE}"/>
               </a:ext>
             </a:extLst>
           </p:cNvPr>
@@ -14049,7 +14187,7 @@
           <p:cNvPr id="23" name="card-label">
             <a:extLst xmlns:a="http://schemas.openxmlformats.org/drawingml/2006/main">
               <a:ext uri="{FF2B5EF4-FFF2-40B4-BE49-F238E27FC236}">
-                <a16:creationId xmlns:a16="http://schemas.microsoft.com/office/drawing/2014/main" id="{6B84F04E-AC45-40C3-B17E-40BA99BB2A23}"/>
+                <a16:creationId xmlns:a16="http://schemas.microsoft.com/office/drawing/2014/main" id="{3F547C31-B91E-4568-81F6-8D4FC69739F3}"/>
               </a:ext>
             </a:extLst>
           </p:cNvPr>
@@ -14105,7 +14243,7 @@
           <p:cNvPr id="24" name="card-title">
             <a:extLst xmlns:a="http://schemas.openxmlformats.org/drawingml/2006/main">
               <a:ext uri="{FF2B5EF4-FFF2-40B4-BE49-F238E27FC236}">
-                <a16:creationId xmlns:a16="http://schemas.microsoft.com/office/drawing/2014/main" id="{072B48EC-DC67-47A2-AFBA-3024D224551F}"/>
+                <a16:creationId xmlns:a16="http://schemas.microsoft.com/office/drawing/2014/main" id="{A9C26B79-3DE4-4237-A2E9-A2F5E62A19D0}"/>
               </a:ext>
             </a:extLst>
           </p:cNvPr>
@@ -14161,7 +14299,7 @@
           <p:cNvPr id="25" name="card-body">
             <a:extLst xmlns:a="http://schemas.openxmlformats.org/drawingml/2006/main">
               <a:ext uri="{FF2B5EF4-FFF2-40B4-BE49-F238E27FC236}">
-                <a16:creationId xmlns:a16="http://schemas.microsoft.com/office/drawing/2014/main" id="{BEC9245F-EB95-45B2-9577-7FC77CF648A7}"/>
+                <a16:creationId xmlns:a16="http://schemas.microsoft.com/office/drawing/2014/main" id="{52CE43F1-555E-4159-AF9E-37C21E931072}"/>
               </a:ext>
             </a:extLst>
           </p:cNvPr>
@@ -14207,7 +14345,7 @@
                 <a:ea typeface="Pretendard"/>
                 <a:cs typeface="Pretendard"/>
               </a:rPr>
-              <a:t>타이머를 보이게 두고, 각 팀의 산출물은</a:t>
+              <a:t>타이머를 보이게 두고, 각 팀의</a:t>
             </a:r>
           </a:p>
           <a:p xmlns:a="http://schemas.openxmlformats.org/drawingml/2006/main">
@@ -14230,7 +14368,30 @@
                 <a:ea typeface="Pretendard"/>
                 <a:cs typeface="Pretendard"/>
               </a:rPr>
-              <a:t>다음 단계 장표에 바로 옮겨 적게 합니다.</a:t>
+              <a:t>산출물은 다음 단계 장표에 바로</a:t>
+            </a:r>
+          </a:p>
+          <a:p xmlns:a="http://schemas.openxmlformats.org/drawingml/2006/main">
+            <a:pPr algn="l">
+              <a:defRPr sz="1350" b="0">
+                <a:solidFill>
+                  <a:srgbClr val="4B5563"/>
+                </a:solidFill>
+                <a:latin typeface="Pretendard"/>
+                <a:ea typeface="Pretendard"/>
+                <a:cs typeface="Pretendard"/>
+              </a:defRPr>
+            </a:pPr>
+            <a:r>
+              <a:rPr sz="1350" b="0">
+                <a:solidFill>
+                  <a:srgbClr val="4B5563"/>
+                </a:solidFill>
+                <a:latin typeface="Pretendard"/>
+                <a:ea typeface="Pretendard"/>
+                <a:cs typeface="Pretendard"/>
+              </a:rPr>
+              <a:t>옮겨 적게 합니다.</a:t>
             </a:r>
           </a:p>
         </p:txBody>
@@ -14238,7 +14399,7 @@
     </p:spTree>
     <p:extLst>
       <p:ext uri="{BB962C8B-B14F-4D97-AF65-F5344CB8AC3E}">
-        <p14:creationId xmlns:p14="http://schemas.microsoft.com/office/powerpoint/2010/main" val="114563979"/>
+        <p14:creationId xmlns:p14="http://schemas.microsoft.com/office/powerpoint/2010/main" val="1554676350"/>
       </p:ext>
     </p:extLst>
   </p:cSld>
@@ -14269,7 +14430,7 @@
           <p:cNvPr id="1" name="decor-ring-1">
             <a:extLst xmlns:a="http://schemas.openxmlformats.org/drawingml/2006/main">
               <a:ext uri="{FF2B5EF4-FFF2-40B4-BE49-F238E27FC236}">
-                <a16:creationId xmlns:a16="http://schemas.microsoft.com/office/drawing/2014/main" id="{6184E789-9501-4598-A8E2-DA710F68EE5F}"/>
+                <a16:creationId xmlns:a16="http://schemas.microsoft.com/office/drawing/2014/main" id="{7E430447-6B8F-4434-B1F5-FF2534DEDE97}"/>
               </a:ext>
             </a:extLst>
           </p:cNvPr>
@@ -14300,7 +14461,7 @@
           <p:cNvPr id="2" name="decor-ring-2">
             <a:extLst xmlns:a="http://schemas.openxmlformats.org/drawingml/2006/main">
               <a:ext uri="{FF2B5EF4-FFF2-40B4-BE49-F238E27FC236}">
-                <a16:creationId xmlns:a16="http://schemas.microsoft.com/office/drawing/2014/main" id="{825773CB-AA77-44B2-8840-5C6A0A75BF24}"/>
+                <a16:creationId xmlns:a16="http://schemas.microsoft.com/office/drawing/2014/main" id="{8064C5D9-7871-4CED-8E51-1C7C861E4A08}"/>
               </a:ext>
             </a:extLst>
           </p:cNvPr>
@@ -14331,7 +14492,7 @@
           <p:cNvPr id="3" name="decor-orb-1">
             <a:extLst xmlns:a="http://schemas.openxmlformats.org/drawingml/2006/main">
               <a:ext uri="{FF2B5EF4-FFF2-40B4-BE49-F238E27FC236}">
-                <a16:creationId xmlns:a16="http://schemas.microsoft.com/office/drawing/2014/main" id="{B3D9D2B6-78CF-4711-902B-A01CB8A94ED5}"/>
+                <a16:creationId xmlns:a16="http://schemas.microsoft.com/office/drawing/2014/main" id="{B98F8356-1FCA-48F7-86DE-57AD9092EFD8}"/>
               </a:ext>
             </a:extLst>
           </p:cNvPr>
@@ -14362,7 +14523,7 @@
           <p:cNvPr id="4" name="decor-orb-2">
             <a:extLst xmlns:a="http://schemas.openxmlformats.org/drawingml/2006/main">
               <a:ext uri="{FF2B5EF4-FFF2-40B4-BE49-F238E27FC236}">
-                <a16:creationId xmlns:a16="http://schemas.microsoft.com/office/drawing/2014/main" id="{89E737B4-B248-45D9-83A4-7ACA4604E4A1}"/>
+                <a16:creationId xmlns:a16="http://schemas.microsoft.com/office/drawing/2014/main" id="{4839D0DD-7E4B-4F2B-B846-C4A1AC717399}"/>
               </a:ext>
             </a:extLst>
           </p:cNvPr>
@@ -14393,7 +14554,7 @@
           <p:cNvPr id="5" name="title-bar">
             <a:extLst xmlns:a="http://schemas.openxmlformats.org/drawingml/2006/main">
               <a:ext uri="{FF2B5EF4-FFF2-40B4-BE49-F238E27FC236}">
-                <a16:creationId xmlns:a16="http://schemas.microsoft.com/office/drawing/2014/main" id="{A2F08093-9A55-4A13-BA31-D60185CBFFBA}"/>
+                <a16:creationId xmlns:a16="http://schemas.microsoft.com/office/drawing/2014/main" id="{3A7166AE-C675-4CA6-8CC5-013CF610252C}"/>
               </a:ext>
             </a:extLst>
           </p:cNvPr>
@@ -14424,7 +14585,7 @@
           <p:cNvPr id="6" name="kicker">
             <a:extLst xmlns:a="http://schemas.openxmlformats.org/drawingml/2006/main">
               <a:ext uri="{FF2B5EF4-FFF2-40B4-BE49-F238E27FC236}">
-                <a16:creationId xmlns:a16="http://schemas.microsoft.com/office/drawing/2014/main" id="{EB536556-CE98-4E53-876A-04F338207F83}"/>
+                <a16:creationId xmlns:a16="http://schemas.microsoft.com/office/drawing/2014/main" id="{23F71D76-27D3-4B65-81C1-B8E8652E1B30}"/>
               </a:ext>
             </a:extLst>
           </p:cNvPr>
@@ -14480,7 +14641,7 @@
           <p:cNvPr id="7" name="title">
             <a:extLst xmlns:a="http://schemas.openxmlformats.org/drawingml/2006/main">
               <a:ext uri="{FF2B5EF4-FFF2-40B4-BE49-F238E27FC236}">
-                <a16:creationId xmlns:a16="http://schemas.microsoft.com/office/drawing/2014/main" id="{84310C75-C7C0-43E3-9F34-0295A452CD9A}"/>
+                <a16:creationId xmlns:a16="http://schemas.microsoft.com/office/drawing/2014/main" id="{72C386A5-E71A-4A48-9156-BB07914DCE81}"/>
               </a:ext>
             </a:extLst>
           </p:cNvPr>
@@ -14536,7 +14697,7 @@
           <p:cNvPr id="8" name="subtitle">
             <a:extLst xmlns:a="http://schemas.openxmlformats.org/drawingml/2006/main">
               <a:ext uri="{FF2B5EF4-FFF2-40B4-BE49-F238E27FC236}">
-                <a16:creationId xmlns:a16="http://schemas.microsoft.com/office/drawing/2014/main" id="{E4C3C948-9BB4-49EC-B642-0CEDEE51A49F}"/>
+                <a16:creationId xmlns:a16="http://schemas.microsoft.com/office/drawing/2014/main" id="{90B9126A-12B4-4A9A-AB7F-72CB1CB78D55}"/>
               </a:ext>
             </a:extLst>
           </p:cNvPr>
@@ -14596,7 +14757,7 @@
           <p:nvPr/>
         </p:nvPicPr>
         <p:blipFill>
-          <a:blip xmlns:r="http://schemas.openxmlformats.org/officeDocument/2006/relationships" xmlns:a="http://schemas.openxmlformats.org/drawingml/2006/main" r:embed="Re9b1b15edef44dba"/>
+          <a:blip xmlns:r="http://schemas.openxmlformats.org/officeDocument/2006/relationships" xmlns:a="http://schemas.openxmlformats.org/drawingml/2006/main" r:embed="R0df37eb3844c49ab"/>
           <a:stretch xmlns:a="http://schemas.openxmlformats.org/drawingml/2006/main"/>
         </p:blipFill>
         <p:spPr>
@@ -14614,7 +14775,7 @@
           <p:cNvPr id="10" name="footer-number">
             <a:extLst xmlns:a="http://schemas.openxmlformats.org/drawingml/2006/main">
               <a:ext uri="{FF2B5EF4-FFF2-40B4-BE49-F238E27FC236}">
-                <a16:creationId xmlns:a16="http://schemas.microsoft.com/office/drawing/2014/main" id="{06E6644D-0B84-498C-AB41-B54CF7131954}"/>
+                <a16:creationId xmlns:a16="http://schemas.microsoft.com/office/drawing/2014/main" id="{B2B6ECD9-9981-4B90-A35F-EF4C48AB1515}"/>
               </a:ext>
             </a:extLst>
           </p:cNvPr>
@@ -14670,7 +14831,7 @@
           <p:cNvPr id="11" name="field-label">
             <a:extLst xmlns:a="http://schemas.openxmlformats.org/drawingml/2006/main">
               <a:ext uri="{FF2B5EF4-FFF2-40B4-BE49-F238E27FC236}">
-                <a16:creationId xmlns:a16="http://schemas.microsoft.com/office/drawing/2014/main" id="{2DE3867B-98EF-4B4F-A98C-D52BFDE65A29}"/>
+                <a16:creationId xmlns:a16="http://schemas.microsoft.com/office/drawing/2014/main" id="{19857763-7C95-43F3-9B2C-F852F5821984}"/>
               </a:ext>
             </a:extLst>
           </p:cNvPr>
@@ -14726,7 +14887,7 @@
           <p:cNvPr id="12" name="field-AI가 보조할 일">
             <a:extLst xmlns:a="http://schemas.openxmlformats.org/drawingml/2006/main">
               <a:ext uri="{FF2B5EF4-FFF2-40B4-BE49-F238E27FC236}">
-                <a16:creationId xmlns:a16="http://schemas.microsoft.com/office/drawing/2014/main" id="{4B34AF2C-E310-412A-A584-D0364620B028}"/>
+                <a16:creationId xmlns:a16="http://schemas.microsoft.com/office/drawing/2014/main" id="{2E728967-3033-46F7-AA14-15030DE9A336}"/>
               </a:ext>
             </a:extLst>
           </p:cNvPr>
@@ -14761,7 +14922,7 @@
           <p:cNvPr id="13" name="field-hint">
             <a:extLst xmlns:a="http://schemas.openxmlformats.org/drawingml/2006/main">
               <a:ext uri="{FF2B5EF4-FFF2-40B4-BE49-F238E27FC236}">
-                <a16:creationId xmlns:a16="http://schemas.microsoft.com/office/drawing/2014/main" id="{7AB1D4D3-48C0-410E-83AC-70ACEA89609D}"/>
+                <a16:creationId xmlns:a16="http://schemas.microsoft.com/office/drawing/2014/main" id="{FA15F990-658B-43B8-8335-0EAD28705659}"/>
               </a:ext>
             </a:extLst>
           </p:cNvPr>
@@ -14807,7 +14968,30 @@
                 <a:ea typeface="Pretendard"/>
                 <a:cs typeface="Pretendard"/>
               </a:rPr>
-              <a:t>검색 / 분류 / 요약 / 초안 / 코드 / 체크리스트 검증</a:t>
+              <a:t>검색 / 분류 / 요약 / 초안 / 코드 /</a:t>
+            </a:r>
+          </a:p>
+          <a:p xmlns:a="http://schemas.openxmlformats.org/drawingml/2006/main">
+            <a:pPr algn="l">
+              <a:defRPr sz="1125" b="0">
+                <a:solidFill>
+                  <a:srgbClr val="4B5563"/>
+                </a:solidFill>
+                <a:latin typeface="Pretendard"/>
+                <a:ea typeface="Pretendard"/>
+                <a:cs typeface="Pretendard"/>
+              </a:defRPr>
+            </a:pPr>
+            <a:r>
+              <a:rPr sz="1125" b="0">
+                <a:solidFill>
+                  <a:srgbClr val="4B5563"/>
+                </a:solidFill>
+                <a:latin typeface="Pretendard"/>
+                <a:ea typeface="Pretendard"/>
+                <a:cs typeface="Pretendard"/>
+              </a:rPr>
+              <a:t>체크리스트 검증</a:t>
             </a:r>
           </a:p>
         </p:txBody>
@@ -14817,7 +15001,7 @@
           <p:cNvPr id="14" name="field-label">
             <a:extLst xmlns:a="http://schemas.openxmlformats.org/drawingml/2006/main">
               <a:ext uri="{FF2B5EF4-FFF2-40B4-BE49-F238E27FC236}">
-                <a16:creationId xmlns:a16="http://schemas.microsoft.com/office/drawing/2014/main" id="{2DBF41F9-7B95-4E88-B299-7D1744EC7F82}"/>
+                <a16:creationId xmlns:a16="http://schemas.microsoft.com/office/drawing/2014/main" id="{27E9BEAE-0D7E-439D-BEF5-A730FBB7AD5D}"/>
               </a:ext>
             </a:extLst>
           </p:cNvPr>
@@ -14873,7 +15057,7 @@
           <p:cNvPr id="15" name="field-사람이 검토할 일">
             <a:extLst xmlns:a="http://schemas.openxmlformats.org/drawingml/2006/main">
               <a:ext uri="{FF2B5EF4-FFF2-40B4-BE49-F238E27FC236}">
-                <a16:creationId xmlns:a16="http://schemas.microsoft.com/office/drawing/2014/main" id="{CB1F8A9A-984C-4826-8A81-E5F9B49DB448}"/>
+                <a16:creationId xmlns:a16="http://schemas.microsoft.com/office/drawing/2014/main" id="{2F295B4C-8079-40C0-8FB5-E704EC1715AE}"/>
               </a:ext>
             </a:extLst>
           </p:cNvPr>
@@ -14908,7 +15092,7 @@
           <p:cNvPr id="16" name="field-hint">
             <a:extLst xmlns:a="http://schemas.openxmlformats.org/drawingml/2006/main">
               <a:ext uri="{FF2B5EF4-FFF2-40B4-BE49-F238E27FC236}">
-                <a16:creationId xmlns:a16="http://schemas.microsoft.com/office/drawing/2014/main" id="{82014D92-B13A-4B96-A92B-4C7449EF7E9A}"/>
+                <a16:creationId xmlns:a16="http://schemas.microsoft.com/office/drawing/2014/main" id="{8CC5648F-CAF1-4258-B73D-B8B3DDEB6AF1}"/>
               </a:ext>
             </a:extLst>
           </p:cNvPr>
@@ -14964,7 +15148,7 @@
           <p:cNvPr id="17" name="field-label">
             <a:extLst xmlns:a="http://schemas.openxmlformats.org/drawingml/2006/main">
               <a:ext uri="{FF2B5EF4-FFF2-40B4-BE49-F238E27FC236}">
-                <a16:creationId xmlns:a16="http://schemas.microsoft.com/office/drawing/2014/main" id="{3DC81803-C5E8-4655-AF35-F8A07794BCC0}"/>
+                <a16:creationId xmlns:a16="http://schemas.microsoft.com/office/drawing/2014/main" id="{380E14FD-CD76-4CCB-869F-5A5D773A63D9}"/>
               </a:ext>
             </a:extLst>
           </p:cNvPr>
@@ -15020,7 +15204,7 @@
           <p:cNvPr id="18" name="field-사용 금지 자료">
             <a:extLst xmlns:a="http://schemas.openxmlformats.org/drawingml/2006/main">
               <a:ext uri="{FF2B5EF4-FFF2-40B4-BE49-F238E27FC236}">
-                <a16:creationId xmlns:a16="http://schemas.microsoft.com/office/drawing/2014/main" id="{6F22C3EF-04DD-4D3F-8966-5BC840B5D1F7}"/>
+                <a16:creationId xmlns:a16="http://schemas.microsoft.com/office/drawing/2014/main" id="{B501B724-A33F-4C57-B588-B69B07D7EE51}"/>
               </a:ext>
             </a:extLst>
           </p:cNvPr>
@@ -15055,7 +15239,7 @@
           <p:cNvPr id="19" name="field-hint">
             <a:extLst xmlns:a="http://schemas.openxmlformats.org/drawingml/2006/main">
               <a:ext uri="{FF2B5EF4-FFF2-40B4-BE49-F238E27FC236}">
-                <a16:creationId xmlns:a16="http://schemas.microsoft.com/office/drawing/2014/main" id="{E8842A16-B5AB-4088-8F29-35C090CE476A}"/>
+                <a16:creationId xmlns:a16="http://schemas.microsoft.com/office/drawing/2014/main" id="{A8F933CE-54F5-46EB-8B20-C98286F989F1}"/>
               </a:ext>
             </a:extLst>
           </p:cNvPr>
@@ -15101,7 +15285,7 @@
                 <a:ea typeface="Pretendard"/>
                 <a:cs typeface="Pretendard"/>
               </a:rPr>
-              <a:t>개인정보 / 운영 로그 원본 / 접근키 / 민감 계약·재무</a:t>
+              <a:t>개인정보 / 운영 로그 원본 / 접근키 / 민감</a:t>
             </a:r>
           </a:p>
           <a:p xmlns:a="http://schemas.openxmlformats.org/drawingml/2006/main">
@@ -15124,7 +15308,7 @@
                 <a:ea typeface="Pretendard"/>
                 <a:cs typeface="Pretendard"/>
               </a:rPr>
-              <a:t>자료</a:t>
+              <a:t>계약·재무 자료</a:t>
             </a:r>
           </a:p>
         </p:txBody>
@@ -15134,7 +15318,7 @@
           <p:cNvPr id="20" name="field-label">
             <a:extLst xmlns:a="http://schemas.openxmlformats.org/drawingml/2006/main">
               <a:ext uri="{FF2B5EF4-FFF2-40B4-BE49-F238E27FC236}">
-                <a16:creationId xmlns:a16="http://schemas.microsoft.com/office/drawing/2014/main" id="{621B24C3-6925-4F4A-8D3A-590A64B63650}"/>
+                <a16:creationId xmlns:a16="http://schemas.microsoft.com/office/drawing/2014/main" id="{5417252F-4DEF-4ABA-AE95-E4E477C82193}"/>
               </a:ext>
             </a:extLst>
           </p:cNvPr>
@@ -15190,7 +15374,7 @@
           <p:cNvPr id="21" name="field-스파로스 데브엑스에서 만들 흐름">
             <a:extLst xmlns:a="http://schemas.openxmlformats.org/drawingml/2006/main">
               <a:ext uri="{FF2B5EF4-FFF2-40B4-BE49-F238E27FC236}">
-                <a16:creationId xmlns:a16="http://schemas.microsoft.com/office/drawing/2014/main" id="{6780B701-1A59-4DA5-A4C5-4CC8DB2D2090}"/>
+                <a16:creationId xmlns:a16="http://schemas.microsoft.com/office/drawing/2014/main" id="{889A2B1B-DAAE-4A44-A42E-28E1904080ED}"/>
               </a:ext>
             </a:extLst>
           </p:cNvPr>
@@ -15225,7 +15409,7 @@
           <p:cNvPr id="22" name="field-hint">
             <a:extLst xmlns:a="http://schemas.openxmlformats.org/drawingml/2006/main">
               <a:ext uri="{FF2B5EF4-FFF2-40B4-BE49-F238E27FC236}">
-                <a16:creationId xmlns:a16="http://schemas.microsoft.com/office/drawing/2014/main" id="{B89B45C8-63B3-41F4-8B16-D20A39FD74C3}"/>
+                <a16:creationId xmlns:a16="http://schemas.microsoft.com/office/drawing/2014/main" id="{6D7DF058-49B0-422B-BA1B-58F26742370F}"/>
               </a:ext>
             </a:extLst>
           </p:cNvPr>
@@ -15281,7 +15465,7 @@
           <p:cNvPr id="23" name="field-label">
             <a:extLst xmlns:a="http://schemas.openxmlformats.org/drawingml/2006/main">
               <a:ext uri="{FF2B5EF4-FFF2-40B4-BE49-F238E27FC236}">
-                <a16:creationId xmlns:a16="http://schemas.microsoft.com/office/drawing/2014/main" id="{3D763076-8A65-489D-ADB6-CC994D4BC817}"/>
+                <a16:creationId xmlns:a16="http://schemas.microsoft.com/office/drawing/2014/main" id="{93DEBC02-E225-409F-B1D3-9976A8DAD58F}"/>
               </a:ext>
             </a:extLst>
           </p:cNvPr>
@@ -15337,7 +15521,7 @@
           <p:cNvPr id="24" name="field-품질 기준">
             <a:extLst xmlns:a="http://schemas.openxmlformats.org/drawingml/2006/main">
               <a:ext uri="{FF2B5EF4-FFF2-40B4-BE49-F238E27FC236}">
-                <a16:creationId xmlns:a16="http://schemas.microsoft.com/office/drawing/2014/main" id="{C6A62B2B-AB63-48C5-945A-2F2DCE8B8D55}"/>
+                <a16:creationId xmlns:a16="http://schemas.microsoft.com/office/drawing/2014/main" id="{ADC48BDF-2505-42FA-B1B4-7586CFDDBD65}"/>
               </a:ext>
             </a:extLst>
           </p:cNvPr>
@@ -15372,7 +15556,7 @@
           <p:cNvPr id="25" name="field-hint">
             <a:extLst xmlns:a="http://schemas.openxmlformats.org/drawingml/2006/main">
               <a:ext uri="{FF2B5EF4-FFF2-40B4-BE49-F238E27FC236}">
-                <a16:creationId xmlns:a16="http://schemas.microsoft.com/office/drawing/2014/main" id="{9DF3409A-ABD7-419F-A3BF-5F9F02E6AB23}"/>
+                <a16:creationId xmlns:a16="http://schemas.microsoft.com/office/drawing/2014/main" id="{6A639DB1-180C-4A99-AB2A-4D395805C2DC}"/>
               </a:ext>
             </a:extLst>
           </p:cNvPr>
@@ -15426,7 +15610,7 @@
     </p:spTree>
     <p:extLst>
       <p:ext uri="{BB962C8B-B14F-4D97-AF65-F5344CB8AC3E}">
-        <p14:creationId xmlns:p14="http://schemas.microsoft.com/office/powerpoint/2010/main" val="787673006"/>
+        <p14:creationId xmlns:p14="http://schemas.microsoft.com/office/powerpoint/2010/main" val="1948257802"/>
       </p:ext>
     </p:extLst>
   </p:cSld>
@@ -15457,7 +15641,7 @@
           <p:cNvPr id="1" name="decor-ring-1">
             <a:extLst xmlns:a="http://schemas.openxmlformats.org/drawingml/2006/main">
               <a:ext uri="{FF2B5EF4-FFF2-40B4-BE49-F238E27FC236}">
-                <a16:creationId xmlns:a16="http://schemas.microsoft.com/office/drawing/2014/main" id="{C49E7AB1-F1C9-4A3E-B796-9652A1FA0AF9}"/>
+                <a16:creationId xmlns:a16="http://schemas.microsoft.com/office/drawing/2014/main" id="{16CF6162-BD26-4CB5-BD19-88F2F8D1FCD3}"/>
               </a:ext>
             </a:extLst>
           </p:cNvPr>
@@ -15488,7 +15672,7 @@
           <p:cNvPr id="2" name="decor-ring-2">
             <a:extLst xmlns:a="http://schemas.openxmlformats.org/drawingml/2006/main">
               <a:ext uri="{FF2B5EF4-FFF2-40B4-BE49-F238E27FC236}">
-                <a16:creationId xmlns:a16="http://schemas.microsoft.com/office/drawing/2014/main" id="{3192D009-648F-4261-9A2D-B53AEBDCBFFC}"/>
+                <a16:creationId xmlns:a16="http://schemas.microsoft.com/office/drawing/2014/main" id="{465C5E92-A7B8-4FF2-9383-18E6A945C876}"/>
               </a:ext>
             </a:extLst>
           </p:cNvPr>
@@ -15519,7 +15703,7 @@
           <p:cNvPr id="3" name="decor-orb-1">
             <a:extLst xmlns:a="http://schemas.openxmlformats.org/drawingml/2006/main">
               <a:ext uri="{FF2B5EF4-FFF2-40B4-BE49-F238E27FC236}">
-                <a16:creationId xmlns:a16="http://schemas.microsoft.com/office/drawing/2014/main" id="{B3D2BFA0-A25E-45C9-B4CD-1D3DA31DBAB9}"/>
+                <a16:creationId xmlns:a16="http://schemas.microsoft.com/office/drawing/2014/main" id="{B72673E2-5EFC-4651-8B05-BDEB2928FA52}"/>
               </a:ext>
             </a:extLst>
           </p:cNvPr>
@@ -15550,7 +15734,7 @@
           <p:cNvPr id="4" name="decor-orb-2">
             <a:extLst xmlns:a="http://schemas.openxmlformats.org/drawingml/2006/main">
               <a:ext uri="{FF2B5EF4-FFF2-40B4-BE49-F238E27FC236}">
-                <a16:creationId xmlns:a16="http://schemas.microsoft.com/office/drawing/2014/main" id="{6A0FA898-3E5B-43BF-89DC-360ED8B04841}"/>
+                <a16:creationId xmlns:a16="http://schemas.microsoft.com/office/drawing/2014/main" id="{243D9D8C-8F20-43B6-B2E0-75479DBAB690}"/>
               </a:ext>
             </a:extLst>
           </p:cNvPr>
@@ -15581,7 +15765,7 @@
           <p:cNvPr id="5" name="title-bar">
             <a:extLst xmlns:a="http://schemas.openxmlformats.org/drawingml/2006/main">
               <a:ext uri="{FF2B5EF4-FFF2-40B4-BE49-F238E27FC236}">
-                <a16:creationId xmlns:a16="http://schemas.microsoft.com/office/drawing/2014/main" id="{7E663CDE-6698-4169-B564-A11C58C39071}"/>
+                <a16:creationId xmlns:a16="http://schemas.microsoft.com/office/drawing/2014/main" id="{6FD0F17E-9FF5-457C-85F1-E09CEAD4173D}"/>
               </a:ext>
             </a:extLst>
           </p:cNvPr>
@@ -15612,7 +15796,7 @@
           <p:cNvPr id="6" name="kicker">
             <a:extLst xmlns:a="http://schemas.openxmlformats.org/drawingml/2006/main">
               <a:ext uri="{FF2B5EF4-FFF2-40B4-BE49-F238E27FC236}">
-                <a16:creationId xmlns:a16="http://schemas.microsoft.com/office/drawing/2014/main" id="{C040ECBF-422B-44AF-8681-77D903662836}"/>
+                <a16:creationId xmlns:a16="http://schemas.microsoft.com/office/drawing/2014/main" id="{6C69830D-F638-4867-991E-4189C3D8046D}"/>
               </a:ext>
             </a:extLst>
           </p:cNvPr>
@@ -15668,7 +15852,7 @@
           <p:cNvPr id="7" name="title">
             <a:extLst xmlns:a="http://schemas.openxmlformats.org/drawingml/2006/main">
               <a:ext uri="{FF2B5EF4-FFF2-40B4-BE49-F238E27FC236}">
-                <a16:creationId xmlns:a16="http://schemas.microsoft.com/office/drawing/2014/main" id="{DEC6F51A-7D41-4BFA-9A25-52A3C78A20C9}"/>
+                <a16:creationId xmlns:a16="http://schemas.microsoft.com/office/drawing/2014/main" id="{73507B48-A45C-49BC-8884-36965994FAF7}"/>
               </a:ext>
             </a:extLst>
           </p:cNvPr>
@@ -15724,7 +15908,7 @@
           <p:cNvPr id="8" name="subtitle">
             <a:extLst xmlns:a="http://schemas.openxmlformats.org/drawingml/2006/main">
               <a:ext uri="{FF2B5EF4-FFF2-40B4-BE49-F238E27FC236}">
-                <a16:creationId xmlns:a16="http://schemas.microsoft.com/office/drawing/2014/main" id="{50B8B751-1C67-4C05-BFF5-20F24F8FC6E4}"/>
+                <a16:creationId xmlns:a16="http://schemas.microsoft.com/office/drawing/2014/main" id="{9A106554-3DC5-4A3F-A448-5101B73784AA}"/>
               </a:ext>
             </a:extLst>
           </p:cNvPr>
@@ -15784,7 +15968,7 @@
           <p:nvPr/>
         </p:nvPicPr>
         <p:blipFill>
-          <a:blip xmlns:r="http://schemas.openxmlformats.org/officeDocument/2006/relationships" xmlns:a="http://schemas.openxmlformats.org/drawingml/2006/main" r:embed="R27a28bb2822d4950"/>
+          <a:blip xmlns:r="http://schemas.openxmlformats.org/officeDocument/2006/relationships" xmlns:a="http://schemas.openxmlformats.org/drawingml/2006/main" r:embed="R8f05d2cb63e241c8"/>
           <a:stretch xmlns:a="http://schemas.openxmlformats.org/drawingml/2006/main"/>
         </p:blipFill>
         <p:spPr>
@@ -15802,7 +15986,7 @@
           <p:cNvPr id="10" name="footer-number">
             <a:extLst xmlns:a="http://schemas.openxmlformats.org/drawingml/2006/main">
               <a:ext uri="{FF2B5EF4-FFF2-40B4-BE49-F238E27FC236}">
-                <a16:creationId xmlns:a16="http://schemas.microsoft.com/office/drawing/2014/main" id="{927BDEB9-81F5-4D91-AE66-5A8043BD560B}"/>
+                <a16:creationId xmlns:a16="http://schemas.microsoft.com/office/drawing/2014/main" id="{D0E35093-58EF-427B-8C03-A4A2E5F8EC55}"/>
               </a:ext>
             </a:extLst>
           </p:cNvPr>
@@ -15858,7 +16042,7 @@
           <p:cNvPr id="11" name="card-진행 방법">
             <a:extLst xmlns:a="http://schemas.openxmlformats.org/drawingml/2006/main">
               <a:ext uri="{FF2B5EF4-FFF2-40B4-BE49-F238E27FC236}">
-                <a16:creationId xmlns:a16="http://schemas.microsoft.com/office/drawing/2014/main" id="{EF7789BC-C81E-47D6-918E-04F66B51401C}"/>
+                <a16:creationId xmlns:a16="http://schemas.microsoft.com/office/drawing/2014/main" id="{E732CD46-A5F0-4542-B666-90A664D6981B}"/>
               </a:ext>
             </a:extLst>
           </p:cNvPr>
@@ -15899,7 +16083,7 @@
           <p:cNvPr id="12" name="card-accent">
             <a:extLst xmlns:a="http://schemas.openxmlformats.org/drawingml/2006/main">
               <a:ext uri="{FF2B5EF4-FFF2-40B4-BE49-F238E27FC236}">
-                <a16:creationId xmlns:a16="http://schemas.microsoft.com/office/drawing/2014/main" id="{3D2DA9F8-E71F-40A6-8D10-66E9D8B25204}"/>
+                <a16:creationId xmlns:a16="http://schemas.microsoft.com/office/drawing/2014/main" id="{2E3E8A45-387D-4C1A-90E5-A0F6E372DF34}"/>
               </a:ext>
             </a:extLst>
           </p:cNvPr>
@@ -15930,7 +16114,7 @@
           <p:cNvPr id="13" name="card-label">
             <a:extLst xmlns:a="http://schemas.openxmlformats.org/drawingml/2006/main">
               <a:ext uri="{FF2B5EF4-FFF2-40B4-BE49-F238E27FC236}">
-                <a16:creationId xmlns:a16="http://schemas.microsoft.com/office/drawing/2014/main" id="{F8F3EB0D-FE6F-4CBE-A926-BEBDA7469732}"/>
+                <a16:creationId xmlns:a16="http://schemas.microsoft.com/office/drawing/2014/main" id="{D12A224E-A6C6-4AF2-BF59-3D99E072F7F1}"/>
               </a:ext>
             </a:extLst>
           </p:cNvPr>
@@ -15986,7 +16170,7 @@
           <p:cNvPr id="14" name="card-title">
             <a:extLst xmlns:a="http://schemas.openxmlformats.org/drawingml/2006/main">
               <a:ext uri="{FF2B5EF4-FFF2-40B4-BE49-F238E27FC236}">
-                <a16:creationId xmlns:a16="http://schemas.microsoft.com/office/drawing/2014/main" id="{BF49AFC0-203B-471F-B863-3C9FA5F47FC0}"/>
+                <a16:creationId xmlns:a16="http://schemas.microsoft.com/office/drawing/2014/main" id="{3385A783-4799-4497-AC5E-2D9C93943261}"/>
               </a:ext>
             </a:extLst>
           </p:cNvPr>
@@ -16042,7 +16226,7 @@
           <p:cNvPr id="15" name="card-body">
             <a:extLst xmlns:a="http://schemas.openxmlformats.org/drawingml/2006/main">
               <a:ext uri="{FF2B5EF4-FFF2-40B4-BE49-F238E27FC236}">
-                <a16:creationId xmlns:a16="http://schemas.microsoft.com/office/drawing/2014/main" id="{960BD7BB-77CB-447C-93EE-AF10EBB821DE}"/>
+                <a16:creationId xmlns:a16="http://schemas.microsoft.com/office/drawing/2014/main" id="{4F1DBB33-2BE5-4652-A9C7-E502168FBF54}"/>
               </a:ext>
             </a:extLst>
           </p:cNvPr>
@@ -16088,7 +16272,7 @@
                 <a:ea typeface="Pretendard"/>
                 <a:cs typeface="Pretendard"/>
               </a:rPr>
-              <a:t>데모 장면, 샘플 데이터, 성공 기준, 제외</a:t>
+              <a:t>데모 장면, 샘플 데이터, 성공 기준,</a:t>
             </a:r>
           </a:p>
           <a:p xmlns:a="http://schemas.openxmlformats.org/drawingml/2006/main">
@@ -16111,7 +16295,7 @@
                 <a:ea typeface="Pretendard"/>
                 <a:cs typeface="Pretendard"/>
               </a:rPr>
-              <a:t>범위를 한 장에 작성</a:t>
+              <a:t>제외 범위를 한 장에 작성</a:t>
             </a:r>
           </a:p>
         </p:txBody>
@@ -16121,7 +16305,7 @@
           <p:cNvPr id="16" name="card-결과물">
             <a:extLst xmlns:a="http://schemas.openxmlformats.org/drawingml/2006/main">
               <a:ext uri="{FF2B5EF4-FFF2-40B4-BE49-F238E27FC236}">
-                <a16:creationId xmlns:a16="http://schemas.microsoft.com/office/drawing/2014/main" id="{BFB45917-E257-488F-8734-3FCA08E3E2E6}"/>
+                <a16:creationId xmlns:a16="http://schemas.microsoft.com/office/drawing/2014/main" id="{A33A31E1-6965-4EAA-A46B-C9DB81C2B950}"/>
               </a:ext>
             </a:extLst>
           </p:cNvPr>
@@ -16162,7 +16346,7 @@
           <p:cNvPr id="17" name="card-accent">
             <a:extLst xmlns:a="http://schemas.openxmlformats.org/drawingml/2006/main">
               <a:ext uri="{FF2B5EF4-FFF2-40B4-BE49-F238E27FC236}">
-                <a16:creationId xmlns:a16="http://schemas.microsoft.com/office/drawing/2014/main" id="{BCFAA5F2-9B62-42F3-80BC-9373FF6B2B38}"/>
+                <a16:creationId xmlns:a16="http://schemas.microsoft.com/office/drawing/2014/main" id="{67AD326B-BD19-4022-A871-86A35A84B660}"/>
               </a:ext>
             </a:extLst>
           </p:cNvPr>
@@ -16193,7 +16377,7 @@
           <p:cNvPr id="18" name="card-label">
             <a:extLst xmlns:a="http://schemas.openxmlformats.org/drawingml/2006/main">
               <a:ext uri="{FF2B5EF4-FFF2-40B4-BE49-F238E27FC236}">
-                <a16:creationId xmlns:a16="http://schemas.microsoft.com/office/drawing/2014/main" id="{0FAD5EFB-476B-4D65-8E2F-0A09E28FB1A3}"/>
+                <a16:creationId xmlns:a16="http://schemas.microsoft.com/office/drawing/2014/main" id="{C2813692-8014-40B6-9FD2-D55E7A3483B5}"/>
               </a:ext>
             </a:extLst>
           </p:cNvPr>
@@ -16249,7 +16433,7 @@
           <p:cNvPr id="19" name="card-title">
             <a:extLst xmlns:a="http://schemas.openxmlformats.org/drawingml/2006/main">
               <a:ext uri="{FF2B5EF4-FFF2-40B4-BE49-F238E27FC236}">
-                <a16:creationId xmlns:a16="http://schemas.microsoft.com/office/drawing/2014/main" id="{2875B0AD-1815-450B-9233-FA419345C874}"/>
+                <a16:creationId xmlns:a16="http://schemas.microsoft.com/office/drawing/2014/main" id="{15879FA0-7F62-4FD2-AFDF-0FC47BA88C7A}"/>
               </a:ext>
             </a:extLst>
           </p:cNvPr>
@@ -16305,7 +16489,7 @@
           <p:cNvPr id="20" name="card-body">
             <a:extLst xmlns:a="http://schemas.openxmlformats.org/drawingml/2006/main">
               <a:ext uri="{FF2B5EF4-FFF2-40B4-BE49-F238E27FC236}">
-                <a16:creationId xmlns:a16="http://schemas.microsoft.com/office/drawing/2014/main" id="{A7FFAE8A-19EF-4629-AE92-A0953B656B99}"/>
+                <a16:creationId xmlns:a16="http://schemas.microsoft.com/office/drawing/2014/main" id="{386CA511-C4D0-462C-A366-DA00653A24EF}"/>
               </a:ext>
             </a:extLst>
           </p:cNvPr>
@@ -16361,7 +16545,7 @@
           <p:cNvPr id="21" name="card-운영 팁">
             <a:extLst xmlns:a="http://schemas.openxmlformats.org/drawingml/2006/main">
               <a:ext uri="{FF2B5EF4-FFF2-40B4-BE49-F238E27FC236}">
-                <a16:creationId xmlns:a16="http://schemas.microsoft.com/office/drawing/2014/main" id="{DEEE88B2-EC19-43C2-8ECD-B662BE41D1A6}"/>
+                <a16:creationId xmlns:a16="http://schemas.microsoft.com/office/drawing/2014/main" id="{1A9C1062-824A-460D-B49C-E3FF0D05D86F}"/>
               </a:ext>
             </a:extLst>
           </p:cNvPr>
@@ -16402,7 +16586,7 @@
           <p:cNvPr id="22" name="card-accent">
             <a:extLst xmlns:a="http://schemas.openxmlformats.org/drawingml/2006/main">
               <a:ext uri="{FF2B5EF4-FFF2-40B4-BE49-F238E27FC236}">
-                <a16:creationId xmlns:a16="http://schemas.microsoft.com/office/drawing/2014/main" id="{C6670B00-0ADC-4C6D-AC9B-685B1030C20E}"/>
+                <a16:creationId xmlns:a16="http://schemas.microsoft.com/office/drawing/2014/main" id="{E046CA13-209E-41A0-A064-209E4DE0543A}"/>
               </a:ext>
             </a:extLst>
           </p:cNvPr>
@@ -16433,7 +16617,7 @@
           <p:cNvPr id="23" name="card-label">
             <a:extLst xmlns:a="http://schemas.openxmlformats.org/drawingml/2006/main">
               <a:ext uri="{FF2B5EF4-FFF2-40B4-BE49-F238E27FC236}">
-                <a16:creationId xmlns:a16="http://schemas.microsoft.com/office/drawing/2014/main" id="{42745979-9997-4DE0-BCBD-B6582E387996}"/>
+                <a16:creationId xmlns:a16="http://schemas.microsoft.com/office/drawing/2014/main" id="{899E0FD4-216E-4153-BF6A-3A5F4491243E}"/>
               </a:ext>
             </a:extLst>
           </p:cNvPr>
@@ -16489,7 +16673,7 @@
           <p:cNvPr id="24" name="card-title">
             <a:extLst xmlns:a="http://schemas.openxmlformats.org/drawingml/2006/main">
               <a:ext uri="{FF2B5EF4-FFF2-40B4-BE49-F238E27FC236}">
-                <a16:creationId xmlns:a16="http://schemas.microsoft.com/office/drawing/2014/main" id="{2D0BF0BF-9C46-4ECB-B88A-9B7856DCBDF7}"/>
+                <a16:creationId xmlns:a16="http://schemas.microsoft.com/office/drawing/2014/main" id="{5135F31C-F4FE-4554-BF51-0F67F420D4BF}"/>
               </a:ext>
             </a:extLst>
           </p:cNvPr>
@@ -16545,7 +16729,7 @@
           <p:cNvPr id="25" name="card-body">
             <a:extLst xmlns:a="http://schemas.openxmlformats.org/drawingml/2006/main">
               <a:ext uri="{FF2B5EF4-FFF2-40B4-BE49-F238E27FC236}">
-                <a16:creationId xmlns:a16="http://schemas.microsoft.com/office/drawing/2014/main" id="{6A2C2F2D-DBC9-48E2-8E61-BC7E1686571E}"/>
+                <a16:creationId xmlns:a16="http://schemas.microsoft.com/office/drawing/2014/main" id="{6F9502B8-D7FC-4E07-95CE-5629B3504D46}"/>
               </a:ext>
             </a:extLst>
           </p:cNvPr>
@@ -16591,7 +16775,7 @@
                 <a:ea typeface="Pretendard"/>
                 <a:cs typeface="Pretendard"/>
               </a:rPr>
-              <a:t>타이머를 보이게 두고, 각 팀의 산출물은</a:t>
+              <a:t>타이머를 보이게 두고, 각 팀의</a:t>
             </a:r>
           </a:p>
           <a:p xmlns:a="http://schemas.openxmlformats.org/drawingml/2006/main">
@@ -16614,7 +16798,30 @@
                 <a:ea typeface="Pretendard"/>
                 <a:cs typeface="Pretendard"/>
               </a:rPr>
-              <a:t>다음 단계 장표에 바로 옮겨 적게 합니다.</a:t>
+              <a:t>산출물은 다음 단계 장표에 바로</a:t>
+            </a:r>
+          </a:p>
+          <a:p xmlns:a="http://schemas.openxmlformats.org/drawingml/2006/main">
+            <a:pPr algn="l">
+              <a:defRPr sz="1350" b="0">
+                <a:solidFill>
+                  <a:srgbClr val="4B5563"/>
+                </a:solidFill>
+                <a:latin typeface="Pretendard"/>
+                <a:ea typeface="Pretendard"/>
+                <a:cs typeface="Pretendard"/>
+              </a:defRPr>
+            </a:pPr>
+            <a:r>
+              <a:rPr sz="1350" b="0">
+                <a:solidFill>
+                  <a:srgbClr val="4B5563"/>
+                </a:solidFill>
+                <a:latin typeface="Pretendard"/>
+                <a:ea typeface="Pretendard"/>
+                <a:cs typeface="Pretendard"/>
+              </a:rPr>
+              <a:t>옮겨 적게 합니다.</a:t>
             </a:r>
           </a:p>
         </p:txBody>
@@ -16622,7 +16829,7 @@
     </p:spTree>
     <p:extLst>
       <p:ext uri="{BB962C8B-B14F-4D97-AF65-F5344CB8AC3E}">
-        <p14:creationId xmlns:p14="http://schemas.microsoft.com/office/powerpoint/2010/main" val="577678612"/>
+        <p14:creationId xmlns:p14="http://schemas.microsoft.com/office/powerpoint/2010/main" val="164630594"/>
       </p:ext>
     </p:extLst>
   </p:cSld>
@@ -16653,7 +16860,7 @@
           <p:cNvPr id="1" name="decor-ring-1">
             <a:extLst xmlns:a="http://schemas.openxmlformats.org/drawingml/2006/main">
               <a:ext uri="{FF2B5EF4-FFF2-40B4-BE49-F238E27FC236}">
-                <a16:creationId xmlns:a16="http://schemas.microsoft.com/office/drawing/2014/main" id="{125ECE77-1E17-4860-8299-5769DC6391D5}"/>
+                <a16:creationId xmlns:a16="http://schemas.microsoft.com/office/drawing/2014/main" id="{BE22B352-AA46-4A8A-AB1E-03E9DC440F33}"/>
               </a:ext>
             </a:extLst>
           </p:cNvPr>
@@ -16684,7 +16891,7 @@
           <p:cNvPr id="2" name="decor-ring-2">
             <a:extLst xmlns:a="http://schemas.openxmlformats.org/drawingml/2006/main">
               <a:ext uri="{FF2B5EF4-FFF2-40B4-BE49-F238E27FC236}">
-                <a16:creationId xmlns:a16="http://schemas.microsoft.com/office/drawing/2014/main" id="{A1CECD8F-55D5-48E1-A081-990CD4A40BE5}"/>
+                <a16:creationId xmlns:a16="http://schemas.microsoft.com/office/drawing/2014/main" id="{9642B505-87EA-4716-B6B4-44907EBB1F98}"/>
               </a:ext>
             </a:extLst>
           </p:cNvPr>
@@ -16715,7 +16922,7 @@
           <p:cNvPr id="3" name="decor-orb-1">
             <a:extLst xmlns:a="http://schemas.openxmlformats.org/drawingml/2006/main">
               <a:ext uri="{FF2B5EF4-FFF2-40B4-BE49-F238E27FC236}">
-                <a16:creationId xmlns:a16="http://schemas.microsoft.com/office/drawing/2014/main" id="{82A74443-615B-46E8-B82E-43C664CA85B4}"/>
+                <a16:creationId xmlns:a16="http://schemas.microsoft.com/office/drawing/2014/main" id="{453E8517-3689-4D98-AF3A-E22991CBA358}"/>
               </a:ext>
             </a:extLst>
           </p:cNvPr>
@@ -16746,7 +16953,7 @@
           <p:cNvPr id="4" name="decor-orb-2">
             <a:extLst xmlns:a="http://schemas.openxmlformats.org/drawingml/2006/main">
               <a:ext uri="{FF2B5EF4-FFF2-40B4-BE49-F238E27FC236}">
-                <a16:creationId xmlns:a16="http://schemas.microsoft.com/office/drawing/2014/main" id="{A4512E23-F8C0-464F-B0CB-88FE4B6DEB90}"/>
+                <a16:creationId xmlns:a16="http://schemas.microsoft.com/office/drawing/2014/main" id="{EA1348E4-7469-4A23-98D8-82477B94FBBF}"/>
               </a:ext>
             </a:extLst>
           </p:cNvPr>
@@ -16777,7 +16984,7 @@
           <p:cNvPr id="5" name="title-bar">
             <a:extLst xmlns:a="http://schemas.openxmlformats.org/drawingml/2006/main">
               <a:ext uri="{FF2B5EF4-FFF2-40B4-BE49-F238E27FC236}">
-                <a16:creationId xmlns:a16="http://schemas.microsoft.com/office/drawing/2014/main" id="{A2E0D09B-2CAA-4963-AD1C-A40CDC3A1C51}"/>
+                <a16:creationId xmlns:a16="http://schemas.microsoft.com/office/drawing/2014/main" id="{7C5E6584-8E99-4A55-A7EB-BCB63B561AF6}"/>
               </a:ext>
             </a:extLst>
           </p:cNvPr>
@@ -16808,7 +17015,7 @@
           <p:cNvPr id="6" name="kicker">
             <a:extLst xmlns:a="http://schemas.openxmlformats.org/drawingml/2006/main">
               <a:ext uri="{FF2B5EF4-FFF2-40B4-BE49-F238E27FC236}">
-                <a16:creationId xmlns:a16="http://schemas.microsoft.com/office/drawing/2014/main" id="{EF04E5EC-0B8B-49C8-BA8B-96E69328DE0C}"/>
+                <a16:creationId xmlns:a16="http://schemas.microsoft.com/office/drawing/2014/main" id="{87489B1C-032F-4DAC-BE32-D79A314EBA25}"/>
               </a:ext>
             </a:extLst>
           </p:cNvPr>
@@ -16864,7 +17071,7 @@
           <p:cNvPr id="7" name="title">
             <a:extLst xmlns:a="http://schemas.openxmlformats.org/drawingml/2006/main">
               <a:ext uri="{FF2B5EF4-FFF2-40B4-BE49-F238E27FC236}">
-                <a16:creationId xmlns:a16="http://schemas.microsoft.com/office/drawing/2014/main" id="{6A54C878-CB6E-4844-9DB8-2464228D4EC6}"/>
+                <a16:creationId xmlns:a16="http://schemas.microsoft.com/office/drawing/2014/main" id="{DB332AB5-E634-414E-9D7E-CBEF867BC9D0}"/>
               </a:ext>
             </a:extLst>
           </p:cNvPr>
@@ -16920,7 +17127,7 @@
           <p:cNvPr id="8" name="subtitle">
             <a:extLst xmlns:a="http://schemas.openxmlformats.org/drawingml/2006/main">
               <a:ext uri="{FF2B5EF4-FFF2-40B4-BE49-F238E27FC236}">
-                <a16:creationId xmlns:a16="http://schemas.microsoft.com/office/drawing/2014/main" id="{E5BF31D0-1D9F-459D-BBB3-02C719C8B3A2}"/>
+                <a16:creationId xmlns:a16="http://schemas.microsoft.com/office/drawing/2014/main" id="{3C8DFEEB-94BA-4525-A3E5-A721F87D612A}"/>
               </a:ext>
             </a:extLst>
           </p:cNvPr>
@@ -16980,7 +17187,7 @@
           <p:nvPr/>
         </p:nvPicPr>
         <p:blipFill>
-          <a:blip xmlns:r="http://schemas.openxmlformats.org/officeDocument/2006/relationships" xmlns:a="http://schemas.openxmlformats.org/drawingml/2006/main" r:embed="R83025db1149042a7"/>
+          <a:blip xmlns:r="http://schemas.openxmlformats.org/officeDocument/2006/relationships" xmlns:a="http://schemas.openxmlformats.org/drawingml/2006/main" r:embed="Rd9af3879bd1247f4"/>
           <a:stretch xmlns:a="http://schemas.openxmlformats.org/drawingml/2006/main"/>
         </p:blipFill>
         <p:spPr>
@@ -16998,7 +17205,7 @@
           <p:cNvPr id="10" name="footer-number">
             <a:extLst xmlns:a="http://schemas.openxmlformats.org/drawingml/2006/main">
               <a:ext uri="{FF2B5EF4-FFF2-40B4-BE49-F238E27FC236}">
-                <a16:creationId xmlns:a16="http://schemas.microsoft.com/office/drawing/2014/main" id="{4CF62E8F-7570-4C52-936C-D08173D17DA2}"/>
+                <a16:creationId xmlns:a16="http://schemas.microsoft.com/office/drawing/2014/main" id="{711438E5-A866-4ADD-800C-A29BC3DE1B16}"/>
               </a:ext>
             </a:extLst>
           </p:cNvPr>
@@ -17054,7 +17261,7 @@
           <p:cNvPr id="11" name="field-label">
             <a:extLst xmlns:a="http://schemas.openxmlformats.org/drawingml/2006/main">
               <a:ext uri="{FF2B5EF4-FFF2-40B4-BE49-F238E27FC236}">
-                <a16:creationId xmlns:a16="http://schemas.microsoft.com/office/drawing/2014/main" id="{887FFB94-2360-4E67-A8AE-70D65A1AFDB3}"/>
+                <a16:creationId xmlns:a16="http://schemas.microsoft.com/office/drawing/2014/main" id="{0D894821-F810-4FBB-8C0F-5C4ACE2AF66C}"/>
               </a:ext>
             </a:extLst>
           </p:cNvPr>
@@ -17110,7 +17317,7 @@
           <p:cNvPr id="12" name="field-데모 장면">
             <a:extLst xmlns:a="http://schemas.openxmlformats.org/drawingml/2006/main">
               <a:ext uri="{FF2B5EF4-FFF2-40B4-BE49-F238E27FC236}">
-                <a16:creationId xmlns:a16="http://schemas.microsoft.com/office/drawing/2014/main" id="{70143767-55A6-43C8-8D64-092CFFEA67B5}"/>
+                <a16:creationId xmlns:a16="http://schemas.microsoft.com/office/drawing/2014/main" id="{7FDE7D8C-787B-4BB2-97A4-A3DA4CBADA16}"/>
               </a:ext>
             </a:extLst>
           </p:cNvPr>
@@ -17145,7 +17352,7 @@
           <p:cNvPr id="13" name="field-hint">
             <a:extLst xmlns:a="http://schemas.openxmlformats.org/drawingml/2006/main">
               <a:ext uri="{FF2B5EF4-FFF2-40B4-BE49-F238E27FC236}">
-                <a16:creationId xmlns:a16="http://schemas.microsoft.com/office/drawing/2014/main" id="{663E55B7-2FB6-43AB-971A-B88B802C21EA}"/>
+                <a16:creationId xmlns:a16="http://schemas.microsoft.com/office/drawing/2014/main" id="{431AC2CE-B232-43C2-AEBC-31E4A5C61430}"/>
               </a:ext>
             </a:extLst>
           </p:cNvPr>
@@ -17201,7 +17408,7 @@
           <p:cNvPr id="14" name="field-label">
             <a:extLst xmlns:a="http://schemas.openxmlformats.org/drawingml/2006/main">
               <a:ext uri="{FF2B5EF4-FFF2-40B4-BE49-F238E27FC236}">
-                <a16:creationId xmlns:a16="http://schemas.microsoft.com/office/drawing/2014/main" id="{5F9D9814-7BD6-4CA7-87F9-9B895F7B024D}"/>
+                <a16:creationId xmlns:a16="http://schemas.microsoft.com/office/drawing/2014/main" id="{24E611EB-F72C-45B5-9507-D3A2C067A35C}"/>
               </a:ext>
             </a:extLst>
           </p:cNvPr>
@@ -17257,7 +17464,7 @@
           <p:cNvPr id="15" name="field-샘플 데이터">
             <a:extLst xmlns:a="http://schemas.openxmlformats.org/drawingml/2006/main">
               <a:ext uri="{FF2B5EF4-FFF2-40B4-BE49-F238E27FC236}">
-                <a16:creationId xmlns:a16="http://schemas.microsoft.com/office/drawing/2014/main" id="{0C7604F8-233F-405E-9483-D0ED4CDD4322}"/>
+                <a16:creationId xmlns:a16="http://schemas.microsoft.com/office/drawing/2014/main" id="{FC0105FC-7236-4BC6-8E74-FE2079218AED}"/>
               </a:ext>
             </a:extLst>
           </p:cNvPr>
@@ -17292,7 +17499,7 @@
           <p:cNvPr id="16" name="field-hint">
             <a:extLst xmlns:a="http://schemas.openxmlformats.org/drawingml/2006/main">
               <a:ext uri="{FF2B5EF4-FFF2-40B4-BE49-F238E27FC236}">
-                <a16:creationId xmlns:a16="http://schemas.microsoft.com/office/drawing/2014/main" id="{B5FAB44C-330C-4FEB-BA9C-B40FAFCCA303}"/>
+                <a16:creationId xmlns:a16="http://schemas.microsoft.com/office/drawing/2014/main" id="{FE415B13-A86C-49D8-84EE-06C941EBA1FF}"/>
               </a:ext>
             </a:extLst>
           </p:cNvPr>
@@ -17348,7 +17555,7 @@
           <p:cNvPr id="17" name="field-label">
             <a:extLst xmlns:a="http://schemas.openxmlformats.org/drawingml/2006/main">
               <a:ext uri="{FF2B5EF4-FFF2-40B4-BE49-F238E27FC236}">
-                <a16:creationId xmlns:a16="http://schemas.microsoft.com/office/drawing/2014/main" id="{7BCE980A-5DE9-465C-95D6-922B2AAD43B9}"/>
+                <a16:creationId xmlns:a16="http://schemas.microsoft.com/office/drawing/2014/main" id="{F590C054-08C1-40AD-8643-258B8DEBE6AE}"/>
               </a:ext>
             </a:extLst>
           </p:cNvPr>
@@ -17404,7 +17611,7 @@
           <p:cNvPr id="18" name="field-성공 기준">
             <a:extLst xmlns:a="http://schemas.openxmlformats.org/drawingml/2006/main">
               <a:ext uri="{FF2B5EF4-FFF2-40B4-BE49-F238E27FC236}">
-                <a16:creationId xmlns:a16="http://schemas.microsoft.com/office/drawing/2014/main" id="{8FDB3343-22C8-44E7-9F81-6FC30F35F6CC}"/>
+                <a16:creationId xmlns:a16="http://schemas.microsoft.com/office/drawing/2014/main" id="{E8C225E0-D9AD-4EFE-96D1-1A97B5402683}"/>
               </a:ext>
             </a:extLst>
           </p:cNvPr>
@@ -17439,7 +17646,7 @@
           <p:cNvPr id="19" name="field-hint">
             <a:extLst xmlns:a="http://schemas.openxmlformats.org/drawingml/2006/main">
               <a:ext uri="{FF2B5EF4-FFF2-40B4-BE49-F238E27FC236}">
-                <a16:creationId xmlns:a16="http://schemas.microsoft.com/office/drawing/2014/main" id="{80F012E7-F4FB-4774-805D-9BC985280DCC}"/>
+                <a16:creationId xmlns:a16="http://schemas.microsoft.com/office/drawing/2014/main" id="{DDE38F88-FAE4-4206-9CDB-9B7A86006BC5}"/>
               </a:ext>
             </a:extLst>
           </p:cNvPr>
@@ -17495,7 +17702,7 @@
           <p:cNvPr id="20" name="field-label">
             <a:extLst xmlns:a="http://schemas.openxmlformats.org/drawingml/2006/main">
               <a:ext uri="{FF2B5EF4-FFF2-40B4-BE49-F238E27FC236}">
-                <a16:creationId xmlns:a16="http://schemas.microsoft.com/office/drawing/2014/main" id="{09835C95-C5FB-4F4E-842D-4C6CB4BE16AD}"/>
+                <a16:creationId xmlns:a16="http://schemas.microsoft.com/office/drawing/2014/main" id="{732C46C7-CBE7-4888-9FCF-018A7CD70B42}"/>
               </a:ext>
             </a:extLst>
           </p:cNvPr>
@@ -17551,7 +17758,7 @@
           <p:cNvPr id="21" name="field-구현에서 제외할 것">
             <a:extLst xmlns:a="http://schemas.openxmlformats.org/drawingml/2006/main">
               <a:ext uri="{FF2B5EF4-FFF2-40B4-BE49-F238E27FC236}">
-                <a16:creationId xmlns:a16="http://schemas.microsoft.com/office/drawing/2014/main" id="{F5A1B8B1-5F57-4012-98EF-B3F4DAAC3D1C}"/>
+                <a16:creationId xmlns:a16="http://schemas.microsoft.com/office/drawing/2014/main" id="{DF4F95D9-E25F-492F-869D-804774C44783}"/>
               </a:ext>
             </a:extLst>
           </p:cNvPr>
@@ -17586,7 +17793,7 @@
           <p:cNvPr id="22" name="field-hint">
             <a:extLst xmlns:a="http://schemas.openxmlformats.org/drawingml/2006/main">
               <a:ext uri="{FF2B5EF4-FFF2-40B4-BE49-F238E27FC236}">
-                <a16:creationId xmlns:a16="http://schemas.microsoft.com/office/drawing/2014/main" id="{F4131C5B-F5B2-4E9F-A652-FC3A4E7AA7F6}"/>
+                <a16:creationId xmlns:a16="http://schemas.microsoft.com/office/drawing/2014/main" id="{34A6E549-C839-4E68-AC4D-114A4529C880}"/>
               </a:ext>
             </a:extLst>
           </p:cNvPr>
@@ -17642,7 +17849,7 @@
           <p:cNvPr id="23" name="field-label">
             <a:extLst xmlns:a="http://schemas.openxmlformats.org/drawingml/2006/main">
               <a:ext uri="{FF2B5EF4-FFF2-40B4-BE49-F238E27FC236}">
-                <a16:creationId xmlns:a16="http://schemas.microsoft.com/office/drawing/2014/main" id="{A51EAC76-8D33-433E-9001-294015B6116B}"/>
+                <a16:creationId xmlns:a16="http://schemas.microsoft.com/office/drawing/2014/main" id="{41E4D271-9155-4676-9AD5-C7F70B8646DD}"/>
               </a:ext>
             </a:extLst>
           </p:cNvPr>
@@ -17698,7 +17905,7 @@
           <p:cNvPr id="24" name="field-멘토에게 물어볼 것">
             <a:extLst xmlns:a="http://schemas.openxmlformats.org/drawingml/2006/main">
               <a:ext uri="{FF2B5EF4-FFF2-40B4-BE49-F238E27FC236}">
-                <a16:creationId xmlns:a16="http://schemas.microsoft.com/office/drawing/2014/main" id="{B429948F-422A-41D0-AD5B-9599A8B78EF5}"/>
+                <a16:creationId xmlns:a16="http://schemas.microsoft.com/office/drawing/2014/main" id="{3D86424E-4DD0-4CBB-9DD4-D025161FD951}"/>
               </a:ext>
             </a:extLst>
           </p:cNvPr>
@@ -17733,7 +17940,7 @@
           <p:cNvPr id="25" name="field-hint">
             <a:extLst xmlns:a="http://schemas.openxmlformats.org/drawingml/2006/main">
               <a:ext uri="{FF2B5EF4-FFF2-40B4-BE49-F238E27FC236}">
-                <a16:creationId xmlns:a16="http://schemas.microsoft.com/office/drawing/2014/main" id="{7CFD0A07-E706-4DDE-8DAA-187AEE936911}"/>
+                <a16:creationId xmlns:a16="http://schemas.microsoft.com/office/drawing/2014/main" id="{9AE94825-7CA9-4962-95DA-D2C50DFBBF96}"/>
               </a:ext>
             </a:extLst>
           </p:cNvPr>
@@ -17787,7 +17994,7 @@
     </p:spTree>
     <p:extLst>
       <p:ext uri="{BB962C8B-B14F-4D97-AF65-F5344CB8AC3E}">
-        <p14:creationId xmlns:p14="http://schemas.microsoft.com/office/powerpoint/2010/main" val="592245599"/>
+        <p14:creationId xmlns:p14="http://schemas.microsoft.com/office/powerpoint/2010/main" val="542819515"/>
       </p:ext>
     </p:extLst>
   </p:cSld>
@@ -17818,7 +18025,7 @@
           <p:cNvPr id="1" name="decor-ring-1">
             <a:extLst xmlns:a="http://schemas.openxmlformats.org/drawingml/2006/main">
               <a:ext uri="{FF2B5EF4-FFF2-40B4-BE49-F238E27FC236}">
-                <a16:creationId xmlns:a16="http://schemas.microsoft.com/office/drawing/2014/main" id="{5B273CF1-F808-4426-A3D6-3D1AF417003E}"/>
+                <a16:creationId xmlns:a16="http://schemas.microsoft.com/office/drawing/2014/main" id="{AB1511C1-162F-4A71-AEA9-0CFA4449A656}"/>
               </a:ext>
             </a:extLst>
           </p:cNvPr>
@@ -17849,7 +18056,7 @@
           <p:cNvPr id="2" name="decor-ring-2">
             <a:extLst xmlns:a="http://schemas.openxmlformats.org/drawingml/2006/main">
               <a:ext uri="{FF2B5EF4-FFF2-40B4-BE49-F238E27FC236}">
-                <a16:creationId xmlns:a16="http://schemas.microsoft.com/office/drawing/2014/main" id="{6DFB020D-7123-475D-B17B-B3E725A2AC1A}"/>
+                <a16:creationId xmlns:a16="http://schemas.microsoft.com/office/drawing/2014/main" id="{B3050360-770B-48E8-95CB-D12B4973C8DC}"/>
               </a:ext>
             </a:extLst>
           </p:cNvPr>
@@ -17880,7 +18087,7 @@
           <p:cNvPr id="3" name="decor-orb-1">
             <a:extLst xmlns:a="http://schemas.openxmlformats.org/drawingml/2006/main">
               <a:ext uri="{FF2B5EF4-FFF2-40B4-BE49-F238E27FC236}">
-                <a16:creationId xmlns:a16="http://schemas.microsoft.com/office/drawing/2014/main" id="{627A97EA-9CDB-4BC0-B587-A32EEA803A09}"/>
+                <a16:creationId xmlns:a16="http://schemas.microsoft.com/office/drawing/2014/main" id="{C49B0754-AA7E-4E65-9790-DF93BE30DA34}"/>
               </a:ext>
             </a:extLst>
           </p:cNvPr>
@@ -17911,7 +18118,7 @@
           <p:cNvPr id="4" name="decor-orb-2">
             <a:extLst xmlns:a="http://schemas.openxmlformats.org/drawingml/2006/main">
               <a:ext uri="{FF2B5EF4-FFF2-40B4-BE49-F238E27FC236}">
-                <a16:creationId xmlns:a16="http://schemas.microsoft.com/office/drawing/2014/main" id="{A2676AA8-4E01-44DC-8888-DB4D19F3EC12}"/>
+                <a16:creationId xmlns:a16="http://schemas.microsoft.com/office/drawing/2014/main" id="{A6EDA2A9-7AEC-47E0-820E-F7B55FBE2D4A}"/>
               </a:ext>
             </a:extLst>
           </p:cNvPr>
@@ -17942,7 +18149,7 @@
           <p:cNvPr id="5" name="title-bar">
             <a:extLst xmlns:a="http://schemas.openxmlformats.org/drawingml/2006/main">
               <a:ext uri="{FF2B5EF4-FFF2-40B4-BE49-F238E27FC236}">
-                <a16:creationId xmlns:a16="http://schemas.microsoft.com/office/drawing/2014/main" id="{91A47034-42CB-4B88-AFF1-5C5D95785B32}"/>
+                <a16:creationId xmlns:a16="http://schemas.microsoft.com/office/drawing/2014/main" id="{966B71EC-D1CB-4E42-9317-A4AE4F4CD7ED}"/>
               </a:ext>
             </a:extLst>
           </p:cNvPr>
@@ -17973,7 +18180,7 @@
           <p:cNvPr id="6" name="kicker">
             <a:extLst xmlns:a="http://schemas.openxmlformats.org/drawingml/2006/main">
               <a:ext uri="{FF2B5EF4-FFF2-40B4-BE49-F238E27FC236}">
-                <a16:creationId xmlns:a16="http://schemas.microsoft.com/office/drawing/2014/main" id="{D8A02FD8-4F86-48E5-9DDE-17F0FF8C58B6}"/>
+                <a16:creationId xmlns:a16="http://schemas.microsoft.com/office/drawing/2014/main" id="{BE42A063-98A0-46D6-A595-B16FD3367263}"/>
               </a:ext>
             </a:extLst>
           </p:cNvPr>
@@ -18029,7 +18236,7 @@
           <p:cNvPr id="7" name="title">
             <a:extLst xmlns:a="http://schemas.openxmlformats.org/drawingml/2006/main">
               <a:ext uri="{FF2B5EF4-FFF2-40B4-BE49-F238E27FC236}">
-                <a16:creationId xmlns:a16="http://schemas.microsoft.com/office/drawing/2014/main" id="{4D1FC69C-5CEA-402E-AC9D-976ECECFA6BA}"/>
+                <a16:creationId xmlns:a16="http://schemas.microsoft.com/office/drawing/2014/main" id="{45BBE718-2C02-4E1C-8088-6F0A290FDF52}"/>
               </a:ext>
             </a:extLst>
           </p:cNvPr>
@@ -18085,7 +18292,7 @@
           <p:cNvPr id="8" name="subtitle">
             <a:extLst xmlns:a="http://schemas.openxmlformats.org/drawingml/2006/main">
               <a:ext uri="{FF2B5EF4-FFF2-40B4-BE49-F238E27FC236}">
-                <a16:creationId xmlns:a16="http://schemas.microsoft.com/office/drawing/2014/main" id="{4A64562A-5F76-4E28-8A86-CC27FBEF1E69}"/>
+                <a16:creationId xmlns:a16="http://schemas.microsoft.com/office/drawing/2014/main" id="{29244BEE-8C75-4AE6-9594-CFB44AB4AA4D}"/>
               </a:ext>
             </a:extLst>
           </p:cNvPr>
@@ -18145,7 +18352,7 @@
           <p:nvPr/>
         </p:nvPicPr>
         <p:blipFill>
-          <a:blip xmlns:r="http://schemas.openxmlformats.org/officeDocument/2006/relationships" xmlns:a="http://schemas.openxmlformats.org/drawingml/2006/main" r:embed="Rae13b17eac8646ae"/>
+          <a:blip xmlns:r="http://schemas.openxmlformats.org/officeDocument/2006/relationships" xmlns:a="http://schemas.openxmlformats.org/drawingml/2006/main" r:embed="R6474dce9a9454ec0"/>
           <a:stretch xmlns:a="http://schemas.openxmlformats.org/drawingml/2006/main"/>
         </p:blipFill>
         <p:spPr>
@@ -18163,7 +18370,7 @@
           <p:cNvPr id="10" name="footer-number">
             <a:extLst xmlns:a="http://schemas.openxmlformats.org/drawingml/2006/main">
               <a:ext uri="{FF2B5EF4-FFF2-40B4-BE49-F238E27FC236}">
-                <a16:creationId xmlns:a16="http://schemas.microsoft.com/office/drawing/2014/main" id="{55D32648-B0FB-4D57-8487-2ED70357FA0A}"/>
+                <a16:creationId xmlns:a16="http://schemas.microsoft.com/office/drawing/2014/main" id="{9E174115-0BFA-48F6-AEFA-BCFD20DFCCE2}"/>
               </a:ext>
             </a:extLst>
           </p:cNvPr>
@@ -18219,7 +18426,7 @@
           <p:cNvPr id="11" name="card-01">
             <a:extLst xmlns:a="http://schemas.openxmlformats.org/drawingml/2006/main">
               <a:ext uri="{FF2B5EF4-FFF2-40B4-BE49-F238E27FC236}">
-                <a16:creationId xmlns:a16="http://schemas.microsoft.com/office/drawing/2014/main" id="{5E218739-2542-459D-BEFE-9CF5BEEB03F4}"/>
+                <a16:creationId xmlns:a16="http://schemas.microsoft.com/office/drawing/2014/main" id="{524A5F19-F8B1-40CF-829F-44D615AB7C5C}"/>
               </a:ext>
             </a:extLst>
           </p:cNvPr>
@@ -18260,7 +18467,7 @@
           <p:cNvPr id="12" name="card-accent">
             <a:extLst xmlns:a="http://schemas.openxmlformats.org/drawingml/2006/main">
               <a:ext uri="{FF2B5EF4-FFF2-40B4-BE49-F238E27FC236}">
-                <a16:creationId xmlns:a16="http://schemas.microsoft.com/office/drawing/2014/main" id="{A178FEDA-6879-4D5F-9193-27158CB4CBB4}"/>
+                <a16:creationId xmlns:a16="http://schemas.microsoft.com/office/drawing/2014/main" id="{CA458BA1-A0C4-4E5B-8DB6-85168AF9BFBD}"/>
               </a:ext>
             </a:extLst>
           </p:cNvPr>
@@ -18291,7 +18498,7 @@
           <p:cNvPr id="13" name="card-label">
             <a:extLst xmlns:a="http://schemas.openxmlformats.org/drawingml/2006/main">
               <a:ext uri="{FF2B5EF4-FFF2-40B4-BE49-F238E27FC236}">
-                <a16:creationId xmlns:a16="http://schemas.microsoft.com/office/drawing/2014/main" id="{95E4696B-E20B-4431-9900-6C185DD38421}"/>
+                <a16:creationId xmlns:a16="http://schemas.microsoft.com/office/drawing/2014/main" id="{EEE226C5-8314-4BDF-AC95-6AF11B7F1431}"/>
               </a:ext>
             </a:extLst>
           </p:cNvPr>
@@ -18347,7 +18554,7 @@
           <p:cNvPr id="14" name="card-title">
             <a:extLst xmlns:a="http://schemas.openxmlformats.org/drawingml/2006/main">
               <a:ext uri="{FF2B5EF4-FFF2-40B4-BE49-F238E27FC236}">
-                <a16:creationId xmlns:a16="http://schemas.microsoft.com/office/drawing/2014/main" id="{C6226266-7C55-4233-A731-A10CAE4AEFC1}"/>
+                <a16:creationId xmlns:a16="http://schemas.microsoft.com/office/drawing/2014/main" id="{6C22355B-DFAC-4D5C-BA0B-1E732587A312}"/>
               </a:ext>
             </a:extLst>
           </p:cNvPr>
@@ -18403,7 +18610,7 @@
           <p:cNvPr id="15" name="card-body">
             <a:extLst xmlns:a="http://schemas.openxmlformats.org/drawingml/2006/main">
               <a:ext uri="{FF2B5EF4-FFF2-40B4-BE49-F238E27FC236}">
-                <a16:creationId xmlns:a16="http://schemas.microsoft.com/office/drawing/2014/main" id="{DE79F4AC-68B1-4185-B4F8-BBD1EA74562E}"/>
+                <a16:creationId xmlns:a16="http://schemas.microsoft.com/office/drawing/2014/main" id="{B165A5BD-310D-418D-A79A-1B5234BDCEBC}"/>
               </a:ext>
             </a:extLst>
           </p:cNvPr>
@@ -18449,7 +18656,7 @@
                 <a:ea typeface="Pretendard"/>
                 <a:cs typeface="Pretendard"/>
               </a:rPr>
-              <a:t>반복, 병목, 검토, 보고, 현업</a:t>
+              <a:t>반복, 병목, 검토, 보고,</a:t>
             </a:r>
           </a:p>
           <a:p xmlns:a="http://schemas.openxmlformats.org/drawingml/2006/main">
@@ -18472,7 +18679,7 @@
                 <a:ea typeface="Pretendard"/>
                 <a:cs typeface="Pretendard"/>
               </a:rPr>
-              <a:t>요청 중 하나를 한 문장으로</a:t>
+              <a:t>현업 요청 중 하나를 한</a:t>
             </a:r>
           </a:p>
           <a:p xmlns:a="http://schemas.openxmlformats.org/drawingml/2006/main">
@@ -18495,7 +18702,7 @@
                 <a:ea typeface="Pretendard"/>
                 <a:cs typeface="Pretendard"/>
               </a:rPr>
-              <a:t>고정합니다.</a:t>
+              <a:t>문장으로 고정합니다.</a:t>
             </a:r>
           </a:p>
         </p:txBody>
@@ -18505,7 +18712,7 @@
           <p:cNvPr id="16" name="card-02">
             <a:extLst xmlns:a="http://schemas.openxmlformats.org/drawingml/2006/main">
               <a:ext uri="{FF2B5EF4-FFF2-40B4-BE49-F238E27FC236}">
-                <a16:creationId xmlns:a16="http://schemas.microsoft.com/office/drawing/2014/main" id="{42738C4E-E4CA-407B-B8E0-E1EB5AED873B}"/>
+                <a16:creationId xmlns:a16="http://schemas.microsoft.com/office/drawing/2014/main" id="{80656AA2-72DF-4321-8AE9-EB2153398B3A}"/>
               </a:ext>
             </a:extLst>
           </p:cNvPr>
@@ -18546,7 +18753,7 @@
           <p:cNvPr id="17" name="card-accent">
             <a:extLst xmlns:a="http://schemas.openxmlformats.org/drawingml/2006/main">
               <a:ext uri="{FF2B5EF4-FFF2-40B4-BE49-F238E27FC236}">
-                <a16:creationId xmlns:a16="http://schemas.microsoft.com/office/drawing/2014/main" id="{A1D566AF-B5EB-40C8-BC66-084AB4FF4F37}"/>
+                <a16:creationId xmlns:a16="http://schemas.microsoft.com/office/drawing/2014/main" id="{A6E35CC6-6A41-42D1-8643-96E1123E0E29}"/>
               </a:ext>
             </a:extLst>
           </p:cNvPr>
@@ -18577,7 +18784,7 @@
           <p:cNvPr id="18" name="card-label">
             <a:extLst xmlns:a="http://schemas.openxmlformats.org/drawingml/2006/main">
               <a:ext uri="{FF2B5EF4-FFF2-40B4-BE49-F238E27FC236}">
-                <a16:creationId xmlns:a16="http://schemas.microsoft.com/office/drawing/2014/main" id="{CEFCD0B3-6291-42E0-B755-FF0526CD37BE}"/>
+                <a16:creationId xmlns:a16="http://schemas.microsoft.com/office/drawing/2014/main" id="{7840122E-AE1B-41B6-AE80-AE0C1AF2D186}"/>
               </a:ext>
             </a:extLst>
           </p:cNvPr>
@@ -18633,7 +18840,7 @@
           <p:cNvPr id="19" name="card-title">
             <a:extLst xmlns:a="http://schemas.openxmlformats.org/drawingml/2006/main">
               <a:ext uri="{FF2B5EF4-FFF2-40B4-BE49-F238E27FC236}">
-                <a16:creationId xmlns:a16="http://schemas.microsoft.com/office/drawing/2014/main" id="{F73CE19A-223D-48B3-9526-461362A6E646}"/>
+                <a16:creationId xmlns:a16="http://schemas.microsoft.com/office/drawing/2014/main" id="{458660EB-551A-4B03-A5C6-A197470D20C0}"/>
               </a:ext>
             </a:extLst>
           </p:cNvPr>
@@ -18689,7 +18896,7 @@
           <p:cNvPr id="20" name="card-body">
             <a:extLst xmlns:a="http://schemas.openxmlformats.org/drawingml/2006/main">
               <a:ext uri="{FF2B5EF4-FFF2-40B4-BE49-F238E27FC236}">
-                <a16:creationId xmlns:a16="http://schemas.microsoft.com/office/drawing/2014/main" id="{DF2E97FC-09AB-4269-952A-4B9D80F3F8B4}"/>
+                <a16:creationId xmlns:a16="http://schemas.microsoft.com/office/drawing/2014/main" id="{023BDDFC-70D7-4B12-AC99-09B66F0C6CE6}"/>
               </a:ext>
             </a:extLst>
           </p:cNvPr>
@@ -18735,7 +18942,7 @@
                 <a:ea typeface="Pretendard"/>
                 <a:cs typeface="Pretendard"/>
               </a:rPr>
-              <a:t>검색, 분류, 요약, 초안 작성,</a:t>
+              <a:t>검색, 분류, 요약, 초안</a:t>
             </a:r>
           </a:p>
           <a:p xmlns:a="http://schemas.openxmlformats.org/drawingml/2006/main">
@@ -18758,7 +18965,7 @@
                 <a:ea typeface="Pretendard"/>
                 <a:cs typeface="Pretendard"/>
               </a:rPr>
-              <a:t>코드 생성, 체크리스트 검증 중</a:t>
+              <a:t>작성, 코드 생성, 체크리스트</a:t>
             </a:r>
           </a:p>
           <a:p xmlns:a="http://schemas.openxmlformats.org/drawingml/2006/main">
@@ -18781,7 +18988,7 @@
                 <a:ea typeface="Pretendard"/>
                 <a:cs typeface="Pretendard"/>
               </a:rPr>
-              <a:t>역할을 정합니다.</a:t>
+              <a:t>검증 중 역할을 정합니다.</a:t>
             </a:r>
           </a:p>
         </p:txBody>
@@ -18791,7 +18998,7 @@
           <p:cNvPr id="21" name="card-03">
             <a:extLst xmlns:a="http://schemas.openxmlformats.org/drawingml/2006/main">
               <a:ext uri="{FF2B5EF4-FFF2-40B4-BE49-F238E27FC236}">
-                <a16:creationId xmlns:a16="http://schemas.microsoft.com/office/drawing/2014/main" id="{F43444EE-C134-455E-9E6B-50DDE17B08AC}"/>
+                <a16:creationId xmlns:a16="http://schemas.microsoft.com/office/drawing/2014/main" id="{A77345AB-CA97-41AB-ADEE-F03C2C0BC3A7}"/>
               </a:ext>
             </a:extLst>
           </p:cNvPr>
@@ -18832,7 +19039,7 @@
           <p:cNvPr id="22" name="card-accent">
             <a:extLst xmlns:a="http://schemas.openxmlformats.org/drawingml/2006/main">
               <a:ext uri="{FF2B5EF4-FFF2-40B4-BE49-F238E27FC236}">
-                <a16:creationId xmlns:a16="http://schemas.microsoft.com/office/drawing/2014/main" id="{CC19A7D3-274A-4E54-993B-3BC4F74213F0}"/>
+                <a16:creationId xmlns:a16="http://schemas.microsoft.com/office/drawing/2014/main" id="{8513BCBD-CA1A-4B4E-99C7-9D8005EF7EFB}"/>
               </a:ext>
             </a:extLst>
           </p:cNvPr>
@@ -18863,7 +19070,7 @@
           <p:cNvPr id="23" name="card-label">
             <a:extLst xmlns:a="http://schemas.openxmlformats.org/drawingml/2006/main">
               <a:ext uri="{FF2B5EF4-FFF2-40B4-BE49-F238E27FC236}">
-                <a16:creationId xmlns:a16="http://schemas.microsoft.com/office/drawing/2014/main" id="{D409CF4F-37E4-47B8-87C6-D557ED106807}"/>
+                <a16:creationId xmlns:a16="http://schemas.microsoft.com/office/drawing/2014/main" id="{E8EBE777-D7E2-435D-98FD-096C45AA07E3}"/>
               </a:ext>
             </a:extLst>
           </p:cNvPr>
@@ -18919,7 +19126,7 @@
           <p:cNvPr id="24" name="card-title">
             <a:extLst xmlns:a="http://schemas.openxmlformats.org/drawingml/2006/main">
               <a:ext uri="{FF2B5EF4-FFF2-40B4-BE49-F238E27FC236}">
-                <a16:creationId xmlns:a16="http://schemas.microsoft.com/office/drawing/2014/main" id="{8ED70E65-5DA2-4369-A8E6-798BDC889473}"/>
+                <a16:creationId xmlns:a16="http://schemas.microsoft.com/office/drawing/2014/main" id="{53FA9735-CF34-47B8-A81A-2F682A2937B6}"/>
               </a:ext>
             </a:extLst>
           </p:cNvPr>
@@ -18975,7 +19182,7 @@
           <p:cNvPr id="25" name="card-body">
             <a:extLst xmlns:a="http://schemas.openxmlformats.org/drawingml/2006/main">
               <a:ext uri="{FF2B5EF4-FFF2-40B4-BE49-F238E27FC236}">
-                <a16:creationId xmlns:a16="http://schemas.microsoft.com/office/drawing/2014/main" id="{F72AC96E-CF2A-43AE-A643-201FE5AC9AF5}"/>
+                <a16:creationId xmlns:a16="http://schemas.microsoft.com/office/drawing/2014/main" id="{42011DE9-F2A8-4BF4-95F6-497487D0EBA5}"/>
               </a:ext>
             </a:extLst>
           </p:cNvPr>
@@ -19021,7 +19228,7 @@
                 <a:ea typeface="Pretendard"/>
                 <a:cs typeface="Pretendard"/>
               </a:rPr>
-              <a:t>정확도, 보안, 승인, 대외 전달</a:t>
+              <a:t>정확도, 보안, 승인, 대외</a:t>
             </a:r>
           </a:p>
           <a:p xmlns:a="http://schemas.openxmlformats.org/drawingml/2006/main">
@@ -19044,7 +19251,7 @@
                 <a:ea typeface="Pretendard"/>
                 <a:cs typeface="Pretendard"/>
               </a:rPr>
-              <a:t>여부 등 확인 지점을 먼저</a:t>
+              <a:t>전달 여부 등 확인 지점을</a:t>
             </a:r>
           </a:p>
           <a:p xmlns:a="http://schemas.openxmlformats.org/drawingml/2006/main">
@@ -19067,7 +19274,7 @@
                 <a:ea typeface="Pretendard"/>
                 <a:cs typeface="Pretendard"/>
               </a:rPr>
-              <a:t>정합니다.</a:t>
+              <a:t>먼저 정합니다.</a:t>
             </a:r>
           </a:p>
         </p:txBody>
@@ -19077,7 +19284,7 @@
           <p:cNvPr id="26" name="card-04">
             <a:extLst xmlns:a="http://schemas.openxmlformats.org/drawingml/2006/main">
               <a:ext uri="{FF2B5EF4-FFF2-40B4-BE49-F238E27FC236}">
-                <a16:creationId xmlns:a16="http://schemas.microsoft.com/office/drawing/2014/main" id="{30C44CA6-0250-4F4F-BB99-90B8EB102731}"/>
+                <a16:creationId xmlns:a16="http://schemas.microsoft.com/office/drawing/2014/main" id="{231B5F81-7262-4BA3-80FA-28E50DC42289}"/>
               </a:ext>
             </a:extLst>
           </p:cNvPr>
@@ -19118,7 +19325,7 @@
           <p:cNvPr id="27" name="card-accent">
             <a:extLst xmlns:a="http://schemas.openxmlformats.org/drawingml/2006/main">
               <a:ext uri="{FF2B5EF4-FFF2-40B4-BE49-F238E27FC236}">
-                <a16:creationId xmlns:a16="http://schemas.microsoft.com/office/drawing/2014/main" id="{25CF4B6C-0B55-4A18-843A-1C45F9980707}"/>
+                <a16:creationId xmlns:a16="http://schemas.microsoft.com/office/drawing/2014/main" id="{3848322E-FFC1-49CC-A4C7-B69AC035FB2F}"/>
               </a:ext>
             </a:extLst>
           </p:cNvPr>
@@ -19149,7 +19356,7 @@
           <p:cNvPr id="28" name="card-label">
             <a:extLst xmlns:a="http://schemas.openxmlformats.org/drawingml/2006/main">
               <a:ext uri="{FF2B5EF4-FFF2-40B4-BE49-F238E27FC236}">
-                <a16:creationId xmlns:a16="http://schemas.microsoft.com/office/drawing/2014/main" id="{C24343A2-1915-4228-B317-2108734FA436}"/>
+                <a16:creationId xmlns:a16="http://schemas.microsoft.com/office/drawing/2014/main" id="{5F49D464-3100-4B5C-94BB-3997CF2D7AAD}"/>
               </a:ext>
             </a:extLst>
           </p:cNvPr>
@@ -19205,7 +19412,7 @@
           <p:cNvPr id="29" name="card-title">
             <a:extLst xmlns:a="http://schemas.openxmlformats.org/drawingml/2006/main">
               <a:ext uri="{FF2B5EF4-FFF2-40B4-BE49-F238E27FC236}">
-                <a16:creationId xmlns:a16="http://schemas.microsoft.com/office/drawing/2014/main" id="{DC19EDC7-9EAD-4847-ABB5-6B0D3F18B6DD}"/>
+                <a16:creationId xmlns:a16="http://schemas.microsoft.com/office/drawing/2014/main" id="{998749A6-749B-4107-ADBC-E2300705DA4C}"/>
               </a:ext>
             </a:extLst>
           </p:cNvPr>
@@ -19261,7 +19468,7 @@
           <p:cNvPr id="30" name="card-body">
             <a:extLst xmlns:a="http://schemas.openxmlformats.org/drawingml/2006/main">
               <a:ext uri="{FF2B5EF4-FFF2-40B4-BE49-F238E27FC236}">
-                <a16:creationId xmlns:a16="http://schemas.microsoft.com/office/drawing/2014/main" id="{6D33E4D3-7FF3-4FA2-B7D8-7F39617638E8}"/>
+                <a16:creationId xmlns:a16="http://schemas.microsoft.com/office/drawing/2014/main" id="{48292CBC-8292-4A71-83A3-A2F9E958638B}"/>
               </a:ext>
             </a:extLst>
           </p:cNvPr>
@@ -19307,7 +19514,7 @@
                 <a:ea typeface="Pretendard"/>
                 <a:cs typeface="Pretendard"/>
               </a:rPr>
-              <a:t>완성품이 아니라 8시간 안에</a:t>
+              <a:t>8시간 안에 시연할</a:t>
             </a:r>
           </a:p>
           <a:p xmlns:a="http://schemas.openxmlformats.org/drawingml/2006/main">
@@ -19330,7 +19537,7 @@
                 <a:ea typeface="Pretendard"/>
                 <a:cs typeface="Pretendard"/>
               </a:rPr>
-              <a:t>시연할 핵심 흐름을 정의합니다.</a:t>
+              <a:t>흐름을 정합니다.</a:t>
             </a:r>
           </a:p>
         </p:txBody>
@@ -19340,7 +19547,7 @@
           <p:cNvPr id="31" name="timeline-cell">
             <a:extLst xmlns:a="http://schemas.openxmlformats.org/drawingml/2006/main">
               <a:ext uri="{FF2B5EF4-FFF2-40B4-BE49-F238E27FC236}">
-                <a16:creationId xmlns:a16="http://schemas.microsoft.com/office/drawing/2014/main" id="{1997E5BE-5DD2-4002-B692-166F8FF2EB44}"/>
+                <a16:creationId xmlns:a16="http://schemas.microsoft.com/office/drawing/2014/main" id="{5F104748-F0EF-4A2E-ABF6-D41595B0CF7B}"/>
               </a:ext>
             </a:extLst>
           </p:cNvPr>
@@ -19375,7 +19582,7 @@
           <p:cNvPr id="32" name="timeline-time">
             <a:extLst xmlns:a="http://schemas.openxmlformats.org/drawingml/2006/main">
               <a:ext uri="{FF2B5EF4-FFF2-40B4-BE49-F238E27FC236}">
-                <a16:creationId xmlns:a16="http://schemas.microsoft.com/office/drawing/2014/main" id="{2C3C9589-61BA-46C7-B422-65D86207714F}"/>
+                <a16:creationId xmlns:a16="http://schemas.microsoft.com/office/drawing/2014/main" id="{9E0F7EE5-D744-4871-97F6-A588810C8E05}"/>
               </a:ext>
             </a:extLst>
           </p:cNvPr>
@@ -19431,7 +19638,7 @@
           <p:cNvPr id="33" name="timeline-text">
             <a:extLst xmlns:a="http://schemas.openxmlformats.org/drawingml/2006/main">
               <a:ext uri="{FF2B5EF4-FFF2-40B4-BE49-F238E27FC236}">
-                <a16:creationId xmlns:a16="http://schemas.microsoft.com/office/drawing/2014/main" id="{32E38E7A-E28D-40A8-8EFC-DD329CEB78BC}"/>
+                <a16:creationId xmlns:a16="http://schemas.microsoft.com/office/drawing/2014/main" id="{A636C6C5-B7B9-4A17-89F6-704C30A28B7E}"/>
               </a:ext>
             </a:extLst>
           </p:cNvPr>
@@ -19487,7 +19694,7 @@
           <p:cNvPr id="34" name="timeline-cell">
             <a:extLst xmlns:a="http://schemas.openxmlformats.org/drawingml/2006/main">
               <a:ext uri="{FF2B5EF4-FFF2-40B4-BE49-F238E27FC236}">
-                <a16:creationId xmlns:a16="http://schemas.microsoft.com/office/drawing/2014/main" id="{793A48F3-9063-499B-8983-36209285F7FB}"/>
+                <a16:creationId xmlns:a16="http://schemas.microsoft.com/office/drawing/2014/main" id="{2DE8228A-5C32-43DE-83C5-EBFE1C9DD765}"/>
               </a:ext>
             </a:extLst>
           </p:cNvPr>
@@ -19522,7 +19729,7 @@
           <p:cNvPr id="35" name="timeline-time">
             <a:extLst xmlns:a="http://schemas.openxmlformats.org/drawingml/2006/main">
               <a:ext uri="{FF2B5EF4-FFF2-40B4-BE49-F238E27FC236}">
-                <a16:creationId xmlns:a16="http://schemas.microsoft.com/office/drawing/2014/main" id="{1F6E7085-3A29-42A8-84E6-D4D20EED9C42}"/>
+                <a16:creationId xmlns:a16="http://schemas.microsoft.com/office/drawing/2014/main" id="{B30E8AFF-0409-494B-8700-09A469165916}"/>
               </a:ext>
             </a:extLst>
           </p:cNvPr>
@@ -19578,7 +19785,7 @@
           <p:cNvPr id="36" name="timeline-text">
             <a:extLst xmlns:a="http://schemas.openxmlformats.org/drawingml/2006/main">
               <a:ext uri="{FF2B5EF4-FFF2-40B4-BE49-F238E27FC236}">
-                <a16:creationId xmlns:a16="http://schemas.microsoft.com/office/drawing/2014/main" id="{1CFFC771-E6D2-4D5E-BE6E-FC859897D21E}"/>
+                <a16:creationId xmlns:a16="http://schemas.microsoft.com/office/drawing/2014/main" id="{E46BC1E3-E392-4AC2-9F56-D13F28CC99A7}"/>
               </a:ext>
             </a:extLst>
           </p:cNvPr>
@@ -19634,7 +19841,7 @@
           <p:cNvPr id="37" name="timeline-cell">
             <a:extLst xmlns:a="http://schemas.openxmlformats.org/drawingml/2006/main">
               <a:ext uri="{FF2B5EF4-FFF2-40B4-BE49-F238E27FC236}">
-                <a16:creationId xmlns:a16="http://schemas.microsoft.com/office/drawing/2014/main" id="{DA7DB428-F015-4402-AD22-97DFC21A42D9}"/>
+                <a16:creationId xmlns:a16="http://schemas.microsoft.com/office/drawing/2014/main" id="{DFD63620-2CFD-4E5D-BF2C-7C4B71EEC5B9}"/>
               </a:ext>
             </a:extLst>
           </p:cNvPr>
@@ -19669,7 +19876,7 @@
           <p:cNvPr id="38" name="timeline-time">
             <a:extLst xmlns:a="http://schemas.openxmlformats.org/drawingml/2006/main">
               <a:ext uri="{FF2B5EF4-FFF2-40B4-BE49-F238E27FC236}">
-                <a16:creationId xmlns:a16="http://schemas.microsoft.com/office/drawing/2014/main" id="{10D97FCC-C232-428D-AAC5-30D9A04946F5}"/>
+                <a16:creationId xmlns:a16="http://schemas.microsoft.com/office/drawing/2014/main" id="{257222FD-E6EB-4AEC-A260-53FBFA8D2A56}"/>
               </a:ext>
             </a:extLst>
           </p:cNvPr>
@@ -19725,7 +19932,7 @@
           <p:cNvPr id="39" name="timeline-text">
             <a:extLst xmlns:a="http://schemas.openxmlformats.org/drawingml/2006/main">
               <a:ext uri="{FF2B5EF4-FFF2-40B4-BE49-F238E27FC236}">
-                <a16:creationId xmlns:a16="http://schemas.microsoft.com/office/drawing/2014/main" id="{92F50601-9ACA-4857-9899-D2C482C6C8B9}"/>
+                <a16:creationId xmlns:a16="http://schemas.microsoft.com/office/drawing/2014/main" id="{7EE46B49-19A4-479F-BE44-04BFD30A34D2}"/>
               </a:ext>
             </a:extLst>
           </p:cNvPr>
@@ -19781,7 +19988,7 @@
           <p:cNvPr id="40" name="timeline-cell">
             <a:extLst xmlns:a="http://schemas.openxmlformats.org/drawingml/2006/main">
               <a:ext uri="{FF2B5EF4-FFF2-40B4-BE49-F238E27FC236}">
-                <a16:creationId xmlns:a16="http://schemas.microsoft.com/office/drawing/2014/main" id="{CFD862F7-8EDF-4B8B-A4C6-1BBBB6D95DC9}"/>
+                <a16:creationId xmlns:a16="http://schemas.microsoft.com/office/drawing/2014/main" id="{4C08FFC6-C745-4325-9A8C-1A4A6118CA88}"/>
               </a:ext>
             </a:extLst>
           </p:cNvPr>
@@ -19816,7 +20023,7 @@
           <p:cNvPr id="41" name="timeline-time">
             <a:extLst xmlns:a="http://schemas.openxmlformats.org/drawingml/2006/main">
               <a:ext uri="{FF2B5EF4-FFF2-40B4-BE49-F238E27FC236}">
-                <a16:creationId xmlns:a16="http://schemas.microsoft.com/office/drawing/2014/main" id="{0065B7BD-C778-4E2A-98F5-B84996EAF727}"/>
+                <a16:creationId xmlns:a16="http://schemas.microsoft.com/office/drawing/2014/main" id="{09482E64-EC53-44FF-8BA8-31296A6075D5}"/>
               </a:ext>
             </a:extLst>
           </p:cNvPr>
@@ -19872,7 +20079,7 @@
           <p:cNvPr id="42" name="timeline-text">
             <a:extLst xmlns:a="http://schemas.openxmlformats.org/drawingml/2006/main">
               <a:ext uri="{FF2B5EF4-FFF2-40B4-BE49-F238E27FC236}">
-                <a16:creationId xmlns:a16="http://schemas.microsoft.com/office/drawing/2014/main" id="{5BCAFFDB-BCE6-49E4-BEC3-A227D9F494F3}"/>
+                <a16:creationId xmlns:a16="http://schemas.microsoft.com/office/drawing/2014/main" id="{76B4B770-79D6-48E3-A111-5789B9216D8A}"/>
               </a:ext>
             </a:extLst>
           </p:cNvPr>
@@ -19928,7 +20135,7 @@
           <p:cNvPr id="43" name="timeline-cell">
             <a:extLst xmlns:a="http://schemas.openxmlformats.org/drawingml/2006/main">
               <a:ext uri="{FF2B5EF4-FFF2-40B4-BE49-F238E27FC236}">
-                <a16:creationId xmlns:a16="http://schemas.microsoft.com/office/drawing/2014/main" id="{AD5AA740-B801-47E7-8140-05A5EDABF7A5}"/>
+                <a16:creationId xmlns:a16="http://schemas.microsoft.com/office/drawing/2014/main" id="{3629847F-42C3-4811-890B-75498E0A0D71}"/>
               </a:ext>
             </a:extLst>
           </p:cNvPr>
@@ -19963,7 +20170,7 @@
           <p:cNvPr id="44" name="timeline-time">
             <a:extLst xmlns:a="http://schemas.openxmlformats.org/drawingml/2006/main">
               <a:ext uri="{FF2B5EF4-FFF2-40B4-BE49-F238E27FC236}">
-                <a16:creationId xmlns:a16="http://schemas.microsoft.com/office/drawing/2014/main" id="{E2946291-A7D9-4C23-826F-5A3383594848}"/>
+                <a16:creationId xmlns:a16="http://schemas.microsoft.com/office/drawing/2014/main" id="{3954951F-E009-42E9-94E8-5A333A18D0A2}"/>
               </a:ext>
             </a:extLst>
           </p:cNvPr>
@@ -20019,7 +20226,7 @@
           <p:cNvPr id="45" name="timeline-text">
             <a:extLst xmlns:a="http://schemas.openxmlformats.org/drawingml/2006/main">
               <a:ext uri="{FF2B5EF4-FFF2-40B4-BE49-F238E27FC236}">
-                <a16:creationId xmlns:a16="http://schemas.microsoft.com/office/drawing/2014/main" id="{E1D93BB2-BD74-432F-ADD2-2AFAC6B5B783}"/>
+                <a16:creationId xmlns:a16="http://schemas.microsoft.com/office/drawing/2014/main" id="{C792A280-A0B5-4807-84D8-8389F71145C6}"/>
               </a:ext>
             </a:extLst>
           </p:cNvPr>
@@ -20075,7 +20282,7 @@
           <p:cNvPr id="46" name="timeline-cell">
             <a:extLst xmlns:a="http://schemas.openxmlformats.org/drawingml/2006/main">
               <a:ext uri="{FF2B5EF4-FFF2-40B4-BE49-F238E27FC236}">
-                <a16:creationId xmlns:a16="http://schemas.microsoft.com/office/drawing/2014/main" id="{8DF13A3E-8CD8-400E-98DB-1DAE6BAC6C03}"/>
+                <a16:creationId xmlns:a16="http://schemas.microsoft.com/office/drawing/2014/main" id="{949F2620-7CEA-4FA4-98D2-823A480119AA}"/>
               </a:ext>
             </a:extLst>
           </p:cNvPr>
@@ -20110,7 +20317,7 @@
           <p:cNvPr id="47" name="timeline-time">
             <a:extLst xmlns:a="http://schemas.openxmlformats.org/drawingml/2006/main">
               <a:ext uri="{FF2B5EF4-FFF2-40B4-BE49-F238E27FC236}">
-                <a16:creationId xmlns:a16="http://schemas.microsoft.com/office/drawing/2014/main" id="{86EA0DBB-AB67-4FE8-AA9F-FFD766DFEB89}"/>
+                <a16:creationId xmlns:a16="http://schemas.microsoft.com/office/drawing/2014/main" id="{D1A468EA-3C94-4836-9D5C-264EBD6F968B}"/>
               </a:ext>
             </a:extLst>
           </p:cNvPr>
@@ -20166,7 +20373,7 @@
           <p:cNvPr id="48" name="timeline-text">
             <a:extLst xmlns:a="http://schemas.openxmlformats.org/drawingml/2006/main">
               <a:ext uri="{FF2B5EF4-FFF2-40B4-BE49-F238E27FC236}">
-                <a16:creationId xmlns:a16="http://schemas.microsoft.com/office/drawing/2014/main" id="{22BBECF3-1B67-4513-B8AB-1BE7E43CC3C4}"/>
+                <a16:creationId xmlns:a16="http://schemas.microsoft.com/office/drawing/2014/main" id="{E400876B-31E1-40AA-9430-35E2EF4E53A1}"/>
               </a:ext>
             </a:extLst>
           </p:cNvPr>
@@ -20220,7 +20427,7 @@
     </p:spTree>
     <p:extLst>
       <p:ext uri="{BB962C8B-B14F-4D97-AF65-F5344CB8AC3E}">
-        <p14:creationId xmlns:p14="http://schemas.microsoft.com/office/powerpoint/2010/main" val="1401795774"/>
+        <p14:creationId xmlns:p14="http://schemas.microsoft.com/office/powerpoint/2010/main" val="1017206844"/>
       </p:ext>
     </p:extLst>
   </p:cSld>
@@ -20251,7 +20458,7 @@
           <p:cNvPr id="1" name="decor-ring-1">
             <a:extLst xmlns:a="http://schemas.openxmlformats.org/drawingml/2006/main">
               <a:ext uri="{FF2B5EF4-FFF2-40B4-BE49-F238E27FC236}">
-                <a16:creationId xmlns:a16="http://schemas.microsoft.com/office/drawing/2014/main" id="{9D1C629B-413F-4769-8F26-ADC8600A00A9}"/>
+                <a16:creationId xmlns:a16="http://schemas.microsoft.com/office/drawing/2014/main" id="{E93156E7-C549-48CF-B2C8-9C24A929508A}"/>
               </a:ext>
             </a:extLst>
           </p:cNvPr>
@@ -20282,7 +20489,7 @@
           <p:cNvPr id="2" name="decor-ring-2">
             <a:extLst xmlns:a="http://schemas.openxmlformats.org/drawingml/2006/main">
               <a:ext uri="{FF2B5EF4-FFF2-40B4-BE49-F238E27FC236}">
-                <a16:creationId xmlns:a16="http://schemas.microsoft.com/office/drawing/2014/main" id="{42197386-B3E9-428C-8F6F-14E56138720F}"/>
+                <a16:creationId xmlns:a16="http://schemas.microsoft.com/office/drawing/2014/main" id="{338600D3-17B4-41C4-AADA-AB7F2448A6F4}"/>
               </a:ext>
             </a:extLst>
           </p:cNvPr>
@@ -20313,7 +20520,7 @@
           <p:cNvPr id="3" name="decor-orb-1">
             <a:extLst xmlns:a="http://schemas.openxmlformats.org/drawingml/2006/main">
               <a:ext uri="{FF2B5EF4-FFF2-40B4-BE49-F238E27FC236}">
-                <a16:creationId xmlns:a16="http://schemas.microsoft.com/office/drawing/2014/main" id="{5AEED236-BEE1-4DE1-A0F9-F2DEB279114D}"/>
+                <a16:creationId xmlns:a16="http://schemas.microsoft.com/office/drawing/2014/main" id="{8E51BE70-75B8-47C2-9BC1-90CB1A9BB714}"/>
               </a:ext>
             </a:extLst>
           </p:cNvPr>
@@ -20344,7 +20551,7 @@
           <p:cNvPr id="4" name="decor-orb-2">
             <a:extLst xmlns:a="http://schemas.openxmlformats.org/drawingml/2006/main">
               <a:ext uri="{FF2B5EF4-FFF2-40B4-BE49-F238E27FC236}">
-                <a16:creationId xmlns:a16="http://schemas.microsoft.com/office/drawing/2014/main" id="{EB748909-502A-4BD9-8445-C806E48DA4BA}"/>
+                <a16:creationId xmlns:a16="http://schemas.microsoft.com/office/drawing/2014/main" id="{D7B41448-ADF8-4D88-B16E-D40D756FEF74}"/>
               </a:ext>
             </a:extLst>
           </p:cNvPr>
@@ -20375,7 +20582,7 @@
           <p:cNvPr id="5" name="title-bar">
             <a:extLst xmlns:a="http://schemas.openxmlformats.org/drawingml/2006/main">
               <a:ext uri="{FF2B5EF4-FFF2-40B4-BE49-F238E27FC236}">
-                <a16:creationId xmlns:a16="http://schemas.microsoft.com/office/drawing/2014/main" id="{254AA02D-1C36-47EA-B43A-C7DA7A96DC6C}"/>
+                <a16:creationId xmlns:a16="http://schemas.microsoft.com/office/drawing/2014/main" id="{B8EB73AD-A9B8-44B6-AAC2-B66ADB26417C}"/>
               </a:ext>
             </a:extLst>
           </p:cNvPr>
@@ -20406,7 +20613,7 @@
           <p:cNvPr id="6" name="kicker">
             <a:extLst xmlns:a="http://schemas.openxmlformats.org/drawingml/2006/main">
               <a:ext uri="{FF2B5EF4-FFF2-40B4-BE49-F238E27FC236}">
-                <a16:creationId xmlns:a16="http://schemas.microsoft.com/office/drawing/2014/main" id="{D1DE4390-5772-4810-ABF3-2EB6E649554E}"/>
+                <a16:creationId xmlns:a16="http://schemas.microsoft.com/office/drawing/2014/main" id="{1A29E77A-3170-4367-81DD-0D4DD1CE26C2}"/>
               </a:ext>
             </a:extLst>
           </p:cNvPr>
@@ -20462,7 +20669,7 @@
           <p:cNvPr id="7" name="title">
             <a:extLst xmlns:a="http://schemas.openxmlformats.org/drawingml/2006/main">
               <a:ext uri="{FF2B5EF4-FFF2-40B4-BE49-F238E27FC236}">
-                <a16:creationId xmlns:a16="http://schemas.microsoft.com/office/drawing/2014/main" id="{93474263-267B-4ADB-BCE5-71CAB55B59BA}"/>
+                <a16:creationId xmlns:a16="http://schemas.microsoft.com/office/drawing/2014/main" id="{25332C6B-66CF-4E45-9285-44CCA812CB27}"/>
               </a:ext>
             </a:extLst>
           </p:cNvPr>
@@ -20518,7 +20725,7 @@
           <p:cNvPr id="8" name="subtitle">
             <a:extLst xmlns:a="http://schemas.openxmlformats.org/drawingml/2006/main">
               <a:ext uri="{FF2B5EF4-FFF2-40B4-BE49-F238E27FC236}">
-                <a16:creationId xmlns:a16="http://schemas.microsoft.com/office/drawing/2014/main" id="{99F59B56-A7D9-489B-8E34-06313D89C4B4}"/>
+                <a16:creationId xmlns:a16="http://schemas.microsoft.com/office/drawing/2014/main" id="{777C9A76-40C6-4C61-A9E2-6C6BC3F2C946}"/>
               </a:ext>
             </a:extLst>
           </p:cNvPr>
@@ -20578,7 +20785,7 @@
           <p:nvPr/>
         </p:nvPicPr>
         <p:blipFill>
-          <a:blip xmlns:r="http://schemas.openxmlformats.org/officeDocument/2006/relationships" xmlns:a="http://schemas.openxmlformats.org/drawingml/2006/main" r:embed="R42aa9be66a484792"/>
+          <a:blip xmlns:r="http://schemas.openxmlformats.org/officeDocument/2006/relationships" xmlns:a="http://schemas.openxmlformats.org/drawingml/2006/main" r:embed="R9cc936c567ff404a"/>
           <a:stretch xmlns:a="http://schemas.openxmlformats.org/drawingml/2006/main"/>
         </p:blipFill>
         <p:spPr>
@@ -20596,7 +20803,7 @@
           <p:cNvPr id="10" name="footer-number">
             <a:extLst xmlns:a="http://schemas.openxmlformats.org/drawingml/2006/main">
               <a:ext uri="{FF2B5EF4-FFF2-40B4-BE49-F238E27FC236}">
-                <a16:creationId xmlns:a16="http://schemas.microsoft.com/office/drawing/2014/main" id="{66F0DC39-AA52-44D2-973D-9CBE6D8A2DA1}"/>
+                <a16:creationId xmlns:a16="http://schemas.microsoft.com/office/drawing/2014/main" id="{327FAA40-3EAA-498F-A9DE-F2E7399CE6ED}"/>
               </a:ext>
             </a:extLst>
           </p:cNvPr>
@@ -20652,7 +20859,7 @@
           <p:cNvPr id="11" name="card-진행 방법">
             <a:extLst xmlns:a="http://schemas.openxmlformats.org/drawingml/2006/main">
               <a:ext uri="{FF2B5EF4-FFF2-40B4-BE49-F238E27FC236}">
-                <a16:creationId xmlns:a16="http://schemas.microsoft.com/office/drawing/2014/main" id="{B09AF006-98C7-44F1-A2AA-C3F501CD6844}"/>
+                <a16:creationId xmlns:a16="http://schemas.microsoft.com/office/drawing/2014/main" id="{A5D134A8-DE95-4D38-A46D-C4A8F3623053}"/>
               </a:ext>
             </a:extLst>
           </p:cNvPr>
@@ -20693,7 +20900,7 @@
           <p:cNvPr id="12" name="card-accent">
             <a:extLst xmlns:a="http://schemas.openxmlformats.org/drawingml/2006/main">
               <a:ext uri="{FF2B5EF4-FFF2-40B4-BE49-F238E27FC236}">
-                <a16:creationId xmlns:a16="http://schemas.microsoft.com/office/drawing/2014/main" id="{5167D63B-B459-418F-9250-96B01379E9BD}"/>
+                <a16:creationId xmlns:a16="http://schemas.microsoft.com/office/drawing/2014/main" id="{2FA57E2F-8FFB-4B47-9F15-5694A5E20955}"/>
               </a:ext>
             </a:extLst>
           </p:cNvPr>
@@ -20724,7 +20931,7 @@
           <p:cNvPr id="13" name="card-label">
             <a:extLst xmlns:a="http://schemas.openxmlformats.org/drawingml/2006/main">
               <a:ext uri="{FF2B5EF4-FFF2-40B4-BE49-F238E27FC236}">
-                <a16:creationId xmlns:a16="http://schemas.microsoft.com/office/drawing/2014/main" id="{CFA01D78-B592-42F4-AD9A-9E1FF0D57128}"/>
+                <a16:creationId xmlns:a16="http://schemas.microsoft.com/office/drawing/2014/main" id="{E9C6A832-6745-484D-BA42-D8C5C5861548}"/>
               </a:ext>
             </a:extLst>
           </p:cNvPr>
@@ -20780,7 +20987,7 @@
           <p:cNvPr id="14" name="card-title">
             <a:extLst xmlns:a="http://schemas.openxmlformats.org/drawingml/2006/main">
               <a:ext uri="{FF2B5EF4-FFF2-40B4-BE49-F238E27FC236}">
-                <a16:creationId xmlns:a16="http://schemas.microsoft.com/office/drawing/2014/main" id="{B39DD5E4-85A4-40A4-82B2-C21FFC595C2A}"/>
+                <a16:creationId xmlns:a16="http://schemas.microsoft.com/office/drawing/2014/main" id="{1B444278-3FEA-44E1-9566-82BDA4C4DAC4}"/>
               </a:ext>
             </a:extLst>
           </p:cNvPr>
@@ -20836,7 +21043,7 @@
           <p:cNvPr id="15" name="card-body">
             <a:extLst xmlns:a="http://schemas.openxmlformats.org/drawingml/2006/main">
               <a:ext uri="{FF2B5EF4-FFF2-40B4-BE49-F238E27FC236}">
-                <a16:creationId xmlns:a16="http://schemas.microsoft.com/office/drawing/2014/main" id="{2FFF20BC-CA27-49B5-94B9-D56412FA54FD}"/>
+                <a16:creationId xmlns:a16="http://schemas.microsoft.com/office/drawing/2014/main" id="{3DC806CB-160E-4827-9F7F-613E556DBE81}"/>
               </a:ext>
             </a:extLst>
           </p:cNvPr>
@@ -20882,7 +21089,7 @@
                 <a:ea typeface="Pretendard"/>
                 <a:cs typeface="Pretendard"/>
               </a:rPr>
-              <a:t>5개 팀 x 5분 발표. 질문은 발표 후 피드백</a:t>
+              <a:t>5개 팀 x 5분 발표. 질문은 발표 후</a:t>
             </a:r>
           </a:p>
           <a:p xmlns:a="http://schemas.openxmlformats.org/drawingml/2006/main">
@@ -20905,7 +21112,7 @@
                 <a:ea typeface="Pretendard"/>
                 <a:cs typeface="Pretendard"/>
               </a:rPr>
-              <a:t>기록지에 남김</a:t>
+              <a:t>피드백 기록지에 남김</a:t>
             </a:r>
           </a:p>
         </p:txBody>
@@ -20915,7 +21122,7 @@
           <p:cNvPr id="16" name="card-결과물">
             <a:extLst xmlns:a="http://schemas.openxmlformats.org/drawingml/2006/main">
               <a:ext uri="{FF2B5EF4-FFF2-40B4-BE49-F238E27FC236}">
-                <a16:creationId xmlns:a16="http://schemas.microsoft.com/office/drawing/2014/main" id="{5EFEE2FE-7E8F-43E6-BC86-95B1389033EA}"/>
+                <a16:creationId xmlns:a16="http://schemas.microsoft.com/office/drawing/2014/main" id="{32D41B17-64B5-4107-A910-A9F4BA41F02E}"/>
               </a:ext>
             </a:extLst>
           </p:cNvPr>
@@ -20956,7 +21163,7 @@
           <p:cNvPr id="17" name="card-accent">
             <a:extLst xmlns:a="http://schemas.openxmlformats.org/drawingml/2006/main">
               <a:ext uri="{FF2B5EF4-FFF2-40B4-BE49-F238E27FC236}">
-                <a16:creationId xmlns:a16="http://schemas.microsoft.com/office/drawing/2014/main" id="{894B6550-CF66-44A6-A085-72E8C57EDE78}"/>
+                <a16:creationId xmlns:a16="http://schemas.microsoft.com/office/drawing/2014/main" id="{9BB3D855-E302-45C1-A357-AE56D1178907}"/>
               </a:ext>
             </a:extLst>
           </p:cNvPr>
@@ -20987,7 +21194,7 @@
           <p:cNvPr id="18" name="card-label">
             <a:extLst xmlns:a="http://schemas.openxmlformats.org/drawingml/2006/main">
               <a:ext uri="{FF2B5EF4-FFF2-40B4-BE49-F238E27FC236}">
-                <a16:creationId xmlns:a16="http://schemas.microsoft.com/office/drawing/2014/main" id="{ACA7AB76-9111-462B-A565-279AF3C5EB38}"/>
+                <a16:creationId xmlns:a16="http://schemas.microsoft.com/office/drawing/2014/main" id="{BA5C3936-B3F4-4707-B7F1-B9A051AA875E}"/>
               </a:ext>
             </a:extLst>
           </p:cNvPr>
@@ -21043,7 +21250,7 @@
           <p:cNvPr id="19" name="card-title">
             <a:extLst xmlns:a="http://schemas.openxmlformats.org/drawingml/2006/main">
               <a:ext uri="{FF2B5EF4-FFF2-40B4-BE49-F238E27FC236}">
-                <a16:creationId xmlns:a16="http://schemas.microsoft.com/office/drawing/2014/main" id="{5E24B3F1-2414-443F-99A1-5528707DDFAB}"/>
+                <a16:creationId xmlns:a16="http://schemas.microsoft.com/office/drawing/2014/main" id="{7A41392F-4E27-4CC9-823D-8822343F6A70}"/>
               </a:ext>
             </a:extLst>
           </p:cNvPr>
@@ -21099,7 +21306,7 @@
           <p:cNvPr id="20" name="card-body">
             <a:extLst xmlns:a="http://schemas.openxmlformats.org/drawingml/2006/main">
               <a:ext uri="{FF2B5EF4-FFF2-40B4-BE49-F238E27FC236}">
-                <a16:creationId xmlns:a16="http://schemas.microsoft.com/office/drawing/2014/main" id="{A4604896-3AFF-41A3-80BF-00E694C2A643}"/>
+                <a16:creationId xmlns:a16="http://schemas.microsoft.com/office/drawing/2014/main" id="{A20D54D1-E679-47A3-8AB2-1D95B60C2DD3}"/>
               </a:ext>
             </a:extLst>
           </p:cNvPr>
@@ -21155,7 +21362,7 @@
           <p:cNvPr id="21" name="card-운영 팁">
             <a:extLst xmlns:a="http://schemas.openxmlformats.org/drawingml/2006/main">
               <a:ext uri="{FF2B5EF4-FFF2-40B4-BE49-F238E27FC236}">
-                <a16:creationId xmlns:a16="http://schemas.microsoft.com/office/drawing/2014/main" id="{CBD058E5-7082-4135-A9AA-E78BC30ABC9A}"/>
+                <a16:creationId xmlns:a16="http://schemas.microsoft.com/office/drawing/2014/main" id="{D444BAD0-6C09-4DED-A979-C8818D54550B}"/>
               </a:ext>
             </a:extLst>
           </p:cNvPr>
@@ -21196,7 +21403,7 @@
           <p:cNvPr id="22" name="card-accent">
             <a:extLst xmlns:a="http://schemas.openxmlformats.org/drawingml/2006/main">
               <a:ext uri="{FF2B5EF4-FFF2-40B4-BE49-F238E27FC236}">
-                <a16:creationId xmlns:a16="http://schemas.microsoft.com/office/drawing/2014/main" id="{67024F6F-27EB-49FC-9332-8684842271C6}"/>
+                <a16:creationId xmlns:a16="http://schemas.microsoft.com/office/drawing/2014/main" id="{E16AD71B-AC0A-49CC-8F08-45F1C7A06805}"/>
               </a:ext>
             </a:extLst>
           </p:cNvPr>
@@ -21227,7 +21434,7 @@
           <p:cNvPr id="23" name="card-label">
             <a:extLst xmlns:a="http://schemas.openxmlformats.org/drawingml/2006/main">
               <a:ext uri="{FF2B5EF4-FFF2-40B4-BE49-F238E27FC236}">
-                <a16:creationId xmlns:a16="http://schemas.microsoft.com/office/drawing/2014/main" id="{13752923-C2C3-46D7-86F0-A8EEA3FA3313}"/>
+                <a16:creationId xmlns:a16="http://schemas.microsoft.com/office/drawing/2014/main" id="{992E0B46-CEDC-4062-BB4A-6238827E332F}"/>
               </a:ext>
             </a:extLst>
           </p:cNvPr>
@@ -21283,7 +21490,7 @@
           <p:cNvPr id="24" name="card-title">
             <a:extLst xmlns:a="http://schemas.openxmlformats.org/drawingml/2006/main">
               <a:ext uri="{FF2B5EF4-FFF2-40B4-BE49-F238E27FC236}">
-                <a16:creationId xmlns:a16="http://schemas.microsoft.com/office/drawing/2014/main" id="{238A29DD-B33B-4DD1-A370-B52FBBBED630}"/>
+                <a16:creationId xmlns:a16="http://schemas.microsoft.com/office/drawing/2014/main" id="{28B11ED1-14C7-448B-B9D3-1D85C833A826}"/>
               </a:ext>
             </a:extLst>
           </p:cNvPr>
@@ -21339,7 +21546,7 @@
           <p:cNvPr id="25" name="card-body">
             <a:extLst xmlns:a="http://schemas.openxmlformats.org/drawingml/2006/main">
               <a:ext uri="{FF2B5EF4-FFF2-40B4-BE49-F238E27FC236}">
-                <a16:creationId xmlns:a16="http://schemas.microsoft.com/office/drawing/2014/main" id="{57224CD5-2A4B-488B-8D68-B8585ED0EF85}"/>
+                <a16:creationId xmlns:a16="http://schemas.microsoft.com/office/drawing/2014/main" id="{E955A174-AFD3-4B95-9216-FEB4295E426F}"/>
               </a:ext>
             </a:extLst>
           </p:cNvPr>
@@ -21385,7 +21592,7 @@
                 <a:ea typeface="Pretendard"/>
                 <a:cs typeface="Pretendard"/>
               </a:rPr>
-              <a:t>타이머를 보이게 두고, 각 팀의 산출물은</a:t>
+              <a:t>타이머를 보이게 두고, 각 팀의</a:t>
             </a:r>
           </a:p>
           <a:p xmlns:a="http://schemas.openxmlformats.org/drawingml/2006/main">
@@ -21408,7 +21615,30 @@
                 <a:ea typeface="Pretendard"/>
                 <a:cs typeface="Pretendard"/>
               </a:rPr>
-              <a:t>다음 단계 장표에 바로 옮겨 적게 합니다.</a:t>
+              <a:t>산출물은 다음 단계 장표에 바로</a:t>
+            </a:r>
+          </a:p>
+          <a:p xmlns:a="http://schemas.openxmlformats.org/drawingml/2006/main">
+            <a:pPr algn="l">
+              <a:defRPr sz="1350" b="0">
+                <a:solidFill>
+                  <a:srgbClr val="4B5563"/>
+                </a:solidFill>
+                <a:latin typeface="Pretendard"/>
+                <a:ea typeface="Pretendard"/>
+                <a:cs typeface="Pretendard"/>
+              </a:defRPr>
+            </a:pPr>
+            <a:r>
+              <a:rPr sz="1350" b="0">
+                <a:solidFill>
+                  <a:srgbClr val="4B5563"/>
+                </a:solidFill>
+                <a:latin typeface="Pretendard"/>
+                <a:ea typeface="Pretendard"/>
+                <a:cs typeface="Pretendard"/>
+              </a:rPr>
+              <a:t>옮겨 적게 합니다.</a:t>
             </a:r>
           </a:p>
         </p:txBody>
@@ -21416,7 +21646,7 @@
     </p:spTree>
     <p:extLst>
       <p:ext uri="{BB962C8B-B14F-4D97-AF65-F5344CB8AC3E}">
-        <p14:creationId xmlns:p14="http://schemas.microsoft.com/office/powerpoint/2010/main" val="1094454911"/>
+        <p14:creationId xmlns:p14="http://schemas.microsoft.com/office/powerpoint/2010/main" val="1501782495"/>
       </p:ext>
     </p:extLst>
   </p:cSld>
@@ -21447,7 +21677,7 @@
           <p:cNvPr id="1" name="decor-ring-1">
             <a:extLst xmlns:a="http://schemas.openxmlformats.org/drawingml/2006/main">
               <a:ext uri="{FF2B5EF4-FFF2-40B4-BE49-F238E27FC236}">
-                <a16:creationId xmlns:a16="http://schemas.microsoft.com/office/drawing/2014/main" id="{19BE37E6-4A29-42D8-9C9E-0539B7266702}"/>
+                <a16:creationId xmlns:a16="http://schemas.microsoft.com/office/drawing/2014/main" id="{517450A4-E319-48C3-BFE8-5E628520EDC4}"/>
               </a:ext>
             </a:extLst>
           </p:cNvPr>
@@ -21478,7 +21708,7 @@
           <p:cNvPr id="2" name="decor-ring-2">
             <a:extLst xmlns:a="http://schemas.openxmlformats.org/drawingml/2006/main">
               <a:ext uri="{FF2B5EF4-FFF2-40B4-BE49-F238E27FC236}">
-                <a16:creationId xmlns:a16="http://schemas.microsoft.com/office/drawing/2014/main" id="{BD9E2F67-72CA-411A-8587-191621A6D3C7}"/>
+                <a16:creationId xmlns:a16="http://schemas.microsoft.com/office/drawing/2014/main" id="{1596F94F-AADC-4301-85B2-E6F9D70474F9}"/>
               </a:ext>
             </a:extLst>
           </p:cNvPr>
@@ -21509,7 +21739,7 @@
           <p:cNvPr id="3" name="decor-orb-1">
             <a:extLst xmlns:a="http://schemas.openxmlformats.org/drawingml/2006/main">
               <a:ext uri="{FF2B5EF4-FFF2-40B4-BE49-F238E27FC236}">
-                <a16:creationId xmlns:a16="http://schemas.microsoft.com/office/drawing/2014/main" id="{FC3761AE-9033-4710-8090-8A7CFEAE0EBA}"/>
+                <a16:creationId xmlns:a16="http://schemas.microsoft.com/office/drawing/2014/main" id="{8E5880CC-C44B-4A5D-8A1B-7A0D2BAE7E2F}"/>
               </a:ext>
             </a:extLst>
           </p:cNvPr>
@@ -21540,7 +21770,7 @@
           <p:cNvPr id="4" name="decor-orb-2">
             <a:extLst xmlns:a="http://schemas.openxmlformats.org/drawingml/2006/main">
               <a:ext uri="{FF2B5EF4-FFF2-40B4-BE49-F238E27FC236}">
-                <a16:creationId xmlns:a16="http://schemas.microsoft.com/office/drawing/2014/main" id="{533C5A90-55E5-4360-B36D-87DE6582FF15}"/>
+                <a16:creationId xmlns:a16="http://schemas.microsoft.com/office/drawing/2014/main" id="{58F43182-BE51-4BFA-B0BE-BFE31FC077F5}"/>
               </a:ext>
             </a:extLst>
           </p:cNvPr>
@@ -21571,7 +21801,7 @@
           <p:cNvPr id="5" name="title-bar">
             <a:extLst xmlns:a="http://schemas.openxmlformats.org/drawingml/2006/main">
               <a:ext uri="{FF2B5EF4-FFF2-40B4-BE49-F238E27FC236}">
-                <a16:creationId xmlns:a16="http://schemas.microsoft.com/office/drawing/2014/main" id="{47FBC48A-B4E8-4ADE-9503-138F6269FF47}"/>
+                <a16:creationId xmlns:a16="http://schemas.microsoft.com/office/drawing/2014/main" id="{8154A27F-473C-477C-9D30-581E17A427E6}"/>
               </a:ext>
             </a:extLst>
           </p:cNvPr>
@@ -21602,7 +21832,7 @@
           <p:cNvPr id="6" name="kicker">
             <a:extLst xmlns:a="http://schemas.openxmlformats.org/drawingml/2006/main">
               <a:ext uri="{FF2B5EF4-FFF2-40B4-BE49-F238E27FC236}">
-                <a16:creationId xmlns:a16="http://schemas.microsoft.com/office/drawing/2014/main" id="{1D0F24A2-06C3-4572-8213-08A306B76F04}"/>
+                <a16:creationId xmlns:a16="http://schemas.microsoft.com/office/drawing/2014/main" id="{0F007E75-9128-4836-A35A-FCC8E87A831E}"/>
               </a:ext>
             </a:extLst>
           </p:cNvPr>
@@ -21658,7 +21888,7 @@
           <p:cNvPr id="7" name="title">
             <a:extLst xmlns:a="http://schemas.openxmlformats.org/drawingml/2006/main">
               <a:ext uri="{FF2B5EF4-FFF2-40B4-BE49-F238E27FC236}">
-                <a16:creationId xmlns:a16="http://schemas.microsoft.com/office/drawing/2014/main" id="{3367A138-9145-4DAB-8BB5-132EF49163C2}"/>
+                <a16:creationId xmlns:a16="http://schemas.microsoft.com/office/drawing/2014/main" id="{7602FCC4-E123-4EA2-99CB-1C81C3A6C998}"/>
               </a:ext>
             </a:extLst>
           </p:cNvPr>
@@ -21714,7 +21944,7 @@
           <p:cNvPr id="8" name="subtitle">
             <a:extLst xmlns:a="http://schemas.openxmlformats.org/drawingml/2006/main">
               <a:ext uri="{FF2B5EF4-FFF2-40B4-BE49-F238E27FC236}">
-                <a16:creationId xmlns:a16="http://schemas.microsoft.com/office/drawing/2014/main" id="{96452C9B-E1B6-4644-BC08-36471D14A3AF}"/>
+                <a16:creationId xmlns:a16="http://schemas.microsoft.com/office/drawing/2014/main" id="{2A22C3ED-5414-442E-A581-855478F712CF}"/>
               </a:ext>
             </a:extLst>
           </p:cNvPr>
@@ -21774,7 +22004,7 @@
           <p:nvPr/>
         </p:nvPicPr>
         <p:blipFill>
-          <a:blip xmlns:r="http://schemas.openxmlformats.org/officeDocument/2006/relationships" xmlns:a="http://schemas.openxmlformats.org/drawingml/2006/main" r:embed="R67371940dcfa43e6"/>
+          <a:blip xmlns:r="http://schemas.openxmlformats.org/officeDocument/2006/relationships" xmlns:a="http://schemas.openxmlformats.org/drawingml/2006/main" r:embed="Ra51d22272e644a04"/>
           <a:stretch xmlns:a="http://schemas.openxmlformats.org/drawingml/2006/main"/>
         </p:blipFill>
         <p:spPr>
@@ -21792,7 +22022,7 @@
           <p:cNvPr id="10" name="footer-number">
             <a:extLst xmlns:a="http://schemas.openxmlformats.org/drawingml/2006/main">
               <a:ext uri="{FF2B5EF4-FFF2-40B4-BE49-F238E27FC236}">
-                <a16:creationId xmlns:a16="http://schemas.microsoft.com/office/drawing/2014/main" id="{122947C3-A930-40F3-8818-BC3A35567243}"/>
+                <a16:creationId xmlns:a16="http://schemas.microsoft.com/office/drawing/2014/main" id="{FCC59533-28B7-4921-B394-80A2D5FBB3C5}"/>
               </a:ext>
             </a:extLst>
           </p:cNvPr>
@@ -21848,7 +22078,7 @@
           <p:cNvPr id="11" name="card-1분">
             <a:extLst xmlns:a="http://schemas.openxmlformats.org/drawingml/2006/main">
               <a:ext uri="{FF2B5EF4-FFF2-40B4-BE49-F238E27FC236}">
-                <a16:creationId xmlns:a16="http://schemas.microsoft.com/office/drawing/2014/main" id="{1092A2C5-EB59-4483-8DC5-62E31D3EC4B9}"/>
+                <a16:creationId xmlns:a16="http://schemas.microsoft.com/office/drawing/2014/main" id="{1CFA2775-8CDE-46A8-8831-30A98C8781AA}"/>
               </a:ext>
             </a:extLst>
           </p:cNvPr>
@@ -21889,7 +22119,7 @@
           <p:cNvPr id="12" name="card-accent">
             <a:extLst xmlns:a="http://schemas.openxmlformats.org/drawingml/2006/main">
               <a:ext uri="{FF2B5EF4-FFF2-40B4-BE49-F238E27FC236}">
-                <a16:creationId xmlns:a16="http://schemas.microsoft.com/office/drawing/2014/main" id="{482F4996-3BE6-4F06-83DA-C4F8C3929064}"/>
+                <a16:creationId xmlns:a16="http://schemas.microsoft.com/office/drawing/2014/main" id="{9E6D95FA-ABF4-431C-9E64-136114899FE0}"/>
               </a:ext>
             </a:extLst>
           </p:cNvPr>
@@ -21920,7 +22150,7 @@
           <p:cNvPr id="13" name="card-label">
             <a:extLst xmlns:a="http://schemas.openxmlformats.org/drawingml/2006/main">
               <a:ext uri="{FF2B5EF4-FFF2-40B4-BE49-F238E27FC236}">
-                <a16:creationId xmlns:a16="http://schemas.microsoft.com/office/drawing/2014/main" id="{90F496B5-00C4-41EA-88DA-65A778307286}"/>
+                <a16:creationId xmlns:a16="http://schemas.microsoft.com/office/drawing/2014/main" id="{7C0B66D8-6796-42C8-B671-B681FA8CC517}"/>
               </a:ext>
             </a:extLst>
           </p:cNvPr>
@@ -21976,7 +22206,7 @@
           <p:cNvPr id="14" name="card-title">
             <a:extLst xmlns:a="http://schemas.openxmlformats.org/drawingml/2006/main">
               <a:ext uri="{FF2B5EF4-FFF2-40B4-BE49-F238E27FC236}">
-                <a16:creationId xmlns:a16="http://schemas.microsoft.com/office/drawing/2014/main" id="{A58CA58F-3E79-429E-BFEE-DB8AB42E15B5}"/>
+                <a16:creationId xmlns:a16="http://schemas.microsoft.com/office/drawing/2014/main" id="{35380BF2-861B-4C96-BB9B-5AD77A2385CC}"/>
               </a:ext>
             </a:extLst>
           </p:cNvPr>
@@ -22032,7 +22262,7 @@
           <p:cNvPr id="15" name="card-body">
             <a:extLst xmlns:a="http://schemas.openxmlformats.org/drawingml/2006/main">
               <a:ext uri="{FF2B5EF4-FFF2-40B4-BE49-F238E27FC236}">
-                <a16:creationId xmlns:a16="http://schemas.microsoft.com/office/drawing/2014/main" id="{3621B1A1-BAFC-4ECC-A44A-FAEE8DC6ABDC}"/>
+                <a16:creationId xmlns:a16="http://schemas.microsoft.com/office/drawing/2014/main" id="{8DB3E34B-CCFE-43F5-824B-C236A7D8EFB5}"/>
               </a:ext>
             </a:extLst>
           </p:cNvPr>
@@ -22078,7 +22308,7 @@
                 <a:ea typeface="Pretendard"/>
                 <a:cs typeface="Pretendard"/>
               </a:rPr>
-              <a:t>현재 어떤 업무가 왜</a:t>
+              <a:t>반복되는 업무 문제는</a:t>
             </a:r>
           </a:p>
           <a:p xmlns:a="http://schemas.openxmlformats.org/drawingml/2006/main">
@@ -22101,7 +22331,7 @@
                 <a:ea typeface="Pretendard"/>
                 <a:cs typeface="Pretendard"/>
               </a:rPr>
-              <a:t>어렵고 반복되는가?</a:t>
+              <a:t>무엇인가?</a:t>
             </a:r>
           </a:p>
         </p:txBody>
@@ -22111,7 +22341,7 @@
           <p:cNvPr id="16" name="card-1분">
             <a:extLst xmlns:a="http://schemas.openxmlformats.org/drawingml/2006/main">
               <a:ext uri="{FF2B5EF4-FFF2-40B4-BE49-F238E27FC236}">
-                <a16:creationId xmlns:a16="http://schemas.microsoft.com/office/drawing/2014/main" id="{0CE2F155-F9F5-4572-8A30-A842B3B09C9C}"/>
+                <a16:creationId xmlns:a16="http://schemas.microsoft.com/office/drawing/2014/main" id="{DE0F0135-DD29-440C-B997-0CBD89FAE4FA}"/>
               </a:ext>
             </a:extLst>
           </p:cNvPr>
@@ -22152,7 +22382,7 @@
           <p:cNvPr id="17" name="card-accent">
             <a:extLst xmlns:a="http://schemas.openxmlformats.org/drawingml/2006/main">
               <a:ext uri="{FF2B5EF4-FFF2-40B4-BE49-F238E27FC236}">
-                <a16:creationId xmlns:a16="http://schemas.microsoft.com/office/drawing/2014/main" id="{D9C76316-35A3-4E08-A474-D11844BFF714}"/>
+                <a16:creationId xmlns:a16="http://schemas.microsoft.com/office/drawing/2014/main" id="{11AC5B67-6128-4E79-8229-B82492767C92}"/>
               </a:ext>
             </a:extLst>
           </p:cNvPr>
@@ -22183,7 +22413,7 @@
           <p:cNvPr id="18" name="card-label">
             <a:extLst xmlns:a="http://schemas.openxmlformats.org/drawingml/2006/main">
               <a:ext uri="{FF2B5EF4-FFF2-40B4-BE49-F238E27FC236}">
-                <a16:creationId xmlns:a16="http://schemas.microsoft.com/office/drawing/2014/main" id="{5E1F53C7-2C55-4FF6-A3CC-F2D4FEE68B19}"/>
+                <a16:creationId xmlns:a16="http://schemas.microsoft.com/office/drawing/2014/main" id="{32AA3F3A-7CF6-4396-B00B-51FB4C3E4A45}"/>
               </a:ext>
             </a:extLst>
           </p:cNvPr>
@@ -22239,7 +22469,7 @@
           <p:cNvPr id="19" name="card-title">
             <a:extLst xmlns:a="http://schemas.openxmlformats.org/drawingml/2006/main">
               <a:ext uri="{FF2B5EF4-FFF2-40B4-BE49-F238E27FC236}">
-                <a16:creationId xmlns:a16="http://schemas.microsoft.com/office/drawing/2014/main" id="{E59C849C-53CD-47F9-9497-C884BA960355}"/>
+                <a16:creationId xmlns:a16="http://schemas.microsoft.com/office/drawing/2014/main" id="{74611DE5-1D37-4A91-B5DA-FC5EC7B074C6}"/>
               </a:ext>
             </a:extLst>
           </p:cNvPr>
@@ -22295,7 +22525,7 @@
           <p:cNvPr id="20" name="card-body">
             <a:extLst xmlns:a="http://schemas.openxmlformats.org/drawingml/2006/main">
               <a:ext uri="{FF2B5EF4-FFF2-40B4-BE49-F238E27FC236}">
-                <a16:creationId xmlns:a16="http://schemas.microsoft.com/office/drawing/2014/main" id="{DBF144A0-F451-440F-BC3B-8A487279F2AF}"/>
+                <a16:creationId xmlns:a16="http://schemas.microsoft.com/office/drawing/2014/main" id="{FC392C2E-4836-44C7-AAE8-E14B68279D31}"/>
               </a:ext>
             </a:extLst>
           </p:cNvPr>
@@ -22374,7 +22604,7 @@
           <p:cNvPr id="21" name="card-1분">
             <a:extLst xmlns:a="http://schemas.openxmlformats.org/drawingml/2006/main">
               <a:ext uri="{FF2B5EF4-FFF2-40B4-BE49-F238E27FC236}">
-                <a16:creationId xmlns:a16="http://schemas.microsoft.com/office/drawing/2014/main" id="{65E38B8D-5652-4335-AF10-6D92583BA5D0}"/>
+                <a16:creationId xmlns:a16="http://schemas.microsoft.com/office/drawing/2014/main" id="{94786153-5953-4A49-ACBF-314A21FCD633}"/>
               </a:ext>
             </a:extLst>
           </p:cNvPr>
@@ -22415,7 +22645,7 @@
           <p:cNvPr id="22" name="card-accent">
             <a:extLst xmlns:a="http://schemas.openxmlformats.org/drawingml/2006/main">
               <a:ext uri="{FF2B5EF4-FFF2-40B4-BE49-F238E27FC236}">
-                <a16:creationId xmlns:a16="http://schemas.microsoft.com/office/drawing/2014/main" id="{BDDEE89B-C873-4600-923F-52D049B4F51C}"/>
+                <a16:creationId xmlns:a16="http://schemas.microsoft.com/office/drawing/2014/main" id="{C0063B8A-0B0B-4660-B7F5-E3018E656206}"/>
               </a:ext>
             </a:extLst>
           </p:cNvPr>
@@ -22446,7 +22676,7 @@
           <p:cNvPr id="23" name="card-label">
             <a:extLst xmlns:a="http://schemas.openxmlformats.org/drawingml/2006/main">
               <a:ext uri="{FF2B5EF4-FFF2-40B4-BE49-F238E27FC236}">
-                <a16:creationId xmlns:a16="http://schemas.microsoft.com/office/drawing/2014/main" id="{52E56232-E618-443B-834C-C2830D64E5D4}"/>
+                <a16:creationId xmlns:a16="http://schemas.microsoft.com/office/drawing/2014/main" id="{B876B4DD-803C-46DD-8983-D9C5FC816319}"/>
               </a:ext>
             </a:extLst>
           </p:cNvPr>
@@ -22502,7 +22732,7 @@
           <p:cNvPr id="24" name="card-title">
             <a:extLst xmlns:a="http://schemas.openxmlformats.org/drawingml/2006/main">
               <a:ext uri="{FF2B5EF4-FFF2-40B4-BE49-F238E27FC236}">
-                <a16:creationId xmlns:a16="http://schemas.microsoft.com/office/drawing/2014/main" id="{9F7E7032-9640-49CB-B323-AA6EAFAD9F2F}"/>
+                <a16:creationId xmlns:a16="http://schemas.microsoft.com/office/drawing/2014/main" id="{B87E2B72-22E0-4FBB-A49F-DBB179F4E2C0}"/>
               </a:ext>
             </a:extLst>
           </p:cNvPr>
@@ -22558,7 +22788,7 @@
           <p:cNvPr id="25" name="card-body">
             <a:extLst xmlns:a="http://schemas.openxmlformats.org/drawingml/2006/main">
               <a:ext uri="{FF2B5EF4-FFF2-40B4-BE49-F238E27FC236}">
-                <a16:creationId xmlns:a16="http://schemas.microsoft.com/office/drawing/2014/main" id="{8E431690-FBAB-44BD-8D02-A119D7989E7E}"/>
+                <a16:creationId xmlns:a16="http://schemas.microsoft.com/office/drawing/2014/main" id="{F2CE2AE1-D6AF-4845-A4BA-2901D2C01E8B}"/>
               </a:ext>
             </a:extLst>
           </p:cNvPr>
@@ -22604,7 +22834,7 @@
                 <a:ea typeface="Pretendard"/>
                 <a:cs typeface="Pretendard"/>
               </a:rPr>
-              <a:t>AI Agent가 보조할 단계와</a:t>
+              <a:t>AI 역할과</a:t>
             </a:r>
           </a:p>
           <a:p xmlns:a="http://schemas.openxmlformats.org/drawingml/2006/main">
@@ -22627,30 +22857,7 @@
                 <a:ea typeface="Pretendard"/>
                 <a:cs typeface="Pretendard"/>
               </a:rPr>
-              <a:t>사람이 검토할 단계는</a:t>
-            </a:r>
-          </a:p>
-          <a:p xmlns:a="http://schemas.openxmlformats.org/drawingml/2006/main">
-            <a:pPr algn="l">
-              <a:defRPr sz="1275" b="0">
-                <a:solidFill>
-                  <a:srgbClr val="4B5563"/>
-                </a:solidFill>
-                <a:latin typeface="Pretendard"/>
-                <a:ea typeface="Pretendard"/>
-                <a:cs typeface="Pretendard"/>
-              </a:defRPr>
-            </a:pPr>
-            <a:r>
-              <a:rPr sz="1275" b="0">
-                <a:solidFill>
-                  <a:srgbClr val="4B5563"/>
-                </a:solidFill>
-                <a:latin typeface="Pretendard"/>
-                <a:ea typeface="Pretendard"/>
-                <a:cs typeface="Pretendard"/>
-              </a:rPr>
-              <a:t>무엇인가?</a:t>
+              <a:t>검토 역할은?</a:t>
             </a:r>
           </a:p>
         </p:txBody>
@@ -22660,7 +22867,7 @@
           <p:cNvPr id="26" name="card-1분">
             <a:extLst xmlns:a="http://schemas.openxmlformats.org/drawingml/2006/main">
               <a:ext uri="{FF2B5EF4-FFF2-40B4-BE49-F238E27FC236}">
-                <a16:creationId xmlns:a16="http://schemas.microsoft.com/office/drawing/2014/main" id="{1568C5DB-FBF6-415B-8249-C39A15FA99D9}"/>
+                <a16:creationId xmlns:a16="http://schemas.microsoft.com/office/drawing/2014/main" id="{A414C1ED-3B69-4A61-9438-AB42B3224262}"/>
               </a:ext>
             </a:extLst>
           </p:cNvPr>
@@ -22701,7 +22908,7 @@
           <p:cNvPr id="27" name="card-accent">
             <a:extLst xmlns:a="http://schemas.openxmlformats.org/drawingml/2006/main">
               <a:ext uri="{FF2B5EF4-FFF2-40B4-BE49-F238E27FC236}">
-                <a16:creationId xmlns:a16="http://schemas.microsoft.com/office/drawing/2014/main" id="{552A7D6D-F712-4872-A690-E105A89A8C5A}"/>
+                <a16:creationId xmlns:a16="http://schemas.microsoft.com/office/drawing/2014/main" id="{DCB44C85-F7D0-4018-A822-17D6F1A366AB}"/>
               </a:ext>
             </a:extLst>
           </p:cNvPr>
@@ -22732,7 +22939,7 @@
           <p:cNvPr id="28" name="card-label">
             <a:extLst xmlns:a="http://schemas.openxmlformats.org/drawingml/2006/main">
               <a:ext uri="{FF2B5EF4-FFF2-40B4-BE49-F238E27FC236}">
-                <a16:creationId xmlns:a16="http://schemas.microsoft.com/office/drawing/2014/main" id="{E70ECBD8-9D26-42CC-B740-6E955038F3CD}"/>
+                <a16:creationId xmlns:a16="http://schemas.microsoft.com/office/drawing/2014/main" id="{E26DA738-6C9D-4D15-BE1A-C37E00363C6D}"/>
               </a:ext>
             </a:extLst>
           </p:cNvPr>
@@ -22788,7 +22995,7 @@
           <p:cNvPr id="29" name="card-title">
             <a:extLst xmlns:a="http://schemas.openxmlformats.org/drawingml/2006/main">
               <a:ext uri="{FF2B5EF4-FFF2-40B4-BE49-F238E27FC236}">
-                <a16:creationId xmlns:a16="http://schemas.microsoft.com/office/drawing/2014/main" id="{40103AD0-DAFD-4EE2-B72D-13544AAABEF0}"/>
+                <a16:creationId xmlns:a16="http://schemas.microsoft.com/office/drawing/2014/main" id="{B0905140-F7FA-4DD0-8032-B77A16D10B84}"/>
               </a:ext>
             </a:extLst>
           </p:cNvPr>
@@ -22844,7 +23051,7 @@
           <p:cNvPr id="30" name="card-body">
             <a:extLst xmlns:a="http://schemas.openxmlformats.org/drawingml/2006/main">
               <a:ext uri="{FF2B5EF4-FFF2-40B4-BE49-F238E27FC236}">
-                <a16:creationId xmlns:a16="http://schemas.microsoft.com/office/drawing/2014/main" id="{9A0BD99C-9426-48B1-A7EC-8E3BC3BC67D8}"/>
+                <a16:creationId xmlns:a16="http://schemas.microsoft.com/office/drawing/2014/main" id="{A198EF7A-8687-4422-9B8F-B6F6F3E9AC35}"/>
               </a:ext>
             </a:extLst>
           </p:cNvPr>
@@ -22890,30 +23097,7 @@
                 <a:ea typeface="Pretendard"/>
                 <a:cs typeface="Pretendard"/>
               </a:rPr>
-              <a:t>8월 21일에 어떤 시연</a:t>
-            </a:r>
-          </a:p>
-          <a:p xmlns:a="http://schemas.openxmlformats.org/drawingml/2006/main">
-            <a:pPr algn="l">
-              <a:defRPr sz="1275" b="0">
-                <a:solidFill>
-                  <a:srgbClr val="4B5563"/>
-                </a:solidFill>
-                <a:latin typeface="Pretendard"/>
-                <a:ea typeface="Pretendard"/>
-                <a:cs typeface="Pretendard"/>
-              </a:defRPr>
-            </a:pPr>
-            <a:r>
-              <a:rPr sz="1275" b="0">
-                <a:solidFill>
-                  <a:srgbClr val="4B5563"/>
-                </a:solidFill>
-                <a:latin typeface="Pretendard"/>
-                <a:ea typeface="Pretendard"/>
-                <a:cs typeface="Pretendard"/>
-              </a:rPr>
-              <a:t>장면을 보여줄 것인가?</a:t>
+              <a:t>시연 장면은?</a:t>
             </a:r>
           </a:p>
         </p:txBody>
@@ -22923,7 +23107,7 @@
           <p:cNvPr id="31" name="card-1분">
             <a:extLst xmlns:a="http://schemas.openxmlformats.org/drawingml/2006/main">
               <a:ext uri="{FF2B5EF4-FFF2-40B4-BE49-F238E27FC236}">
-                <a16:creationId xmlns:a16="http://schemas.microsoft.com/office/drawing/2014/main" id="{56E56649-3E25-48BE-9B0F-1BF7333B8E6C}"/>
+                <a16:creationId xmlns:a16="http://schemas.microsoft.com/office/drawing/2014/main" id="{E46DDCDC-39E4-429F-921F-5AC6E3424685}"/>
               </a:ext>
             </a:extLst>
           </p:cNvPr>
@@ -22964,7 +23148,7 @@
           <p:cNvPr id="32" name="card-accent">
             <a:extLst xmlns:a="http://schemas.openxmlformats.org/drawingml/2006/main">
               <a:ext uri="{FF2B5EF4-FFF2-40B4-BE49-F238E27FC236}">
-                <a16:creationId xmlns:a16="http://schemas.microsoft.com/office/drawing/2014/main" id="{28392A67-7B55-4497-9ED2-4B1E6CABCDBB}"/>
+                <a16:creationId xmlns:a16="http://schemas.microsoft.com/office/drawing/2014/main" id="{CF77E9ED-15C4-4433-9DF4-5C0B5FCADDF8}"/>
               </a:ext>
             </a:extLst>
           </p:cNvPr>
@@ -22995,7 +23179,7 @@
           <p:cNvPr id="33" name="card-label">
             <a:extLst xmlns:a="http://schemas.openxmlformats.org/drawingml/2006/main">
               <a:ext uri="{FF2B5EF4-FFF2-40B4-BE49-F238E27FC236}">
-                <a16:creationId xmlns:a16="http://schemas.microsoft.com/office/drawing/2014/main" id="{C5B027E8-A14A-460F-BB9E-BBE681D06775}"/>
+                <a16:creationId xmlns:a16="http://schemas.microsoft.com/office/drawing/2014/main" id="{F035F578-0032-46D7-B3D7-AC17374A5279}"/>
               </a:ext>
             </a:extLst>
           </p:cNvPr>
@@ -23051,7 +23235,7 @@
           <p:cNvPr id="34" name="card-title">
             <a:extLst xmlns:a="http://schemas.openxmlformats.org/drawingml/2006/main">
               <a:ext uri="{FF2B5EF4-FFF2-40B4-BE49-F238E27FC236}">
-                <a16:creationId xmlns:a16="http://schemas.microsoft.com/office/drawing/2014/main" id="{83A8A7E6-1527-4685-8BAB-4CA452E30A0A}"/>
+                <a16:creationId xmlns:a16="http://schemas.microsoft.com/office/drawing/2014/main" id="{976632CD-FC72-42D1-AA7A-AE5C58E6C0A3}"/>
               </a:ext>
             </a:extLst>
           </p:cNvPr>
@@ -23107,7 +23291,7 @@
           <p:cNvPr id="35" name="card-body">
             <a:extLst xmlns:a="http://schemas.openxmlformats.org/drawingml/2006/main">
               <a:ext uri="{FF2B5EF4-FFF2-40B4-BE49-F238E27FC236}">
-                <a16:creationId xmlns:a16="http://schemas.microsoft.com/office/drawing/2014/main" id="{8F4FC55C-B25A-4EBF-BD8E-AEBF6D706A79}"/>
+                <a16:creationId xmlns:a16="http://schemas.microsoft.com/office/drawing/2014/main" id="{BBC5DB70-FC50-48CF-822F-D7079F21E811}"/>
               </a:ext>
             </a:extLst>
           </p:cNvPr>
@@ -23153,7 +23337,7 @@
                 <a:ea typeface="Pretendard"/>
                 <a:cs typeface="Pretendard"/>
               </a:rPr>
-              <a:t>다음 수업 전까지 누가</a:t>
+              <a:t>준비할 자료와</a:t>
             </a:r>
           </a:p>
           <a:p xmlns:a="http://schemas.openxmlformats.org/drawingml/2006/main">
@@ -23176,30 +23360,7 @@
                 <a:ea typeface="Pretendard"/>
                 <a:cs typeface="Pretendard"/>
               </a:rPr>
-              <a:t>어떤 자료를 준비할</a:t>
-            </a:r>
-          </a:p>
-          <a:p xmlns:a="http://schemas.openxmlformats.org/drawingml/2006/main">
-            <a:pPr algn="l">
-              <a:defRPr sz="1275" b="0">
-                <a:solidFill>
-                  <a:srgbClr val="4B5563"/>
-                </a:solidFill>
-                <a:latin typeface="Pretendard"/>
-                <a:ea typeface="Pretendard"/>
-                <a:cs typeface="Pretendard"/>
-              </a:defRPr>
-            </a:pPr>
-            <a:r>
-              <a:rPr sz="1275" b="0">
-                <a:solidFill>
-                  <a:srgbClr val="4B5563"/>
-                </a:solidFill>
-                <a:latin typeface="Pretendard"/>
-                <a:ea typeface="Pretendard"/>
-                <a:cs typeface="Pretendard"/>
-              </a:rPr>
-              <a:t>것인가?</a:t>
+              <a:t>담당자는 누구인가?</a:t>
             </a:r>
           </a:p>
         </p:txBody>
@@ -23207,7 +23368,7 @@
     </p:spTree>
     <p:extLst>
       <p:ext uri="{BB962C8B-B14F-4D97-AF65-F5344CB8AC3E}">
-        <p14:creationId xmlns:p14="http://schemas.microsoft.com/office/powerpoint/2010/main" val="2144245562"/>
+        <p14:creationId xmlns:p14="http://schemas.microsoft.com/office/powerpoint/2010/main" val="1682110522"/>
       </p:ext>
     </p:extLst>
   </p:cSld>
@@ -23238,7 +23399,7 @@
           <p:cNvPr id="1" name="decor-ring-1">
             <a:extLst xmlns:a="http://schemas.openxmlformats.org/drawingml/2006/main">
               <a:ext uri="{FF2B5EF4-FFF2-40B4-BE49-F238E27FC236}">
-                <a16:creationId xmlns:a16="http://schemas.microsoft.com/office/drawing/2014/main" id="{42A70CBE-399B-4FEC-9261-A7C7AC6705CD}"/>
+                <a16:creationId xmlns:a16="http://schemas.microsoft.com/office/drawing/2014/main" id="{16324413-8A2A-4B1B-A537-9C013047AE06}"/>
               </a:ext>
             </a:extLst>
           </p:cNvPr>
@@ -23269,7 +23430,7 @@
           <p:cNvPr id="2" name="decor-ring-2">
             <a:extLst xmlns:a="http://schemas.openxmlformats.org/drawingml/2006/main">
               <a:ext uri="{FF2B5EF4-FFF2-40B4-BE49-F238E27FC236}">
-                <a16:creationId xmlns:a16="http://schemas.microsoft.com/office/drawing/2014/main" id="{006B0FCA-1644-4D9D-B8B9-D7794DE44F64}"/>
+                <a16:creationId xmlns:a16="http://schemas.microsoft.com/office/drawing/2014/main" id="{F75C6A10-F7E4-463D-897F-D03C3A338DD5}"/>
               </a:ext>
             </a:extLst>
           </p:cNvPr>
@@ -23300,7 +23461,7 @@
           <p:cNvPr id="3" name="decor-orb-1">
             <a:extLst xmlns:a="http://schemas.openxmlformats.org/drawingml/2006/main">
               <a:ext uri="{FF2B5EF4-FFF2-40B4-BE49-F238E27FC236}">
-                <a16:creationId xmlns:a16="http://schemas.microsoft.com/office/drawing/2014/main" id="{60615253-FAD1-4C46-8500-7CD9A160883B}"/>
+                <a16:creationId xmlns:a16="http://schemas.microsoft.com/office/drawing/2014/main" id="{D988E8D9-05D2-47F4-AE67-1FD67F73F3E3}"/>
               </a:ext>
             </a:extLst>
           </p:cNvPr>
@@ -23331,7 +23492,7 @@
           <p:cNvPr id="4" name="decor-orb-2">
             <a:extLst xmlns:a="http://schemas.openxmlformats.org/drawingml/2006/main">
               <a:ext uri="{FF2B5EF4-FFF2-40B4-BE49-F238E27FC236}">
-                <a16:creationId xmlns:a16="http://schemas.microsoft.com/office/drawing/2014/main" id="{147ABCBB-FFE6-4633-A0B5-EF888D37E231}"/>
+                <a16:creationId xmlns:a16="http://schemas.microsoft.com/office/drawing/2014/main" id="{3486A1A1-5C27-45F3-9B77-2CD5383ABBF5}"/>
               </a:ext>
             </a:extLst>
           </p:cNvPr>
@@ -23362,7 +23523,7 @@
           <p:cNvPr id="5" name="title-bar">
             <a:extLst xmlns:a="http://schemas.openxmlformats.org/drawingml/2006/main">
               <a:ext uri="{FF2B5EF4-FFF2-40B4-BE49-F238E27FC236}">
-                <a16:creationId xmlns:a16="http://schemas.microsoft.com/office/drawing/2014/main" id="{CFC191A9-B852-4112-978F-90A3D33A10C7}"/>
+                <a16:creationId xmlns:a16="http://schemas.microsoft.com/office/drawing/2014/main" id="{99DC99AF-F8B2-4B9E-8E38-1E864F4492F2}"/>
               </a:ext>
             </a:extLst>
           </p:cNvPr>
@@ -23393,7 +23554,7 @@
           <p:cNvPr id="6" name="kicker">
             <a:extLst xmlns:a="http://schemas.openxmlformats.org/drawingml/2006/main">
               <a:ext uri="{FF2B5EF4-FFF2-40B4-BE49-F238E27FC236}">
-                <a16:creationId xmlns:a16="http://schemas.microsoft.com/office/drawing/2014/main" id="{41A927EF-5429-4608-B02D-E0C2F256AB6D}"/>
+                <a16:creationId xmlns:a16="http://schemas.microsoft.com/office/drawing/2014/main" id="{E3EF5646-5163-4F5E-8602-670523ABC434}"/>
               </a:ext>
             </a:extLst>
           </p:cNvPr>
@@ -23449,7 +23610,7 @@
           <p:cNvPr id="7" name="title">
             <a:extLst xmlns:a="http://schemas.openxmlformats.org/drawingml/2006/main">
               <a:ext uri="{FF2B5EF4-FFF2-40B4-BE49-F238E27FC236}">
-                <a16:creationId xmlns:a16="http://schemas.microsoft.com/office/drawing/2014/main" id="{34AC6694-90EF-4D6F-9091-EDB870AEC4D2}"/>
+                <a16:creationId xmlns:a16="http://schemas.microsoft.com/office/drawing/2014/main" id="{66453C92-4B2E-43F8-854F-0103853B9578}"/>
               </a:ext>
             </a:extLst>
           </p:cNvPr>
@@ -23505,7 +23666,7 @@
           <p:cNvPr id="8" name="subtitle">
             <a:extLst xmlns:a="http://schemas.openxmlformats.org/drawingml/2006/main">
               <a:ext uri="{FF2B5EF4-FFF2-40B4-BE49-F238E27FC236}">
-                <a16:creationId xmlns:a16="http://schemas.microsoft.com/office/drawing/2014/main" id="{05D851E5-A8B3-4A80-8AEE-8DC802999021}"/>
+                <a16:creationId xmlns:a16="http://schemas.microsoft.com/office/drawing/2014/main" id="{5597ADB5-90B1-4069-A318-8778E16F5C36}"/>
               </a:ext>
             </a:extLst>
           </p:cNvPr>
@@ -23565,7 +23726,7 @@
           <p:nvPr/>
         </p:nvPicPr>
         <p:blipFill>
-          <a:blip xmlns:r="http://schemas.openxmlformats.org/officeDocument/2006/relationships" xmlns:a="http://schemas.openxmlformats.org/drawingml/2006/main" r:embed="Rdcebfd6bc0e84108"/>
+          <a:blip xmlns:r="http://schemas.openxmlformats.org/officeDocument/2006/relationships" xmlns:a="http://schemas.openxmlformats.org/drawingml/2006/main" r:embed="R946c1a3959194ed7"/>
           <a:stretch xmlns:a="http://schemas.openxmlformats.org/drawingml/2006/main"/>
         </p:blipFill>
         <p:spPr>
@@ -23583,7 +23744,7 @@
           <p:cNvPr id="10" name="footer-number">
             <a:extLst xmlns:a="http://schemas.openxmlformats.org/drawingml/2006/main">
               <a:ext uri="{FF2B5EF4-FFF2-40B4-BE49-F238E27FC236}">
-                <a16:creationId xmlns:a16="http://schemas.microsoft.com/office/drawing/2014/main" id="{ABD93B2E-4733-42BB-900E-72AE03D0857A}"/>
+                <a16:creationId xmlns:a16="http://schemas.microsoft.com/office/drawing/2014/main" id="{47867B44-9188-4E43-B12E-6519B52A90EF}"/>
               </a:ext>
             </a:extLst>
           </p:cNvPr>
@@ -23639,7 +23800,7 @@
           <p:cNvPr id="11" name="card-CHECK 1">
             <a:extLst xmlns:a="http://schemas.openxmlformats.org/drawingml/2006/main">
               <a:ext uri="{FF2B5EF4-FFF2-40B4-BE49-F238E27FC236}">
-                <a16:creationId xmlns:a16="http://schemas.microsoft.com/office/drawing/2014/main" id="{300375E9-9701-4D23-AD81-ACBA705D6CF2}"/>
+                <a16:creationId xmlns:a16="http://schemas.microsoft.com/office/drawing/2014/main" id="{2AE83AB3-954E-484F-B578-B6CC0421B1D1}"/>
               </a:ext>
             </a:extLst>
           </p:cNvPr>
@@ -23680,7 +23841,7 @@
           <p:cNvPr id="12" name="card-accent">
             <a:extLst xmlns:a="http://schemas.openxmlformats.org/drawingml/2006/main">
               <a:ext uri="{FF2B5EF4-FFF2-40B4-BE49-F238E27FC236}">
-                <a16:creationId xmlns:a16="http://schemas.microsoft.com/office/drawing/2014/main" id="{1C5777FD-6043-42FA-89FA-9F3C63256D8B}"/>
+                <a16:creationId xmlns:a16="http://schemas.microsoft.com/office/drawing/2014/main" id="{AD128495-50DD-46ED-AB98-EDDA4664BE5B}"/>
               </a:ext>
             </a:extLst>
           </p:cNvPr>
@@ -23711,7 +23872,7 @@
           <p:cNvPr id="13" name="card-label">
             <a:extLst xmlns:a="http://schemas.openxmlformats.org/drawingml/2006/main">
               <a:ext uri="{FF2B5EF4-FFF2-40B4-BE49-F238E27FC236}">
-                <a16:creationId xmlns:a16="http://schemas.microsoft.com/office/drawing/2014/main" id="{3734D75E-C314-4894-B2CF-2D1B8C190C41}"/>
+                <a16:creationId xmlns:a16="http://schemas.microsoft.com/office/drawing/2014/main" id="{9A2D042C-55B9-4DE3-9C21-58341854D373}"/>
               </a:ext>
             </a:extLst>
           </p:cNvPr>
@@ -23767,7 +23928,7 @@
           <p:cNvPr id="14" name="card-title">
             <a:extLst xmlns:a="http://schemas.openxmlformats.org/drawingml/2006/main">
               <a:ext uri="{FF2B5EF4-FFF2-40B4-BE49-F238E27FC236}">
-                <a16:creationId xmlns:a16="http://schemas.microsoft.com/office/drawing/2014/main" id="{F8B93D54-CBFD-491E-9412-880EC5AD7439}"/>
+                <a16:creationId xmlns:a16="http://schemas.microsoft.com/office/drawing/2014/main" id="{3BA1E8A7-ECB0-4088-A645-218D74430F11}"/>
               </a:ext>
             </a:extLst>
           </p:cNvPr>
@@ -23823,7 +23984,7 @@
           <p:cNvPr id="15" name="card-body">
             <a:extLst xmlns:a="http://schemas.openxmlformats.org/drawingml/2006/main">
               <a:ext uri="{FF2B5EF4-FFF2-40B4-BE49-F238E27FC236}">
-                <a16:creationId xmlns:a16="http://schemas.microsoft.com/office/drawing/2014/main" id="{BD0B7A6E-517B-4E28-80C0-81F8CD50EFF8}"/>
+                <a16:creationId xmlns:a16="http://schemas.microsoft.com/office/drawing/2014/main" id="{B3A27914-1D42-40F3-A513-6B4BA420775F}"/>
               </a:ext>
             </a:extLst>
           </p:cNvPr>
@@ -23902,7 +24063,7 @@
           <p:cNvPr id="16" name="card-CHECK 2">
             <a:extLst xmlns:a="http://schemas.openxmlformats.org/drawingml/2006/main">
               <a:ext uri="{FF2B5EF4-FFF2-40B4-BE49-F238E27FC236}">
-                <a16:creationId xmlns:a16="http://schemas.microsoft.com/office/drawing/2014/main" id="{B3E5953A-977D-4B8A-BE2F-F95F86B42962}"/>
+                <a16:creationId xmlns:a16="http://schemas.microsoft.com/office/drawing/2014/main" id="{D8CE3A40-F9AF-4EA9-AFD1-097D76CFBE85}"/>
               </a:ext>
             </a:extLst>
           </p:cNvPr>
@@ -23943,7 +24104,7 @@
           <p:cNvPr id="17" name="card-accent">
             <a:extLst xmlns:a="http://schemas.openxmlformats.org/drawingml/2006/main">
               <a:ext uri="{FF2B5EF4-FFF2-40B4-BE49-F238E27FC236}">
-                <a16:creationId xmlns:a16="http://schemas.microsoft.com/office/drawing/2014/main" id="{A12A8A3F-1F5B-4020-B7C4-918F382BD6D9}"/>
+                <a16:creationId xmlns:a16="http://schemas.microsoft.com/office/drawing/2014/main" id="{940B7241-F99F-4F22-8211-0F20A4B7A310}"/>
               </a:ext>
             </a:extLst>
           </p:cNvPr>
@@ -23974,7 +24135,7 @@
           <p:cNvPr id="18" name="card-label">
             <a:extLst xmlns:a="http://schemas.openxmlformats.org/drawingml/2006/main">
               <a:ext uri="{FF2B5EF4-FFF2-40B4-BE49-F238E27FC236}">
-                <a16:creationId xmlns:a16="http://schemas.microsoft.com/office/drawing/2014/main" id="{239BD2C4-89D9-49FE-B758-4A0931E071D1}"/>
+                <a16:creationId xmlns:a16="http://schemas.microsoft.com/office/drawing/2014/main" id="{E2BC264C-E4DA-4576-8F58-6C90B4E79C02}"/>
               </a:ext>
             </a:extLst>
           </p:cNvPr>
@@ -24030,7 +24191,7 @@
           <p:cNvPr id="19" name="card-title">
             <a:extLst xmlns:a="http://schemas.openxmlformats.org/drawingml/2006/main">
               <a:ext uri="{FF2B5EF4-FFF2-40B4-BE49-F238E27FC236}">
-                <a16:creationId xmlns:a16="http://schemas.microsoft.com/office/drawing/2014/main" id="{0C6568A0-C485-4376-A63F-2B2C4C11D6DF}"/>
+                <a16:creationId xmlns:a16="http://schemas.microsoft.com/office/drawing/2014/main" id="{47A0C346-B558-41E4-9675-AF6012A4159F}"/>
               </a:ext>
             </a:extLst>
           </p:cNvPr>
@@ -24086,7 +24247,7 @@
           <p:cNvPr id="20" name="card-body">
             <a:extLst xmlns:a="http://schemas.openxmlformats.org/drawingml/2006/main">
               <a:ext uri="{FF2B5EF4-FFF2-40B4-BE49-F238E27FC236}">
-                <a16:creationId xmlns:a16="http://schemas.microsoft.com/office/drawing/2014/main" id="{D216D7D9-78C4-4FBB-AC88-F1F80EE0065D}"/>
+                <a16:creationId xmlns:a16="http://schemas.microsoft.com/office/drawing/2014/main" id="{2067CEA8-A739-43CB-97E9-188CC9D14F5C}"/>
               </a:ext>
             </a:extLst>
           </p:cNvPr>
@@ -24132,7 +24293,7 @@
                 <a:ea typeface="Pretendard"/>
                 <a:cs typeface="Pretendard"/>
               </a:rPr>
-              <a:t>8월 21일에 안전한 샘플 자료를</a:t>
+              <a:t>8월 21일에 안전한 샘플</a:t>
             </a:r>
           </a:p>
           <a:p xmlns:a="http://schemas.openxmlformats.org/drawingml/2006/main">
@@ -24155,7 +24316,7 @@
                 <a:ea typeface="Pretendard"/>
                 <a:cs typeface="Pretendard"/>
               </a:rPr>
-              <a:t>가져올 수 있는가?</a:t>
+              <a:t>자료를 가져올 수 있는가?</a:t>
             </a:r>
           </a:p>
         </p:txBody>
@@ -24165,7 +24326,7 @@
           <p:cNvPr id="21" name="card-CHECK 3">
             <a:extLst xmlns:a="http://schemas.openxmlformats.org/drawingml/2006/main">
               <a:ext uri="{FF2B5EF4-FFF2-40B4-BE49-F238E27FC236}">
-                <a16:creationId xmlns:a16="http://schemas.microsoft.com/office/drawing/2014/main" id="{2C986AC8-EA32-4584-88BD-D93EB88C8280}"/>
+                <a16:creationId xmlns:a16="http://schemas.microsoft.com/office/drawing/2014/main" id="{571D90BC-C48F-42CC-BE93-9EBBEDD28783}"/>
               </a:ext>
             </a:extLst>
           </p:cNvPr>
@@ -24206,7 +24367,7 @@
           <p:cNvPr id="22" name="card-accent">
             <a:extLst xmlns:a="http://schemas.openxmlformats.org/drawingml/2006/main">
               <a:ext uri="{FF2B5EF4-FFF2-40B4-BE49-F238E27FC236}">
-                <a16:creationId xmlns:a16="http://schemas.microsoft.com/office/drawing/2014/main" id="{646B7ED9-A430-4D43-B49B-0C0F3BA34789}"/>
+                <a16:creationId xmlns:a16="http://schemas.microsoft.com/office/drawing/2014/main" id="{07EFF5C0-CAD3-4937-AE3E-7F7DD17E2732}"/>
               </a:ext>
             </a:extLst>
           </p:cNvPr>
@@ -24237,7 +24398,7 @@
           <p:cNvPr id="23" name="card-label">
             <a:extLst xmlns:a="http://schemas.openxmlformats.org/drawingml/2006/main">
               <a:ext uri="{FF2B5EF4-FFF2-40B4-BE49-F238E27FC236}">
-                <a16:creationId xmlns:a16="http://schemas.microsoft.com/office/drawing/2014/main" id="{B1557895-458C-4652-8621-311E0E05B369}"/>
+                <a16:creationId xmlns:a16="http://schemas.microsoft.com/office/drawing/2014/main" id="{E7BA9D45-F6F6-4E8D-8BCB-A49255766A40}"/>
               </a:ext>
             </a:extLst>
           </p:cNvPr>
@@ -24293,7 +24454,7 @@
           <p:cNvPr id="24" name="card-title">
             <a:extLst xmlns:a="http://schemas.openxmlformats.org/drawingml/2006/main">
               <a:ext uri="{FF2B5EF4-FFF2-40B4-BE49-F238E27FC236}">
-                <a16:creationId xmlns:a16="http://schemas.microsoft.com/office/drawing/2014/main" id="{CBF93FDD-9E26-4FCE-8F73-C034A364A285}"/>
+                <a16:creationId xmlns:a16="http://schemas.microsoft.com/office/drawing/2014/main" id="{B93AEB1F-3AF0-497D-8EE0-E8D777AA205B}"/>
               </a:ext>
             </a:extLst>
           </p:cNvPr>
@@ -24349,7 +24510,7 @@
           <p:cNvPr id="25" name="card-body">
             <a:extLst xmlns:a="http://schemas.openxmlformats.org/drawingml/2006/main">
               <a:ext uri="{FF2B5EF4-FFF2-40B4-BE49-F238E27FC236}">
-                <a16:creationId xmlns:a16="http://schemas.microsoft.com/office/drawing/2014/main" id="{5BD22C1A-83E8-499A-97CA-92566EDE7B19}"/>
+                <a16:creationId xmlns:a16="http://schemas.microsoft.com/office/drawing/2014/main" id="{789F7E56-234A-4E53-AA34-5DAEF2095CAD}"/>
               </a:ext>
             </a:extLst>
           </p:cNvPr>
@@ -24395,30 +24556,7 @@
                 <a:ea typeface="Pretendard"/>
                 <a:cs typeface="Pretendard"/>
               </a:rPr>
-              <a:t>스파로스 데브엑스에서 하루 안에</a:t>
-            </a:r>
-          </a:p>
-          <a:p xmlns:a="http://schemas.openxmlformats.org/drawingml/2006/main">
-            <a:pPr algn="l">
-              <a:defRPr sz="1350" b="0">
-                <a:solidFill>
-                  <a:srgbClr val="4B5563"/>
-                </a:solidFill>
-                <a:latin typeface="Pretendard"/>
-                <a:ea typeface="Pretendard"/>
-                <a:cs typeface="Pretendard"/>
-              </a:defRPr>
-            </a:pPr>
-            <a:r>
-              <a:rPr sz="1350" b="0">
-                <a:solidFill>
-                  <a:srgbClr val="4B5563"/>
-                </a:solidFill>
-                <a:latin typeface="Pretendard"/>
-                <a:ea typeface="Pretendard"/>
-                <a:cs typeface="Pretendard"/>
-              </a:rPr>
-              <a:t>핵심 흐름을 만들 수 있는가?</a:t>
+              <a:t>하루 안에 구현 가능한가?</a:t>
             </a:r>
           </a:p>
         </p:txBody>
@@ -24428,7 +24566,7 @@
           <p:cNvPr id="26" name="card-CHECK 4">
             <a:extLst xmlns:a="http://schemas.openxmlformats.org/drawingml/2006/main">
               <a:ext uri="{FF2B5EF4-FFF2-40B4-BE49-F238E27FC236}">
-                <a16:creationId xmlns:a16="http://schemas.microsoft.com/office/drawing/2014/main" id="{BC1F558B-7A2E-4B3A-98A5-67AD18D03D3B}"/>
+                <a16:creationId xmlns:a16="http://schemas.microsoft.com/office/drawing/2014/main" id="{A8B313B0-C29E-41CB-AD64-4F4FB9B6A67D}"/>
               </a:ext>
             </a:extLst>
           </p:cNvPr>
@@ -24469,7 +24607,7 @@
           <p:cNvPr id="27" name="card-accent">
             <a:extLst xmlns:a="http://schemas.openxmlformats.org/drawingml/2006/main">
               <a:ext uri="{FF2B5EF4-FFF2-40B4-BE49-F238E27FC236}">
-                <a16:creationId xmlns:a16="http://schemas.microsoft.com/office/drawing/2014/main" id="{9E16AF65-2DC6-4F45-9497-848A8ED0C810}"/>
+                <a16:creationId xmlns:a16="http://schemas.microsoft.com/office/drawing/2014/main" id="{AA46A96A-EC6D-4871-83F5-996C9DAE166A}"/>
               </a:ext>
             </a:extLst>
           </p:cNvPr>
@@ -24500,7 +24638,7 @@
           <p:cNvPr id="28" name="card-label">
             <a:extLst xmlns:a="http://schemas.openxmlformats.org/drawingml/2006/main">
               <a:ext uri="{FF2B5EF4-FFF2-40B4-BE49-F238E27FC236}">
-                <a16:creationId xmlns:a16="http://schemas.microsoft.com/office/drawing/2014/main" id="{3625477A-B126-4A73-A273-906BA55B8B81}"/>
+                <a16:creationId xmlns:a16="http://schemas.microsoft.com/office/drawing/2014/main" id="{59A5A918-81D0-402D-BC48-A237BC1EB935}"/>
               </a:ext>
             </a:extLst>
           </p:cNvPr>
@@ -24556,7 +24694,7 @@
           <p:cNvPr id="29" name="card-title">
             <a:extLst xmlns:a="http://schemas.openxmlformats.org/drawingml/2006/main">
               <a:ext uri="{FF2B5EF4-FFF2-40B4-BE49-F238E27FC236}">
-                <a16:creationId xmlns:a16="http://schemas.microsoft.com/office/drawing/2014/main" id="{3E4489DE-3914-4E81-BD8B-433F459F04A1}"/>
+                <a16:creationId xmlns:a16="http://schemas.microsoft.com/office/drawing/2014/main" id="{3E987AAB-C5DA-4148-BB58-967C336F8A8E}"/>
               </a:ext>
             </a:extLst>
           </p:cNvPr>
@@ -24612,7 +24750,7 @@
           <p:cNvPr id="30" name="card-body">
             <a:extLst xmlns:a="http://schemas.openxmlformats.org/drawingml/2006/main">
               <a:ext uri="{FF2B5EF4-FFF2-40B4-BE49-F238E27FC236}">
-                <a16:creationId xmlns:a16="http://schemas.microsoft.com/office/drawing/2014/main" id="{0AEC8A18-B9CE-4256-AE2C-3E986482E5EB}"/>
+                <a16:creationId xmlns:a16="http://schemas.microsoft.com/office/drawing/2014/main" id="{CA711255-B851-416E-9AA8-69B5C5CFCA01}"/>
               </a:ext>
             </a:extLst>
           </p:cNvPr>
@@ -24658,7 +24796,7 @@
                 <a:ea typeface="Pretendard"/>
                 <a:cs typeface="Pretendard"/>
               </a:rPr>
-              <a:t>AI 결과를 사람이 검토할 기준이</a:t>
+              <a:t>AI 결과를 사람이 검토할</a:t>
             </a:r>
           </a:p>
           <a:p xmlns:a="http://schemas.openxmlformats.org/drawingml/2006/main">
@@ -24681,7 +24819,7 @@
                 <a:ea typeface="Pretendard"/>
                 <a:cs typeface="Pretendard"/>
               </a:rPr>
-              <a:t>분명한가?</a:t>
+              <a:t>기준이 분명한가?</a:t>
             </a:r>
           </a:p>
         </p:txBody>
@@ -24689,7 +24827,7 @@
     </p:spTree>
     <p:extLst>
       <p:ext uri="{BB962C8B-B14F-4D97-AF65-F5344CB8AC3E}">
-        <p14:creationId xmlns:p14="http://schemas.microsoft.com/office/powerpoint/2010/main" val="1387931863"/>
+        <p14:creationId xmlns:p14="http://schemas.microsoft.com/office/powerpoint/2010/main" val="1458573525"/>
       </p:ext>
     </p:extLst>
   </p:cSld>
@@ -24720,7 +24858,7 @@
           <p:cNvPr id="1" name="decor-ring-1">
             <a:extLst xmlns:a="http://schemas.openxmlformats.org/drawingml/2006/main">
               <a:ext uri="{FF2B5EF4-FFF2-40B4-BE49-F238E27FC236}">
-                <a16:creationId xmlns:a16="http://schemas.microsoft.com/office/drawing/2014/main" id="{FB97D130-E111-473D-9CCD-21F2F59B0288}"/>
+                <a16:creationId xmlns:a16="http://schemas.microsoft.com/office/drawing/2014/main" id="{F26CF30C-FF72-4FB5-B468-8E3A971494EF}"/>
               </a:ext>
             </a:extLst>
           </p:cNvPr>
@@ -24751,7 +24889,7 @@
           <p:cNvPr id="2" name="decor-ring-2">
             <a:extLst xmlns:a="http://schemas.openxmlformats.org/drawingml/2006/main">
               <a:ext uri="{FF2B5EF4-FFF2-40B4-BE49-F238E27FC236}">
-                <a16:creationId xmlns:a16="http://schemas.microsoft.com/office/drawing/2014/main" id="{4F001C05-7803-4026-AA43-FC87FE507DF2}"/>
+                <a16:creationId xmlns:a16="http://schemas.microsoft.com/office/drawing/2014/main" id="{33A4D9C9-5427-430D-9528-1C437182A523}"/>
               </a:ext>
             </a:extLst>
           </p:cNvPr>
@@ -24782,7 +24920,7 @@
           <p:cNvPr id="3" name="decor-orb-1">
             <a:extLst xmlns:a="http://schemas.openxmlformats.org/drawingml/2006/main">
               <a:ext uri="{FF2B5EF4-FFF2-40B4-BE49-F238E27FC236}">
-                <a16:creationId xmlns:a16="http://schemas.microsoft.com/office/drawing/2014/main" id="{BC80003F-0609-4D6C-832D-44739DB9D048}"/>
+                <a16:creationId xmlns:a16="http://schemas.microsoft.com/office/drawing/2014/main" id="{999662C4-497E-4493-974C-57ACE8BF8658}"/>
               </a:ext>
             </a:extLst>
           </p:cNvPr>
@@ -24813,7 +24951,7 @@
           <p:cNvPr id="4" name="decor-orb-2">
             <a:extLst xmlns:a="http://schemas.openxmlformats.org/drawingml/2006/main">
               <a:ext uri="{FF2B5EF4-FFF2-40B4-BE49-F238E27FC236}">
-                <a16:creationId xmlns:a16="http://schemas.microsoft.com/office/drawing/2014/main" id="{F2BCE3C5-F540-441A-9EED-A1C290A5CB9F}"/>
+                <a16:creationId xmlns:a16="http://schemas.microsoft.com/office/drawing/2014/main" id="{47B60CC0-EE5E-4730-AD96-845D392FF824}"/>
               </a:ext>
             </a:extLst>
           </p:cNvPr>
@@ -24844,7 +24982,7 @@
           <p:cNvPr id="5" name="title-bar">
             <a:extLst xmlns:a="http://schemas.openxmlformats.org/drawingml/2006/main">
               <a:ext uri="{FF2B5EF4-FFF2-40B4-BE49-F238E27FC236}">
-                <a16:creationId xmlns:a16="http://schemas.microsoft.com/office/drawing/2014/main" id="{E50837E2-870B-419C-9A72-C8D73661375F}"/>
+                <a16:creationId xmlns:a16="http://schemas.microsoft.com/office/drawing/2014/main" id="{951B280D-1554-4513-9E4A-4E5CB8F22909}"/>
               </a:ext>
             </a:extLst>
           </p:cNvPr>
@@ -24875,7 +25013,7 @@
           <p:cNvPr id="6" name="kicker">
             <a:extLst xmlns:a="http://schemas.openxmlformats.org/drawingml/2006/main">
               <a:ext uri="{FF2B5EF4-FFF2-40B4-BE49-F238E27FC236}">
-                <a16:creationId xmlns:a16="http://schemas.microsoft.com/office/drawing/2014/main" id="{20DDF455-92C6-43E4-9B2E-CF903DEDDA2C}"/>
+                <a16:creationId xmlns:a16="http://schemas.microsoft.com/office/drawing/2014/main" id="{DEB2109F-F458-4C3E-91A4-CE7CF5E23935}"/>
               </a:ext>
             </a:extLst>
           </p:cNvPr>
@@ -24931,7 +25069,7 @@
           <p:cNvPr id="7" name="title">
             <a:extLst xmlns:a="http://schemas.openxmlformats.org/drawingml/2006/main">
               <a:ext uri="{FF2B5EF4-FFF2-40B4-BE49-F238E27FC236}">
-                <a16:creationId xmlns:a16="http://schemas.microsoft.com/office/drawing/2014/main" id="{23555F60-EF75-4986-AD53-076030FDE50B}"/>
+                <a16:creationId xmlns:a16="http://schemas.microsoft.com/office/drawing/2014/main" id="{61A7230F-B121-484F-8216-6B1E1CF415B3}"/>
               </a:ext>
             </a:extLst>
           </p:cNvPr>
@@ -24987,7 +25125,7 @@
           <p:cNvPr id="8" name="subtitle">
             <a:extLst xmlns:a="http://schemas.openxmlformats.org/drawingml/2006/main">
               <a:ext uri="{FF2B5EF4-FFF2-40B4-BE49-F238E27FC236}">
-                <a16:creationId xmlns:a16="http://schemas.microsoft.com/office/drawing/2014/main" id="{96620665-A9F3-446A-8AB2-B65A15FEB2AB}"/>
+                <a16:creationId xmlns:a16="http://schemas.microsoft.com/office/drawing/2014/main" id="{0233FB48-24F5-4F67-8EC3-1786A0411292}"/>
               </a:ext>
             </a:extLst>
           </p:cNvPr>
@@ -25047,7 +25185,7 @@
           <p:nvPr/>
         </p:nvPicPr>
         <p:blipFill>
-          <a:blip xmlns:r="http://schemas.openxmlformats.org/officeDocument/2006/relationships" xmlns:a="http://schemas.openxmlformats.org/drawingml/2006/main" r:embed="R74631a1f54ff4e94"/>
+          <a:blip xmlns:r="http://schemas.openxmlformats.org/officeDocument/2006/relationships" xmlns:a="http://schemas.openxmlformats.org/drawingml/2006/main" r:embed="Rc049a646157e4d33"/>
           <a:stretch xmlns:a="http://schemas.openxmlformats.org/drawingml/2006/main"/>
         </p:blipFill>
         <p:spPr>
@@ -25065,7 +25203,7 @@
           <p:cNvPr id="10" name="footer-number">
             <a:extLst xmlns:a="http://schemas.openxmlformats.org/drawingml/2006/main">
               <a:ext uri="{FF2B5EF4-FFF2-40B4-BE49-F238E27FC236}">
-                <a16:creationId xmlns:a16="http://schemas.microsoft.com/office/drawing/2014/main" id="{9464100F-3665-44E2-8CFF-C5D383FA59D8}"/>
+                <a16:creationId xmlns:a16="http://schemas.microsoft.com/office/drawing/2014/main" id="{B735CF2C-2B2D-4764-8F13-30566E6D845B}"/>
               </a:ext>
             </a:extLst>
           </p:cNvPr>
@@ -25121,7 +25259,7 @@
           <p:cNvPr id="11" name="fb-header">
             <a:extLst xmlns:a="http://schemas.openxmlformats.org/drawingml/2006/main">
               <a:ext uri="{FF2B5EF4-FFF2-40B4-BE49-F238E27FC236}">
-                <a16:creationId xmlns:a16="http://schemas.microsoft.com/office/drawing/2014/main" id="{4378178B-3772-4A3B-9B21-E54517427AF5}"/>
+                <a16:creationId xmlns:a16="http://schemas.microsoft.com/office/drawing/2014/main" id="{5B436859-FAD3-40CB-BE64-556E027B3077}"/>
               </a:ext>
             </a:extLst>
           </p:cNvPr>
@@ -25154,7 +25292,7 @@
           <p:cNvPr id="12" name="fb-header-text">
             <a:extLst xmlns:a="http://schemas.openxmlformats.org/drawingml/2006/main">
               <a:ext uri="{FF2B5EF4-FFF2-40B4-BE49-F238E27FC236}">
-                <a16:creationId xmlns:a16="http://schemas.microsoft.com/office/drawing/2014/main" id="{10A77EDF-DBF4-44CC-936D-3C9E04CB2C8C}"/>
+                <a16:creationId xmlns:a16="http://schemas.microsoft.com/office/drawing/2014/main" id="{507E4EC7-4379-4014-8643-35E1096891B4}"/>
               </a:ext>
             </a:extLst>
           </p:cNvPr>
@@ -25210,7 +25348,7 @@
           <p:cNvPr id="13" name="fb-header">
             <a:extLst xmlns:a="http://schemas.openxmlformats.org/drawingml/2006/main">
               <a:ext uri="{FF2B5EF4-FFF2-40B4-BE49-F238E27FC236}">
-                <a16:creationId xmlns:a16="http://schemas.microsoft.com/office/drawing/2014/main" id="{52E1C54B-F5E2-47EC-AB04-C8E9060C563A}"/>
+                <a16:creationId xmlns:a16="http://schemas.microsoft.com/office/drawing/2014/main" id="{3A50DD6B-337A-4AEC-8DC7-FB60480A4B82}"/>
               </a:ext>
             </a:extLst>
           </p:cNvPr>
@@ -25243,7 +25381,7 @@
           <p:cNvPr id="14" name="fb-header-text">
             <a:extLst xmlns:a="http://schemas.openxmlformats.org/drawingml/2006/main">
               <a:ext uri="{FF2B5EF4-FFF2-40B4-BE49-F238E27FC236}">
-                <a16:creationId xmlns:a16="http://schemas.microsoft.com/office/drawing/2014/main" id="{FC0B9B0D-5525-4F62-8B16-103DA5637D3F}"/>
+                <a16:creationId xmlns:a16="http://schemas.microsoft.com/office/drawing/2014/main" id="{44553B40-01C4-4ABD-8589-8D4F310C8A22}"/>
               </a:ext>
             </a:extLst>
           </p:cNvPr>
@@ -25299,7 +25437,7 @@
           <p:cNvPr id="15" name="fb-header">
             <a:extLst xmlns:a="http://schemas.openxmlformats.org/drawingml/2006/main">
               <a:ext uri="{FF2B5EF4-FFF2-40B4-BE49-F238E27FC236}">
-                <a16:creationId xmlns:a16="http://schemas.microsoft.com/office/drawing/2014/main" id="{B6458257-157A-4D8B-A15F-3E4B627AE002}"/>
+                <a16:creationId xmlns:a16="http://schemas.microsoft.com/office/drawing/2014/main" id="{A5008C3B-9653-426D-B4A9-82D778E8EA30}"/>
               </a:ext>
             </a:extLst>
           </p:cNvPr>
@@ -25332,7 +25470,7 @@
           <p:cNvPr id="16" name="fb-header-text">
             <a:extLst xmlns:a="http://schemas.openxmlformats.org/drawingml/2006/main">
               <a:ext uri="{FF2B5EF4-FFF2-40B4-BE49-F238E27FC236}">
-                <a16:creationId xmlns:a16="http://schemas.microsoft.com/office/drawing/2014/main" id="{F4E16258-71B1-42B1-A0F6-0F08CA522D57}"/>
+                <a16:creationId xmlns:a16="http://schemas.microsoft.com/office/drawing/2014/main" id="{889C10C9-27F7-42B8-B6D9-99E77DCE4AF0}"/>
               </a:ext>
             </a:extLst>
           </p:cNvPr>
@@ -25388,7 +25526,7 @@
           <p:cNvPr id="17" name="fb-header">
             <a:extLst xmlns:a="http://schemas.openxmlformats.org/drawingml/2006/main">
               <a:ext uri="{FF2B5EF4-FFF2-40B4-BE49-F238E27FC236}">
-                <a16:creationId xmlns:a16="http://schemas.microsoft.com/office/drawing/2014/main" id="{789D01AA-7743-4748-91B7-F721D793405C}"/>
+                <a16:creationId xmlns:a16="http://schemas.microsoft.com/office/drawing/2014/main" id="{E6F5C09F-54E4-4244-B814-35557161CBD0}"/>
               </a:ext>
             </a:extLst>
           </p:cNvPr>
@@ -25421,7 +25559,7 @@
           <p:cNvPr id="18" name="fb-header-text">
             <a:extLst xmlns:a="http://schemas.openxmlformats.org/drawingml/2006/main">
               <a:ext uri="{FF2B5EF4-FFF2-40B4-BE49-F238E27FC236}">
-                <a16:creationId xmlns:a16="http://schemas.microsoft.com/office/drawing/2014/main" id="{8643C7C3-898A-45A6-AFFF-73D06E882901}"/>
+                <a16:creationId xmlns:a16="http://schemas.microsoft.com/office/drawing/2014/main" id="{140A6064-6261-41F7-BBF2-78FE86B06EC6}"/>
               </a:ext>
             </a:extLst>
           </p:cNvPr>
@@ -25477,7 +25615,7 @@
           <p:cNvPr id="19" name="fb-header">
             <a:extLst xmlns:a="http://schemas.openxmlformats.org/drawingml/2006/main">
               <a:ext uri="{FF2B5EF4-FFF2-40B4-BE49-F238E27FC236}">
-                <a16:creationId xmlns:a16="http://schemas.microsoft.com/office/drawing/2014/main" id="{12701C5B-CA09-45A4-B65A-49C7472B3A48}"/>
+                <a16:creationId xmlns:a16="http://schemas.microsoft.com/office/drawing/2014/main" id="{B7A69061-C07B-467E-BB27-2D05D68FF064}"/>
               </a:ext>
             </a:extLst>
           </p:cNvPr>
@@ -25510,7 +25648,7 @@
           <p:cNvPr id="20" name="fb-header-text">
             <a:extLst xmlns:a="http://schemas.openxmlformats.org/drawingml/2006/main">
               <a:ext uri="{FF2B5EF4-FFF2-40B4-BE49-F238E27FC236}">
-                <a16:creationId xmlns:a16="http://schemas.microsoft.com/office/drawing/2014/main" id="{EACE6C61-0107-44C7-984E-BD9C88A5DFF3}"/>
+                <a16:creationId xmlns:a16="http://schemas.microsoft.com/office/drawing/2014/main" id="{DDBF85C5-04AE-486D-9E19-7E3C813E56B4}"/>
               </a:ext>
             </a:extLst>
           </p:cNvPr>
@@ -25566,7 +25704,7 @@
           <p:cNvPr id="21" name="fb-cell">
             <a:extLst xmlns:a="http://schemas.openxmlformats.org/drawingml/2006/main">
               <a:ext uri="{FF2B5EF4-FFF2-40B4-BE49-F238E27FC236}">
-                <a16:creationId xmlns:a16="http://schemas.microsoft.com/office/drawing/2014/main" id="{1D9D2415-AAE2-4D4E-834C-4E38BA527AFF}"/>
+                <a16:creationId xmlns:a16="http://schemas.microsoft.com/office/drawing/2014/main" id="{5D053436-3C90-42B5-9177-E4C367848A63}"/>
               </a:ext>
             </a:extLst>
           </p:cNvPr>
@@ -25599,7 +25737,7 @@
           <p:cNvPr id="22" name="team-label">
             <a:extLst xmlns:a="http://schemas.openxmlformats.org/drawingml/2006/main">
               <a:ext uri="{FF2B5EF4-FFF2-40B4-BE49-F238E27FC236}">
-                <a16:creationId xmlns:a16="http://schemas.microsoft.com/office/drawing/2014/main" id="{60D90AB5-4087-47C1-BECA-88C809E5C2CA}"/>
+                <a16:creationId xmlns:a16="http://schemas.microsoft.com/office/drawing/2014/main" id="{06599E9E-9BDD-46A3-8D45-43FFFB444909}"/>
               </a:ext>
             </a:extLst>
           </p:cNvPr>
@@ -25655,7 +25793,7 @@
           <p:cNvPr id="23" name="fb-cell">
             <a:extLst xmlns:a="http://schemas.openxmlformats.org/drawingml/2006/main">
               <a:ext uri="{FF2B5EF4-FFF2-40B4-BE49-F238E27FC236}">
-                <a16:creationId xmlns:a16="http://schemas.microsoft.com/office/drawing/2014/main" id="{A64C8D0D-E4E9-4F24-A38C-B8B42FFA5EAC}"/>
+                <a16:creationId xmlns:a16="http://schemas.microsoft.com/office/drawing/2014/main" id="{708C8DCD-AF59-4E5A-B33A-5F777589E530}"/>
               </a:ext>
             </a:extLst>
           </p:cNvPr>
@@ -25688,7 +25826,7 @@
           <p:cNvPr id="24" name="fb-cell">
             <a:extLst xmlns:a="http://schemas.openxmlformats.org/drawingml/2006/main">
               <a:ext uri="{FF2B5EF4-FFF2-40B4-BE49-F238E27FC236}">
-                <a16:creationId xmlns:a16="http://schemas.microsoft.com/office/drawing/2014/main" id="{99240A54-615C-470D-8EE7-1B385B550B9B}"/>
+                <a16:creationId xmlns:a16="http://schemas.microsoft.com/office/drawing/2014/main" id="{AC44713B-EB46-4174-9DB5-E5C5937229BD}"/>
               </a:ext>
             </a:extLst>
           </p:cNvPr>
@@ -25721,7 +25859,7 @@
           <p:cNvPr id="25" name="fb-cell">
             <a:extLst xmlns:a="http://schemas.openxmlformats.org/drawingml/2006/main">
               <a:ext uri="{FF2B5EF4-FFF2-40B4-BE49-F238E27FC236}">
-                <a16:creationId xmlns:a16="http://schemas.microsoft.com/office/drawing/2014/main" id="{DC916421-E80A-4142-9A75-58C0454B0C2B}"/>
+                <a16:creationId xmlns:a16="http://schemas.microsoft.com/office/drawing/2014/main" id="{96F1F02A-D00D-4600-8DB4-79F883D925AF}"/>
               </a:ext>
             </a:extLst>
           </p:cNvPr>
@@ -25754,7 +25892,7 @@
           <p:cNvPr id="26" name="fb-cell">
             <a:extLst xmlns:a="http://schemas.openxmlformats.org/drawingml/2006/main">
               <a:ext uri="{FF2B5EF4-FFF2-40B4-BE49-F238E27FC236}">
-                <a16:creationId xmlns:a16="http://schemas.microsoft.com/office/drawing/2014/main" id="{4580EAF8-0081-4916-A38C-6DDEA85BEC93}"/>
+                <a16:creationId xmlns:a16="http://schemas.microsoft.com/office/drawing/2014/main" id="{F523C791-E75E-4CAB-80DF-214D6262CE75}"/>
               </a:ext>
             </a:extLst>
           </p:cNvPr>
@@ -25787,7 +25925,7 @@
           <p:cNvPr id="27" name="fb-cell">
             <a:extLst xmlns:a="http://schemas.openxmlformats.org/drawingml/2006/main">
               <a:ext uri="{FF2B5EF4-FFF2-40B4-BE49-F238E27FC236}">
-                <a16:creationId xmlns:a16="http://schemas.microsoft.com/office/drawing/2014/main" id="{B8D18784-458A-4459-AB46-B1B408101FBA}"/>
+                <a16:creationId xmlns:a16="http://schemas.microsoft.com/office/drawing/2014/main" id="{EF56D809-90CC-458A-BCA3-C1E4E69C3D03}"/>
               </a:ext>
             </a:extLst>
           </p:cNvPr>
@@ -25820,7 +25958,7 @@
           <p:cNvPr id="28" name="team-label">
             <a:extLst xmlns:a="http://schemas.openxmlformats.org/drawingml/2006/main">
               <a:ext uri="{FF2B5EF4-FFF2-40B4-BE49-F238E27FC236}">
-                <a16:creationId xmlns:a16="http://schemas.microsoft.com/office/drawing/2014/main" id="{68A66B4A-A868-4B29-A097-20B8F769DB10}"/>
+                <a16:creationId xmlns:a16="http://schemas.microsoft.com/office/drawing/2014/main" id="{8594F828-3FB7-46F9-8248-89E66D8EBF65}"/>
               </a:ext>
             </a:extLst>
           </p:cNvPr>
@@ -25876,7 +26014,7 @@
           <p:cNvPr id="29" name="fb-cell">
             <a:extLst xmlns:a="http://schemas.openxmlformats.org/drawingml/2006/main">
               <a:ext uri="{FF2B5EF4-FFF2-40B4-BE49-F238E27FC236}">
-                <a16:creationId xmlns:a16="http://schemas.microsoft.com/office/drawing/2014/main" id="{D563AD57-D306-42A0-82B6-C64AA87A0851}"/>
+                <a16:creationId xmlns:a16="http://schemas.microsoft.com/office/drawing/2014/main" id="{38061644-87A9-485A-8587-6BFBDD8635FB}"/>
               </a:ext>
             </a:extLst>
           </p:cNvPr>
@@ -25909,7 +26047,7 @@
           <p:cNvPr id="30" name="fb-cell">
             <a:extLst xmlns:a="http://schemas.openxmlformats.org/drawingml/2006/main">
               <a:ext uri="{FF2B5EF4-FFF2-40B4-BE49-F238E27FC236}">
-                <a16:creationId xmlns:a16="http://schemas.microsoft.com/office/drawing/2014/main" id="{3EABB9AA-5E5D-43F8-8793-BDC0CA7F6D65}"/>
+                <a16:creationId xmlns:a16="http://schemas.microsoft.com/office/drawing/2014/main" id="{06DE44E2-96A5-4631-9171-87A5E731DA01}"/>
               </a:ext>
             </a:extLst>
           </p:cNvPr>
@@ -25942,7 +26080,7 @@
           <p:cNvPr id="31" name="fb-cell">
             <a:extLst xmlns:a="http://schemas.openxmlformats.org/drawingml/2006/main">
               <a:ext uri="{FF2B5EF4-FFF2-40B4-BE49-F238E27FC236}">
-                <a16:creationId xmlns:a16="http://schemas.microsoft.com/office/drawing/2014/main" id="{A1D891A5-872B-4E4E-B56E-CA614EAEB2AA}"/>
+                <a16:creationId xmlns:a16="http://schemas.microsoft.com/office/drawing/2014/main" id="{710ACD80-F53D-4313-B169-90CBD845472A}"/>
               </a:ext>
             </a:extLst>
           </p:cNvPr>
@@ -25975,7 +26113,7 @@
           <p:cNvPr id="32" name="fb-cell">
             <a:extLst xmlns:a="http://schemas.openxmlformats.org/drawingml/2006/main">
               <a:ext uri="{FF2B5EF4-FFF2-40B4-BE49-F238E27FC236}">
-                <a16:creationId xmlns:a16="http://schemas.microsoft.com/office/drawing/2014/main" id="{C8D6A0B9-B491-47A2-B670-AC39F506A790}"/>
+                <a16:creationId xmlns:a16="http://schemas.microsoft.com/office/drawing/2014/main" id="{D116591B-CBE6-49FF-9DDD-D836C643B7AE}"/>
               </a:ext>
             </a:extLst>
           </p:cNvPr>
@@ -26008,7 +26146,7 @@
           <p:cNvPr id="33" name="fb-cell">
             <a:extLst xmlns:a="http://schemas.openxmlformats.org/drawingml/2006/main">
               <a:ext uri="{FF2B5EF4-FFF2-40B4-BE49-F238E27FC236}">
-                <a16:creationId xmlns:a16="http://schemas.microsoft.com/office/drawing/2014/main" id="{1E9DD80D-B4C2-42B3-8BC1-0CB16F7366B8}"/>
+                <a16:creationId xmlns:a16="http://schemas.microsoft.com/office/drawing/2014/main" id="{665F8948-D9E1-4ED1-BB2E-A1238CF8DE16}"/>
               </a:ext>
             </a:extLst>
           </p:cNvPr>
@@ -26041,7 +26179,7 @@
           <p:cNvPr id="34" name="team-label">
             <a:extLst xmlns:a="http://schemas.openxmlformats.org/drawingml/2006/main">
               <a:ext uri="{FF2B5EF4-FFF2-40B4-BE49-F238E27FC236}">
-                <a16:creationId xmlns:a16="http://schemas.microsoft.com/office/drawing/2014/main" id="{88F0C9C1-BC4A-4D88-B842-F8C08C28B025}"/>
+                <a16:creationId xmlns:a16="http://schemas.microsoft.com/office/drawing/2014/main" id="{0D9F095D-E1B4-4A6C-9E34-134B16E054B6}"/>
               </a:ext>
             </a:extLst>
           </p:cNvPr>
@@ -26097,7 +26235,7 @@
           <p:cNvPr id="35" name="fb-cell">
             <a:extLst xmlns:a="http://schemas.openxmlformats.org/drawingml/2006/main">
               <a:ext uri="{FF2B5EF4-FFF2-40B4-BE49-F238E27FC236}">
-                <a16:creationId xmlns:a16="http://schemas.microsoft.com/office/drawing/2014/main" id="{9BB20032-DAD0-4719-B791-89D51B9B1ACC}"/>
+                <a16:creationId xmlns:a16="http://schemas.microsoft.com/office/drawing/2014/main" id="{C0FD3DA7-AFDA-400A-A4A1-3DCF3739AE2D}"/>
               </a:ext>
             </a:extLst>
           </p:cNvPr>
@@ -26130,7 +26268,7 @@
           <p:cNvPr id="36" name="fb-cell">
             <a:extLst xmlns:a="http://schemas.openxmlformats.org/drawingml/2006/main">
               <a:ext uri="{FF2B5EF4-FFF2-40B4-BE49-F238E27FC236}">
-                <a16:creationId xmlns:a16="http://schemas.microsoft.com/office/drawing/2014/main" id="{2A23F088-8387-46E8-B1CF-26566CB3F26D}"/>
+                <a16:creationId xmlns:a16="http://schemas.microsoft.com/office/drawing/2014/main" id="{62484469-A70A-4753-BD5F-0F4C9B3049E8}"/>
               </a:ext>
             </a:extLst>
           </p:cNvPr>
@@ -26163,7 +26301,7 @@
           <p:cNvPr id="37" name="fb-cell">
             <a:extLst xmlns:a="http://schemas.openxmlformats.org/drawingml/2006/main">
               <a:ext uri="{FF2B5EF4-FFF2-40B4-BE49-F238E27FC236}">
-                <a16:creationId xmlns:a16="http://schemas.microsoft.com/office/drawing/2014/main" id="{C763226C-9FE8-4214-874D-A53B00F103CB}"/>
+                <a16:creationId xmlns:a16="http://schemas.microsoft.com/office/drawing/2014/main" id="{F3228794-675E-46DB-92E5-1B9C3E2A2088}"/>
               </a:ext>
             </a:extLst>
           </p:cNvPr>
@@ -26196,7 +26334,7 @@
           <p:cNvPr id="38" name="fb-cell">
             <a:extLst xmlns:a="http://schemas.openxmlformats.org/drawingml/2006/main">
               <a:ext uri="{FF2B5EF4-FFF2-40B4-BE49-F238E27FC236}">
-                <a16:creationId xmlns:a16="http://schemas.microsoft.com/office/drawing/2014/main" id="{1AA3F784-78C8-4E64-A49F-58EF39B3A3E8}"/>
+                <a16:creationId xmlns:a16="http://schemas.microsoft.com/office/drawing/2014/main" id="{0395C966-01B8-457D-8048-D0E0782E6917}"/>
               </a:ext>
             </a:extLst>
           </p:cNvPr>
@@ -26229,7 +26367,7 @@
           <p:cNvPr id="39" name="fb-cell">
             <a:extLst xmlns:a="http://schemas.openxmlformats.org/drawingml/2006/main">
               <a:ext uri="{FF2B5EF4-FFF2-40B4-BE49-F238E27FC236}">
-                <a16:creationId xmlns:a16="http://schemas.microsoft.com/office/drawing/2014/main" id="{786F3CAB-5439-49AB-A2B7-91C4890C9B4F}"/>
+                <a16:creationId xmlns:a16="http://schemas.microsoft.com/office/drawing/2014/main" id="{DA23A07D-520B-4B8C-9ABD-E5B2F7815235}"/>
               </a:ext>
             </a:extLst>
           </p:cNvPr>
@@ -26262,7 +26400,7 @@
           <p:cNvPr id="40" name="team-label">
             <a:extLst xmlns:a="http://schemas.openxmlformats.org/drawingml/2006/main">
               <a:ext uri="{FF2B5EF4-FFF2-40B4-BE49-F238E27FC236}">
-                <a16:creationId xmlns:a16="http://schemas.microsoft.com/office/drawing/2014/main" id="{3928F476-E2A1-4E45-9887-FD37243FB351}"/>
+                <a16:creationId xmlns:a16="http://schemas.microsoft.com/office/drawing/2014/main" id="{91B65E15-3D11-4D73-82F5-2B04F447C4AC}"/>
               </a:ext>
             </a:extLst>
           </p:cNvPr>
@@ -26318,7 +26456,7 @@
           <p:cNvPr id="41" name="fb-cell">
             <a:extLst xmlns:a="http://schemas.openxmlformats.org/drawingml/2006/main">
               <a:ext uri="{FF2B5EF4-FFF2-40B4-BE49-F238E27FC236}">
-                <a16:creationId xmlns:a16="http://schemas.microsoft.com/office/drawing/2014/main" id="{FDB9D119-074F-4D39-A8AF-6F5219E56995}"/>
+                <a16:creationId xmlns:a16="http://schemas.microsoft.com/office/drawing/2014/main" id="{F13CB550-A85E-407F-AEE6-9115FDE305D7}"/>
               </a:ext>
             </a:extLst>
           </p:cNvPr>
@@ -26351,7 +26489,7 @@
           <p:cNvPr id="42" name="fb-cell">
             <a:extLst xmlns:a="http://schemas.openxmlformats.org/drawingml/2006/main">
               <a:ext uri="{FF2B5EF4-FFF2-40B4-BE49-F238E27FC236}">
-                <a16:creationId xmlns:a16="http://schemas.microsoft.com/office/drawing/2014/main" id="{8E6B10E1-D5B6-4083-8840-D2DDC9783B9D}"/>
+                <a16:creationId xmlns:a16="http://schemas.microsoft.com/office/drawing/2014/main" id="{7575B334-A913-469E-B731-FFD9EB0D6511}"/>
               </a:ext>
             </a:extLst>
           </p:cNvPr>
@@ -26384,7 +26522,7 @@
           <p:cNvPr id="43" name="fb-cell">
             <a:extLst xmlns:a="http://schemas.openxmlformats.org/drawingml/2006/main">
               <a:ext uri="{FF2B5EF4-FFF2-40B4-BE49-F238E27FC236}">
-                <a16:creationId xmlns:a16="http://schemas.microsoft.com/office/drawing/2014/main" id="{6BC1525D-9B4D-4DA3-94AE-B18CBE7B5292}"/>
+                <a16:creationId xmlns:a16="http://schemas.microsoft.com/office/drawing/2014/main" id="{9D7A887B-CF5E-426C-BA13-86876808B8AA}"/>
               </a:ext>
             </a:extLst>
           </p:cNvPr>
@@ -26417,7 +26555,7 @@
           <p:cNvPr id="44" name="fb-cell">
             <a:extLst xmlns:a="http://schemas.openxmlformats.org/drawingml/2006/main">
               <a:ext uri="{FF2B5EF4-FFF2-40B4-BE49-F238E27FC236}">
-                <a16:creationId xmlns:a16="http://schemas.microsoft.com/office/drawing/2014/main" id="{464BBA96-E176-44DF-A2C3-1166FD6B4A57}"/>
+                <a16:creationId xmlns:a16="http://schemas.microsoft.com/office/drawing/2014/main" id="{20B25C81-EEC6-44C1-B201-E03B53F82AFF}"/>
               </a:ext>
             </a:extLst>
           </p:cNvPr>
@@ -26450,7 +26588,7 @@
           <p:cNvPr id="45" name="fb-cell">
             <a:extLst xmlns:a="http://schemas.openxmlformats.org/drawingml/2006/main">
               <a:ext uri="{FF2B5EF4-FFF2-40B4-BE49-F238E27FC236}">
-                <a16:creationId xmlns:a16="http://schemas.microsoft.com/office/drawing/2014/main" id="{4CB1B20B-CC21-45BC-B5AB-5CF4301E970C}"/>
+                <a16:creationId xmlns:a16="http://schemas.microsoft.com/office/drawing/2014/main" id="{CEC2016A-ACBD-41AA-A7F5-1857C73B048B}"/>
               </a:ext>
             </a:extLst>
           </p:cNvPr>
@@ -26483,7 +26621,7 @@
           <p:cNvPr id="46" name="team-label">
             <a:extLst xmlns:a="http://schemas.openxmlformats.org/drawingml/2006/main">
               <a:ext uri="{FF2B5EF4-FFF2-40B4-BE49-F238E27FC236}">
-                <a16:creationId xmlns:a16="http://schemas.microsoft.com/office/drawing/2014/main" id="{72ADC86B-FD6F-4CB9-8EAA-0020282C453B}"/>
+                <a16:creationId xmlns:a16="http://schemas.microsoft.com/office/drawing/2014/main" id="{FC0AA4BD-1522-4922-B4C7-734DFCC814B9}"/>
               </a:ext>
             </a:extLst>
           </p:cNvPr>
@@ -26539,7 +26677,7 @@
           <p:cNvPr id="47" name="fb-cell">
             <a:extLst xmlns:a="http://schemas.openxmlformats.org/drawingml/2006/main">
               <a:ext uri="{FF2B5EF4-FFF2-40B4-BE49-F238E27FC236}">
-                <a16:creationId xmlns:a16="http://schemas.microsoft.com/office/drawing/2014/main" id="{610E3A69-56A5-4A79-80BF-318D31165460}"/>
+                <a16:creationId xmlns:a16="http://schemas.microsoft.com/office/drawing/2014/main" id="{BF2799DC-A105-41C2-9114-556B0C8C0BA3}"/>
               </a:ext>
             </a:extLst>
           </p:cNvPr>
@@ -26572,7 +26710,7 @@
           <p:cNvPr id="48" name="fb-cell">
             <a:extLst xmlns:a="http://schemas.openxmlformats.org/drawingml/2006/main">
               <a:ext uri="{FF2B5EF4-FFF2-40B4-BE49-F238E27FC236}">
-                <a16:creationId xmlns:a16="http://schemas.microsoft.com/office/drawing/2014/main" id="{C29ACF2E-0EA0-4EBF-8044-B74D3390856C}"/>
+                <a16:creationId xmlns:a16="http://schemas.microsoft.com/office/drawing/2014/main" id="{B694BC66-B42F-4225-BDAB-2DBDAF62E2B7}"/>
               </a:ext>
             </a:extLst>
           </p:cNvPr>
@@ -26605,7 +26743,7 @@
           <p:cNvPr id="49" name="fb-cell">
             <a:extLst xmlns:a="http://schemas.openxmlformats.org/drawingml/2006/main">
               <a:ext uri="{FF2B5EF4-FFF2-40B4-BE49-F238E27FC236}">
-                <a16:creationId xmlns:a16="http://schemas.microsoft.com/office/drawing/2014/main" id="{3F2AE5B3-B08F-4A8F-B570-6C9DD77E5A5D}"/>
+                <a16:creationId xmlns:a16="http://schemas.microsoft.com/office/drawing/2014/main" id="{BE03D2E0-3642-40E5-BC78-DB345EAF0278}"/>
               </a:ext>
             </a:extLst>
           </p:cNvPr>
@@ -26638,7 +26776,7 @@
           <p:cNvPr id="50" name="fb-cell">
             <a:extLst xmlns:a="http://schemas.openxmlformats.org/drawingml/2006/main">
               <a:ext uri="{FF2B5EF4-FFF2-40B4-BE49-F238E27FC236}">
-                <a16:creationId xmlns:a16="http://schemas.microsoft.com/office/drawing/2014/main" id="{90EAB887-1940-4D6F-810C-8112D3A8CECD}"/>
+                <a16:creationId xmlns:a16="http://schemas.microsoft.com/office/drawing/2014/main" id="{C2297115-A85B-473C-BFE2-95E3947308C3}"/>
               </a:ext>
             </a:extLst>
           </p:cNvPr>
@@ -26669,7 +26807,7 @@
     </p:spTree>
     <p:extLst>
       <p:ext uri="{BB962C8B-B14F-4D97-AF65-F5344CB8AC3E}">
-        <p14:creationId xmlns:p14="http://schemas.microsoft.com/office/powerpoint/2010/main" val="1079667417"/>
+        <p14:creationId xmlns:p14="http://schemas.microsoft.com/office/powerpoint/2010/main" val="1780460976"/>
       </p:ext>
     </p:extLst>
   </p:cSld>
@@ -26700,7 +26838,7 @@
           <p:cNvPr id="1" name="decor-ring-1">
             <a:extLst xmlns:a="http://schemas.openxmlformats.org/drawingml/2006/main">
               <a:ext uri="{FF2B5EF4-FFF2-40B4-BE49-F238E27FC236}">
-                <a16:creationId xmlns:a16="http://schemas.microsoft.com/office/drawing/2014/main" id="{7FF380E4-8BDD-44E1-B9D5-6EF4352A5502}"/>
+                <a16:creationId xmlns:a16="http://schemas.microsoft.com/office/drawing/2014/main" id="{D2108982-F286-4472-9915-356AFD64C216}"/>
               </a:ext>
             </a:extLst>
           </p:cNvPr>
@@ -26731,7 +26869,7 @@
           <p:cNvPr id="2" name="decor-ring-2">
             <a:extLst xmlns:a="http://schemas.openxmlformats.org/drawingml/2006/main">
               <a:ext uri="{FF2B5EF4-FFF2-40B4-BE49-F238E27FC236}">
-                <a16:creationId xmlns:a16="http://schemas.microsoft.com/office/drawing/2014/main" id="{58A78153-3878-402C-BB2C-6627F9598894}"/>
+                <a16:creationId xmlns:a16="http://schemas.microsoft.com/office/drawing/2014/main" id="{FCD5BDE2-6BC4-42B7-9BF5-851223465F7D}"/>
               </a:ext>
             </a:extLst>
           </p:cNvPr>
@@ -26762,7 +26900,7 @@
           <p:cNvPr id="3" name="decor-orb-1">
             <a:extLst xmlns:a="http://schemas.openxmlformats.org/drawingml/2006/main">
               <a:ext uri="{FF2B5EF4-FFF2-40B4-BE49-F238E27FC236}">
-                <a16:creationId xmlns:a16="http://schemas.microsoft.com/office/drawing/2014/main" id="{8079DD6D-75E4-4185-B047-051ED6DFF81C}"/>
+                <a16:creationId xmlns:a16="http://schemas.microsoft.com/office/drawing/2014/main" id="{EC4F2817-868D-450C-B0D4-5965D82ADD69}"/>
               </a:ext>
             </a:extLst>
           </p:cNvPr>
@@ -26793,7 +26931,7 @@
           <p:cNvPr id="4" name="decor-orb-2">
             <a:extLst xmlns:a="http://schemas.openxmlformats.org/drawingml/2006/main">
               <a:ext uri="{FF2B5EF4-FFF2-40B4-BE49-F238E27FC236}">
-                <a16:creationId xmlns:a16="http://schemas.microsoft.com/office/drawing/2014/main" id="{513602E7-55B3-48EA-B4FD-1C712AA0036F}"/>
+                <a16:creationId xmlns:a16="http://schemas.microsoft.com/office/drawing/2014/main" id="{4C4DEA7C-FB9D-4864-80FA-E6877C1C1375}"/>
               </a:ext>
             </a:extLst>
           </p:cNvPr>
@@ -26824,7 +26962,7 @@
           <p:cNvPr id="5" name="title-bar">
             <a:extLst xmlns:a="http://schemas.openxmlformats.org/drawingml/2006/main">
               <a:ext uri="{FF2B5EF4-FFF2-40B4-BE49-F238E27FC236}">
-                <a16:creationId xmlns:a16="http://schemas.microsoft.com/office/drawing/2014/main" id="{B17A4325-2631-4521-98D6-3E389A145A2B}"/>
+                <a16:creationId xmlns:a16="http://schemas.microsoft.com/office/drawing/2014/main" id="{EC2D98E1-5970-4B2A-9C1E-58339FCC4924}"/>
               </a:ext>
             </a:extLst>
           </p:cNvPr>
@@ -26855,7 +26993,7 @@
           <p:cNvPr id="6" name="kicker">
             <a:extLst xmlns:a="http://schemas.openxmlformats.org/drawingml/2006/main">
               <a:ext uri="{FF2B5EF4-FFF2-40B4-BE49-F238E27FC236}">
-                <a16:creationId xmlns:a16="http://schemas.microsoft.com/office/drawing/2014/main" id="{F882985A-9440-4423-B3DB-16E6FDE3CC68}"/>
+                <a16:creationId xmlns:a16="http://schemas.microsoft.com/office/drawing/2014/main" id="{4349D935-A78F-4269-95A7-DA764E5090A3}"/>
               </a:ext>
             </a:extLst>
           </p:cNvPr>
@@ -26911,7 +27049,7 @@
           <p:cNvPr id="7" name="title">
             <a:extLst xmlns:a="http://schemas.openxmlformats.org/drawingml/2006/main">
               <a:ext uri="{FF2B5EF4-FFF2-40B4-BE49-F238E27FC236}">
-                <a16:creationId xmlns:a16="http://schemas.microsoft.com/office/drawing/2014/main" id="{789278FB-7B3F-4628-942B-F853C7CAA8CC}"/>
+                <a16:creationId xmlns:a16="http://schemas.microsoft.com/office/drawing/2014/main" id="{63EBBD12-F92D-45D2-8B4F-911E827C5A04}"/>
               </a:ext>
             </a:extLst>
           </p:cNvPr>
@@ -26967,7 +27105,7 @@
           <p:cNvPr id="8" name="subtitle">
             <a:extLst xmlns:a="http://schemas.openxmlformats.org/drawingml/2006/main">
               <a:ext uri="{FF2B5EF4-FFF2-40B4-BE49-F238E27FC236}">
-                <a16:creationId xmlns:a16="http://schemas.microsoft.com/office/drawing/2014/main" id="{21BCF0EB-C6A2-4BD3-936C-DF176834CEF0}"/>
+                <a16:creationId xmlns:a16="http://schemas.microsoft.com/office/drawing/2014/main" id="{B8AED71E-2EC9-4E06-A3E2-23D010F9B0A4}"/>
               </a:ext>
             </a:extLst>
           </p:cNvPr>
@@ -27027,7 +27165,7 @@
           <p:nvPr/>
         </p:nvPicPr>
         <p:blipFill>
-          <a:blip xmlns:r="http://schemas.openxmlformats.org/officeDocument/2006/relationships" xmlns:a="http://schemas.openxmlformats.org/drawingml/2006/main" r:embed="R4f4b9969656f4995"/>
+          <a:blip xmlns:r="http://schemas.openxmlformats.org/officeDocument/2006/relationships" xmlns:a="http://schemas.openxmlformats.org/drawingml/2006/main" r:embed="R12e8d841623a40b0"/>
           <a:stretch xmlns:a="http://schemas.openxmlformats.org/drawingml/2006/main"/>
         </p:blipFill>
         <p:spPr>
@@ -27045,7 +27183,7 @@
           <p:cNvPr id="10" name="footer-number">
             <a:extLst xmlns:a="http://schemas.openxmlformats.org/drawingml/2006/main">
               <a:ext uri="{FF2B5EF4-FFF2-40B4-BE49-F238E27FC236}">
-                <a16:creationId xmlns:a16="http://schemas.microsoft.com/office/drawing/2014/main" id="{FDA38449-F59B-4C35-8729-5A3CCEA6E301}"/>
+                <a16:creationId xmlns:a16="http://schemas.microsoft.com/office/drawing/2014/main" id="{7C6418C5-D65B-4761-ABFE-8E9BD9082692}"/>
               </a:ext>
             </a:extLst>
           </p:cNvPr>
@@ -27101,7 +27239,7 @@
           <p:cNvPr id="11" name="card-진행 방법">
             <a:extLst xmlns:a="http://schemas.openxmlformats.org/drawingml/2006/main">
               <a:ext uri="{FF2B5EF4-FFF2-40B4-BE49-F238E27FC236}">
-                <a16:creationId xmlns:a16="http://schemas.microsoft.com/office/drawing/2014/main" id="{2D5752F7-DB11-465B-B809-000B3845F6C1}"/>
+                <a16:creationId xmlns:a16="http://schemas.microsoft.com/office/drawing/2014/main" id="{25EA50D5-E157-4A30-8312-C8D63F28A487}"/>
               </a:ext>
             </a:extLst>
           </p:cNvPr>
@@ -27142,7 +27280,7 @@
           <p:cNvPr id="12" name="card-accent">
             <a:extLst xmlns:a="http://schemas.openxmlformats.org/drawingml/2006/main">
               <a:ext uri="{FF2B5EF4-FFF2-40B4-BE49-F238E27FC236}">
-                <a16:creationId xmlns:a16="http://schemas.microsoft.com/office/drawing/2014/main" id="{AD3A0B8E-EEF8-450B-969C-8E9B7A667AAE}"/>
+                <a16:creationId xmlns:a16="http://schemas.microsoft.com/office/drawing/2014/main" id="{85424722-DC4D-4FD5-A447-3B9142814B65}"/>
               </a:ext>
             </a:extLst>
           </p:cNvPr>
@@ -27173,7 +27311,7 @@
           <p:cNvPr id="13" name="card-label">
             <a:extLst xmlns:a="http://schemas.openxmlformats.org/drawingml/2006/main">
               <a:ext uri="{FF2B5EF4-FFF2-40B4-BE49-F238E27FC236}">
-                <a16:creationId xmlns:a16="http://schemas.microsoft.com/office/drawing/2014/main" id="{534FE8C3-E81A-4363-9F14-A07F416A091C}"/>
+                <a16:creationId xmlns:a16="http://schemas.microsoft.com/office/drawing/2014/main" id="{B3F39282-3991-4981-ADC4-277E017A3B90}"/>
               </a:ext>
             </a:extLst>
           </p:cNvPr>
@@ -27229,7 +27367,7 @@
           <p:cNvPr id="14" name="card-title">
             <a:extLst xmlns:a="http://schemas.openxmlformats.org/drawingml/2006/main">
               <a:ext uri="{FF2B5EF4-FFF2-40B4-BE49-F238E27FC236}">
-                <a16:creationId xmlns:a16="http://schemas.microsoft.com/office/drawing/2014/main" id="{5B52A55F-29CC-4E67-B291-231F1E95FC09}"/>
+                <a16:creationId xmlns:a16="http://schemas.microsoft.com/office/drawing/2014/main" id="{3321A910-CE8A-4DCC-9434-6A75F59476BD}"/>
               </a:ext>
             </a:extLst>
           </p:cNvPr>
@@ -27285,7 +27423,7 @@
           <p:cNvPr id="15" name="card-body">
             <a:extLst xmlns:a="http://schemas.openxmlformats.org/drawingml/2006/main">
               <a:ext uri="{FF2B5EF4-FFF2-40B4-BE49-F238E27FC236}">
-                <a16:creationId xmlns:a16="http://schemas.microsoft.com/office/drawing/2014/main" id="{C896F796-53C3-4CAE-94C8-FF58E6328A6F}"/>
+                <a16:creationId xmlns:a16="http://schemas.microsoft.com/office/drawing/2014/main" id="{26648FF2-1411-427E-BD51-71ACDAB66F58}"/>
               </a:ext>
             </a:extLst>
           </p:cNvPr>
@@ -27364,7 +27502,7 @@
           <p:cNvPr id="16" name="card-결과물">
             <a:extLst xmlns:a="http://schemas.openxmlformats.org/drawingml/2006/main">
               <a:ext uri="{FF2B5EF4-FFF2-40B4-BE49-F238E27FC236}">
-                <a16:creationId xmlns:a16="http://schemas.microsoft.com/office/drawing/2014/main" id="{DAF7CDCF-6E9E-4A5F-96A9-F36AF2884EDA}"/>
+                <a16:creationId xmlns:a16="http://schemas.microsoft.com/office/drawing/2014/main" id="{44326808-D74A-4CD9-9CF1-F5255914EF5E}"/>
               </a:ext>
             </a:extLst>
           </p:cNvPr>
@@ -27405,7 +27543,7 @@
           <p:cNvPr id="17" name="card-accent">
             <a:extLst xmlns:a="http://schemas.openxmlformats.org/drawingml/2006/main">
               <a:ext uri="{FF2B5EF4-FFF2-40B4-BE49-F238E27FC236}">
-                <a16:creationId xmlns:a16="http://schemas.microsoft.com/office/drawing/2014/main" id="{3402D316-A1E4-41FD-B427-F23C2D8FD73E}"/>
+                <a16:creationId xmlns:a16="http://schemas.microsoft.com/office/drawing/2014/main" id="{BAE1D8CE-98F7-41E5-9255-26FA5C0C546F}"/>
               </a:ext>
             </a:extLst>
           </p:cNvPr>
@@ -27436,7 +27574,7 @@
           <p:cNvPr id="18" name="card-label">
             <a:extLst xmlns:a="http://schemas.openxmlformats.org/drawingml/2006/main">
               <a:ext uri="{FF2B5EF4-FFF2-40B4-BE49-F238E27FC236}">
-                <a16:creationId xmlns:a16="http://schemas.microsoft.com/office/drawing/2014/main" id="{46FD5A4C-9F69-4E52-B822-E5EE964D2F1F}"/>
+                <a16:creationId xmlns:a16="http://schemas.microsoft.com/office/drawing/2014/main" id="{F38E8E6B-BE79-4049-A797-FDA305DBE964}"/>
               </a:ext>
             </a:extLst>
           </p:cNvPr>
@@ -27492,7 +27630,7 @@
           <p:cNvPr id="19" name="card-title">
             <a:extLst xmlns:a="http://schemas.openxmlformats.org/drawingml/2006/main">
               <a:ext uri="{FF2B5EF4-FFF2-40B4-BE49-F238E27FC236}">
-                <a16:creationId xmlns:a16="http://schemas.microsoft.com/office/drawing/2014/main" id="{772C8193-43CC-46F8-AF2C-4BD033FCD79E}"/>
+                <a16:creationId xmlns:a16="http://schemas.microsoft.com/office/drawing/2014/main" id="{E9C36EFC-A2C0-4200-A663-1D584A9F2367}"/>
               </a:ext>
             </a:extLst>
           </p:cNvPr>
@@ -27548,7 +27686,7 @@
           <p:cNvPr id="20" name="card-body">
             <a:extLst xmlns:a="http://schemas.openxmlformats.org/drawingml/2006/main">
               <a:ext uri="{FF2B5EF4-FFF2-40B4-BE49-F238E27FC236}">
-                <a16:creationId xmlns:a16="http://schemas.microsoft.com/office/drawing/2014/main" id="{D724C5D6-1D37-40CD-B78E-3356BE9E91A6}"/>
+                <a16:creationId xmlns:a16="http://schemas.microsoft.com/office/drawing/2014/main" id="{4A3CDCEF-BC88-4BF7-A42B-0B7EDB8E5975}"/>
               </a:ext>
             </a:extLst>
           </p:cNvPr>
@@ -27604,7 +27742,7 @@
           <p:cNvPr id="21" name="card-운영 팁">
             <a:extLst xmlns:a="http://schemas.openxmlformats.org/drawingml/2006/main">
               <a:ext uri="{FF2B5EF4-FFF2-40B4-BE49-F238E27FC236}">
-                <a16:creationId xmlns:a16="http://schemas.microsoft.com/office/drawing/2014/main" id="{8B6E6108-B018-43BA-88D6-1FADBCFF0506}"/>
+                <a16:creationId xmlns:a16="http://schemas.microsoft.com/office/drawing/2014/main" id="{F6D4F717-3648-45A6-B7F6-C9DC48047FEC}"/>
               </a:ext>
             </a:extLst>
           </p:cNvPr>
@@ -27645,7 +27783,7 @@
           <p:cNvPr id="22" name="card-accent">
             <a:extLst xmlns:a="http://schemas.openxmlformats.org/drawingml/2006/main">
               <a:ext uri="{FF2B5EF4-FFF2-40B4-BE49-F238E27FC236}">
-                <a16:creationId xmlns:a16="http://schemas.microsoft.com/office/drawing/2014/main" id="{17460783-3D96-42F1-83E1-E58E4E2FAB5C}"/>
+                <a16:creationId xmlns:a16="http://schemas.microsoft.com/office/drawing/2014/main" id="{E26E2A33-FF45-4CB3-8B04-06DFDDE2F7C0}"/>
               </a:ext>
             </a:extLst>
           </p:cNvPr>
@@ -27676,7 +27814,7 @@
           <p:cNvPr id="23" name="card-label">
             <a:extLst xmlns:a="http://schemas.openxmlformats.org/drawingml/2006/main">
               <a:ext uri="{FF2B5EF4-FFF2-40B4-BE49-F238E27FC236}">
-                <a16:creationId xmlns:a16="http://schemas.microsoft.com/office/drawing/2014/main" id="{9FA78FA9-AE86-496D-8B78-214AFB2C1B6F}"/>
+                <a16:creationId xmlns:a16="http://schemas.microsoft.com/office/drawing/2014/main" id="{9A68D5ED-EBE5-448C-BCAB-CBE3873EBD51}"/>
               </a:ext>
             </a:extLst>
           </p:cNvPr>
@@ -27732,7 +27870,7 @@
           <p:cNvPr id="24" name="card-title">
             <a:extLst xmlns:a="http://schemas.openxmlformats.org/drawingml/2006/main">
               <a:ext uri="{FF2B5EF4-FFF2-40B4-BE49-F238E27FC236}">
-                <a16:creationId xmlns:a16="http://schemas.microsoft.com/office/drawing/2014/main" id="{B7D20B60-5BD6-4DB1-95DC-A62D4698855B}"/>
+                <a16:creationId xmlns:a16="http://schemas.microsoft.com/office/drawing/2014/main" id="{684915BA-C01C-4BBC-9C30-9A33D4D22432}"/>
               </a:ext>
             </a:extLst>
           </p:cNvPr>
@@ -27788,7 +27926,7 @@
           <p:cNvPr id="25" name="card-body">
             <a:extLst xmlns:a="http://schemas.openxmlformats.org/drawingml/2006/main">
               <a:ext uri="{FF2B5EF4-FFF2-40B4-BE49-F238E27FC236}">
-                <a16:creationId xmlns:a16="http://schemas.microsoft.com/office/drawing/2014/main" id="{0C097C96-0BA9-4738-8EC7-1C06BDBED4F8}"/>
+                <a16:creationId xmlns:a16="http://schemas.microsoft.com/office/drawing/2014/main" id="{DE55F14B-57AC-4D39-8731-C9BAEA957B40}"/>
               </a:ext>
             </a:extLst>
           </p:cNvPr>
@@ -27834,7 +27972,7 @@
                 <a:ea typeface="Pretendard"/>
                 <a:cs typeface="Pretendard"/>
               </a:rPr>
-              <a:t>타이머를 보이게 두고, 각 팀의 산출물은</a:t>
+              <a:t>타이머를 보이게 두고, 각 팀의</a:t>
             </a:r>
           </a:p>
           <a:p xmlns:a="http://schemas.openxmlformats.org/drawingml/2006/main">
@@ -27857,7 +27995,30 @@
                 <a:ea typeface="Pretendard"/>
                 <a:cs typeface="Pretendard"/>
               </a:rPr>
-              <a:t>다음 단계 장표에 바로 옮겨 적게 합니다.</a:t>
+              <a:t>산출물은 다음 단계 장표에 바로</a:t>
+            </a:r>
+          </a:p>
+          <a:p xmlns:a="http://schemas.openxmlformats.org/drawingml/2006/main">
+            <a:pPr algn="l">
+              <a:defRPr sz="1350" b="0">
+                <a:solidFill>
+                  <a:srgbClr val="4B5563"/>
+                </a:solidFill>
+                <a:latin typeface="Pretendard"/>
+                <a:ea typeface="Pretendard"/>
+                <a:cs typeface="Pretendard"/>
+              </a:defRPr>
+            </a:pPr>
+            <a:r>
+              <a:rPr sz="1350" b="0">
+                <a:solidFill>
+                  <a:srgbClr val="4B5563"/>
+                </a:solidFill>
+                <a:latin typeface="Pretendard"/>
+                <a:ea typeface="Pretendard"/>
+                <a:cs typeface="Pretendard"/>
+              </a:rPr>
+              <a:t>옮겨 적게 합니다.</a:t>
             </a:r>
           </a:p>
         </p:txBody>
@@ -27865,7 +28026,7 @@
     </p:spTree>
     <p:extLst>
       <p:ext uri="{BB962C8B-B14F-4D97-AF65-F5344CB8AC3E}">
-        <p14:creationId xmlns:p14="http://schemas.microsoft.com/office/powerpoint/2010/main" val="416387860"/>
+        <p14:creationId xmlns:p14="http://schemas.microsoft.com/office/powerpoint/2010/main" val="1562238915"/>
       </p:ext>
     </p:extLst>
   </p:cSld>
@@ -27896,7 +28057,7 @@
           <p:cNvPr id="1" name="decor-ring-1">
             <a:extLst xmlns:a="http://schemas.openxmlformats.org/drawingml/2006/main">
               <a:ext uri="{FF2B5EF4-FFF2-40B4-BE49-F238E27FC236}">
-                <a16:creationId xmlns:a16="http://schemas.microsoft.com/office/drawing/2014/main" id="{8CF345BB-B1A3-4A4A-ACA6-641CB3D1F950}"/>
+                <a16:creationId xmlns:a16="http://schemas.microsoft.com/office/drawing/2014/main" id="{209F86D2-0ADF-40F5-90DD-4D5E271CAD74}"/>
               </a:ext>
             </a:extLst>
           </p:cNvPr>
@@ -27927,7 +28088,7 @@
           <p:cNvPr id="2" name="decor-ring-2">
             <a:extLst xmlns:a="http://schemas.openxmlformats.org/drawingml/2006/main">
               <a:ext uri="{FF2B5EF4-FFF2-40B4-BE49-F238E27FC236}">
-                <a16:creationId xmlns:a16="http://schemas.microsoft.com/office/drawing/2014/main" id="{265974FF-94B8-499F-A5FF-7B6B8D35C249}"/>
+                <a16:creationId xmlns:a16="http://schemas.microsoft.com/office/drawing/2014/main" id="{07776001-FCAA-41A3-A203-AEB7D4F8C2EA}"/>
               </a:ext>
             </a:extLst>
           </p:cNvPr>
@@ -27958,7 +28119,7 @@
           <p:cNvPr id="3" name="decor-orb-1">
             <a:extLst xmlns:a="http://schemas.openxmlformats.org/drawingml/2006/main">
               <a:ext uri="{FF2B5EF4-FFF2-40B4-BE49-F238E27FC236}">
-                <a16:creationId xmlns:a16="http://schemas.microsoft.com/office/drawing/2014/main" id="{5C09B190-8596-4DB1-BA12-F8FF4BC8CCD9}"/>
+                <a16:creationId xmlns:a16="http://schemas.microsoft.com/office/drawing/2014/main" id="{21911E7B-6627-4C27-8118-1A2FEC0D479A}"/>
               </a:ext>
             </a:extLst>
           </p:cNvPr>
@@ -27989,7 +28150,7 @@
           <p:cNvPr id="4" name="decor-orb-2">
             <a:extLst xmlns:a="http://schemas.openxmlformats.org/drawingml/2006/main">
               <a:ext uri="{FF2B5EF4-FFF2-40B4-BE49-F238E27FC236}">
-                <a16:creationId xmlns:a16="http://schemas.microsoft.com/office/drawing/2014/main" id="{C4E0A2D3-A12B-412A-ABEB-001410B03A4E}"/>
+                <a16:creationId xmlns:a16="http://schemas.microsoft.com/office/drawing/2014/main" id="{D2313A63-4EAC-4273-885B-B61D8DF0EAC8}"/>
               </a:ext>
             </a:extLst>
           </p:cNvPr>
@@ -28020,7 +28181,7 @@
           <p:cNvPr id="5" name="title-bar">
             <a:extLst xmlns:a="http://schemas.openxmlformats.org/drawingml/2006/main">
               <a:ext uri="{FF2B5EF4-FFF2-40B4-BE49-F238E27FC236}">
-                <a16:creationId xmlns:a16="http://schemas.microsoft.com/office/drawing/2014/main" id="{437E3CBB-E0E1-4D05-9AF4-1E9180BF72C6}"/>
+                <a16:creationId xmlns:a16="http://schemas.microsoft.com/office/drawing/2014/main" id="{2223F5EF-A0CD-4795-A774-63F4E058A02C}"/>
               </a:ext>
             </a:extLst>
           </p:cNvPr>
@@ -28051,7 +28212,7 @@
           <p:cNvPr id="6" name="kicker">
             <a:extLst xmlns:a="http://schemas.openxmlformats.org/drawingml/2006/main">
               <a:ext uri="{FF2B5EF4-FFF2-40B4-BE49-F238E27FC236}">
-                <a16:creationId xmlns:a16="http://schemas.microsoft.com/office/drawing/2014/main" id="{4F8E2056-BD97-404C-8F2E-8473FB5B75C5}"/>
+                <a16:creationId xmlns:a16="http://schemas.microsoft.com/office/drawing/2014/main" id="{CE3FE0A9-C3F5-4CA1-916F-6A3DA4B1EBBD}"/>
               </a:ext>
             </a:extLst>
           </p:cNvPr>
@@ -28107,7 +28268,7 @@
           <p:cNvPr id="7" name="title">
             <a:extLst xmlns:a="http://schemas.openxmlformats.org/drawingml/2006/main">
               <a:ext uri="{FF2B5EF4-FFF2-40B4-BE49-F238E27FC236}">
-                <a16:creationId xmlns:a16="http://schemas.microsoft.com/office/drawing/2014/main" id="{59B1C215-E101-47A2-8020-58F0095440F9}"/>
+                <a16:creationId xmlns:a16="http://schemas.microsoft.com/office/drawing/2014/main" id="{27318424-B0DC-4218-A4D4-6DDA8E6940D4}"/>
               </a:ext>
             </a:extLst>
           </p:cNvPr>
@@ -28163,7 +28324,7 @@
           <p:cNvPr id="8" name="subtitle">
             <a:extLst xmlns:a="http://schemas.openxmlformats.org/drawingml/2006/main">
               <a:ext uri="{FF2B5EF4-FFF2-40B4-BE49-F238E27FC236}">
-                <a16:creationId xmlns:a16="http://schemas.microsoft.com/office/drawing/2014/main" id="{BBDA0D21-5EEB-438C-9284-C33AB2A7B729}"/>
+                <a16:creationId xmlns:a16="http://schemas.microsoft.com/office/drawing/2014/main" id="{0D05E596-F0C1-4DDD-A169-9E252BFA2A2F}"/>
               </a:ext>
             </a:extLst>
           </p:cNvPr>
@@ -28223,7 +28384,7 @@
           <p:nvPr/>
         </p:nvPicPr>
         <p:blipFill>
-          <a:blip xmlns:r="http://schemas.openxmlformats.org/officeDocument/2006/relationships" xmlns:a="http://schemas.openxmlformats.org/drawingml/2006/main" r:embed="Rf5e43e11ddb449e8"/>
+          <a:blip xmlns:r="http://schemas.openxmlformats.org/officeDocument/2006/relationships" xmlns:a="http://schemas.openxmlformats.org/drawingml/2006/main" r:embed="Rd3c543be72164fc1"/>
           <a:stretch xmlns:a="http://schemas.openxmlformats.org/drawingml/2006/main"/>
         </p:blipFill>
         <p:spPr>
@@ -28241,7 +28402,7 @@
           <p:cNvPr id="10" name="footer-number">
             <a:extLst xmlns:a="http://schemas.openxmlformats.org/drawingml/2006/main">
               <a:ext uri="{FF2B5EF4-FFF2-40B4-BE49-F238E27FC236}">
-                <a16:creationId xmlns:a16="http://schemas.microsoft.com/office/drawing/2014/main" id="{317C509D-2864-45D7-876A-0FC8A51D5C7A}"/>
+                <a16:creationId xmlns:a16="http://schemas.microsoft.com/office/drawing/2014/main" id="{9E5F9279-9C07-4532-A4EC-FC9E5CDFFEF9}"/>
               </a:ext>
             </a:extLst>
           </p:cNvPr>
@@ -28297,7 +28458,7 @@
           <p:cNvPr id="11" name="field-label">
             <a:extLst xmlns:a="http://schemas.openxmlformats.org/drawingml/2006/main">
               <a:ext uri="{FF2B5EF4-FFF2-40B4-BE49-F238E27FC236}">
-                <a16:creationId xmlns:a16="http://schemas.microsoft.com/office/drawing/2014/main" id="{E2D0C351-D427-4EBE-9864-15F2CC6FEE6D}"/>
+                <a16:creationId xmlns:a16="http://schemas.microsoft.com/office/drawing/2014/main" id="{0C3A41D7-1204-430D-98B1-3786220B77CA}"/>
               </a:ext>
             </a:extLst>
           </p:cNvPr>
@@ -28353,7 +28514,7 @@
           <p:cNvPr id="12" name="field-준비할 샘플 자료">
             <a:extLst xmlns:a="http://schemas.openxmlformats.org/drawingml/2006/main">
               <a:ext uri="{FF2B5EF4-FFF2-40B4-BE49-F238E27FC236}">
-                <a16:creationId xmlns:a16="http://schemas.microsoft.com/office/drawing/2014/main" id="{57C59C92-10FD-47D0-9CEA-20DA1C7B419E}"/>
+                <a16:creationId xmlns:a16="http://schemas.microsoft.com/office/drawing/2014/main" id="{50C98AE0-052D-45A3-BAAD-B22CCAFBEAAC}"/>
               </a:ext>
             </a:extLst>
           </p:cNvPr>
@@ -28388,7 +28549,7 @@
           <p:cNvPr id="13" name="field-hint">
             <a:extLst xmlns:a="http://schemas.openxmlformats.org/drawingml/2006/main">
               <a:ext uri="{FF2B5EF4-FFF2-40B4-BE49-F238E27FC236}">
-                <a16:creationId xmlns:a16="http://schemas.microsoft.com/office/drawing/2014/main" id="{810A0EB0-1A0B-49A8-BEF5-8A6ABBB8554D}"/>
+                <a16:creationId xmlns:a16="http://schemas.microsoft.com/office/drawing/2014/main" id="{A512BC05-59BE-43E9-9AA7-D8A2878AEA11}"/>
               </a:ext>
             </a:extLst>
           </p:cNvPr>
@@ -28444,7 +28605,7 @@
           <p:cNvPr id="14" name="field-label">
             <a:extLst xmlns:a="http://schemas.openxmlformats.org/drawingml/2006/main">
               <a:ext uri="{FF2B5EF4-FFF2-40B4-BE49-F238E27FC236}">
-                <a16:creationId xmlns:a16="http://schemas.microsoft.com/office/drawing/2014/main" id="{99C05A67-9F79-4190-A68A-B2BE3CE70608}"/>
+                <a16:creationId xmlns:a16="http://schemas.microsoft.com/office/drawing/2014/main" id="{0FD1127A-8C95-4DE4-BD61-36746CE5F03E}"/>
               </a:ext>
             </a:extLst>
           </p:cNvPr>
@@ -28500,7 +28661,7 @@
           <p:cNvPr id="15" name="field-담당자 / 마감">
             <a:extLst xmlns:a="http://schemas.openxmlformats.org/drawingml/2006/main">
               <a:ext uri="{FF2B5EF4-FFF2-40B4-BE49-F238E27FC236}">
-                <a16:creationId xmlns:a16="http://schemas.microsoft.com/office/drawing/2014/main" id="{23DF372E-FA01-4642-9A09-5EA4C4082115}"/>
+                <a16:creationId xmlns:a16="http://schemas.microsoft.com/office/drawing/2014/main" id="{266FF55A-5F48-4CDB-9260-195106198EE9}"/>
               </a:ext>
             </a:extLst>
           </p:cNvPr>
@@ -28535,7 +28696,7 @@
           <p:cNvPr id="16" name="field-hint">
             <a:extLst xmlns:a="http://schemas.openxmlformats.org/drawingml/2006/main">
               <a:ext uri="{FF2B5EF4-FFF2-40B4-BE49-F238E27FC236}">
-                <a16:creationId xmlns:a16="http://schemas.microsoft.com/office/drawing/2014/main" id="{248A5DCE-360E-44AD-AA61-7BED9EA456D0}"/>
+                <a16:creationId xmlns:a16="http://schemas.microsoft.com/office/drawing/2014/main" id="{A77E0D04-B945-4D45-932B-C44A5B10AA31}"/>
               </a:ext>
             </a:extLst>
           </p:cNvPr>
@@ -28591,7 +28752,7 @@
           <p:cNvPr id="17" name="field-label">
             <a:extLst xmlns:a="http://schemas.openxmlformats.org/drawingml/2006/main">
               <a:ext uri="{FF2B5EF4-FFF2-40B4-BE49-F238E27FC236}">
-                <a16:creationId xmlns:a16="http://schemas.microsoft.com/office/drawing/2014/main" id="{614A4E34-D788-486B-AB3C-ED55856FE673}"/>
+                <a16:creationId xmlns:a16="http://schemas.microsoft.com/office/drawing/2014/main" id="{5A6EB367-99B7-4E0B-B32F-5649E81EBD38}"/>
               </a:ext>
             </a:extLst>
           </p:cNvPr>
@@ -28647,7 +28808,7 @@
           <p:cNvPr id="18" name="field-금지 자료">
             <a:extLst xmlns:a="http://schemas.openxmlformats.org/drawingml/2006/main">
               <a:ext uri="{FF2B5EF4-FFF2-40B4-BE49-F238E27FC236}">
-                <a16:creationId xmlns:a16="http://schemas.microsoft.com/office/drawing/2014/main" id="{3A43DC15-7032-4F50-A5B0-D79104188537}"/>
+                <a16:creationId xmlns:a16="http://schemas.microsoft.com/office/drawing/2014/main" id="{6E10143C-59B2-441E-A664-8E6C52FD1A40}"/>
               </a:ext>
             </a:extLst>
           </p:cNvPr>
@@ -28682,7 +28843,7 @@
           <p:cNvPr id="19" name="field-hint">
             <a:extLst xmlns:a="http://schemas.openxmlformats.org/drawingml/2006/main">
               <a:ext uri="{FF2B5EF4-FFF2-40B4-BE49-F238E27FC236}">
-                <a16:creationId xmlns:a16="http://schemas.microsoft.com/office/drawing/2014/main" id="{B8333D0D-1BE6-44E8-A18D-23388A166084}"/>
+                <a16:creationId xmlns:a16="http://schemas.microsoft.com/office/drawing/2014/main" id="{CDD03CC0-12F7-444C-88E2-204D1CAB223E}"/>
               </a:ext>
             </a:extLst>
           </p:cNvPr>
@@ -28738,7 +28899,7 @@
           <p:cNvPr id="20" name="field-label">
             <a:extLst xmlns:a="http://schemas.openxmlformats.org/drawingml/2006/main">
               <a:ext uri="{FF2B5EF4-FFF2-40B4-BE49-F238E27FC236}">
-                <a16:creationId xmlns:a16="http://schemas.microsoft.com/office/drawing/2014/main" id="{4E49F99A-AA6A-4C54-A655-7AD175F4674A}"/>
+                <a16:creationId xmlns:a16="http://schemas.microsoft.com/office/drawing/2014/main" id="{936278C8-974D-420E-874C-D8A105DA724B}"/>
               </a:ext>
             </a:extLst>
           </p:cNvPr>
@@ -28794,7 +28955,7 @@
           <p:cNvPr id="21" name="field-8월 21일 구현 시작점">
             <a:extLst xmlns:a="http://schemas.openxmlformats.org/drawingml/2006/main">
               <a:ext uri="{FF2B5EF4-FFF2-40B4-BE49-F238E27FC236}">
-                <a16:creationId xmlns:a16="http://schemas.microsoft.com/office/drawing/2014/main" id="{12E1C382-4640-431F-B69B-703F4510E122}"/>
+                <a16:creationId xmlns:a16="http://schemas.microsoft.com/office/drawing/2014/main" id="{5CA682F8-45BB-4109-AFEB-CD2AE8417B90}"/>
               </a:ext>
             </a:extLst>
           </p:cNvPr>
@@ -28829,7 +28990,7 @@
           <p:cNvPr id="22" name="field-hint">
             <a:extLst xmlns:a="http://schemas.openxmlformats.org/drawingml/2006/main">
               <a:ext uri="{FF2B5EF4-FFF2-40B4-BE49-F238E27FC236}">
-                <a16:creationId xmlns:a16="http://schemas.microsoft.com/office/drawing/2014/main" id="{EB0C2F9D-71FE-499F-AD38-57E3A036C2A7}"/>
+                <a16:creationId xmlns:a16="http://schemas.microsoft.com/office/drawing/2014/main" id="{CEA9C5E6-645E-4694-AA4E-81D70941D15D}"/>
               </a:ext>
             </a:extLst>
           </p:cNvPr>
@@ -28885,7 +29046,7 @@
           <p:cNvPr id="23" name="field-label">
             <a:extLst xmlns:a="http://schemas.openxmlformats.org/drawingml/2006/main">
               <a:ext uri="{FF2B5EF4-FFF2-40B4-BE49-F238E27FC236}">
-                <a16:creationId xmlns:a16="http://schemas.microsoft.com/office/drawing/2014/main" id="{CFCC0720-68D3-4A63-9BB3-D11300A21874}"/>
+                <a16:creationId xmlns:a16="http://schemas.microsoft.com/office/drawing/2014/main" id="{0531441E-323C-4163-9037-C0DE511E96F9}"/>
               </a:ext>
             </a:extLst>
           </p:cNvPr>
@@ -28941,7 +29102,7 @@
           <p:cNvPr id="24" name="field-8월 28일 발표 가설">
             <a:extLst xmlns:a="http://schemas.openxmlformats.org/drawingml/2006/main">
               <a:ext uri="{FF2B5EF4-FFF2-40B4-BE49-F238E27FC236}">
-                <a16:creationId xmlns:a16="http://schemas.microsoft.com/office/drawing/2014/main" id="{01C6C074-557C-49C9-AC26-ED05E486F531}"/>
+                <a16:creationId xmlns:a16="http://schemas.microsoft.com/office/drawing/2014/main" id="{6DD2A3C6-4A7A-4160-B934-C36E41F3746F}"/>
               </a:ext>
             </a:extLst>
           </p:cNvPr>
@@ -28976,7 +29137,7 @@
           <p:cNvPr id="25" name="field-hint">
             <a:extLst xmlns:a="http://schemas.openxmlformats.org/drawingml/2006/main">
               <a:ext uri="{FF2B5EF4-FFF2-40B4-BE49-F238E27FC236}">
-                <a16:creationId xmlns:a16="http://schemas.microsoft.com/office/drawing/2014/main" id="{45BC4A0E-5A06-4306-9F7B-C3A7678AA5AA}"/>
+                <a16:creationId xmlns:a16="http://schemas.microsoft.com/office/drawing/2014/main" id="{C9F322DB-FF40-4B53-873A-DBFF2A4F8ADB}"/>
               </a:ext>
             </a:extLst>
           </p:cNvPr>
@@ -29030,7 +29191,7 @@
     </p:spTree>
     <p:extLst>
       <p:ext uri="{BB962C8B-B14F-4D97-AF65-F5344CB8AC3E}">
-        <p14:creationId xmlns:p14="http://schemas.microsoft.com/office/powerpoint/2010/main" val="1673797493"/>
+        <p14:creationId xmlns:p14="http://schemas.microsoft.com/office/powerpoint/2010/main" val="1279396853"/>
       </p:ext>
     </p:extLst>
   </p:cSld>
@@ -29061,7 +29222,7 @@
           <p:cNvPr id="1" name="decor-ring-1">
             <a:extLst xmlns:a="http://schemas.openxmlformats.org/drawingml/2006/main">
               <a:ext uri="{FF2B5EF4-FFF2-40B4-BE49-F238E27FC236}">
-                <a16:creationId xmlns:a16="http://schemas.microsoft.com/office/drawing/2014/main" id="{4107BC34-5AE5-4F24-9544-BD198F640EB3}"/>
+                <a16:creationId xmlns:a16="http://schemas.microsoft.com/office/drawing/2014/main" id="{BDC24222-8100-4695-9657-83BE2E62F5E8}"/>
               </a:ext>
             </a:extLst>
           </p:cNvPr>
@@ -29092,7 +29253,7 @@
           <p:cNvPr id="2" name="decor-ring-2">
             <a:extLst xmlns:a="http://schemas.openxmlformats.org/drawingml/2006/main">
               <a:ext uri="{FF2B5EF4-FFF2-40B4-BE49-F238E27FC236}">
-                <a16:creationId xmlns:a16="http://schemas.microsoft.com/office/drawing/2014/main" id="{C4C0F00F-F29A-4321-BC60-A8E55D0E6E2A}"/>
+                <a16:creationId xmlns:a16="http://schemas.microsoft.com/office/drawing/2014/main" id="{84F75234-3DF6-47FD-B012-10041F8F3113}"/>
               </a:ext>
             </a:extLst>
           </p:cNvPr>
@@ -29123,7 +29284,7 @@
           <p:cNvPr id="3" name="decor-orb-1">
             <a:extLst xmlns:a="http://schemas.openxmlformats.org/drawingml/2006/main">
               <a:ext uri="{FF2B5EF4-FFF2-40B4-BE49-F238E27FC236}">
-                <a16:creationId xmlns:a16="http://schemas.microsoft.com/office/drawing/2014/main" id="{61F709C7-A78B-4A19-9902-62364BD82FE0}"/>
+                <a16:creationId xmlns:a16="http://schemas.microsoft.com/office/drawing/2014/main" id="{EDF12169-4B38-4B65-AF72-149AC5C6F119}"/>
               </a:ext>
             </a:extLst>
           </p:cNvPr>
@@ -29154,7 +29315,7 @@
           <p:cNvPr id="4" name="decor-orb-2">
             <a:extLst xmlns:a="http://schemas.openxmlformats.org/drawingml/2006/main">
               <a:ext uri="{FF2B5EF4-FFF2-40B4-BE49-F238E27FC236}">
-                <a16:creationId xmlns:a16="http://schemas.microsoft.com/office/drawing/2014/main" id="{D53F61FC-047F-48BE-A3D1-1DFD6E604879}"/>
+                <a16:creationId xmlns:a16="http://schemas.microsoft.com/office/drawing/2014/main" id="{10715590-AA59-40F4-969A-DBAFEBD61588}"/>
               </a:ext>
             </a:extLst>
           </p:cNvPr>
@@ -29185,7 +29346,7 @@
           <p:cNvPr id="5" name="title-bar">
             <a:extLst xmlns:a="http://schemas.openxmlformats.org/drawingml/2006/main">
               <a:ext uri="{FF2B5EF4-FFF2-40B4-BE49-F238E27FC236}">
-                <a16:creationId xmlns:a16="http://schemas.microsoft.com/office/drawing/2014/main" id="{F8E21683-3B04-469C-9A00-B303418FAF98}"/>
+                <a16:creationId xmlns:a16="http://schemas.microsoft.com/office/drawing/2014/main" id="{2AADB742-9A0B-49C3-B73D-0B48B85FE9F6}"/>
               </a:ext>
             </a:extLst>
           </p:cNvPr>
@@ -29216,7 +29377,7 @@
           <p:cNvPr id="6" name="kicker">
             <a:extLst xmlns:a="http://schemas.openxmlformats.org/drawingml/2006/main">
               <a:ext uri="{FF2B5EF4-FFF2-40B4-BE49-F238E27FC236}">
-                <a16:creationId xmlns:a16="http://schemas.microsoft.com/office/drawing/2014/main" id="{2BB27CE6-6485-407F-9104-427FBDD58D72}"/>
+                <a16:creationId xmlns:a16="http://schemas.microsoft.com/office/drawing/2014/main" id="{3CCBB069-C666-4C77-BE54-746A19D3E844}"/>
               </a:ext>
             </a:extLst>
           </p:cNvPr>
@@ -29272,7 +29433,7 @@
           <p:cNvPr id="7" name="title">
             <a:extLst xmlns:a="http://schemas.openxmlformats.org/drawingml/2006/main">
               <a:ext uri="{FF2B5EF4-FFF2-40B4-BE49-F238E27FC236}">
-                <a16:creationId xmlns:a16="http://schemas.microsoft.com/office/drawing/2014/main" id="{2B24C7F4-7EEB-43D2-8EF6-7C2919F8C89D}"/>
+                <a16:creationId xmlns:a16="http://schemas.microsoft.com/office/drawing/2014/main" id="{44C61E77-3E4C-4ED7-8F82-0F7C53E062FA}"/>
               </a:ext>
             </a:extLst>
           </p:cNvPr>
@@ -29328,7 +29489,7 @@
           <p:cNvPr id="8" name="subtitle">
             <a:extLst xmlns:a="http://schemas.openxmlformats.org/drawingml/2006/main">
               <a:ext uri="{FF2B5EF4-FFF2-40B4-BE49-F238E27FC236}">
-                <a16:creationId xmlns:a16="http://schemas.microsoft.com/office/drawing/2014/main" id="{CB580B96-EAF0-4112-857B-B7FA6A3A0290}"/>
+                <a16:creationId xmlns:a16="http://schemas.microsoft.com/office/drawing/2014/main" id="{0643CAD0-E1D5-4281-A55A-E0F9076A75CF}"/>
               </a:ext>
             </a:extLst>
           </p:cNvPr>
@@ -29388,7 +29549,7 @@
           <p:nvPr/>
         </p:nvPicPr>
         <p:blipFill>
-          <a:blip xmlns:r="http://schemas.openxmlformats.org/officeDocument/2006/relationships" xmlns:a="http://schemas.openxmlformats.org/drawingml/2006/main" r:embed="R451491a4207c4f5b"/>
+          <a:blip xmlns:r="http://schemas.openxmlformats.org/officeDocument/2006/relationships" xmlns:a="http://schemas.openxmlformats.org/drawingml/2006/main" r:embed="Rcf6a79fada39426f"/>
           <a:stretch xmlns:a="http://schemas.openxmlformats.org/drawingml/2006/main"/>
         </p:blipFill>
         <p:spPr>
@@ -29406,7 +29567,7 @@
           <p:cNvPr id="10" name="footer-number">
             <a:extLst xmlns:a="http://schemas.openxmlformats.org/drawingml/2006/main">
               <a:ext uri="{FF2B5EF4-FFF2-40B4-BE49-F238E27FC236}">
-                <a16:creationId xmlns:a16="http://schemas.microsoft.com/office/drawing/2014/main" id="{F152FA1A-5B7D-4627-B416-DF2223AFA8E5}"/>
+                <a16:creationId xmlns:a16="http://schemas.microsoft.com/office/drawing/2014/main" id="{A3D8BEC7-3A88-48F5-9FC7-BA4EFDA776BA}"/>
               </a:ext>
             </a:extLst>
           </p:cNvPr>
@@ -29462,7 +29623,7 @@
           <p:cNvPr id="11" name="card-08.21 · 8시간">
             <a:extLst xmlns:a="http://schemas.openxmlformats.org/drawingml/2006/main">
               <a:ext uri="{FF2B5EF4-FFF2-40B4-BE49-F238E27FC236}">
-                <a16:creationId xmlns:a16="http://schemas.microsoft.com/office/drawing/2014/main" id="{AD4B1C10-E4FE-4663-857F-87D999F8DA87}"/>
+                <a16:creationId xmlns:a16="http://schemas.microsoft.com/office/drawing/2014/main" id="{B83BCF8D-C246-44AE-92C2-AD0F6022913C}"/>
               </a:ext>
             </a:extLst>
           </p:cNvPr>
@@ -29503,7 +29664,7 @@
           <p:cNvPr id="12" name="card-accent">
             <a:extLst xmlns:a="http://schemas.openxmlformats.org/drawingml/2006/main">
               <a:ext uri="{FF2B5EF4-FFF2-40B4-BE49-F238E27FC236}">
-                <a16:creationId xmlns:a16="http://schemas.microsoft.com/office/drawing/2014/main" id="{EE6E5F15-CBB6-422C-BBD0-6DAA45C50CD0}"/>
+                <a16:creationId xmlns:a16="http://schemas.microsoft.com/office/drawing/2014/main" id="{3C6E8D56-6F6F-4902-8DCA-C57300972471}"/>
               </a:ext>
             </a:extLst>
           </p:cNvPr>
@@ -29534,7 +29695,7 @@
           <p:cNvPr id="13" name="card-label">
             <a:extLst xmlns:a="http://schemas.openxmlformats.org/drawingml/2006/main">
               <a:ext uri="{FF2B5EF4-FFF2-40B4-BE49-F238E27FC236}">
-                <a16:creationId xmlns:a16="http://schemas.microsoft.com/office/drawing/2014/main" id="{53437462-4EAB-456B-B895-5D8299F83279}"/>
+                <a16:creationId xmlns:a16="http://schemas.microsoft.com/office/drawing/2014/main" id="{10503C51-A9B7-4717-A3B6-85AD7D6E2E43}"/>
               </a:ext>
             </a:extLst>
           </p:cNvPr>
@@ -29590,7 +29751,7 @@
           <p:cNvPr id="14" name="card-title">
             <a:extLst xmlns:a="http://schemas.openxmlformats.org/drawingml/2006/main">
               <a:ext uri="{FF2B5EF4-FFF2-40B4-BE49-F238E27FC236}">
-                <a16:creationId xmlns:a16="http://schemas.microsoft.com/office/drawing/2014/main" id="{23142F3C-368F-4903-9BF4-D552548BFB3E}"/>
+                <a16:creationId xmlns:a16="http://schemas.microsoft.com/office/drawing/2014/main" id="{D4452CC9-8726-4AD4-A896-DA3680F925B0}"/>
               </a:ext>
             </a:extLst>
           </p:cNvPr>
@@ -29646,7 +29807,7 @@
           <p:cNvPr id="15" name="card-body">
             <a:extLst xmlns:a="http://schemas.openxmlformats.org/drawingml/2006/main">
               <a:ext uri="{FF2B5EF4-FFF2-40B4-BE49-F238E27FC236}">
-                <a16:creationId xmlns:a16="http://schemas.microsoft.com/office/drawing/2014/main" id="{18D5A257-5DBD-436D-B14C-8B11C9DCF6AB}"/>
+                <a16:creationId xmlns:a16="http://schemas.microsoft.com/office/drawing/2014/main" id="{055A8155-0781-419C-A863-0EE55BD63CB0}"/>
               </a:ext>
             </a:extLst>
           </p:cNvPr>
@@ -29715,7 +29876,7 @@
                 <a:ea typeface="Pretendard"/>
                 <a:cs typeface="Pretendard"/>
               </a:rPr>
-              <a:t>데브엑스에서 AI Agent 또는 업무 보조 도구를</a:t>
+              <a:t>데브엑스에서 AI Agent 또는 업무 보조</a:t>
             </a:r>
           </a:p>
           <a:p xmlns:a="http://schemas.openxmlformats.org/drawingml/2006/main">
@@ -29738,7 +29899,7 @@
                 <a:ea typeface="Pretendard"/>
                 <a:cs typeface="Pretendard"/>
               </a:rPr>
-              <a:t>구현합니다.</a:t>
+              <a:t>도구를 구현합니다.</a:t>
             </a:r>
           </a:p>
           <a:p xmlns:a="http://schemas.openxmlformats.org/drawingml/2006/main">
@@ -29761,7 +29922,7 @@
                 <a:ea typeface="Pretendard"/>
                 <a:cs typeface="Pretendard"/>
               </a:rPr>
-              <a:t>산출물: 작동 데모, 검증 체크리스트, 개선 요청</a:t>
+              <a:t>산출물: 작동 데모, 검증 체크리스트,</a:t>
             </a:r>
           </a:p>
           <a:p xmlns:a="http://schemas.openxmlformats.org/drawingml/2006/main">
@@ -29784,7 +29945,7 @@
                 <a:ea typeface="Pretendard"/>
                 <a:cs typeface="Pretendard"/>
               </a:rPr>
-              <a:t>목록</a:t>
+              <a:t>개선 요청 목록</a:t>
             </a:r>
           </a:p>
         </p:txBody>
@@ -29794,7 +29955,7 @@
           <p:cNvPr id="16" name="card-08.28 · 8시간">
             <a:extLst xmlns:a="http://schemas.openxmlformats.org/drawingml/2006/main">
               <a:ext uri="{FF2B5EF4-FFF2-40B4-BE49-F238E27FC236}">
-                <a16:creationId xmlns:a16="http://schemas.microsoft.com/office/drawing/2014/main" id="{6DF4F96B-EF64-40F0-929C-B159BAB4BD03}"/>
+                <a16:creationId xmlns:a16="http://schemas.microsoft.com/office/drawing/2014/main" id="{8A245A9E-13BB-4127-9A29-F38168B07DE5}"/>
               </a:ext>
             </a:extLst>
           </p:cNvPr>
@@ -29835,7 +29996,7 @@
           <p:cNvPr id="17" name="card-accent">
             <a:extLst xmlns:a="http://schemas.openxmlformats.org/drawingml/2006/main">
               <a:ext uri="{FF2B5EF4-FFF2-40B4-BE49-F238E27FC236}">
-                <a16:creationId xmlns:a16="http://schemas.microsoft.com/office/drawing/2014/main" id="{0DC1DE40-DF38-48DA-92AD-FC68E87F27A0}"/>
+                <a16:creationId xmlns:a16="http://schemas.microsoft.com/office/drawing/2014/main" id="{457E9AED-21EA-4EC2-AF7D-3FB69E0A9E92}"/>
               </a:ext>
             </a:extLst>
           </p:cNvPr>
@@ -29866,7 +30027,7 @@
           <p:cNvPr id="18" name="card-label">
             <a:extLst xmlns:a="http://schemas.openxmlformats.org/drawingml/2006/main">
               <a:ext uri="{FF2B5EF4-FFF2-40B4-BE49-F238E27FC236}">
-                <a16:creationId xmlns:a16="http://schemas.microsoft.com/office/drawing/2014/main" id="{53657394-98B2-4DAE-A832-C81C128AF066}"/>
+                <a16:creationId xmlns:a16="http://schemas.microsoft.com/office/drawing/2014/main" id="{1430E8A0-939C-4E08-A39F-D6A23E2E6C85}"/>
               </a:ext>
             </a:extLst>
           </p:cNvPr>
@@ -29922,7 +30083,7 @@
           <p:cNvPr id="19" name="card-title">
             <a:extLst xmlns:a="http://schemas.openxmlformats.org/drawingml/2006/main">
               <a:ext uri="{FF2B5EF4-FFF2-40B4-BE49-F238E27FC236}">
-                <a16:creationId xmlns:a16="http://schemas.microsoft.com/office/drawing/2014/main" id="{DCBE126D-FEE9-49B4-B1A2-9DB04F35710A}"/>
+                <a16:creationId xmlns:a16="http://schemas.microsoft.com/office/drawing/2014/main" id="{5695D7FE-3A08-4B64-9FF8-E0739B99E9F5}"/>
               </a:ext>
             </a:extLst>
           </p:cNvPr>
@@ -29978,7 +30139,7 @@
           <p:cNvPr id="20" name="card-body">
             <a:extLst xmlns:a="http://schemas.openxmlformats.org/drawingml/2006/main">
               <a:ext uri="{FF2B5EF4-FFF2-40B4-BE49-F238E27FC236}">
-                <a16:creationId xmlns:a16="http://schemas.microsoft.com/office/drawing/2014/main" id="{9BE00BC8-EDB7-484A-9A2B-6EBB29FD2AC7}"/>
+                <a16:creationId xmlns:a16="http://schemas.microsoft.com/office/drawing/2014/main" id="{F5EB5482-945D-4D08-BB62-89C4D956D972}"/>
               </a:ext>
             </a:extLst>
           </p:cNvPr>
@@ -30024,7 +30185,7 @@
                 <a:ea typeface="Pretendard"/>
                 <a:cs typeface="Pretendard"/>
               </a:rPr>
-              <a:t>데모를 발표 가능한 형태로 정리하고, 현업 적용</a:t>
+              <a:t>데모를 발표 가능한 형태로 정리하고,</a:t>
             </a:r>
           </a:p>
           <a:p xmlns:a="http://schemas.openxmlformats.org/drawingml/2006/main">
@@ -30047,7 +30208,7 @@
                 <a:ea typeface="Pretendard"/>
                 <a:cs typeface="Pretendard"/>
               </a:rPr>
-              <a:t>가능성과 조직 지원 조건을 회고합니다.</a:t>
+              <a:t>현업 적용 가능성과 조직 지원</a:t>
             </a:r>
           </a:p>
           <a:p xmlns:a="http://schemas.openxmlformats.org/drawingml/2006/main">
@@ -30070,7 +30231,7 @@
                 <a:ea typeface="Pretendard"/>
                 <a:cs typeface="Pretendard"/>
               </a:rPr>
-              <a:t>산출물: 5분 발표안, 데모 시나리오, 후속 AX</a:t>
+              <a:t>조건을 회고합니다.</a:t>
             </a:r>
           </a:p>
           <a:p xmlns:a="http://schemas.openxmlformats.org/drawingml/2006/main">
@@ -30093,7 +30254,30 @@
                 <a:ea typeface="Pretendard"/>
                 <a:cs typeface="Pretendard"/>
               </a:rPr>
-              <a:t>과제 후보</a:t>
+              <a:t>산출물: 5분 발표안, 데모 시나리오,</a:t>
+            </a:r>
+          </a:p>
+          <a:p xmlns:a="http://schemas.openxmlformats.org/drawingml/2006/main">
+            <a:pPr algn="l">
+              <a:defRPr sz="1275" b="0">
+                <a:solidFill>
+                  <a:srgbClr val="4B5563"/>
+                </a:solidFill>
+                <a:latin typeface="Pretendard"/>
+                <a:ea typeface="Pretendard"/>
+                <a:cs typeface="Pretendard"/>
+              </a:defRPr>
+            </a:pPr>
+            <a:r>
+              <a:rPr sz="1275" b="0">
+                <a:solidFill>
+                  <a:srgbClr val="4B5563"/>
+                </a:solidFill>
+                <a:latin typeface="Pretendard"/>
+                <a:ea typeface="Pretendard"/>
+                <a:cs typeface="Pretendard"/>
+              </a:rPr>
+              <a:t>후속 AX 과제 후보</a:t>
             </a:r>
           </a:p>
         </p:txBody>
@@ -30103,7 +30287,7 @@
           <p:cNvPr id="21" name="card-사전 준비">
             <a:extLst xmlns:a="http://schemas.openxmlformats.org/drawingml/2006/main">
               <a:ext uri="{FF2B5EF4-FFF2-40B4-BE49-F238E27FC236}">
-                <a16:creationId xmlns:a16="http://schemas.microsoft.com/office/drawing/2014/main" id="{F61A957C-6E72-4C10-8548-DAFE35D3DB6F}"/>
+                <a16:creationId xmlns:a16="http://schemas.microsoft.com/office/drawing/2014/main" id="{1330BD5F-9A04-42D9-BA8E-066B180962D6}"/>
               </a:ext>
             </a:extLst>
           </p:cNvPr>
@@ -30144,7 +30328,7 @@
           <p:cNvPr id="22" name="card-accent">
             <a:extLst xmlns:a="http://schemas.openxmlformats.org/drawingml/2006/main">
               <a:ext uri="{FF2B5EF4-FFF2-40B4-BE49-F238E27FC236}">
-                <a16:creationId xmlns:a16="http://schemas.microsoft.com/office/drawing/2014/main" id="{5CE25079-C168-4376-846B-B631666A83E4}"/>
+                <a16:creationId xmlns:a16="http://schemas.microsoft.com/office/drawing/2014/main" id="{B4F53BC5-33AD-4949-8818-E53A96FCFDFF}"/>
               </a:ext>
             </a:extLst>
           </p:cNvPr>
@@ -30175,7 +30359,7 @@
           <p:cNvPr id="23" name="card-label">
             <a:extLst xmlns:a="http://schemas.openxmlformats.org/drawingml/2006/main">
               <a:ext uri="{FF2B5EF4-FFF2-40B4-BE49-F238E27FC236}">
-                <a16:creationId xmlns:a16="http://schemas.microsoft.com/office/drawing/2014/main" id="{F22646CA-C505-458C-9DB3-59972306C871}"/>
+                <a16:creationId xmlns:a16="http://schemas.microsoft.com/office/drawing/2014/main" id="{F6D4D806-E8B6-4CBA-B5AA-7684A10EAD56}"/>
               </a:ext>
             </a:extLst>
           </p:cNvPr>
@@ -30231,7 +30415,7 @@
           <p:cNvPr id="24" name="card-title">
             <a:extLst xmlns:a="http://schemas.openxmlformats.org/drawingml/2006/main">
               <a:ext uri="{FF2B5EF4-FFF2-40B4-BE49-F238E27FC236}">
-                <a16:creationId xmlns:a16="http://schemas.microsoft.com/office/drawing/2014/main" id="{44FD2D1C-9388-4A87-9D90-5DE432CE73BB}"/>
+                <a16:creationId xmlns:a16="http://schemas.microsoft.com/office/drawing/2014/main" id="{A9210533-E715-4778-A2A5-6433DBFB11F6}"/>
               </a:ext>
             </a:extLst>
           </p:cNvPr>
@@ -30287,7 +30471,7 @@
           <p:cNvPr id="25" name="card-body">
             <a:extLst xmlns:a="http://schemas.openxmlformats.org/drawingml/2006/main">
               <a:ext uri="{FF2B5EF4-FFF2-40B4-BE49-F238E27FC236}">
-                <a16:creationId xmlns:a16="http://schemas.microsoft.com/office/drawing/2014/main" id="{A98C09E8-48AA-43BF-B513-E8222094E2F3}"/>
+                <a16:creationId xmlns:a16="http://schemas.microsoft.com/office/drawing/2014/main" id="{8ABD6C51-4C97-425D-BEA2-AED0F7BB83AB}"/>
               </a:ext>
             </a:extLst>
           </p:cNvPr>
@@ -30333,7 +30517,7 @@
                 <a:ea typeface="Pretendard"/>
                 <a:cs typeface="Pretendard"/>
               </a:rPr>
-              <a:t>샘플 자료 준비, 금지 자료 정리, 현재 업무</a:t>
+              <a:t>샘플 자료 준비, 금지 자료 정리, 현재</a:t>
             </a:r>
           </a:p>
           <a:p xmlns:a="http://schemas.openxmlformats.org/drawingml/2006/main">
@@ -30356,7 +30540,7 @@
                 <a:ea typeface="Pretendard"/>
                 <a:cs typeface="Pretendard"/>
               </a:rPr>
-              <a:t>프로세스 설명, 멘토 질문 목록 작성이</a:t>
+              <a:t>업무 프로세스 설명, 멘토 질문 목록</a:t>
             </a:r>
           </a:p>
           <a:p xmlns:a="http://schemas.openxmlformats.org/drawingml/2006/main">
@@ -30379,7 +30563,7 @@
                 <a:ea typeface="Pretendard"/>
                 <a:cs typeface="Pretendard"/>
               </a:rPr>
-              <a:t>필요합니다.</a:t>
+              <a:t>작성이 필요합니다.</a:t>
             </a:r>
           </a:p>
         </p:txBody>
@@ -30387,7 +30571,7 @@
     </p:spTree>
     <p:extLst>
       <p:ext uri="{BB962C8B-B14F-4D97-AF65-F5344CB8AC3E}">
-        <p14:creationId xmlns:p14="http://schemas.microsoft.com/office/powerpoint/2010/main" val="677141670"/>
+        <p14:creationId xmlns:p14="http://schemas.microsoft.com/office/powerpoint/2010/main" val="877052233"/>
       </p:ext>
     </p:extLst>
   </p:cSld>
@@ -30418,7 +30602,7 @@
           <p:cNvPr id="1" name="decor-ring-1">
             <a:extLst xmlns:a="http://schemas.openxmlformats.org/drawingml/2006/main">
               <a:ext uri="{FF2B5EF4-FFF2-40B4-BE49-F238E27FC236}">
-                <a16:creationId xmlns:a16="http://schemas.microsoft.com/office/drawing/2014/main" id="{53B3687E-2444-48F7-A0C2-3F2295299805}"/>
+                <a16:creationId xmlns:a16="http://schemas.microsoft.com/office/drawing/2014/main" id="{E41E0D28-0B1A-46AE-A264-BE01AE1C05E4}"/>
               </a:ext>
             </a:extLst>
           </p:cNvPr>
@@ -30449,7 +30633,7 @@
           <p:cNvPr id="2" name="decor-ring-2">
             <a:extLst xmlns:a="http://schemas.openxmlformats.org/drawingml/2006/main">
               <a:ext uri="{FF2B5EF4-FFF2-40B4-BE49-F238E27FC236}">
-                <a16:creationId xmlns:a16="http://schemas.microsoft.com/office/drawing/2014/main" id="{B2E7D882-DC09-4AA5-95F2-BB9E213BE57C}"/>
+                <a16:creationId xmlns:a16="http://schemas.microsoft.com/office/drawing/2014/main" id="{78824F63-3858-4456-BB71-57F74BF39B59}"/>
               </a:ext>
             </a:extLst>
           </p:cNvPr>
@@ -30480,7 +30664,7 @@
           <p:cNvPr id="3" name="decor-orb-1">
             <a:extLst xmlns:a="http://schemas.openxmlformats.org/drawingml/2006/main">
               <a:ext uri="{FF2B5EF4-FFF2-40B4-BE49-F238E27FC236}">
-                <a16:creationId xmlns:a16="http://schemas.microsoft.com/office/drawing/2014/main" id="{3479BD1E-55AC-4651-8987-310984E31A2E}"/>
+                <a16:creationId xmlns:a16="http://schemas.microsoft.com/office/drawing/2014/main" id="{8A164BAD-642C-4E57-A850-AD3F890C7B47}"/>
               </a:ext>
             </a:extLst>
           </p:cNvPr>
@@ -30511,7 +30695,7 @@
           <p:cNvPr id="4" name="decor-orb-2">
             <a:extLst xmlns:a="http://schemas.openxmlformats.org/drawingml/2006/main">
               <a:ext uri="{FF2B5EF4-FFF2-40B4-BE49-F238E27FC236}">
-                <a16:creationId xmlns:a16="http://schemas.microsoft.com/office/drawing/2014/main" id="{EBE8EDE3-E1E2-41B1-ABA2-19E3B01F2FFE}"/>
+                <a16:creationId xmlns:a16="http://schemas.microsoft.com/office/drawing/2014/main" id="{788DD614-BC2A-4642-9DDC-5F2012205501}"/>
               </a:ext>
             </a:extLst>
           </p:cNvPr>
@@ -30542,7 +30726,7 @@
           <p:cNvPr id="5" name="title-bar">
             <a:extLst xmlns:a="http://schemas.openxmlformats.org/drawingml/2006/main">
               <a:ext uri="{FF2B5EF4-FFF2-40B4-BE49-F238E27FC236}">
-                <a16:creationId xmlns:a16="http://schemas.microsoft.com/office/drawing/2014/main" id="{585B1C91-333A-4A6F-BB56-4A2CC65DD837}"/>
+                <a16:creationId xmlns:a16="http://schemas.microsoft.com/office/drawing/2014/main" id="{2A72FCB7-9F02-4F14-AC88-40CE1AB2C6A3}"/>
               </a:ext>
             </a:extLst>
           </p:cNvPr>
@@ -30573,7 +30757,7 @@
           <p:cNvPr id="6" name="close-title">
             <a:extLst xmlns:a="http://schemas.openxmlformats.org/drawingml/2006/main">
               <a:ext uri="{FF2B5EF4-FFF2-40B4-BE49-F238E27FC236}">
-                <a16:creationId xmlns:a16="http://schemas.microsoft.com/office/drawing/2014/main" id="{A830C12B-9994-4DA2-8D45-1829E1826CAE}"/>
+                <a16:creationId xmlns:a16="http://schemas.microsoft.com/office/drawing/2014/main" id="{A91AFE8C-2DD6-4513-8356-29469122AB1E}"/>
               </a:ext>
             </a:extLst>
           </p:cNvPr>
@@ -30633,7 +30817,7 @@
           <p:nvPr/>
         </p:nvPicPr>
         <p:blipFill>
-          <a:blip xmlns:r="http://schemas.openxmlformats.org/officeDocument/2006/relationships" xmlns:a="http://schemas.openxmlformats.org/drawingml/2006/main" r:embed="R8d61402e9d3b4b6d"/>
+          <a:blip xmlns:r="http://schemas.openxmlformats.org/officeDocument/2006/relationships" xmlns:a="http://schemas.openxmlformats.org/drawingml/2006/main" r:embed="R31610339e1874350"/>
           <a:stretch xmlns:a="http://schemas.openxmlformats.org/drawingml/2006/main"/>
         </p:blipFill>
         <p:spPr>
@@ -30651,7 +30835,7 @@
           <p:cNvPr id="8" name="check-square">
             <a:extLst xmlns:a="http://schemas.openxmlformats.org/drawingml/2006/main">
               <a:ext uri="{FF2B5EF4-FFF2-40B4-BE49-F238E27FC236}">
-                <a16:creationId xmlns:a16="http://schemas.microsoft.com/office/drawing/2014/main" id="{DCED2F1E-042B-4A2E-9D4D-3C0CADDFCB1E}"/>
+                <a16:creationId xmlns:a16="http://schemas.microsoft.com/office/drawing/2014/main" id="{3C861EB3-C78B-4611-ACE3-ABCFD09298CD}"/>
               </a:ext>
             </a:extLst>
           </p:cNvPr>
@@ -30686,7 +30870,7 @@
           <p:cNvPr id="9" name="check-text">
             <a:extLst xmlns:a="http://schemas.openxmlformats.org/drawingml/2006/main">
               <a:ext uri="{FF2B5EF4-FFF2-40B4-BE49-F238E27FC236}">
-                <a16:creationId xmlns:a16="http://schemas.microsoft.com/office/drawing/2014/main" id="{131C71D3-2DFA-4F8B-ABCC-80937DAB3C09}"/>
+                <a16:creationId xmlns:a16="http://schemas.microsoft.com/office/drawing/2014/main" id="{03E81856-D8FB-4004-9FC0-02927695E3AC}"/>
               </a:ext>
             </a:extLst>
           </p:cNvPr>
@@ -30742,7 +30926,7 @@
           <p:cNvPr id="10" name="check-square">
             <a:extLst xmlns:a="http://schemas.openxmlformats.org/drawingml/2006/main">
               <a:ext uri="{FF2B5EF4-FFF2-40B4-BE49-F238E27FC236}">
-                <a16:creationId xmlns:a16="http://schemas.microsoft.com/office/drawing/2014/main" id="{2377DBA2-E068-4D85-B1AF-06C070676D55}"/>
+                <a16:creationId xmlns:a16="http://schemas.microsoft.com/office/drawing/2014/main" id="{7D0A0F63-A037-48EF-9C4D-8A33AA44B2EA}"/>
               </a:ext>
             </a:extLst>
           </p:cNvPr>
@@ -30777,7 +30961,7 @@
           <p:cNvPr id="11" name="check-text">
             <a:extLst xmlns:a="http://schemas.openxmlformats.org/drawingml/2006/main">
               <a:ext uri="{FF2B5EF4-FFF2-40B4-BE49-F238E27FC236}">
-                <a16:creationId xmlns:a16="http://schemas.microsoft.com/office/drawing/2014/main" id="{FEE29DA7-3DC5-465C-8B06-3391A08F9EC3}"/>
+                <a16:creationId xmlns:a16="http://schemas.microsoft.com/office/drawing/2014/main" id="{01EDACD5-8762-40BA-AB09-F028AB4DDE42}"/>
               </a:ext>
             </a:extLst>
           </p:cNvPr>
@@ -30833,7 +31017,7 @@
           <p:cNvPr id="12" name="check-square">
             <a:extLst xmlns:a="http://schemas.openxmlformats.org/drawingml/2006/main">
               <a:ext uri="{FF2B5EF4-FFF2-40B4-BE49-F238E27FC236}">
-                <a16:creationId xmlns:a16="http://schemas.microsoft.com/office/drawing/2014/main" id="{855B3F73-2FD6-4694-8FFC-FBA8B0DDA0C4}"/>
+                <a16:creationId xmlns:a16="http://schemas.microsoft.com/office/drawing/2014/main" id="{A15B63F4-D04C-480F-947A-B0197D9327B4}"/>
               </a:ext>
             </a:extLst>
           </p:cNvPr>
@@ -30868,7 +31052,7 @@
           <p:cNvPr id="13" name="check-text">
             <a:extLst xmlns:a="http://schemas.openxmlformats.org/drawingml/2006/main">
               <a:ext uri="{FF2B5EF4-FFF2-40B4-BE49-F238E27FC236}">
-                <a16:creationId xmlns:a16="http://schemas.microsoft.com/office/drawing/2014/main" id="{1D88DC2C-065E-45F7-B825-4EADEE959114}"/>
+                <a16:creationId xmlns:a16="http://schemas.microsoft.com/office/drawing/2014/main" id="{DBBD74BE-B4EC-4525-9121-5B14E5994A77}"/>
               </a:ext>
             </a:extLst>
           </p:cNvPr>
@@ -30924,7 +31108,7 @@
           <p:cNvPr id="14" name="check-square">
             <a:extLst xmlns:a="http://schemas.openxmlformats.org/drawingml/2006/main">
               <a:ext uri="{FF2B5EF4-FFF2-40B4-BE49-F238E27FC236}">
-                <a16:creationId xmlns:a16="http://schemas.microsoft.com/office/drawing/2014/main" id="{F6585162-6DD3-4B19-9B75-DC67C7E5D24E}"/>
+                <a16:creationId xmlns:a16="http://schemas.microsoft.com/office/drawing/2014/main" id="{8B9AE88F-B264-4CC9-8FA7-3EAF91902CA9}"/>
               </a:ext>
             </a:extLst>
           </p:cNvPr>
@@ -30959,7 +31143,7 @@
           <p:cNvPr id="15" name="check-text">
             <a:extLst xmlns:a="http://schemas.openxmlformats.org/drawingml/2006/main">
               <a:ext uri="{FF2B5EF4-FFF2-40B4-BE49-F238E27FC236}">
-                <a16:creationId xmlns:a16="http://schemas.microsoft.com/office/drawing/2014/main" id="{332886BA-F4DA-4D03-9D85-40AC4D80CFC3}"/>
+                <a16:creationId xmlns:a16="http://schemas.microsoft.com/office/drawing/2014/main" id="{80D0D5E4-3346-4D7F-97F0-4A7D1A679A8F}"/>
               </a:ext>
             </a:extLst>
           </p:cNvPr>
@@ -31015,7 +31199,7 @@
           <p:cNvPr id="16" name="check-square">
             <a:extLst xmlns:a="http://schemas.openxmlformats.org/drawingml/2006/main">
               <a:ext uri="{FF2B5EF4-FFF2-40B4-BE49-F238E27FC236}">
-                <a16:creationId xmlns:a16="http://schemas.microsoft.com/office/drawing/2014/main" id="{95B804C3-6DD5-4842-B679-2CB3B6F39F18}"/>
+                <a16:creationId xmlns:a16="http://schemas.microsoft.com/office/drawing/2014/main" id="{33520769-CB41-428A-A020-659D96A991A5}"/>
               </a:ext>
             </a:extLst>
           </p:cNvPr>
@@ -31050,7 +31234,7 @@
           <p:cNvPr id="17" name="check-text">
             <a:extLst xmlns:a="http://schemas.openxmlformats.org/drawingml/2006/main">
               <a:ext uri="{FF2B5EF4-FFF2-40B4-BE49-F238E27FC236}">
-                <a16:creationId xmlns:a16="http://schemas.microsoft.com/office/drawing/2014/main" id="{9D99DC39-9AAE-4C87-B2DA-6D50DBF5AEF3}"/>
+                <a16:creationId xmlns:a16="http://schemas.microsoft.com/office/drawing/2014/main" id="{F4FC6853-205F-4F9C-80F6-91BFC06C7FD6}"/>
               </a:ext>
             </a:extLst>
           </p:cNvPr>
@@ -31106,7 +31290,7 @@
           <p:cNvPr id="18" name="closing-panel">
             <a:extLst xmlns:a="http://schemas.openxmlformats.org/drawingml/2006/main">
               <a:ext uri="{FF2B5EF4-FFF2-40B4-BE49-F238E27FC236}">
-                <a16:creationId xmlns:a16="http://schemas.microsoft.com/office/drawing/2014/main" id="{3D4241CB-9C61-42CD-BF65-1FF4567B5D1D}"/>
+                <a16:creationId xmlns:a16="http://schemas.microsoft.com/office/drawing/2014/main" id="{996389A0-FBBC-4805-9D20-AAA15305FBC5}"/>
               </a:ext>
             </a:extLst>
           </p:cNvPr>
@@ -31147,7 +31331,7 @@
           <p:cNvPr id="19" name="closing-message">
             <a:extLst xmlns:a="http://schemas.openxmlformats.org/drawingml/2006/main">
               <a:ext uri="{FF2B5EF4-FFF2-40B4-BE49-F238E27FC236}">
-                <a16:creationId xmlns:a16="http://schemas.microsoft.com/office/drawing/2014/main" id="{2DC9E183-787A-4E87-824B-A9A87FD19EF3}"/>
+                <a16:creationId xmlns:a16="http://schemas.microsoft.com/office/drawing/2014/main" id="{F8EF4DFF-E326-48A2-93D2-E158B64AAF85}"/>
               </a:ext>
             </a:extLst>
           </p:cNvPr>
@@ -31216,7 +31400,30 @@
                 <a:ea typeface="Pretendard"/>
                 <a:cs typeface="Pretendard"/>
               </a:rPr>
-              <a:t>현업 업무를 AI와 함께 처리하는 실행 기준입니다.</a:t>
+              <a:t>현업 업무를 AI와 함께 처리하는</a:t>
+            </a:r>
+          </a:p>
+          <a:p xmlns:a="http://schemas.openxmlformats.org/drawingml/2006/main">
+            <a:pPr algn="l">
+              <a:defRPr sz="1650" b="1">
+                <a:solidFill>
+                  <a:srgbClr val="2F80ED"/>
+                </a:solidFill>
+                <a:latin typeface="Pretendard"/>
+                <a:ea typeface="Pretendard"/>
+                <a:cs typeface="Pretendard"/>
+              </a:defRPr>
+            </a:pPr>
+            <a:r>
+              <a:rPr sz="1650" b="1">
+                <a:solidFill>
+                  <a:srgbClr val="2F80ED"/>
+                </a:solidFill>
+                <a:latin typeface="Pretendard"/>
+                <a:ea typeface="Pretendard"/>
+                <a:cs typeface="Pretendard"/>
+              </a:rPr>
+              <a:t>실행 기준입니다.</a:t>
             </a:r>
           </a:p>
         </p:txBody>
@@ -31226,7 +31433,7 @@
           <p:cNvPr id="20" name="footer-number">
             <a:extLst xmlns:a="http://schemas.openxmlformats.org/drawingml/2006/main">
               <a:ext uri="{FF2B5EF4-FFF2-40B4-BE49-F238E27FC236}">
-                <a16:creationId xmlns:a16="http://schemas.microsoft.com/office/drawing/2014/main" id="{EFE38CDF-54BA-4783-BA3B-83D95D1550E8}"/>
+                <a16:creationId xmlns:a16="http://schemas.microsoft.com/office/drawing/2014/main" id="{D6BFB589-0D6A-4D5B-A1C1-BC7CDBB10748}"/>
               </a:ext>
             </a:extLst>
           </p:cNvPr>
@@ -31280,7 +31487,7 @@
     </p:spTree>
     <p:extLst>
       <p:ext uri="{BB962C8B-B14F-4D97-AF65-F5344CB8AC3E}">
-        <p14:creationId xmlns:p14="http://schemas.microsoft.com/office/powerpoint/2010/main" val="427003813"/>
+        <p14:creationId xmlns:p14="http://schemas.microsoft.com/office/powerpoint/2010/main" val="649854397"/>
       </p:ext>
     </p:extLst>
   </p:cSld>
@@ -31311,7 +31518,7 @@
           <p:cNvPr id="1" name="decor-ring-1">
             <a:extLst xmlns:a="http://schemas.openxmlformats.org/drawingml/2006/main">
               <a:ext uri="{FF2B5EF4-FFF2-40B4-BE49-F238E27FC236}">
-                <a16:creationId xmlns:a16="http://schemas.microsoft.com/office/drawing/2014/main" id="{48983609-E12D-4ACE-B5D2-85234F7EA015}"/>
+                <a16:creationId xmlns:a16="http://schemas.microsoft.com/office/drawing/2014/main" id="{474BCDCF-40DC-4B57-8CE0-A37477A37BEA}"/>
               </a:ext>
             </a:extLst>
           </p:cNvPr>
@@ -31342,7 +31549,7 @@
           <p:cNvPr id="2" name="decor-ring-2">
             <a:extLst xmlns:a="http://schemas.openxmlformats.org/drawingml/2006/main">
               <a:ext uri="{FF2B5EF4-FFF2-40B4-BE49-F238E27FC236}">
-                <a16:creationId xmlns:a16="http://schemas.microsoft.com/office/drawing/2014/main" id="{815B8CF7-E614-40E7-893A-5A865A6494B6}"/>
+                <a16:creationId xmlns:a16="http://schemas.microsoft.com/office/drawing/2014/main" id="{66008296-0CDC-4AB8-AB03-64CE4E1B1996}"/>
               </a:ext>
             </a:extLst>
           </p:cNvPr>
@@ -31373,7 +31580,7 @@
           <p:cNvPr id="3" name="decor-orb-1">
             <a:extLst xmlns:a="http://schemas.openxmlformats.org/drawingml/2006/main">
               <a:ext uri="{FF2B5EF4-FFF2-40B4-BE49-F238E27FC236}">
-                <a16:creationId xmlns:a16="http://schemas.microsoft.com/office/drawing/2014/main" id="{F9F5E6DB-357E-410F-BA9D-7D03813CC2DE}"/>
+                <a16:creationId xmlns:a16="http://schemas.microsoft.com/office/drawing/2014/main" id="{984E8053-975A-4003-88E6-D8487F9DCC40}"/>
               </a:ext>
             </a:extLst>
           </p:cNvPr>
@@ -31404,7 +31611,7 @@
           <p:cNvPr id="4" name="decor-orb-2">
             <a:extLst xmlns:a="http://schemas.openxmlformats.org/drawingml/2006/main">
               <a:ext uri="{FF2B5EF4-FFF2-40B4-BE49-F238E27FC236}">
-                <a16:creationId xmlns:a16="http://schemas.microsoft.com/office/drawing/2014/main" id="{10F8CE2C-B6F8-4E71-9378-D5D5F5C462C7}"/>
+                <a16:creationId xmlns:a16="http://schemas.microsoft.com/office/drawing/2014/main" id="{1A1BA5CA-A227-4430-B0A7-AF32F7D6F33D}"/>
               </a:ext>
             </a:extLst>
           </p:cNvPr>
@@ -31435,7 +31642,7 @@
           <p:cNvPr id="5" name="title-bar">
             <a:extLst xmlns:a="http://schemas.openxmlformats.org/drawingml/2006/main">
               <a:ext uri="{FF2B5EF4-FFF2-40B4-BE49-F238E27FC236}">
-                <a16:creationId xmlns:a16="http://schemas.microsoft.com/office/drawing/2014/main" id="{2B6846FF-3512-4678-AF34-8C0802B6F84C}"/>
+                <a16:creationId xmlns:a16="http://schemas.microsoft.com/office/drawing/2014/main" id="{9B8CBB08-C48E-4DD9-BFC4-B8FC11B9C373}"/>
               </a:ext>
             </a:extLst>
           </p:cNvPr>
@@ -31466,7 +31673,7 @@
           <p:cNvPr id="6" name="kicker">
             <a:extLst xmlns:a="http://schemas.openxmlformats.org/drawingml/2006/main">
               <a:ext uri="{FF2B5EF4-FFF2-40B4-BE49-F238E27FC236}">
-                <a16:creationId xmlns:a16="http://schemas.microsoft.com/office/drawing/2014/main" id="{05501AB2-B4E4-4AA0-A01F-25E1AA2C77CF}"/>
+                <a16:creationId xmlns:a16="http://schemas.microsoft.com/office/drawing/2014/main" id="{DEE2B2F0-6EBE-43F9-9F6E-6FE8EBDD290F}"/>
               </a:ext>
             </a:extLst>
           </p:cNvPr>
@@ -31522,7 +31729,7 @@
           <p:cNvPr id="7" name="title">
             <a:extLst xmlns:a="http://schemas.openxmlformats.org/drawingml/2006/main">
               <a:ext uri="{FF2B5EF4-FFF2-40B4-BE49-F238E27FC236}">
-                <a16:creationId xmlns:a16="http://schemas.microsoft.com/office/drawing/2014/main" id="{935F14F5-9BDB-4152-B38A-DB3D4F0C8D3F}"/>
+                <a16:creationId xmlns:a16="http://schemas.microsoft.com/office/drawing/2014/main" id="{85BD9B19-2FDE-4B83-A330-B44646C498E1}"/>
               </a:ext>
             </a:extLst>
           </p:cNvPr>
@@ -31578,7 +31785,7 @@
           <p:cNvPr id="8" name="subtitle">
             <a:extLst xmlns:a="http://schemas.openxmlformats.org/drawingml/2006/main">
               <a:ext uri="{FF2B5EF4-FFF2-40B4-BE49-F238E27FC236}">
-                <a16:creationId xmlns:a16="http://schemas.microsoft.com/office/drawing/2014/main" id="{7E5631B6-92BF-4361-9ED8-2FD570A116FF}"/>
+                <a16:creationId xmlns:a16="http://schemas.microsoft.com/office/drawing/2014/main" id="{F6BBBDB3-A026-465F-8047-A36F6D64B221}"/>
               </a:ext>
             </a:extLst>
           </p:cNvPr>
@@ -31638,7 +31845,7 @@
           <p:nvPr/>
         </p:nvPicPr>
         <p:blipFill>
-          <a:blip xmlns:r="http://schemas.openxmlformats.org/officeDocument/2006/relationships" xmlns:a="http://schemas.openxmlformats.org/drawingml/2006/main" r:embed="R3f47094a65784ec1"/>
+          <a:blip xmlns:r="http://schemas.openxmlformats.org/officeDocument/2006/relationships" xmlns:a="http://schemas.openxmlformats.org/drawingml/2006/main" r:embed="R901ddc536b0f4706"/>
           <a:stretch xmlns:a="http://schemas.openxmlformats.org/drawingml/2006/main"/>
         </p:blipFill>
         <p:spPr>
@@ -31656,7 +31863,7 @@
           <p:cNvPr id="10" name="footer-number">
             <a:extLst xmlns:a="http://schemas.openxmlformats.org/drawingml/2006/main">
               <a:ext uri="{FF2B5EF4-FFF2-40B4-BE49-F238E27FC236}">
-                <a16:creationId xmlns:a16="http://schemas.microsoft.com/office/drawing/2014/main" id="{04BEACA4-CDB1-4B88-B8EA-169BD8A1E72A}"/>
+                <a16:creationId xmlns:a16="http://schemas.microsoft.com/office/drawing/2014/main" id="{54029650-F5CA-4DC7-BE82-63697CD7F788}"/>
               </a:ext>
             </a:extLst>
           </p:cNvPr>
@@ -31712,7 +31919,7 @@
           <p:cNvPr id="11" name="schedule-row">
             <a:extLst xmlns:a="http://schemas.openxmlformats.org/drawingml/2006/main">
               <a:ext uri="{FF2B5EF4-FFF2-40B4-BE49-F238E27FC236}">
-                <a16:creationId xmlns:a16="http://schemas.microsoft.com/office/drawing/2014/main" id="{6C930255-3981-46EE-BBAD-DF869D167FE4}"/>
+                <a16:creationId xmlns:a16="http://schemas.microsoft.com/office/drawing/2014/main" id="{ED0FC2CC-7461-4D82-A865-E17A67F4006F}"/>
               </a:ext>
             </a:extLst>
           </p:cNvPr>
@@ -31745,7 +31952,7 @@
           <p:cNvPr id="12" name="time">
             <a:extLst xmlns:a="http://schemas.openxmlformats.org/drawingml/2006/main">
               <a:ext uri="{FF2B5EF4-FFF2-40B4-BE49-F238E27FC236}">
-                <a16:creationId xmlns:a16="http://schemas.microsoft.com/office/drawing/2014/main" id="{6D96E19A-3A31-47DE-AE6E-C3CC27734AB7}"/>
+                <a16:creationId xmlns:a16="http://schemas.microsoft.com/office/drawing/2014/main" id="{DF4945E1-338A-4629-BA6E-5FF952F4C733}"/>
               </a:ext>
             </a:extLst>
           </p:cNvPr>
@@ -31801,7 +32008,7 @@
           <p:cNvPr id="13" name="activity">
             <a:extLst xmlns:a="http://schemas.openxmlformats.org/drawingml/2006/main">
               <a:ext uri="{FF2B5EF4-FFF2-40B4-BE49-F238E27FC236}">
-                <a16:creationId xmlns:a16="http://schemas.microsoft.com/office/drawing/2014/main" id="{1CEC8D76-00EB-4722-A092-5F9E25E8F3FD}"/>
+                <a16:creationId xmlns:a16="http://schemas.microsoft.com/office/drawing/2014/main" id="{29C23F03-5685-4B44-A09D-F462E8CAEB5C}"/>
               </a:ext>
             </a:extLst>
           </p:cNvPr>
@@ -31857,7 +32064,7 @@
           <p:cNvPr id="14" name="output">
             <a:extLst xmlns:a="http://schemas.openxmlformats.org/drawingml/2006/main">
               <a:ext uri="{FF2B5EF4-FFF2-40B4-BE49-F238E27FC236}">
-                <a16:creationId xmlns:a16="http://schemas.microsoft.com/office/drawing/2014/main" id="{0F5EB7CB-DDFB-4C95-9A22-6214046200CE}"/>
+                <a16:creationId xmlns:a16="http://schemas.microsoft.com/office/drawing/2014/main" id="{CD12E40C-5CB2-4D1D-8E15-CD320ADAB8D6}"/>
               </a:ext>
             </a:extLst>
           </p:cNvPr>
@@ -31913,7 +32120,7 @@
           <p:cNvPr id="15" name="schedule-row">
             <a:extLst xmlns:a="http://schemas.openxmlformats.org/drawingml/2006/main">
               <a:ext uri="{FF2B5EF4-FFF2-40B4-BE49-F238E27FC236}">
-                <a16:creationId xmlns:a16="http://schemas.microsoft.com/office/drawing/2014/main" id="{263FA33F-12F9-4CC3-A098-3A57A5A98637}"/>
+                <a16:creationId xmlns:a16="http://schemas.microsoft.com/office/drawing/2014/main" id="{E017D8C7-F3A2-432C-A1BC-81E63A22040F}"/>
               </a:ext>
             </a:extLst>
           </p:cNvPr>
@@ -31946,7 +32153,7 @@
           <p:cNvPr id="16" name="time">
             <a:extLst xmlns:a="http://schemas.openxmlformats.org/drawingml/2006/main">
               <a:ext uri="{FF2B5EF4-FFF2-40B4-BE49-F238E27FC236}">
-                <a16:creationId xmlns:a16="http://schemas.microsoft.com/office/drawing/2014/main" id="{07F2BC97-89D9-44B0-AA1B-FA46EC850AF8}"/>
+                <a16:creationId xmlns:a16="http://schemas.microsoft.com/office/drawing/2014/main" id="{FDDC8367-90FF-4FD8-8486-BBB0F3E8362C}"/>
               </a:ext>
             </a:extLst>
           </p:cNvPr>
@@ -32002,7 +32209,7 @@
           <p:cNvPr id="17" name="activity">
             <a:extLst xmlns:a="http://schemas.openxmlformats.org/drawingml/2006/main">
               <a:ext uri="{FF2B5EF4-FFF2-40B4-BE49-F238E27FC236}">
-                <a16:creationId xmlns:a16="http://schemas.microsoft.com/office/drawing/2014/main" id="{85D67C04-593A-4940-BF0F-4640864C2182}"/>
+                <a16:creationId xmlns:a16="http://schemas.microsoft.com/office/drawing/2014/main" id="{64395A41-5988-4530-A13A-94A8E209EFCD}"/>
               </a:ext>
             </a:extLst>
           </p:cNvPr>
@@ -32058,7 +32265,7 @@
           <p:cNvPr id="18" name="output">
             <a:extLst xmlns:a="http://schemas.openxmlformats.org/drawingml/2006/main">
               <a:ext uri="{FF2B5EF4-FFF2-40B4-BE49-F238E27FC236}">
-                <a16:creationId xmlns:a16="http://schemas.microsoft.com/office/drawing/2014/main" id="{A7514D68-6D2D-44BB-8052-5E873BA1B7CE}"/>
+                <a16:creationId xmlns:a16="http://schemas.microsoft.com/office/drawing/2014/main" id="{A440A7F0-D4CA-4513-8F39-3CAC11F94B03}"/>
               </a:ext>
             </a:extLst>
           </p:cNvPr>
@@ -32114,7 +32321,7 @@
           <p:cNvPr id="19" name="schedule-row">
             <a:extLst xmlns:a="http://schemas.openxmlformats.org/drawingml/2006/main">
               <a:ext uri="{FF2B5EF4-FFF2-40B4-BE49-F238E27FC236}">
-                <a16:creationId xmlns:a16="http://schemas.microsoft.com/office/drawing/2014/main" id="{06E62B4A-6256-44CF-B4DC-1A345CA09561}"/>
+                <a16:creationId xmlns:a16="http://schemas.microsoft.com/office/drawing/2014/main" id="{C83E4974-A915-4109-8C91-26A46B34A182}"/>
               </a:ext>
             </a:extLst>
           </p:cNvPr>
@@ -32147,7 +32354,7 @@
           <p:cNvPr id="20" name="time">
             <a:extLst xmlns:a="http://schemas.openxmlformats.org/drawingml/2006/main">
               <a:ext uri="{FF2B5EF4-FFF2-40B4-BE49-F238E27FC236}">
-                <a16:creationId xmlns:a16="http://schemas.microsoft.com/office/drawing/2014/main" id="{8EC50B85-C134-42DE-A76E-40CCF51CC3A8}"/>
+                <a16:creationId xmlns:a16="http://schemas.microsoft.com/office/drawing/2014/main" id="{23B64D5B-1AB2-4158-AE43-C6258ABD9A7B}"/>
               </a:ext>
             </a:extLst>
           </p:cNvPr>
@@ -32203,7 +32410,7 @@
           <p:cNvPr id="21" name="activity">
             <a:extLst xmlns:a="http://schemas.openxmlformats.org/drawingml/2006/main">
               <a:ext uri="{FF2B5EF4-FFF2-40B4-BE49-F238E27FC236}">
-                <a16:creationId xmlns:a16="http://schemas.microsoft.com/office/drawing/2014/main" id="{2B167129-F3BC-4312-B608-0B8EDED98B99}"/>
+                <a16:creationId xmlns:a16="http://schemas.microsoft.com/office/drawing/2014/main" id="{D2861644-564E-487F-AFE8-57EA57D328C1}"/>
               </a:ext>
             </a:extLst>
           </p:cNvPr>
@@ -32259,7 +32466,7 @@
           <p:cNvPr id="22" name="output">
             <a:extLst xmlns:a="http://schemas.openxmlformats.org/drawingml/2006/main">
               <a:ext uri="{FF2B5EF4-FFF2-40B4-BE49-F238E27FC236}">
-                <a16:creationId xmlns:a16="http://schemas.microsoft.com/office/drawing/2014/main" id="{BFFA310C-9DE6-4CFD-9125-C996CF4B9172}"/>
+                <a16:creationId xmlns:a16="http://schemas.microsoft.com/office/drawing/2014/main" id="{165AA0F2-4A40-4454-92DA-EED624E6302F}"/>
               </a:ext>
             </a:extLst>
           </p:cNvPr>
@@ -32315,7 +32522,7 @@
           <p:cNvPr id="23" name="schedule-row">
             <a:extLst xmlns:a="http://schemas.openxmlformats.org/drawingml/2006/main">
               <a:ext uri="{FF2B5EF4-FFF2-40B4-BE49-F238E27FC236}">
-                <a16:creationId xmlns:a16="http://schemas.microsoft.com/office/drawing/2014/main" id="{CFF855C3-E452-43A5-8549-8C5208B461CF}"/>
+                <a16:creationId xmlns:a16="http://schemas.microsoft.com/office/drawing/2014/main" id="{CA469148-16AF-4160-90C3-8EA398BEEA1E}"/>
               </a:ext>
             </a:extLst>
           </p:cNvPr>
@@ -32348,7 +32555,7 @@
           <p:cNvPr id="24" name="time">
             <a:extLst xmlns:a="http://schemas.openxmlformats.org/drawingml/2006/main">
               <a:ext uri="{FF2B5EF4-FFF2-40B4-BE49-F238E27FC236}">
-                <a16:creationId xmlns:a16="http://schemas.microsoft.com/office/drawing/2014/main" id="{F9D2201C-561C-4AEA-9A51-9EBB06E760DF}"/>
+                <a16:creationId xmlns:a16="http://schemas.microsoft.com/office/drawing/2014/main" id="{C3771BB2-3EE7-4AD5-8839-051EA02B99A6}"/>
               </a:ext>
             </a:extLst>
           </p:cNvPr>
@@ -32404,7 +32611,7 @@
           <p:cNvPr id="25" name="activity">
             <a:extLst xmlns:a="http://schemas.openxmlformats.org/drawingml/2006/main">
               <a:ext uri="{FF2B5EF4-FFF2-40B4-BE49-F238E27FC236}">
-                <a16:creationId xmlns:a16="http://schemas.microsoft.com/office/drawing/2014/main" id="{33620717-7175-4B6E-8AC8-157ACF0C121F}"/>
+                <a16:creationId xmlns:a16="http://schemas.microsoft.com/office/drawing/2014/main" id="{A78EF767-1810-4420-9946-32C74D044DAB}"/>
               </a:ext>
             </a:extLst>
           </p:cNvPr>
@@ -32460,7 +32667,7 @@
           <p:cNvPr id="26" name="output">
             <a:extLst xmlns:a="http://schemas.openxmlformats.org/drawingml/2006/main">
               <a:ext uri="{FF2B5EF4-FFF2-40B4-BE49-F238E27FC236}">
-                <a16:creationId xmlns:a16="http://schemas.microsoft.com/office/drawing/2014/main" id="{0EC48AD5-E039-47C4-9221-88E971D27A80}"/>
+                <a16:creationId xmlns:a16="http://schemas.microsoft.com/office/drawing/2014/main" id="{A799E50B-A792-4C3B-A16E-60E7FFBA4ABB}"/>
               </a:ext>
             </a:extLst>
           </p:cNvPr>
@@ -32516,7 +32723,7 @@
           <p:cNvPr id="27" name="schedule-row">
             <a:extLst xmlns:a="http://schemas.openxmlformats.org/drawingml/2006/main">
               <a:ext uri="{FF2B5EF4-FFF2-40B4-BE49-F238E27FC236}">
-                <a16:creationId xmlns:a16="http://schemas.microsoft.com/office/drawing/2014/main" id="{CF40D21E-A3A0-4DFB-AC24-29F31A9D219E}"/>
+                <a16:creationId xmlns:a16="http://schemas.microsoft.com/office/drawing/2014/main" id="{C732EC82-AE36-4861-BD22-402D67F158AB}"/>
               </a:ext>
             </a:extLst>
           </p:cNvPr>
@@ -32549,7 +32756,7 @@
           <p:cNvPr id="28" name="time">
             <a:extLst xmlns:a="http://schemas.openxmlformats.org/drawingml/2006/main">
               <a:ext uri="{FF2B5EF4-FFF2-40B4-BE49-F238E27FC236}">
-                <a16:creationId xmlns:a16="http://schemas.microsoft.com/office/drawing/2014/main" id="{8133D73C-007B-4A7C-860F-DB53D10389DD}"/>
+                <a16:creationId xmlns:a16="http://schemas.microsoft.com/office/drawing/2014/main" id="{AEFA492F-D9EB-4848-8DFA-791F1F0B6EA0}"/>
               </a:ext>
             </a:extLst>
           </p:cNvPr>
@@ -32605,7 +32812,7 @@
           <p:cNvPr id="29" name="activity">
             <a:extLst xmlns:a="http://schemas.openxmlformats.org/drawingml/2006/main">
               <a:ext uri="{FF2B5EF4-FFF2-40B4-BE49-F238E27FC236}">
-                <a16:creationId xmlns:a16="http://schemas.microsoft.com/office/drawing/2014/main" id="{B360841A-C23B-4295-A276-5D860B40EE89}"/>
+                <a16:creationId xmlns:a16="http://schemas.microsoft.com/office/drawing/2014/main" id="{35B8D4CE-1058-4441-9A34-BE3473C7D3E4}"/>
               </a:ext>
             </a:extLst>
           </p:cNvPr>
@@ -32661,7 +32868,7 @@
           <p:cNvPr id="30" name="output">
             <a:extLst xmlns:a="http://schemas.openxmlformats.org/drawingml/2006/main">
               <a:ext uri="{FF2B5EF4-FFF2-40B4-BE49-F238E27FC236}">
-                <a16:creationId xmlns:a16="http://schemas.microsoft.com/office/drawing/2014/main" id="{3C860F9A-0962-4A1F-A8D1-AD51543E366E}"/>
+                <a16:creationId xmlns:a16="http://schemas.microsoft.com/office/drawing/2014/main" id="{1F4DBDAC-143F-4EEE-BDD2-16B22779201D}"/>
               </a:ext>
             </a:extLst>
           </p:cNvPr>
@@ -32717,7 +32924,7 @@
           <p:cNvPr id="31" name="schedule-row">
             <a:extLst xmlns:a="http://schemas.openxmlformats.org/drawingml/2006/main">
               <a:ext uri="{FF2B5EF4-FFF2-40B4-BE49-F238E27FC236}">
-                <a16:creationId xmlns:a16="http://schemas.microsoft.com/office/drawing/2014/main" id="{8193FC3F-9015-4257-8583-002B007DEABF}"/>
+                <a16:creationId xmlns:a16="http://schemas.microsoft.com/office/drawing/2014/main" id="{285AC66F-3B71-40A5-8488-9C675EFDAA50}"/>
               </a:ext>
             </a:extLst>
           </p:cNvPr>
@@ -32750,7 +32957,7 @@
           <p:cNvPr id="32" name="time">
             <a:extLst xmlns:a="http://schemas.openxmlformats.org/drawingml/2006/main">
               <a:ext uri="{FF2B5EF4-FFF2-40B4-BE49-F238E27FC236}">
-                <a16:creationId xmlns:a16="http://schemas.microsoft.com/office/drawing/2014/main" id="{1AE7D685-6572-4A8C-B9CF-95151C044740}"/>
+                <a16:creationId xmlns:a16="http://schemas.microsoft.com/office/drawing/2014/main" id="{6AB146D2-212D-43E7-A985-112364EB0A8B}"/>
               </a:ext>
             </a:extLst>
           </p:cNvPr>
@@ -32806,7 +33013,7 @@
           <p:cNvPr id="33" name="activity">
             <a:extLst xmlns:a="http://schemas.openxmlformats.org/drawingml/2006/main">
               <a:ext uri="{FF2B5EF4-FFF2-40B4-BE49-F238E27FC236}">
-                <a16:creationId xmlns:a16="http://schemas.microsoft.com/office/drawing/2014/main" id="{1AA482B0-E50A-4387-8ED4-8BD0C6182C58}"/>
+                <a16:creationId xmlns:a16="http://schemas.microsoft.com/office/drawing/2014/main" id="{B7B511AA-A9FE-4794-817C-69EAF01B11F4}"/>
               </a:ext>
             </a:extLst>
           </p:cNvPr>
@@ -32862,7 +33069,7 @@
           <p:cNvPr id="34" name="output">
             <a:extLst xmlns:a="http://schemas.openxmlformats.org/drawingml/2006/main">
               <a:ext uri="{FF2B5EF4-FFF2-40B4-BE49-F238E27FC236}">
-                <a16:creationId xmlns:a16="http://schemas.microsoft.com/office/drawing/2014/main" id="{2693DE70-DABD-4513-AFAD-9AB6C6510464}"/>
+                <a16:creationId xmlns:a16="http://schemas.microsoft.com/office/drawing/2014/main" id="{D2A47333-1693-4287-9E31-346BAF220621}"/>
               </a:ext>
             </a:extLst>
           </p:cNvPr>
@@ -32918,7 +33125,7 @@
           <p:cNvPr id="35" name="schedule-row">
             <a:extLst xmlns:a="http://schemas.openxmlformats.org/drawingml/2006/main">
               <a:ext uri="{FF2B5EF4-FFF2-40B4-BE49-F238E27FC236}">
-                <a16:creationId xmlns:a16="http://schemas.microsoft.com/office/drawing/2014/main" id="{11F12726-62D5-4675-B500-C0DEFCBA5302}"/>
+                <a16:creationId xmlns:a16="http://schemas.microsoft.com/office/drawing/2014/main" id="{D924FE7F-E1D0-461F-92B4-DB31592EE795}"/>
               </a:ext>
             </a:extLst>
           </p:cNvPr>
@@ -32951,7 +33158,7 @@
           <p:cNvPr id="36" name="time">
             <a:extLst xmlns:a="http://schemas.openxmlformats.org/drawingml/2006/main">
               <a:ext uri="{FF2B5EF4-FFF2-40B4-BE49-F238E27FC236}">
-                <a16:creationId xmlns:a16="http://schemas.microsoft.com/office/drawing/2014/main" id="{35BC235E-A25C-4259-BDED-0E988B7D99C2}"/>
+                <a16:creationId xmlns:a16="http://schemas.microsoft.com/office/drawing/2014/main" id="{C69AD16B-2FFF-4CC0-8C9B-5AEF41E7050C}"/>
               </a:ext>
             </a:extLst>
           </p:cNvPr>
@@ -33007,7 +33214,7 @@
           <p:cNvPr id="37" name="activity">
             <a:extLst xmlns:a="http://schemas.openxmlformats.org/drawingml/2006/main">
               <a:ext uri="{FF2B5EF4-FFF2-40B4-BE49-F238E27FC236}">
-                <a16:creationId xmlns:a16="http://schemas.microsoft.com/office/drawing/2014/main" id="{23275030-E6D4-4142-B99B-C81EDD91863D}"/>
+                <a16:creationId xmlns:a16="http://schemas.microsoft.com/office/drawing/2014/main" id="{172F889B-EA82-4042-8AD4-BC91C446ED6B}"/>
               </a:ext>
             </a:extLst>
           </p:cNvPr>
@@ -33063,7 +33270,7 @@
           <p:cNvPr id="38" name="output">
             <a:extLst xmlns:a="http://schemas.openxmlformats.org/drawingml/2006/main">
               <a:ext uri="{FF2B5EF4-FFF2-40B4-BE49-F238E27FC236}">
-                <a16:creationId xmlns:a16="http://schemas.microsoft.com/office/drawing/2014/main" id="{D8680C27-1319-42A2-8FC9-697EDBE3F9D5}"/>
+                <a16:creationId xmlns:a16="http://schemas.microsoft.com/office/drawing/2014/main" id="{C8C78E24-E923-4487-9E0D-9EE142621385}"/>
               </a:ext>
             </a:extLst>
           </p:cNvPr>
@@ -33119,7 +33326,7 @@
           <p:cNvPr id="39" name="schedule-row">
             <a:extLst xmlns:a="http://schemas.openxmlformats.org/drawingml/2006/main">
               <a:ext uri="{FF2B5EF4-FFF2-40B4-BE49-F238E27FC236}">
-                <a16:creationId xmlns:a16="http://schemas.microsoft.com/office/drawing/2014/main" id="{47FE11B9-F110-4E57-B13F-DBB4481D10F0}"/>
+                <a16:creationId xmlns:a16="http://schemas.microsoft.com/office/drawing/2014/main" id="{D49E8AEE-78E1-469F-AA9B-3141551CE936}"/>
               </a:ext>
             </a:extLst>
           </p:cNvPr>
@@ -33152,7 +33359,7 @@
           <p:cNvPr id="40" name="time">
             <a:extLst xmlns:a="http://schemas.openxmlformats.org/drawingml/2006/main">
               <a:ext uri="{FF2B5EF4-FFF2-40B4-BE49-F238E27FC236}">
-                <a16:creationId xmlns:a16="http://schemas.microsoft.com/office/drawing/2014/main" id="{433BE3B3-74E5-4F03-93D7-3D0816B427AE}"/>
+                <a16:creationId xmlns:a16="http://schemas.microsoft.com/office/drawing/2014/main" id="{AAE381E5-24AB-47C9-97D4-0646E74ADCFB}"/>
               </a:ext>
             </a:extLst>
           </p:cNvPr>
@@ -33208,7 +33415,7 @@
           <p:cNvPr id="41" name="activity">
             <a:extLst xmlns:a="http://schemas.openxmlformats.org/drawingml/2006/main">
               <a:ext uri="{FF2B5EF4-FFF2-40B4-BE49-F238E27FC236}">
-                <a16:creationId xmlns:a16="http://schemas.microsoft.com/office/drawing/2014/main" id="{099E8870-99DF-4821-AD07-B8163DFE8887}"/>
+                <a16:creationId xmlns:a16="http://schemas.microsoft.com/office/drawing/2014/main" id="{9674601F-AB24-48F8-8210-009AA9AE75D4}"/>
               </a:ext>
             </a:extLst>
           </p:cNvPr>
@@ -33264,7 +33471,7 @@
           <p:cNvPr id="42" name="output">
             <a:extLst xmlns:a="http://schemas.openxmlformats.org/drawingml/2006/main">
               <a:ext uri="{FF2B5EF4-FFF2-40B4-BE49-F238E27FC236}">
-                <a16:creationId xmlns:a16="http://schemas.microsoft.com/office/drawing/2014/main" id="{C403C90F-A38B-4380-98CC-9DF296AF6F73}"/>
+                <a16:creationId xmlns:a16="http://schemas.microsoft.com/office/drawing/2014/main" id="{A852BB26-AC13-4836-9785-F9B6E54D65B3}"/>
               </a:ext>
             </a:extLst>
           </p:cNvPr>
@@ -33320,7 +33527,7 @@
           <p:cNvPr id="43" name="schedule-row">
             <a:extLst xmlns:a="http://schemas.openxmlformats.org/drawingml/2006/main">
               <a:ext uri="{FF2B5EF4-FFF2-40B4-BE49-F238E27FC236}">
-                <a16:creationId xmlns:a16="http://schemas.microsoft.com/office/drawing/2014/main" id="{EE2B538F-A5BC-4052-8843-06BCB9F94799}"/>
+                <a16:creationId xmlns:a16="http://schemas.microsoft.com/office/drawing/2014/main" id="{0971529F-6F99-4B81-9B80-493C68C753F4}"/>
               </a:ext>
             </a:extLst>
           </p:cNvPr>
@@ -33353,7 +33560,7 @@
           <p:cNvPr id="44" name="time">
             <a:extLst xmlns:a="http://schemas.openxmlformats.org/drawingml/2006/main">
               <a:ext uri="{FF2B5EF4-FFF2-40B4-BE49-F238E27FC236}">
-                <a16:creationId xmlns:a16="http://schemas.microsoft.com/office/drawing/2014/main" id="{8527EF53-5C2D-4720-AFA0-890B657302E9}"/>
+                <a16:creationId xmlns:a16="http://schemas.microsoft.com/office/drawing/2014/main" id="{43E876EC-53B6-49CD-AA28-F0C838E78D5A}"/>
               </a:ext>
             </a:extLst>
           </p:cNvPr>
@@ -33409,7 +33616,7 @@
           <p:cNvPr id="45" name="activity">
             <a:extLst xmlns:a="http://schemas.openxmlformats.org/drawingml/2006/main">
               <a:ext uri="{FF2B5EF4-FFF2-40B4-BE49-F238E27FC236}">
-                <a16:creationId xmlns:a16="http://schemas.microsoft.com/office/drawing/2014/main" id="{6DBD4F5E-8EF8-47C6-A78A-6C529F32D942}"/>
+                <a16:creationId xmlns:a16="http://schemas.microsoft.com/office/drawing/2014/main" id="{95A5933A-E4C8-44D7-BC19-F6C6A8BFC771}"/>
               </a:ext>
             </a:extLst>
           </p:cNvPr>
@@ -33465,7 +33672,7 @@
           <p:cNvPr id="46" name="output">
             <a:extLst xmlns:a="http://schemas.openxmlformats.org/drawingml/2006/main">
               <a:ext uri="{FF2B5EF4-FFF2-40B4-BE49-F238E27FC236}">
-                <a16:creationId xmlns:a16="http://schemas.microsoft.com/office/drawing/2014/main" id="{9CEB4B59-4691-4469-AF6C-FA7BF6AEA05E}"/>
+                <a16:creationId xmlns:a16="http://schemas.microsoft.com/office/drawing/2014/main" id="{8B97A96E-E4CA-43D8-8B2F-6603128AFF94}"/>
               </a:ext>
             </a:extLst>
           </p:cNvPr>
@@ -33519,7 +33726,7 @@
     </p:spTree>
     <p:extLst>
       <p:ext uri="{BB962C8B-B14F-4D97-AF65-F5344CB8AC3E}">
-        <p14:creationId xmlns:p14="http://schemas.microsoft.com/office/powerpoint/2010/main" val="1606744963"/>
+        <p14:creationId xmlns:p14="http://schemas.microsoft.com/office/powerpoint/2010/main" val="2042031437"/>
       </p:ext>
     </p:extLst>
   </p:cSld>
@@ -33550,7 +33757,7 @@
           <p:cNvPr id="1" name="decor-ring-1">
             <a:extLst xmlns:a="http://schemas.openxmlformats.org/drawingml/2006/main">
               <a:ext uri="{FF2B5EF4-FFF2-40B4-BE49-F238E27FC236}">
-                <a16:creationId xmlns:a16="http://schemas.microsoft.com/office/drawing/2014/main" id="{22B73C32-A7B3-48C9-8BFF-BB9A5FCDF1E5}"/>
+                <a16:creationId xmlns:a16="http://schemas.microsoft.com/office/drawing/2014/main" id="{D755B9E7-B6FC-48C9-B91D-5DAE6200D8E1}"/>
               </a:ext>
             </a:extLst>
           </p:cNvPr>
@@ -33581,7 +33788,7 @@
           <p:cNvPr id="2" name="decor-ring-2">
             <a:extLst xmlns:a="http://schemas.openxmlformats.org/drawingml/2006/main">
               <a:ext uri="{FF2B5EF4-FFF2-40B4-BE49-F238E27FC236}">
-                <a16:creationId xmlns:a16="http://schemas.microsoft.com/office/drawing/2014/main" id="{7E30D51F-9D68-4C28-ABD3-981E407B87FC}"/>
+                <a16:creationId xmlns:a16="http://schemas.microsoft.com/office/drawing/2014/main" id="{5BD89BE0-8F8C-4E36-A438-BCA942479B1C}"/>
               </a:ext>
             </a:extLst>
           </p:cNvPr>
@@ -33612,7 +33819,7 @@
           <p:cNvPr id="3" name="decor-orb-1">
             <a:extLst xmlns:a="http://schemas.openxmlformats.org/drawingml/2006/main">
               <a:ext uri="{FF2B5EF4-FFF2-40B4-BE49-F238E27FC236}">
-                <a16:creationId xmlns:a16="http://schemas.microsoft.com/office/drawing/2014/main" id="{AA627E5F-3FFC-4952-841D-910419FE6308}"/>
+                <a16:creationId xmlns:a16="http://schemas.microsoft.com/office/drawing/2014/main" id="{C7833CD9-7604-4698-AF39-0262709DD6F7}"/>
               </a:ext>
             </a:extLst>
           </p:cNvPr>
@@ -33643,7 +33850,7 @@
           <p:cNvPr id="4" name="decor-orb-2">
             <a:extLst xmlns:a="http://schemas.openxmlformats.org/drawingml/2006/main">
               <a:ext uri="{FF2B5EF4-FFF2-40B4-BE49-F238E27FC236}">
-                <a16:creationId xmlns:a16="http://schemas.microsoft.com/office/drawing/2014/main" id="{8B38E0F4-EEE6-4BAF-9419-D5B425628FA5}"/>
+                <a16:creationId xmlns:a16="http://schemas.microsoft.com/office/drawing/2014/main" id="{0295008D-5642-4AD1-8BAE-9A9C869D3BF3}"/>
               </a:ext>
             </a:extLst>
           </p:cNvPr>
@@ -33674,7 +33881,7 @@
           <p:cNvPr id="5" name="title-bar">
             <a:extLst xmlns:a="http://schemas.openxmlformats.org/drawingml/2006/main">
               <a:ext uri="{FF2B5EF4-FFF2-40B4-BE49-F238E27FC236}">
-                <a16:creationId xmlns:a16="http://schemas.microsoft.com/office/drawing/2014/main" id="{6BA858B6-8FEB-4C1E-8700-C329A5CD2A4B}"/>
+                <a16:creationId xmlns:a16="http://schemas.microsoft.com/office/drawing/2014/main" id="{2C52E877-DDEB-45B0-BF47-E1DBF9379056}"/>
               </a:ext>
             </a:extLst>
           </p:cNvPr>
@@ -33705,7 +33912,7 @@
           <p:cNvPr id="6" name="kicker">
             <a:extLst xmlns:a="http://schemas.openxmlformats.org/drawingml/2006/main">
               <a:ext uri="{FF2B5EF4-FFF2-40B4-BE49-F238E27FC236}">
-                <a16:creationId xmlns:a16="http://schemas.microsoft.com/office/drawing/2014/main" id="{BD58D0FB-4737-4232-9C34-5A5EBE03655B}"/>
+                <a16:creationId xmlns:a16="http://schemas.microsoft.com/office/drawing/2014/main" id="{2F4D3E63-4C38-4E6A-A81C-7C2595B39DB6}"/>
               </a:ext>
             </a:extLst>
           </p:cNvPr>
@@ -33761,7 +33968,7 @@
           <p:cNvPr id="7" name="title">
             <a:extLst xmlns:a="http://schemas.openxmlformats.org/drawingml/2006/main">
               <a:ext uri="{FF2B5EF4-FFF2-40B4-BE49-F238E27FC236}">
-                <a16:creationId xmlns:a16="http://schemas.microsoft.com/office/drawing/2014/main" id="{2B15D979-BAEE-4678-87DD-F22C928B4979}"/>
+                <a16:creationId xmlns:a16="http://schemas.microsoft.com/office/drawing/2014/main" id="{78119F8E-922A-44FD-B1C5-5CA9F20F7560}"/>
               </a:ext>
             </a:extLst>
           </p:cNvPr>
@@ -33817,7 +34024,7 @@
           <p:cNvPr id="8" name="subtitle">
             <a:extLst xmlns:a="http://schemas.openxmlformats.org/drawingml/2006/main">
               <a:ext uri="{FF2B5EF4-FFF2-40B4-BE49-F238E27FC236}">
-                <a16:creationId xmlns:a16="http://schemas.microsoft.com/office/drawing/2014/main" id="{F8DD9ECB-91CC-459E-B3EC-EE0ADE619B0C}"/>
+                <a16:creationId xmlns:a16="http://schemas.microsoft.com/office/drawing/2014/main" id="{A1B466AD-73AE-4D0C-B5C3-A821E582115C}"/>
               </a:ext>
             </a:extLst>
           </p:cNvPr>
@@ -33877,7 +34084,7 @@
           <p:nvPr/>
         </p:nvPicPr>
         <p:blipFill>
-          <a:blip xmlns:r="http://schemas.openxmlformats.org/officeDocument/2006/relationships" xmlns:a="http://schemas.openxmlformats.org/drawingml/2006/main" r:embed="R350c3f0c31ec4bee"/>
+          <a:blip xmlns:r="http://schemas.openxmlformats.org/officeDocument/2006/relationships" xmlns:a="http://schemas.openxmlformats.org/drawingml/2006/main" r:embed="R4cf032ae7b1f4f4c"/>
           <a:stretch xmlns:a="http://schemas.openxmlformats.org/drawingml/2006/main"/>
         </p:blipFill>
         <p:spPr>
@@ -33895,7 +34102,7 @@
           <p:cNvPr id="10" name="footer-number">
             <a:extLst xmlns:a="http://schemas.openxmlformats.org/drawingml/2006/main">
               <a:ext uri="{FF2B5EF4-FFF2-40B4-BE49-F238E27FC236}">
-                <a16:creationId xmlns:a16="http://schemas.microsoft.com/office/drawing/2014/main" id="{D54C2BB1-0828-44F5-87D8-BCBF3C75475E}"/>
+                <a16:creationId xmlns:a16="http://schemas.microsoft.com/office/drawing/2014/main" id="{E65AF74A-D9B4-4DB7-BD41-827062827495}"/>
               </a:ext>
             </a:extLst>
           </p:cNvPr>
@@ -33951,7 +34158,7 @@
           <p:cNvPr id="11" name="card-RULE 1">
             <a:extLst xmlns:a="http://schemas.openxmlformats.org/drawingml/2006/main">
               <a:ext uri="{FF2B5EF4-FFF2-40B4-BE49-F238E27FC236}">
-                <a16:creationId xmlns:a16="http://schemas.microsoft.com/office/drawing/2014/main" id="{C6DEA6F5-C637-4D12-B46C-5030DB524106}"/>
+                <a16:creationId xmlns:a16="http://schemas.microsoft.com/office/drawing/2014/main" id="{25872A28-04D0-4FE5-8CC8-6A02E263B3E6}"/>
               </a:ext>
             </a:extLst>
           </p:cNvPr>
@@ -33992,7 +34199,7 @@
           <p:cNvPr id="12" name="card-accent">
             <a:extLst xmlns:a="http://schemas.openxmlformats.org/drawingml/2006/main">
               <a:ext uri="{FF2B5EF4-FFF2-40B4-BE49-F238E27FC236}">
-                <a16:creationId xmlns:a16="http://schemas.microsoft.com/office/drawing/2014/main" id="{015D076E-1CB0-490A-98B0-1311A626A77C}"/>
+                <a16:creationId xmlns:a16="http://schemas.microsoft.com/office/drawing/2014/main" id="{8127ACCB-309E-41DE-AB35-28EE963A5A62}"/>
               </a:ext>
             </a:extLst>
           </p:cNvPr>
@@ -34023,7 +34230,7 @@
           <p:cNvPr id="13" name="card-label">
             <a:extLst xmlns:a="http://schemas.openxmlformats.org/drawingml/2006/main">
               <a:ext uri="{FF2B5EF4-FFF2-40B4-BE49-F238E27FC236}">
-                <a16:creationId xmlns:a16="http://schemas.microsoft.com/office/drawing/2014/main" id="{D34D05DD-F7A0-4879-BB3E-7EB291DA0C62}"/>
+                <a16:creationId xmlns:a16="http://schemas.microsoft.com/office/drawing/2014/main" id="{FD0A78EF-806E-4DAA-8586-70A30EA0F370}"/>
               </a:ext>
             </a:extLst>
           </p:cNvPr>
@@ -34079,7 +34286,7 @@
           <p:cNvPr id="14" name="card-title">
             <a:extLst xmlns:a="http://schemas.openxmlformats.org/drawingml/2006/main">
               <a:ext uri="{FF2B5EF4-FFF2-40B4-BE49-F238E27FC236}">
-                <a16:creationId xmlns:a16="http://schemas.microsoft.com/office/drawing/2014/main" id="{FFC83E2E-13F2-4071-95F5-89D4494EC463}"/>
+                <a16:creationId xmlns:a16="http://schemas.microsoft.com/office/drawing/2014/main" id="{C5FA5B29-4E51-4340-8D05-9F58524FDD6B}"/>
               </a:ext>
             </a:extLst>
           </p:cNvPr>
@@ -34135,7 +34342,7 @@
           <p:cNvPr id="15" name="card-body">
             <a:extLst xmlns:a="http://schemas.openxmlformats.org/drawingml/2006/main">
               <a:ext uri="{FF2B5EF4-FFF2-40B4-BE49-F238E27FC236}">
-                <a16:creationId xmlns:a16="http://schemas.microsoft.com/office/drawing/2014/main" id="{EEC55294-E936-4FEB-997F-55060D8842DB}"/>
+                <a16:creationId xmlns:a16="http://schemas.microsoft.com/office/drawing/2014/main" id="{97A8BD3F-C7CA-46AA-8F6D-8E26DABFE8D8}"/>
               </a:ext>
             </a:extLst>
           </p:cNvPr>
@@ -34181,7 +34388,7 @@
                 <a:ea typeface="Pretendard"/>
                 <a:cs typeface="Pretendard"/>
               </a:rPr>
-              <a:t>현업에서 반복되거나 병목을 만드는 업무여야</a:t>
+              <a:t>현업에서 반복되거나 병목을 만드는</a:t>
             </a:r>
           </a:p>
           <a:p xmlns:a="http://schemas.openxmlformats.org/drawingml/2006/main">
@@ -34204,7 +34411,7 @@
                 <a:ea typeface="Pretendard"/>
                 <a:cs typeface="Pretendard"/>
               </a:rPr>
-              <a:t>합니다.</a:t>
+              <a:t>업무여야 합니다.</a:t>
             </a:r>
           </a:p>
         </p:txBody>
@@ -34214,7 +34421,7 @@
           <p:cNvPr id="16" name="card-RULE 2">
             <a:extLst xmlns:a="http://schemas.openxmlformats.org/drawingml/2006/main">
               <a:ext uri="{FF2B5EF4-FFF2-40B4-BE49-F238E27FC236}">
-                <a16:creationId xmlns:a16="http://schemas.microsoft.com/office/drawing/2014/main" id="{A914D314-E418-4185-97EE-1E1BEAEAF892}"/>
+                <a16:creationId xmlns:a16="http://schemas.microsoft.com/office/drawing/2014/main" id="{7A3B5E2B-19F5-4A70-8AD4-9FAFFCC27E9F}"/>
               </a:ext>
             </a:extLst>
           </p:cNvPr>
@@ -34255,7 +34462,7 @@
           <p:cNvPr id="17" name="card-accent">
             <a:extLst xmlns:a="http://schemas.openxmlformats.org/drawingml/2006/main">
               <a:ext uri="{FF2B5EF4-FFF2-40B4-BE49-F238E27FC236}">
-                <a16:creationId xmlns:a16="http://schemas.microsoft.com/office/drawing/2014/main" id="{388B6E65-D668-42A4-AEF3-B9CA35DDAFA1}"/>
+                <a16:creationId xmlns:a16="http://schemas.microsoft.com/office/drawing/2014/main" id="{9E036F22-AEDD-4D49-8E34-AB6E850219E2}"/>
               </a:ext>
             </a:extLst>
           </p:cNvPr>
@@ -34286,7 +34493,7 @@
           <p:cNvPr id="18" name="card-label">
             <a:extLst xmlns:a="http://schemas.openxmlformats.org/drawingml/2006/main">
               <a:ext uri="{FF2B5EF4-FFF2-40B4-BE49-F238E27FC236}">
-                <a16:creationId xmlns:a16="http://schemas.microsoft.com/office/drawing/2014/main" id="{F12368A4-F017-4B0E-8ED7-52793DF821A4}"/>
+                <a16:creationId xmlns:a16="http://schemas.microsoft.com/office/drawing/2014/main" id="{AE4DFDF8-163F-440A-82E1-DD5F31BF6F78}"/>
               </a:ext>
             </a:extLst>
           </p:cNvPr>
@@ -34342,7 +34549,7 @@
           <p:cNvPr id="19" name="card-title">
             <a:extLst xmlns:a="http://schemas.openxmlformats.org/drawingml/2006/main">
               <a:ext uri="{FF2B5EF4-FFF2-40B4-BE49-F238E27FC236}">
-                <a16:creationId xmlns:a16="http://schemas.microsoft.com/office/drawing/2014/main" id="{F80A057A-27E7-43E1-B91B-D1428AD60895}"/>
+                <a16:creationId xmlns:a16="http://schemas.microsoft.com/office/drawing/2014/main" id="{0C1AEC8B-6666-44EA-9DE3-9126D1B9EEA2}"/>
               </a:ext>
             </a:extLst>
           </p:cNvPr>
@@ -34398,7 +34605,7 @@
           <p:cNvPr id="20" name="card-body">
             <a:extLst xmlns:a="http://schemas.openxmlformats.org/drawingml/2006/main">
               <a:ext uri="{FF2B5EF4-FFF2-40B4-BE49-F238E27FC236}">
-                <a16:creationId xmlns:a16="http://schemas.microsoft.com/office/drawing/2014/main" id="{7DF340D7-A1B6-4ED2-8516-F9A69F387D37}"/>
+                <a16:creationId xmlns:a16="http://schemas.microsoft.com/office/drawing/2014/main" id="{82C8E818-CBD0-42FF-A4AE-AC5CAA053FA7}"/>
               </a:ext>
             </a:extLst>
           </p:cNvPr>
@@ -34444,7 +34651,7 @@
                 <a:ea typeface="Pretendard"/>
                 <a:cs typeface="Pretendard"/>
               </a:rPr>
-              <a:t>샘플 문서, 입력값, 예시 출력물 중 하나는 준비</a:t>
+              <a:t>샘플 문서, 입력값, 예시 출력물 중 하나는</a:t>
             </a:r>
           </a:p>
           <a:p xmlns:a="http://schemas.openxmlformats.org/drawingml/2006/main">
@@ -34467,7 +34674,7 @@
                 <a:ea typeface="Pretendard"/>
                 <a:cs typeface="Pretendard"/>
               </a:rPr>
-              <a:t>가능해야 합니다.</a:t>
+              <a:t>준비 가능해야 합니다.</a:t>
             </a:r>
           </a:p>
         </p:txBody>
@@ -34477,7 +34684,7 @@
           <p:cNvPr id="21" name="card-RULE 3">
             <a:extLst xmlns:a="http://schemas.openxmlformats.org/drawingml/2006/main">
               <a:ext uri="{FF2B5EF4-FFF2-40B4-BE49-F238E27FC236}">
-                <a16:creationId xmlns:a16="http://schemas.microsoft.com/office/drawing/2014/main" id="{F7777C81-B3FE-4C56-96E5-307EC277E816}"/>
+                <a16:creationId xmlns:a16="http://schemas.microsoft.com/office/drawing/2014/main" id="{4E3EE625-0791-4944-9661-B8DE56545C49}"/>
               </a:ext>
             </a:extLst>
           </p:cNvPr>
@@ -34518,7 +34725,7 @@
           <p:cNvPr id="22" name="card-accent">
             <a:extLst xmlns:a="http://schemas.openxmlformats.org/drawingml/2006/main">
               <a:ext uri="{FF2B5EF4-FFF2-40B4-BE49-F238E27FC236}">
-                <a16:creationId xmlns:a16="http://schemas.microsoft.com/office/drawing/2014/main" id="{46C64F54-5267-4B55-98BF-FCF336B33226}"/>
+                <a16:creationId xmlns:a16="http://schemas.microsoft.com/office/drawing/2014/main" id="{68E90EF3-6E6E-41CE-8D6B-5D5BA9DCCCCE}"/>
               </a:ext>
             </a:extLst>
           </p:cNvPr>
@@ -34549,7 +34756,7 @@
           <p:cNvPr id="23" name="card-label">
             <a:extLst xmlns:a="http://schemas.openxmlformats.org/drawingml/2006/main">
               <a:ext uri="{FF2B5EF4-FFF2-40B4-BE49-F238E27FC236}">
-                <a16:creationId xmlns:a16="http://schemas.microsoft.com/office/drawing/2014/main" id="{AA276691-1E31-4F8E-9A2C-B1B9E3EA9367}"/>
+                <a16:creationId xmlns:a16="http://schemas.microsoft.com/office/drawing/2014/main" id="{350EBCC8-C0F7-437D-941B-077E5E111ACB}"/>
               </a:ext>
             </a:extLst>
           </p:cNvPr>
@@ -34605,7 +34812,7 @@
           <p:cNvPr id="24" name="card-title">
             <a:extLst xmlns:a="http://schemas.openxmlformats.org/drawingml/2006/main">
               <a:ext uri="{FF2B5EF4-FFF2-40B4-BE49-F238E27FC236}">
-                <a16:creationId xmlns:a16="http://schemas.microsoft.com/office/drawing/2014/main" id="{A678D775-60C3-4C4F-97F2-0F2B640BE03B}"/>
+                <a16:creationId xmlns:a16="http://schemas.microsoft.com/office/drawing/2014/main" id="{852B62C3-C6A6-4AB4-A2A1-CA511E37D1B1}"/>
               </a:ext>
             </a:extLst>
           </p:cNvPr>
@@ -34661,7 +34868,7 @@
           <p:cNvPr id="25" name="card-body">
             <a:extLst xmlns:a="http://schemas.openxmlformats.org/drawingml/2006/main">
               <a:ext uri="{FF2B5EF4-FFF2-40B4-BE49-F238E27FC236}">
-                <a16:creationId xmlns:a16="http://schemas.microsoft.com/office/drawing/2014/main" id="{CEC7BEC4-AD5D-48F1-881D-6485908B6849}"/>
+                <a16:creationId xmlns:a16="http://schemas.microsoft.com/office/drawing/2014/main" id="{08FE6522-3996-4CED-A168-0C67B05478D3}"/>
               </a:ext>
             </a:extLst>
           </p:cNvPr>
@@ -34707,7 +34914,7 @@
                 <a:ea typeface="Pretendard"/>
                 <a:cs typeface="Pretendard"/>
               </a:rPr>
-              <a:t>AI 결과를 사람이 검토할 기준을 말할 수 있어야</a:t>
+              <a:t>AI 결과를 사람이 검토할 기준을 말할 수</a:t>
             </a:r>
           </a:p>
           <a:p xmlns:a="http://schemas.openxmlformats.org/drawingml/2006/main">
@@ -34730,7 +34937,7 @@
                 <a:ea typeface="Pretendard"/>
                 <a:cs typeface="Pretendard"/>
               </a:rPr>
-              <a:t>합니다.</a:t>
+              <a:t>있어야 합니다.</a:t>
             </a:r>
           </a:p>
         </p:txBody>
@@ -34740,7 +34947,7 @@
           <p:cNvPr id="26" name="card-RULE 4">
             <a:extLst xmlns:a="http://schemas.openxmlformats.org/drawingml/2006/main">
               <a:ext uri="{FF2B5EF4-FFF2-40B4-BE49-F238E27FC236}">
-                <a16:creationId xmlns:a16="http://schemas.microsoft.com/office/drawing/2014/main" id="{35A6BA22-C18A-4A4D-AA9A-F5E9FEF43090}"/>
+                <a16:creationId xmlns:a16="http://schemas.microsoft.com/office/drawing/2014/main" id="{36E68183-6BD6-4FDE-B680-29480110E0AD}"/>
               </a:ext>
             </a:extLst>
           </p:cNvPr>
@@ -34781,7 +34988,7 @@
           <p:cNvPr id="27" name="card-accent">
             <a:extLst xmlns:a="http://schemas.openxmlformats.org/drawingml/2006/main">
               <a:ext uri="{FF2B5EF4-FFF2-40B4-BE49-F238E27FC236}">
-                <a16:creationId xmlns:a16="http://schemas.microsoft.com/office/drawing/2014/main" id="{E982580E-24A1-4450-AF77-2A6B58899413}"/>
+                <a16:creationId xmlns:a16="http://schemas.microsoft.com/office/drawing/2014/main" id="{FE872114-FDAE-4106-93EB-FC1DD1B189E9}"/>
               </a:ext>
             </a:extLst>
           </p:cNvPr>
@@ -34812,7 +35019,7 @@
           <p:cNvPr id="28" name="card-label">
             <a:extLst xmlns:a="http://schemas.openxmlformats.org/drawingml/2006/main">
               <a:ext uri="{FF2B5EF4-FFF2-40B4-BE49-F238E27FC236}">
-                <a16:creationId xmlns:a16="http://schemas.microsoft.com/office/drawing/2014/main" id="{28BC0BD4-F7C5-4DC4-A63C-480D1423D71B}"/>
+                <a16:creationId xmlns:a16="http://schemas.microsoft.com/office/drawing/2014/main" id="{3FEEC8C3-F72C-4DF7-9177-C48ABAB5A7C0}"/>
               </a:ext>
             </a:extLst>
           </p:cNvPr>
@@ -34868,7 +35075,7 @@
           <p:cNvPr id="29" name="card-title">
             <a:extLst xmlns:a="http://schemas.openxmlformats.org/drawingml/2006/main">
               <a:ext uri="{FF2B5EF4-FFF2-40B4-BE49-F238E27FC236}">
-                <a16:creationId xmlns:a16="http://schemas.microsoft.com/office/drawing/2014/main" id="{877CBF74-4C73-4D77-AF24-365832A59956}"/>
+                <a16:creationId xmlns:a16="http://schemas.microsoft.com/office/drawing/2014/main" id="{A4F7DE0C-961A-456C-B6BC-11E6D96CBB7B}"/>
               </a:ext>
             </a:extLst>
           </p:cNvPr>
@@ -34924,7 +35131,7 @@
           <p:cNvPr id="30" name="card-body">
             <a:extLst xmlns:a="http://schemas.openxmlformats.org/drawingml/2006/main">
               <a:ext uri="{FF2B5EF4-FFF2-40B4-BE49-F238E27FC236}">
-                <a16:creationId xmlns:a16="http://schemas.microsoft.com/office/drawing/2014/main" id="{68754749-F7F7-4F33-83E0-7AF07A96C78C}"/>
+                <a16:creationId xmlns:a16="http://schemas.microsoft.com/office/drawing/2014/main" id="{99ADAA2B-6B1C-4A7F-9A60-D712E073FDDC}"/>
               </a:ext>
             </a:extLst>
           </p:cNvPr>
@@ -34970,7 +35177,7 @@
                 <a:ea typeface="Pretendard"/>
                 <a:cs typeface="Pretendard"/>
               </a:rPr>
-              <a:t>화면, Agent 흐름, 자동화 초안 중 하나를</a:t>
+              <a:t>화면, Agent 흐름, 자동화 초안 중</a:t>
             </a:r>
           </a:p>
           <a:p xmlns:a="http://schemas.openxmlformats.org/drawingml/2006/main">
@@ -34993,7 +35200,7 @@
                 <a:ea typeface="Pretendard"/>
                 <a:cs typeface="Pretendard"/>
               </a:rPr>
-              <a:t>시연합니다.</a:t>
+              <a:t>하나를 시연합니다.</a:t>
             </a:r>
           </a:p>
         </p:txBody>
@@ -35003,7 +35210,7 @@
           <p:cNvPr id="31" name="card-RULE 5">
             <a:extLst xmlns:a="http://schemas.openxmlformats.org/drawingml/2006/main">
               <a:ext uri="{FF2B5EF4-FFF2-40B4-BE49-F238E27FC236}">
-                <a16:creationId xmlns:a16="http://schemas.microsoft.com/office/drawing/2014/main" id="{FF9FC3CC-DE76-48BC-B13C-1C9AB82F343C}"/>
+                <a16:creationId xmlns:a16="http://schemas.microsoft.com/office/drawing/2014/main" id="{28F98E75-1311-4564-83F4-870A0656D858}"/>
               </a:ext>
             </a:extLst>
           </p:cNvPr>
@@ -35044,7 +35251,7 @@
           <p:cNvPr id="32" name="card-accent">
             <a:extLst xmlns:a="http://schemas.openxmlformats.org/drawingml/2006/main">
               <a:ext uri="{FF2B5EF4-FFF2-40B4-BE49-F238E27FC236}">
-                <a16:creationId xmlns:a16="http://schemas.microsoft.com/office/drawing/2014/main" id="{C58022B2-A892-4630-8C18-BD637FF6D315}"/>
+                <a16:creationId xmlns:a16="http://schemas.microsoft.com/office/drawing/2014/main" id="{6279E25F-8869-4825-9733-44A9C7595721}"/>
               </a:ext>
             </a:extLst>
           </p:cNvPr>
@@ -35075,7 +35282,7 @@
           <p:cNvPr id="33" name="card-label">
             <a:extLst xmlns:a="http://schemas.openxmlformats.org/drawingml/2006/main">
               <a:ext uri="{FF2B5EF4-FFF2-40B4-BE49-F238E27FC236}">
-                <a16:creationId xmlns:a16="http://schemas.microsoft.com/office/drawing/2014/main" id="{47916F9C-7DF3-44D8-A08D-6F828C941D64}"/>
+                <a16:creationId xmlns:a16="http://schemas.microsoft.com/office/drawing/2014/main" id="{F9B0FCA4-775C-4F44-8EF9-03A1F995FBA8}"/>
               </a:ext>
             </a:extLst>
           </p:cNvPr>
@@ -35131,7 +35338,7 @@
           <p:cNvPr id="34" name="card-title">
             <a:extLst xmlns:a="http://schemas.openxmlformats.org/drawingml/2006/main">
               <a:ext uri="{FF2B5EF4-FFF2-40B4-BE49-F238E27FC236}">
-                <a16:creationId xmlns:a16="http://schemas.microsoft.com/office/drawing/2014/main" id="{C20F4DBE-B365-463A-9F22-E6A9A0492674}"/>
+                <a16:creationId xmlns:a16="http://schemas.microsoft.com/office/drawing/2014/main" id="{EFD3A6A9-CEE1-491A-BD0C-6480587F8087}"/>
               </a:ext>
             </a:extLst>
           </p:cNvPr>
@@ -35187,7 +35394,7 @@
           <p:cNvPr id="35" name="card-body">
             <a:extLst xmlns:a="http://schemas.openxmlformats.org/drawingml/2006/main">
               <a:ext uri="{FF2B5EF4-FFF2-40B4-BE49-F238E27FC236}">
-                <a16:creationId xmlns:a16="http://schemas.microsoft.com/office/drawing/2014/main" id="{66295D5F-A0F3-4787-B3A0-0EAB3C732C19}"/>
+                <a16:creationId xmlns:a16="http://schemas.microsoft.com/office/drawing/2014/main" id="{3F8D8392-D17D-4C08-9CE1-05F8F2BC81D4}"/>
               </a:ext>
             </a:extLst>
           </p:cNvPr>
@@ -35233,7 +35440,7 @@
                 <a:ea typeface="Pretendard"/>
                 <a:cs typeface="Pretendard"/>
               </a:rPr>
-              <a:t>민감정보, 운영 로그, 접근키, 고객 개인정보는 쓰지</a:t>
+              <a:t>민감정보, 운영 로그, 접근키, 고객</a:t>
             </a:r>
           </a:p>
           <a:p xmlns:a="http://schemas.openxmlformats.org/drawingml/2006/main">
@@ -35256,7 +35463,7 @@
                 <a:ea typeface="Pretendard"/>
                 <a:cs typeface="Pretendard"/>
               </a:rPr>
-              <a:t>않습니다.</a:t>
+              <a:t>개인정보는 쓰지 않습니다.</a:t>
             </a:r>
           </a:p>
         </p:txBody>
@@ -35266,7 +35473,7 @@
           <p:cNvPr id="36" name="card-RULE 6">
             <a:extLst xmlns:a="http://schemas.openxmlformats.org/drawingml/2006/main">
               <a:ext uri="{FF2B5EF4-FFF2-40B4-BE49-F238E27FC236}">
-                <a16:creationId xmlns:a16="http://schemas.microsoft.com/office/drawing/2014/main" id="{962575CB-ED84-4894-B8C4-D1E5B4948F47}"/>
+                <a16:creationId xmlns:a16="http://schemas.microsoft.com/office/drawing/2014/main" id="{40DBD9EF-7297-4972-BA3A-E3959554CF7A}"/>
               </a:ext>
             </a:extLst>
           </p:cNvPr>
@@ -35307,7 +35514,7 @@
           <p:cNvPr id="37" name="card-accent">
             <a:extLst xmlns:a="http://schemas.openxmlformats.org/drawingml/2006/main">
               <a:ext uri="{FF2B5EF4-FFF2-40B4-BE49-F238E27FC236}">
-                <a16:creationId xmlns:a16="http://schemas.microsoft.com/office/drawing/2014/main" id="{A73AEB96-1662-4A9D-8524-9A8ECBA44F16}"/>
+                <a16:creationId xmlns:a16="http://schemas.microsoft.com/office/drawing/2014/main" id="{DF8CD7A5-2CEF-4E3C-B060-938B46EE4BD0}"/>
               </a:ext>
             </a:extLst>
           </p:cNvPr>
@@ -35338,7 +35545,7 @@
           <p:cNvPr id="38" name="card-label">
             <a:extLst xmlns:a="http://schemas.openxmlformats.org/drawingml/2006/main">
               <a:ext uri="{FF2B5EF4-FFF2-40B4-BE49-F238E27FC236}">
-                <a16:creationId xmlns:a16="http://schemas.microsoft.com/office/drawing/2014/main" id="{8047DBA5-E0B9-4D53-B0FE-135B539F2EB4}"/>
+                <a16:creationId xmlns:a16="http://schemas.microsoft.com/office/drawing/2014/main" id="{4F595E81-4141-425F-BDE3-A77342B10F36}"/>
               </a:ext>
             </a:extLst>
           </p:cNvPr>
@@ -35394,7 +35601,7 @@
           <p:cNvPr id="39" name="card-title">
             <a:extLst xmlns:a="http://schemas.openxmlformats.org/drawingml/2006/main">
               <a:ext uri="{FF2B5EF4-FFF2-40B4-BE49-F238E27FC236}">
-                <a16:creationId xmlns:a16="http://schemas.microsoft.com/office/drawing/2014/main" id="{9A44BFE4-5648-4B33-9215-2C0CA9A0E3A9}"/>
+                <a16:creationId xmlns:a16="http://schemas.microsoft.com/office/drawing/2014/main" id="{D9C71070-1B84-4124-BF8A-A31549884ED2}"/>
               </a:ext>
             </a:extLst>
           </p:cNvPr>
@@ -35450,7 +35657,7 @@
           <p:cNvPr id="40" name="card-body">
             <a:extLst xmlns:a="http://schemas.openxmlformats.org/drawingml/2006/main">
               <a:ext uri="{FF2B5EF4-FFF2-40B4-BE49-F238E27FC236}">
-                <a16:creationId xmlns:a16="http://schemas.microsoft.com/office/drawing/2014/main" id="{4E98613D-73B6-451D-9732-5A99CCDADD91}"/>
+                <a16:creationId xmlns:a16="http://schemas.microsoft.com/office/drawing/2014/main" id="{46B6336B-4F22-4979-A456-0B982B096E43}"/>
               </a:ext>
             </a:extLst>
           </p:cNvPr>
@@ -35527,7 +35734,7 @@
     </p:spTree>
     <p:extLst>
       <p:ext uri="{BB962C8B-B14F-4D97-AF65-F5344CB8AC3E}">
-        <p14:creationId xmlns:p14="http://schemas.microsoft.com/office/powerpoint/2010/main" val="38177052"/>
+        <p14:creationId xmlns:p14="http://schemas.microsoft.com/office/powerpoint/2010/main" val="14164107"/>
       </p:ext>
     </p:extLst>
   </p:cSld>
@@ -35558,7 +35765,7 @@
           <p:cNvPr id="1" name="decor-ring-1">
             <a:extLst xmlns:a="http://schemas.openxmlformats.org/drawingml/2006/main">
               <a:ext uri="{FF2B5EF4-FFF2-40B4-BE49-F238E27FC236}">
-                <a16:creationId xmlns:a16="http://schemas.microsoft.com/office/drawing/2014/main" id="{98261B6A-E4A4-49E4-9EFB-C5FA26156158}"/>
+                <a16:creationId xmlns:a16="http://schemas.microsoft.com/office/drawing/2014/main" id="{F647E7CB-8465-4054-A21F-8E5F2298B9BE}"/>
               </a:ext>
             </a:extLst>
           </p:cNvPr>
@@ -35589,7 +35796,7 @@
           <p:cNvPr id="2" name="decor-ring-2">
             <a:extLst xmlns:a="http://schemas.openxmlformats.org/drawingml/2006/main">
               <a:ext uri="{FF2B5EF4-FFF2-40B4-BE49-F238E27FC236}">
-                <a16:creationId xmlns:a16="http://schemas.microsoft.com/office/drawing/2014/main" id="{085A9B72-938A-4ACD-AFBA-3E846803A478}"/>
+                <a16:creationId xmlns:a16="http://schemas.microsoft.com/office/drawing/2014/main" id="{50236CB7-970F-4346-9D2F-15A6444A821E}"/>
               </a:ext>
             </a:extLst>
           </p:cNvPr>
@@ -35620,7 +35827,7 @@
           <p:cNvPr id="3" name="decor-orb-1">
             <a:extLst xmlns:a="http://schemas.openxmlformats.org/drawingml/2006/main">
               <a:ext uri="{FF2B5EF4-FFF2-40B4-BE49-F238E27FC236}">
-                <a16:creationId xmlns:a16="http://schemas.microsoft.com/office/drawing/2014/main" id="{4929B0D2-84F3-4790-9980-96B8A31AEF76}"/>
+                <a16:creationId xmlns:a16="http://schemas.microsoft.com/office/drawing/2014/main" id="{93C18B34-5644-4C9D-85D1-1A229E6ECA6F}"/>
               </a:ext>
             </a:extLst>
           </p:cNvPr>
@@ -35651,7 +35858,7 @@
           <p:cNvPr id="4" name="decor-orb-2">
             <a:extLst xmlns:a="http://schemas.openxmlformats.org/drawingml/2006/main">
               <a:ext uri="{FF2B5EF4-FFF2-40B4-BE49-F238E27FC236}">
-                <a16:creationId xmlns:a16="http://schemas.microsoft.com/office/drawing/2014/main" id="{C9348C71-3BE0-44C6-9940-3F26A984CC32}"/>
+                <a16:creationId xmlns:a16="http://schemas.microsoft.com/office/drawing/2014/main" id="{B25E66A4-5922-4A6F-873E-AD1CA869BB01}"/>
               </a:ext>
             </a:extLst>
           </p:cNvPr>
@@ -35682,7 +35889,7 @@
           <p:cNvPr id="5" name="title-bar">
             <a:extLst xmlns:a="http://schemas.openxmlformats.org/drawingml/2006/main">
               <a:ext uri="{FF2B5EF4-FFF2-40B4-BE49-F238E27FC236}">
-                <a16:creationId xmlns:a16="http://schemas.microsoft.com/office/drawing/2014/main" id="{BFA1696E-6506-45A5-B4DA-F7B8B7AA859F}"/>
+                <a16:creationId xmlns:a16="http://schemas.microsoft.com/office/drawing/2014/main" id="{0DEBF4EF-C2F9-4B81-86D8-CC53C3981029}"/>
               </a:ext>
             </a:extLst>
           </p:cNvPr>
@@ -35713,7 +35920,7 @@
           <p:cNvPr id="6" name="kicker">
             <a:extLst xmlns:a="http://schemas.openxmlformats.org/drawingml/2006/main">
               <a:ext uri="{FF2B5EF4-FFF2-40B4-BE49-F238E27FC236}">
-                <a16:creationId xmlns:a16="http://schemas.microsoft.com/office/drawing/2014/main" id="{DAD392F7-6CDD-4D5D-98B9-3972B02A2077}"/>
+                <a16:creationId xmlns:a16="http://schemas.microsoft.com/office/drawing/2014/main" id="{8FA69D31-4AB7-40AF-A701-7AC0FD09F8BA}"/>
               </a:ext>
             </a:extLst>
           </p:cNvPr>
@@ -35769,7 +35976,7 @@
           <p:cNvPr id="7" name="title">
             <a:extLst xmlns:a="http://schemas.openxmlformats.org/drawingml/2006/main">
               <a:ext uri="{FF2B5EF4-FFF2-40B4-BE49-F238E27FC236}">
-                <a16:creationId xmlns:a16="http://schemas.microsoft.com/office/drawing/2014/main" id="{EAB39A4B-221D-42CB-8B1A-F627D780E6D8}"/>
+                <a16:creationId xmlns:a16="http://schemas.microsoft.com/office/drawing/2014/main" id="{7569BACF-D3EF-42C6-86F6-AA042C87C690}"/>
               </a:ext>
             </a:extLst>
           </p:cNvPr>
@@ -35825,7 +36032,7 @@
           <p:cNvPr id="8" name="subtitle">
             <a:extLst xmlns:a="http://schemas.openxmlformats.org/drawingml/2006/main">
               <a:ext uri="{FF2B5EF4-FFF2-40B4-BE49-F238E27FC236}">
-                <a16:creationId xmlns:a16="http://schemas.microsoft.com/office/drawing/2014/main" id="{DCA1DBF3-CAAA-4C39-9422-F587F67C2D07}"/>
+                <a16:creationId xmlns:a16="http://schemas.microsoft.com/office/drawing/2014/main" id="{53A93FE6-63DD-4126-86FF-E56392EC6925}"/>
               </a:ext>
             </a:extLst>
           </p:cNvPr>
@@ -35885,7 +36092,7 @@
           <p:nvPr/>
         </p:nvPicPr>
         <p:blipFill>
-          <a:blip xmlns:r="http://schemas.openxmlformats.org/officeDocument/2006/relationships" xmlns:a="http://schemas.openxmlformats.org/drawingml/2006/main" r:embed="Rf9ee77b81a054869"/>
+          <a:blip xmlns:r="http://schemas.openxmlformats.org/officeDocument/2006/relationships" xmlns:a="http://schemas.openxmlformats.org/drawingml/2006/main" r:embed="R93da94c394124499"/>
           <a:stretch xmlns:a="http://schemas.openxmlformats.org/drawingml/2006/main"/>
         </p:blipFill>
         <p:spPr>
@@ -35903,7 +36110,7 @@
           <p:cNvPr id="10" name="footer-number">
             <a:extLst xmlns:a="http://schemas.openxmlformats.org/drawingml/2006/main">
               <a:ext uri="{FF2B5EF4-FFF2-40B4-BE49-F238E27FC236}">
-                <a16:creationId xmlns:a16="http://schemas.microsoft.com/office/drawing/2014/main" id="{4C128FF0-773A-4A10-A3D7-D8C52C2F5E86}"/>
+                <a16:creationId xmlns:a16="http://schemas.microsoft.com/office/drawing/2014/main" id="{93EA280D-8A4A-4B79-B457-2D8EAF353257}"/>
               </a:ext>
             </a:extLst>
           </p:cNvPr>
@@ -35959,7 +36166,7 @@
           <p:cNvPr id="11" name="role-card">
             <a:extLst xmlns:a="http://schemas.openxmlformats.org/drawingml/2006/main">
               <a:ext uri="{FF2B5EF4-FFF2-40B4-BE49-F238E27FC236}">
-                <a16:creationId xmlns:a16="http://schemas.microsoft.com/office/drawing/2014/main" id="{630EC236-FBE9-42A0-A893-8FFEA27E65AA}"/>
+                <a16:creationId xmlns:a16="http://schemas.microsoft.com/office/drawing/2014/main" id="{BA147302-2F10-4A0E-9C69-E0170818BECD}"/>
               </a:ext>
             </a:extLst>
           </p:cNvPr>
@@ -35992,7 +36199,7 @@
           <p:cNvPr id="12" name="role-accent">
             <a:extLst xmlns:a="http://schemas.openxmlformats.org/drawingml/2006/main">
               <a:ext uri="{FF2B5EF4-FFF2-40B4-BE49-F238E27FC236}">
-                <a16:creationId xmlns:a16="http://schemas.microsoft.com/office/drawing/2014/main" id="{898B808D-3171-4E55-B7E2-E2FDD069A2FC}"/>
+                <a16:creationId xmlns:a16="http://schemas.microsoft.com/office/drawing/2014/main" id="{ABF4788D-9AFD-47F1-8267-E847ACAF4AAC}"/>
               </a:ext>
             </a:extLst>
           </p:cNvPr>
@@ -36023,7 +36230,7 @@
           <p:cNvPr id="13" name="role-title">
             <a:extLst xmlns:a="http://schemas.openxmlformats.org/drawingml/2006/main">
               <a:ext uri="{FF2B5EF4-FFF2-40B4-BE49-F238E27FC236}">
-                <a16:creationId xmlns:a16="http://schemas.microsoft.com/office/drawing/2014/main" id="{0ED2E3A8-4BA7-46DC-90E3-3303691563C6}"/>
+                <a16:creationId xmlns:a16="http://schemas.microsoft.com/office/drawing/2014/main" id="{E21B1BDB-3FD3-43A6-86B3-CD8C16575794}"/>
               </a:ext>
             </a:extLst>
           </p:cNvPr>
@@ -36079,7 +36286,7 @@
           <p:cNvPr id="14" name="role-body">
             <a:extLst xmlns:a="http://schemas.openxmlformats.org/drawingml/2006/main">
               <a:ext uri="{FF2B5EF4-FFF2-40B4-BE49-F238E27FC236}">
-                <a16:creationId xmlns:a16="http://schemas.microsoft.com/office/drawing/2014/main" id="{21D7C19A-C53B-474D-9220-D15E7D824A20}"/>
+                <a16:creationId xmlns:a16="http://schemas.microsoft.com/office/drawing/2014/main" id="{6A138652-1C86-44FB-9824-BDFCC8CB1A7C}"/>
               </a:ext>
             </a:extLst>
           </p:cNvPr>
@@ -36125,7 +36332,7 @@
                 <a:ea typeface="Pretendard"/>
                 <a:cs typeface="Pretendard"/>
               </a:rPr>
-              <a:t>현재 업무 흐름, 병목, 성공 기준, 실제</a:t>
+              <a:t>현재 업무 흐름, 병목, 성공 기준,</a:t>
             </a:r>
           </a:p>
           <a:p xmlns:a="http://schemas.openxmlformats.org/drawingml/2006/main">
@@ -36148,7 +36355,7 @@
                 <a:ea typeface="Pretendard"/>
                 <a:cs typeface="Pretendard"/>
               </a:rPr>
-              <a:t>사용자를 설명합니다.</a:t>
+              <a:t>실제 사용자를 설명합니다.</a:t>
             </a:r>
           </a:p>
         </p:txBody>
@@ -36158,7 +36365,7 @@
           <p:cNvPr id="15" name="role-question">
             <a:extLst xmlns:a="http://schemas.openxmlformats.org/drawingml/2006/main">
               <a:ext uri="{FF2B5EF4-FFF2-40B4-BE49-F238E27FC236}">
-                <a16:creationId xmlns:a16="http://schemas.microsoft.com/office/drawing/2014/main" id="{6F58FB71-BF1D-403A-B18C-3F249069495D}"/>
+                <a16:creationId xmlns:a16="http://schemas.microsoft.com/office/drawing/2014/main" id="{C57008E3-E75F-4416-B632-A2F0FFF959FB}"/>
               </a:ext>
             </a:extLst>
           </p:cNvPr>
@@ -36214,7 +36421,7 @@
           <p:cNvPr id="16" name="role-card">
             <a:extLst xmlns:a="http://schemas.openxmlformats.org/drawingml/2006/main">
               <a:ext uri="{FF2B5EF4-FFF2-40B4-BE49-F238E27FC236}">
-                <a16:creationId xmlns:a16="http://schemas.microsoft.com/office/drawing/2014/main" id="{2B4039B4-18EB-4670-A817-5F61D98B6D3F}"/>
+                <a16:creationId xmlns:a16="http://schemas.microsoft.com/office/drawing/2014/main" id="{ED246515-FB24-434C-A9BD-9D2F48ADCE3D}"/>
               </a:ext>
             </a:extLst>
           </p:cNvPr>
@@ -36247,7 +36454,7 @@
           <p:cNvPr id="17" name="role-accent">
             <a:extLst xmlns:a="http://schemas.openxmlformats.org/drawingml/2006/main">
               <a:ext uri="{FF2B5EF4-FFF2-40B4-BE49-F238E27FC236}">
-                <a16:creationId xmlns:a16="http://schemas.microsoft.com/office/drawing/2014/main" id="{ED592883-A4EE-4086-9D9F-051EAFF34D76}"/>
+                <a16:creationId xmlns:a16="http://schemas.microsoft.com/office/drawing/2014/main" id="{5DA9040C-654D-4340-9D95-A45CBC3C40E2}"/>
               </a:ext>
             </a:extLst>
           </p:cNvPr>
@@ -36278,7 +36485,7 @@
           <p:cNvPr id="18" name="role-title">
             <a:extLst xmlns:a="http://schemas.openxmlformats.org/drawingml/2006/main">
               <a:ext uri="{FF2B5EF4-FFF2-40B4-BE49-F238E27FC236}">
-                <a16:creationId xmlns:a16="http://schemas.microsoft.com/office/drawing/2014/main" id="{19983F67-9A83-445A-9CBC-77EEE7F8FBF9}"/>
+                <a16:creationId xmlns:a16="http://schemas.microsoft.com/office/drawing/2014/main" id="{10AE1F38-C3E5-4B38-994D-A9414E4EEB92}"/>
               </a:ext>
             </a:extLst>
           </p:cNvPr>
@@ -36334,7 +36541,7 @@
           <p:cNvPr id="19" name="role-body">
             <a:extLst xmlns:a="http://schemas.openxmlformats.org/drawingml/2006/main">
               <a:ext uri="{FF2B5EF4-FFF2-40B4-BE49-F238E27FC236}">
-                <a16:creationId xmlns:a16="http://schemas.microsoft.com/office/drawing/2014/main" id="{A29D7B6C-AF25-46DD-BB98-A6D40C68AA43}"/>
+                <a16:creationId xmlns:a16="http://schemas.microsoft.com/office/drawing/2014/main" id="{DC33916B-97FA-47D5-AB4A-268D858FF848}"/>
               </a:ext>
             </a:extLst>
           </p:cNvPr>
@@ -36380,7 +36587,7 @@
                 <a:ea typeface="Pretendard"/>
                 <a:cs typeface="Pretendard"/>
               </a:rPr>
-              <a:t>스파로스 데브엑스에서 Prompt, Context,</a:t>
+              <a:t>스파로스 데브엑스에서 Prompt,</a:t>
             </a:r>
           </a:p>
           <a:p xmlns:a="http://schemas.openxmlformats.org/drawingml/2006/main">
@@ -36403,7 +36610,30 @@
                 <a:ea typeface="Pretendard"/>
                 <a:cs typeface="Pretendard"/>
               </a:rPr>
-              <a:t>Agent 흐름, 화면 초안을 만듭니다.</a:t>
+              <a:t>Context, Agent 흐름, 화면</a:t>
+            </a:r>
+          </a:p>
+          <a:p xmlns:a="http://schemas.openxmlformats.org/drawingml/2006/main">
+            <a:pPr algn="l">
+              <a:defRPr sz="1425" b="0">
+                <a:solidFill>
+                  <a:srgbClr val="4B5563"/>
+                </a:solidFill>
+                <a:latin typeface="Pretendard"/>
+                <a:ea typeface="Pretendard"/>
+                <a:cs typeface="Pretendard"/>
+              </a:defRPr>
+            </a:pPr>
+            <a:r>
+              <a:rPr sz="1425" b="0">
+                <a:solidFill>
+                  <a:srgbClr val="4B5563"/>
+                </a:solidFill>
+                <a:latin typeface="Pretendard"/>
+                <a:ea typeface="Pretendard"/>
+                <a:cs typeface="Pretendard"/>
+              </a:rPr>
+              <a:t>초안을 만듭니다.</a:t>
             </a:r>
           </a:p>
         </p:txBody>
@@ -36413,7 +36643,7 @@
           <p:cNvPr id="20" name="role-question">
             <a:extLst xmlns:a="http://schemas.openxmlformats.org/drawingml/2006/main">
               <a:ext uri="{FF2B5EF4-FFF2-40B4-BE49-F238E27FC236}">
-                <a16:creationId xmlns:a16="http://schemas.microsoft.com/office/drawing/2014/main" id="{7D9C05D4-A867-4A77-AD40-71243150EBBB}"/>
+                <a16:creationId xmlns:a16="http://schemas.microsoft.com/office/drawing/2014/main" id="{89006535-B6CA-4F88-8961-AE43AED898D0}"/>
               </a:ext>
             </a:extLst>
           </p:cNvPr>
@@ -36459,7 +36689,30 @@
                 <a:ea typeface="Pretendard"/>
                 <a:cs typeface="Pretendard"/>
               </a:rPr>
-              <a:t>질문: 8시간 안에 무엇을 시연할 수 있는가?</a:t>
+              <a:t>질문: 8시간 안에 무엇을 시연할</a:t>
+            </a:r>
+          </a:p>
+          <a:p xmlns:a="http://schemas.openxmlformats.org/drawingml/2006/main">
+            <a:pPr algn="l">
+              <a:defRPr sz="1350" b="1">
+                <a:solidFill>
+                  <a:srgbClr val="2F80ED"/>
+                </a:solidFill>
+                <a:latin typeface="Pretendard"/>
+                <a:ea typeface="Pretendard"/>
+                <a:cs typeface="Pretendard"/>
+              </a:defRPr>
+            </a:pPr>
+            <a:r>
+              <a:rPr sz="1350" b="1">
+                <a:solidFill>
+                  <a:srgbClr val="2F80ED"/>
+                </a:solidFill>
+                <a:latin typeface="Pretendard"/>
+                <a:ea typeface="Pretendard"/>
+                <a:cs typeface="Pretendard"/>
+              </a:rPr>
+              <a:t>수 있는가?</a:t>
             </a:r>
           </a:p>
         </p:txBody>
@@ -36469,7 +36722,7 @@
           <p:cNvPr id="21" name="role-card">
             <a:extLst xmlns:a="http://schemas.openxmlformats.org/drawingml/2006/main">
               <a:ext uri="{FF2B5EF4-FFF2-40B4-BE49-F238E27FC236}">
-                <a16:creationId xmlns:a16="http://schemas.microsoft.com/office/drawing/2014/main" id="{73486BF5-875D-4A59-8C42-98AC762CEDD7}"/>
+                <a16:creationId xmlns:a16="http://schemas.microsoft.com/office/drawing/2014/main" id="{867296F5-7D3D-4F5F-BB75-DBEE008965C8}"/>
               </a:ext>
             </a:extLst>
           </p:cNvPr>
@@ -36502,7 +36755,7 @@
           <p:cNvPr id="22" name="role-accent">
             <a:extLst xmlns:a="http://schemas.openxmlformats.org/drawingml/2006/main">
               <a:ext uri="{FF2B5EF4-FFF2-40B4-BE49-F238E27FC236}">
-                <a16:creationId xmlns:a16="http://schemas.microsoft.com/office/drawing/2014/main" id="{E7EB74C3-34E1-4D5B-B5A3-364FF408051A}"/>
+                <a16:creationId xmlns:a16="http://schemas.microsoft.com/office/drawing/2014/main" id="{28958143-9463-4793-B9D6-17667E9B98AC}"/>
               </a:ext>
             </a:extLst>
           </p:cNvPr>
@@ -36533,7 +36786,7 @@
           <p:cNvPr id="23" name="role-title">
             <a:extLst xmlns:a="http://schemas.openxmlformats.org/drawingml/2006/main">
               <a:ext uri="{FF2B5EF4-FFF2-40B4-BE49-F238E27FC236}">
-                <a16:creationId xmlns:a16="http://schemas.microsoft.com/office/drawing/2014/main" id="{86B4B037-D215-41B3-9667-C971F41F1AAA}"/>
+                <a16:creationId xmlns:a16="http://schemas.microsoft.com/office/drawing/2014/main" id="{368B9D8E-8A19-41E0-91DA-91F98DF61172}"/>
               </a:ext>
             </a:extLst>
           </p:cNvPr>
@@ -36589,7 +36842,7 @@
           <p:cNvPr id="24" name="role-body">
             <a:extLst xmlns:a="http://schemas.openxmlformats.org/drawingml/2006/main">
               <a:ext uri="{FF2B5EF4-FFF2-40B4-BE49-F238E27FC236}">
-                <a16:creationId xmlns:a16="http://schemas.microsoft.com/office/drawing/2014/main" id="{376FF4BA-AA47-4696-8F35-E66B25C437B9}"/>
+                <a16:creationId xmlns:a16="http://schemas.microsoft.com/office/drawing/2014/main" id="{67FC94AA-BD48-49EE-9B9F-BDCD70907460}"/>
               </a:ext>
             </a:extLst>
           </p:cNvPr>
@@ -36635,7 +36888,7 @@
                 <a:ea typeface="Pretendard"/>
                 <a:cs typeface="Pretendard"/>
               </a:rPr>
-              <a:t>샘플 자료, 금지사항, 품질 기준, 발표</a:t>
+              <a:t>샘플 자료, 금지사항, 품질 기준,</a:t>
             </a:r>
           </a:p>
           <a:p xmlns:a="http://schemas.openxmlformats.org/drawingml/2006/main">
@@ -36658,7 +36911,7 @@
                 <a:ea typeface="Pretendard"/>
                 <a:cs typeface="Pretendard"/>
               </a:rPr>
-              <a:t>흐름을 정리합니다.</a:t>
+              <a:t>발표 흐름을 정리합니다.</a:t>
             </a:r>
           </a:p>
         </p:txBody>
@@ -36668,7 +36921,7 @@
           <p:cNvPr id="25" name="role-question">
             <a:extLst xmlns:a="http://schemas.openxmlformats.org/drawingml/2006/main">
               <a:ext uri="{FF2B5EF4-FFF2-40B4-BE49-F238E27FC236}">
-                <a16:creationId xmlns:a16="http://schemas.microsoft.com/office/drawing/2014/main" id="{B29FD3FF-60E8-4E00-B81E-76A55B514362}"/>
+                <a16:creationId xmlns:a16="http://schemas.microsoft.com/office/drawing/2014/main" id="{CDDA9587-A834-4DF4-90B8-85027F2E2091}"/>
               </a:ext>
             </a:extLst>
           </p:cNvPr>
@@ -36714,7 +36967,30 @@
                 <a:ea typeface="Pretendard"/>
                 <a:cs typeface="Pretendard"/>
               </a:rPr>
-              <a:t>질문: 사람이 어디서 최종 판단해야 하는가?</a:t>
+              <a:t>질문: 사람이 어디서 최종</a:t>
+            </a:r>
+          </a:p>
+          <a:p xmlns:a="http://schemas.openxmlformats.org/drawingml/2006/main">
+            <a:pPr algn="l">
+              <a:defRPr sz="1350" b="1">
+                <a:solidFill>
+                  <a:srgbClr val="11A67A"/>
+                </a:solidFill>
+                <a:latin typeface="Pretendard"/>
+                <a:ea typeface="Pretendard"/>
+                <a:cs typeface="Pretendard"/>
+              </a:defRPr>
+            </a:pPr>
+            <a:r>
+              <a:rPr sz="1350" b="1">
+                <a:solidFill>
+                  <a:srgbClr val="11A67A"/>
+                </a:solidFill>
+                <a:latin typeface="Pretendard"/>
+                <a:ea typeface="Pretendard"/>
+                <a:cs typeface="Pretendard"/>
+              </a:rPr>
+              <a:t>판단해야 하는가?</a:t>
             </a:r>
           </a:p>
         </p:txBody>
@@ -36722,7 +36998,7 @@
     </p:spTree>
     <p:extLst>
       <p:ext uri="{BB962C8B-B14F-4D97-AF65-F5344CB8AC3E}">
-        <p14:creationId xmlns:p14="http://schemas.microsoft.com/office/powerpoint/2010/main" val="571584766"/>
+        <p14:creationId xmlns:p14="http://schemas.microsoft.com/office/powerpoint/2010/main" val="881871259"/>
       </p:ext>
     </p:extLst>
   </p:cSld>
@@ -36753,7 +37029,7 @@
           <p:cNvPr id="1" name="decor-ring-1">
             <a:extLst xmlns:a="http://schemas.openxmlformats.org/drawingml/2006/main">
               <a:ext uri="{FF2B5EF4-FFF2-40B4-BE49-F238E27FC236}">
-                <a16:creationId xmlns:a16="http://schemas.microsoft.com/office/drawing/2014/main" id="{A004708B-B36C-4AD4-992B-D86AB301BEAC}"/>
+                <a16:creationId xmlns:a16="http://schemas.microsoft.com/office/drawing/2014/main" id="{EC402615-F679-4539-9881-B9EC8530D0E3}"/>
               </a:ext>
             </a:extLst>
           </p:cNvPr>
@@ -36784,7 +37060,7 @@
           <p:cNvPr id="2" name="decor-ring-2">
             <a:extLst xmlns:a="http://schemas.openxmlformats.org/drawingml/2006/main">
               <a:ext uri="{FF2B5EF4-FFF2-40B4-BE49-F238E27FC236}">
-                <a16:creationId xmlns:a16="http://schemas.microsoft.com/office/drawing/2014/main" id="{97C2001C-BB30-485A-8FC9-B7265FE024C8}"/>
+                <a16:creationId xmlns:a16="http://schemas.microsoft.com/office/drawing/2014/main" id="{637AD369-158B-4EF4-8ED0-9DE45078609C}"/>
               </a:ext>
             </a:extLst>
           </p:cNvPr>
@@ -36815,7 +37091,7 @@
           <p:cNvPr id="3" name="decor-orb-1">
             <a:extLst xmlns:a="http://schemas.openxmlformats.org/drawingml/2006/main">
               <a:ext uri="{FF2B5EF4-FFF2-40B4-BE49-F238E27FC236}">
-                <a16:creationId xmlns:a16="http://schemas.microsoft.com/office/drawing/2014/main" id="{2ED60875-4F25-4C46-B611-56DC5C97319B}"/>
+                <a16:creationId xmlns:a16="http://schemas.microsoft.com/office/drawing/2014/main" id="{FC54BDE0-775B-448E-8DE1-80A4A59A513B}"/>
               </a:ext>
             </a:extLst>
           </p:cNvPr>
@@ -36846,7 +37122,7 @@
           <p:cNvPr id="4" name="decor-orb-2">
             <a:extLst xmlns:a="http://schemas.openxmlformats.org/drawingml/2006/main">
               <a:ext uri="{FF2B5EF4-FFF2-40B4-BE49-F238E27FC236}">
-                <a16:creationId xmlns:a16="http://schemas.microsoft.com/office/drawing/2014/main" id="{74DDE1DF-DC96-4042-9009-963574AA5CA7}"/>
+                <a16:creationId xmlns:a16="http://schemas.microsoft.com/office/drawing/2014/main" id="{742FE13C-9D34-4DE5-B487-377B5784FEFB}"/>
               </a:ext>
             </a:extLst>
           </p:cNvPr>
@@ -36877,7 +37153,7 @@
           <p:cNvPr id="5" name="title-bar">
             <a:extLst xmlns:a="http://schemas.openxmlformats.org/drawingml/2006/main">
               <a:ext uri="{FF2B5EF4-FFF2-40B4-BE49-F238E27FC236}">
-                <a16:creationId xmlns:a16="http://schemas.microsoft.com/office/drawing/2014/main" id="{6AB1DED6-9B1D-4AD7-B19F-FF5D9CC36339}"/>
+                <a16:creationId xmlns:a16="http://schemas.microsoft.com/office/drawing/2014/main" id="{01926C3D-1D5F-4503-B106-99F0FE25E066}"/>
               </a:ext>
             </a:extLst>
           </p:cNvPr>
@@ -36908,7 +37184,7 @@
           <p:cNvPr id="6" name="kicker">
             <a:extLst xmlns:a="http://schemas.openxmlformats.org/drawingml/2006/main">
               <a:ext uri="{FF2B5EF4-FFF2-40B4-BE49-F238E27FC236}">
-                <a16:creationId xmlns:a16="http://schemas.microsoft.com/office/drawing/2014/main" id="{67DDECB9-6502-4E05-9B5A-0E056CBB8142}"/>
+                <a16:creationId xmlns:a16="http://schemas.microsoft.com/office/drawing/2014/main" id="{EBD885EC-BCEF-41AF-AE10-7579913F4B05}"/>
               </a:ext>
             </a:extLst>
           </p:cNvPr>
@@ -36964,7 +37240,7 @@
           <p:cNvPr id="7" name="title">
             <a:extLst xmlns:a="http://schemas.openxmlformats.org/drawingml/2006/main">
               <a:ext uri="{FF2B5EF4-FFF2-40B4-BE49-F238E27FC236}">
-                <a16:creationId xmlns:a16="http://schemas.microsoft.com/office/drawing/2014/main" id="{8CD8234B-D595-4C16-A8AD-43F501C0B199}"/>
+                <a16:creationId xmlns:a16="http://schemas.microsoft.com/office/drawing/2014/main" id="{F7D3E7A1-6DA3-4937-B0CA-2326D5799082}"/>
               </a:ext>
             </a:extLst>
           </p:cNvPr>
@@ -37020,7 +37296,7 @@
           <p:cNvPr id="8" name="subtitle">
             <a:extLst xmlns:a="http://schemas.openxmlformats.org/drawingml/2006/main">
               <a:ext uri="{FF2B5EF4-FFF2-40B4-BE49-F238E27FC236}">
-                <a16:creationId xmlns:a16="http://schemas.microsoft.com/office/drawing/2014/main" id="{13A2E150-777C-4628-9A8D-533037EBD9D7}"/>
+                <a16:creationId xmlns:a16="http://schemas.microsoft.com/office/drawing/2014/main" id="{14367585-B920-47D2-976B-757B42661755}"/>
               </a:ext>
             </a:extLst>
           </p:cNvPr>
@@ -37080,7 +37356,7 @@
           <p:nvPr/>
         </p:nvPicPr>
         <p:blipFill>
-          <a:blip xmlns:r="http://schemas.openxmlformats.org/officeDocument/2006/relationships" xmlns:a="http://schemas.openxmlformats.org/drawingml/2006/main" r:embed="Rd9d805dc6ac7462d"/>
+          <a:blip xmlns:r="http://schemas.openxmlformats.org/officeDocument/2006/relationships" xmlns:a="http://schemas.openxmlformats.org/drawingml/2006/main" r:embed="R9e82ae0f85794cfe"/>
           <a:stretch xmlns:a="http://schemas.openxmlformats.org/drawingml/2006/main"/>
         </p:blipFill>
         <p:spPr>
@@ -37098,7 +37374,7 @@
           <p:cNvPr id="10" name="footer-number">
             <a:extLst xmlns:a="http://schemas.openxmlformats.org/drawingml/2006/main">
               <a:ext uri="{FF2B5EF4-FFF2-40B4-BE49-F238E27FC236}">
-                <a16:creationId xmlns:a16="http://schemas.microsoft.com/office/drawing/2014/main" id="{9A35D704-C942-443C-B758-64601BF662D6}"/>
+                <a16:creationId xmlns:a16="http://schemas.microsoft.com/office/drawing/2014/main" id="{8B014091-3682-475D-A605-8DE2DAAB1E77}"/>
               </a:ext>
             </a:extLst>
           </p:cNvPr>
@@ -37154,7 +37430,7 @@
           <p:cNvPr id="11" name="card-진행 방법">
             <a:extLst xmlns:a="http://schemas.openxmlformats.org/drawingml/2006/main">
               <a:ext uri="{FF2B5EF4-FFF2-40B4-BE49-F238E27FC236}">
-                <a16:creationId xmlns:a16="http://schemas.microsoft.com/office/drawing/2014/main" id="{6FE18745-4497-490B-9E5C-DE8F50E78FDF}"/>
+                <a16:creationId xmlns:a16="http://schemas.microsoft.com/office/drawing/2014/main" id="{5EA3FAD4-483B-457B-A537-56C1AA67D8BA}"/>
               </a:ext>
             </a:extLst>
           </p:cNvPr>
@@ -37195,7 +37471,7 @@
           <p:cNvPr id="12" name="card-accent">
             <a:extLst xmlns:a="http://schemas.openxmlformats.org/drawingml/2006/main">
               <a:ext uri="{FF2B5EF4-FFF2-40B4-BE49-F238E27FC236}">
-                <a16:creationId xmlns:a16="http://schemas.microsoft.com/office/drawing/2014/main" id="{A6E0A419-2922-4DC5-92AE-506C9696B961}"/>
+                <a16:creationId xmlns:a16="http://schemas.microsoft.com/office/drawing/2014/main" id="{608EC188-9C2E-4C7E-A056-3D0760F972B4}"/>
               </a:ext>
             </a:extLst>
           </p:cNvPr>
@@ -37226,7 +37502,7 @@
           <p:cNvPr id="13" name="card-label">
             <a:extLst xmlns:a="http://schemas.openxmlformats.org/drawingml/2006/main">
               <a:ext uri="{FF2B5EF4-FFF2-40B4-BE49-F238E27FC236}">
-                <a16:creationId xmlns:a16="http://schemas.microsoft.com/office/drawing/2014/main" id="{61F02C9B-1536-4A57-9D69-59414459E835}"/>
+                <a16:creationId xmlns:a16="http://schemas.microsoft.com/office/drawing/2014/main" id="{25B1FCF9-5B3D-44C0-AA86-054B26F87CC5}"/>
               </a:ext>
             </a:extLst>
           </p:cNvPr>
@@ -37282,7 +37558,7 @@
           <p:cNvPr id="14" name="card-title">
             <a:extLst xmlns:a="http://schemas.openxmlformats.org/drawingml/2006/main">
               <a:ext uri="{FF2B5EF4-FFF2-40B4-BE49-F238E27FC236}">
-                <a16:creationId xmlns:a16="http://schemas.microsoft.com/office/drawing/2014/main" id="{D4D62C29-A15A-40A2-A16B-5876B981B87D}"/>
+                <a16:creationId xmlns:a16="http://schemas.microsoft.com/office/drawing/2014/main" id="{FB1454DA-A89A-4CF5-A567-A683C6D28AF9}"/>
               </a:ext>
             </a:extLst>
           </p:cNvPr>
@@ -37338,7 +37614,7 @@
           <p:cNvPr id="15" name="card-body">
             <a:extLst xmlns:a="http://schemas.openxmlformats.org/drawingml/2006/main">
               <a:ext uri="{FF2B5EF4-FFF2-40B4-BE49-F238E27FC236}">
-                <a16:creationId xmlns:a16="http://schemas.microsoft.com/office/drawing/2014/main" id="{057BA42E-B211-47F6-B6AD-E26271455BE4}"/>
+                <a16:creationId xmlns:a16="http://schemas.microsoft.com/office/drawing/2014/main" id="{4CA32D42-BE1C-4C9F-B0A6-1F2B1F83B998}"/>
               </a:ext>
             </a:extLst>
           </p:cNvPr>
@@ -37384,7 +37660,7 @@
                 <a:ea typeface="Pretendard"/>
                 <a:cs typeface="Pretendard"/>
               </a:rPr>
-              <a:t>개인 작성 10분 → 옆 사람 공유 5분 → 가장</a:t>
+              <a:t>개인 작성 10분 → 옆 사람 공유 5분</a:t>
             </a:r>
           </a:p>
           <a:p xmlns:a="http://schemas.openxmlformats.org/drawingml/2006/main">
@@ -37407,7 +37683,7 @@
                 <a:ea typeface="Pretendard"/>
                 <a:cs typeface="Pretendard"/>
               </a:rPr>
-              <a:t>강한 후보 1개 표시 5분</a:t>
+              <a:t>→ 가장 강한 후보 1개 표시 5분</a:t>
             </a:r>
           </a:p>
         </p:txBody>
@@ -37417,7 +37693,7 @@
           <p:cNvPr id="16" name="card-결과물">
             <a:extLst xmlns:a="http://schemas.openxmlformats.org/drawingml/2006/main">
               <a:ext uri="{FF2B5EF4-FFF2-40B4-BE49-F238E27FC236}">
-                <a16:creationId xmlns:a16="http://schemas.microsoft.com/office/drawing/2014/main" id="{0BE34C6D-C857-4362-8AB2-EE698E09A647}"/>
+                <a16:creationId xmlns:a16="http://schemas.microsoft.com/office/drawing/2014/main" id="{90F3C196-3B46-4D53-BA8C-CDCE2CEFEB89}"/>
               </a:ext>
             </a:extLst>
           </p:cNvPr>
@@ -37458,7 +37734,7 @@
           <p:cNvPr id="17" name="card-accent">
             <a:extLst xmlns:a="http://schemas.openxmlformats.org/drawingml/2006/main">
               <a:ext uri="{FF2B5EF4-FFF2-40B4-BE49-F238E27FC236}">
-                <a16:creationId xmlns:a16="http://schemas.microsoft.com/office/drawing/2014/main" id="{FFC217C9-8247-46A1-B362-E5CE623F6D32}"/>
+                <a16:creationId xmlns:a16="http://schemas.microsoft.com/office/drawing/2014/main" id="{3EDB0735-EB08-4A8B-A7B0-C47BC41EC921}"/>
               </a:ext>
             </a:extLst>
           </p:cNvPr>
@@ -37489,7 +37765,7 @@
           <p:cNvPr id="18" name="card-label">
             <a:extLst xmlns:a="http://schemas.openxmlformats.org/drawingml/2006/main">
               <a:ext uri="{FF2B5EF4-FFF2-40B4-BE49-F238E27FC236}">
-                <a16:creationId xmlns:a16="http://schemas.microsoft.com/office/drawing/2014/main" id="{783FBD8D-800D-40A0-BD4C-A578CF8CCFC7}"/>
+                <a16:creationId xmlns:a16="http://schemas.microsoft.com/office/drawing/2014/main" id="{77CE22E2-CA79-432E-8068-CC48F87C2AFD}"/>
               </a:ext>
             </a:extLst>
           </p:cNvPr>
@@ -37545,7 +37821,7 @@
           <p:cNvPr id="19" name="card-title">
             <a:extLst xmlns:a="http://schemas.openxmlformats.org/drawingml/2006/main">
               <a:ext uri="{FF2B5EF4-FFF2-40B4-BE49-F238E27FC236}">
-                <a16:creationId xmlns:a16="http://schemas.microsoft.com/office/drawing/2014/main" id="{7660716F-C51D-413F-B9FC-286146659A0B}"/>
+                <a16:creationId xmlns:a16="http://schemas.microsoft.com/office/drawing/2014/main" id="{7FBFAC38-411E-4C95-8B0F-8238D80C73D9}"/>
               </a:ext>
             </a:extLst>
           </p:cNvPr>
@@ -37601,7 +37877,7 @@
           <p:cNvPr id="20" name="card-body">
             <a:extLst xmlns:a="http://schemas.openxmlformats.org/drawingml/2006/main">
               <a:ext uri="{FF2B5EF4-FFF2-40B4-BE49-F238E27FC236}">
-                <a16:creationId xmlns:a16="http://schemas.microsoft.com/office/drawing/2014/main" id="{4D5698F6-632F-4BC6-967B-70640F823687}"/>
+                <a16:creationId xmlns:a16="http://schemas.microsoft.com/office/drawing/2014/main" id="{60F88904-4941-441E-9DF6-B6880E2100C8}"/>
               </a:ext>
             </a:extLst>
           </p:cNvPr>
@@ -37657,7 +37933,7 @@
           <p:cNvPr id="21" name="card-운영 팁">
             <a:extLst xmlns:a="http://schemas.openxmlformats.org/drawingml/2006/main">
               <a:ext uri="{FF2B5EF4-FFF2-40B4-BE49-F238E27FC236}">
-                <a16:creationId xmlns:a16="http://schemas.microsoft.com/office/drawing/2014/main" id="{8C697B9C-152C-4B3D-A044-2F716924DD33}"/>
+                <a16:creationId xmlns:a16="http://schemas.microsoft.com/office/drawing/2014/main" id="{37E40AF7-B979-435F-BF1F-17FF28AFF976}"/>
               </a:ext>
             </a:extLst>
           </p:cNvPr>
@@ -37698,7 +37974,7 @@
           <p:cNvPr id="22" name="card-accent">
             <a:extLst xmlns:a="http://schemas.openxmlformats.org/drawingml/2006/main">
               <a:ext uri="{FF2B5EF4-FFF2-40B4-BE49-F238E27FC236}">
-                <a16:creationId xmlns:a16="http://schemas.microsoft.com/office/drawing/2014/main" id="{F2B2B418-34C8-468A-A26A-1EC40C212C3C}"/>
+                <a16:creationId xmlns:a16="http://schemas.microsoft.com/office/drawing/2014/main" id="{5242A243-71CB-47C3-86EF-7CC621F8A7F1}"/>
               </a:ext>
             </a:extLst>
           </p:cNvPr>
@@ -37729,7 +38005,7 @@
           <p:cNvPr id="23" name="card-label">
             <a:extLst xmlns:a="http://schemas.openxmlformats.org/drawingml/2006/main">
               <a:ext uri="{FF2B5EF4-FFF2-40B4-BE49-F238E27FC236}">
-                <a16:creationId xmlns:a16="http://schemas.microsoft.com/office/drawing/2014/main" id="{BE7494E9-23E4-406C-B606-D9F56D497696}"/>
+                <a16:creationId xmlns:a16="http://schemas.microsoft.com/office/drawing/2014/main" id="{CACBFAF1-5688-44D4-847F-F78F9F8E8523}"/>
               </a:ext>
             </a:extLst>
           </p:cNvPr>
@@ -37785,7 +38061,7 @@
           <p:cNvPr id="24" name="card-title">
             <a:extLst xmlns:a="http://schemas.openxmlformats.org/drawingml/2006/main">
               <a:ext uri="{FF2B5EF4-FFF2-40B4-BE49-F238E27FC236}">
-                <a16:creationId xmlns:a16="http://schemas.microsoft.com/office/drawing/2014/main" id="{010755A2-A12A-44AA-BB2E-A2AFC4BE360F}"/>
+                <a16:creationId xmlns:a16="http://schemas.microsoft.com/office/drawing/2014/main" id="{769A5730-8446-4717-8D9D-91F4105E1D4F}"/>
               </a:ext>
             </a:extLst>
           </p:cNvPr>
@@ -37841,7 +38117,7 @@
           <p:cNvPr id="25" name="card-body">
             <a:extLst xmlns:a="http://schemas.openxmlformats.org/drawingml/2006/main">
               <a:ext uri="{FF2B5EF4-FFF2-40B4-BE49-F238E27FC236}">
-                <a16:creationId xmlns:a16="http://schemas.microsoft.com/office/drawing/2014/main" id="{987113C1-C5F2-446C-940E-987435A400C9}"/>
+                <a16:creationId xmlns:a16="http://schemas.microsoft.com/office/drawing/2014/main" id="{C549FCAA-4FEB-4AFA-BBFA-F9B3CD466082}"/>
               </a:ext>
             </a:extLst>
           </p:cNvPr>
@@ -37887,7 +38163,7 @@
                 <a:ea typeface="Pretendard"/>
                 <a:cs typeface="Pretendard"/>
               </a:rPr>
-              <a:t>타이머를 보이게 두고, 각 팀의 산출물은</a:t>
+              <a:t>타이머를 보이게 두고, 각 팀의</a:t>
             </a:r>
           </a:p>
           <a:p xmlns:a="http://schemas.openxmlformats.org/drawingml/2006/main">
@@ -37910,7 +38186,30 @@
                 <a:ea typeface="Pretendard"/>
                 <a:cs typeface="Pretendard"/>
               </a:rPr>
-              <a:t>다음 단계 장표에 바로 옮겨 적게 합니다.</a:t>
+              <a:t>산출물은 다음 단계 장표에 바로</a:t>
+            </a:r>
+          </a:p>
+          <a:p xmlns:a="http://schemas.openxmlformats.org/drawingml/2006/main">
+            <a:pPr algn="l">
+              <a:defRPr sz="1350" b="0">
+                <a:solidFill>
+                  <a:srgbClr val="4B5563"/>
+                </a:solidFill>
+                <a:latin typeface="Pretendard"/>
+                <a:ea typeface="Pretendard"/>
+                <a:cs typeface="Pretendard"/>
+              </a:defRPr>
+            </a:pPr>
+            <a:r>
+              <a:rPr sz="1350" b="0">
+                <a:solidFill>
+                  <a:srgbClr val="4B5563"/>
+                </a:solidFill>
+                <a:latin typeface="Pretendard"/>
+                <a:ea typeface="Pretendard"/>
+                <a:cs typeface="Pretendard"/>
+              </a:rPr>
+              <a:t>옮겨 적게 합니다.</a:t>
             </a:r>
           </a:p>
         </p:txBody>
@@ -37918,7 +38217,7 @@
     </p:spTree>
     <p:extLst>
       <p:ext uri="{BB962C8B-B14F-4D97-AF65-F5344CB8AC3E}">
-        <p14:creationId xmlns:p14="http://schemas.microsoft.com/office/powerpoint/2010/main" val="331645798"/>
+        <p14:creationId xmlns:p14="http://schemas.microsoft.com/office/powerpoint/2010/main" val="1554340817"/>
       </p:ext>
     </p:extLst>
   </p:cSld>
@@ -37949,7 +38248,7 @@
           <p:cNvPr id="1" name="decor-ring-1">
             <a:extLst xmlns:a="http://schemas.openxmlformats.org/drawingml/2006/main">
               <a:ext uri="{FF2B5EF4-FFF2-40B4-BE49-F238E27FC236}">
-                <a16:creationId xmlns:a16="http://schemas.microsoft.com/office/drawing/2014/main" id="{EFA78F97-AFFE-4BC2-8EAB-0C9CF598766B}"/>
+                <a16:creationId xmlns:a16="http://schemas.microsoft.com/office/drawing/2014/main" id="{3E7F0A31-35B1-4840-B779-8553C8E016B8}"/>
               </a:ext>
             </a:extLst>
           </p:cNvPr>
@@ -37980,7 +38279,7 @@
           <p:cNvPr id="2" name="decor-ring-2">
             <a:extLst xmlns:a="http://schemas.openxmlformats.org/drawingml/2006/main">
               <a:ext uri="{FF2B5EF4-FFF2-40B4-BE49-F238E27FC236}">
-                <a16:creationId xmlns:a16="http://schemas.microsoft.com/office/drawing/2014/main" id="{5F07A0EB-2055-4306-9159-E0301D6A0E24}"/>
+                <a16:creationId xmlns:a16="http://schemas.microsoft.com/office/drawing/2014/main" id="{DCED7794-4A7A-48D7-B132-735B8BC8EC32}"/>
               </a:ext>
             </a:extLst>
           </p:cNvPr>
@@ -38011,7 +38310,7 @@
           <p:cNvPr id="3" name="decor-orb-1">
             <a:extLst xmlns:a="http://schemas.openxmlformats.org/drawingml/2006/main">
               <a:ext uri="{FF2B5EF4-FFF2-40B4-BE49-F238E27FC236}">
-                <a16:creationId xmlns:a16="http://schemas.microsoft.com/office/drawing/2014/main" id="{C2768429-1217-494D-8249-76DA5D0BF055}"/>
+                <a16:creationId xmlns:a16="http://schemas.microsoft.com/office/drawing/2014/main" id="{1470BE90-CC24-4B5B-BC80-FAE0AB674C2F}"/>
               </a:ext>
             </a:extLst>
           </p:cNvPr>
@@ -38042,7 +38341,7 @@
           <p:cNvPr id="4" name="decor-orb-2">
             <a:extLst xmlns:a="http://schemas.openxmlformats.org/drawingml/2006/main">
               <a:ext uri="{FF2B5EF4-FFF2-40B4-BE49-F238E27FC236}">
-                <a16:creationId xmlns:a16="http://schemas.microsoft.com/office/drawing/2014/main" id="{2CDDC53F-CB5A-400A-A351-38D0218D1151}"/>
+                <a16:creationId xmlns:a16="http://schemas.microsoft.com/office/drawing/2014/main" id="{95BAD5CF-3806-4FE6-BC7C-4371B033C362}"/>
               </a:ext>
             </a:extLst>
           </p:cNvPr>
@@ -38073,7 +38372,7 @@
           <p:cNvPr id="5" name="title-bar">
             <a:extLst xmlns:a="http://schemas.openxmlformats.org/drawingml/2006/main">
               <a:ext uri="{FF2B5EF4-FFF2-40B4-BE49-F238E27FC236}">
-                <a16:creationId xmlns:a16="http://schemas.microsoft.com/office/drawing/2014/main" id="{FCDECFE0-0501-4F15-9CD3-53B74B2EF3D3}"/>
+                <a16:creationId xmlns:a16="http://schemas.microsoft.com/office/drawing/2014/main" id="{C3C7470A-3EA2-499B-93E5-D4097ABEE2D1}"/>
               </a:ext>
             </a:extLst>
           </p:cNvPr>
@@ -38104,7 +38403,7 @@
           <p:cNvPr id="6" name="kicker">
             <a:extLst xmlns:a="http://schemas.openxmlformats.org/drawingml/2006/main">
               <a:ext uri="{FF2B5EF4-FFF2-40B4-BE49-F238E27FC236}">
-                <a16:creationId xmlns:a16="http://schemas.microsoft.com/office/drawing/2014/main" id="{1DE7F722-E4EE-4645-84BB-6C14E8B96301}"/>
+                <a16:creationId xmlns:a16="http://schemas.microsoft.com/office/drawing/2014/main" id="{A862F9B9-9478-4875-9BCD-D0C33B251F78}"/>
               </a:ext>
             </a:extLst>
           </p:cNvPr>
@@ -38160,7 +38459,7 @@
           <p:cNvPr id="7" name="title">
             <a:extLst xmlns:a="http://schemas.openxmlformats.org/drawingml/2006/main">
               <a:ext uri="{FF2B5EF4-FFF2-40B4-BE49-F238E27FC236}">
-                <a16:creationId xmlns:a16="http://schemas.microsoft.com/office/drawing/2014/main" id="{DCDC2908-6164-49C5-A817-E33B2869992F}"/>
+                <a16:creationId xmlns:a16="http://schemas.microsoft.com/office/drawing/2014/main" id="{D1619A33-AE88-41B1-9922-10B46B215A7E}"/>
               </a:ext>
             </a:extLst>
           </p:cNvPr>
@@ -38216,7 +38515,7 @@
           <p:cNvPr id="8" name="subtitle">
             <a:extLst xmlns:a="http://schemas.openxmlformats.org/drawingml/2006/main">
               <a:ext uri="{FF2B5EF4-FFF2-40B4-BE49-F238E27FC236}">
-                <a16:creationId xmlns:a16="http://schemas.microsoft.com/office/drawing/2014/main" id="{5D4865C5-640C-409D-983E-8A015D0C7451}"/>
+                <a16:creationId xmlns:a16="http://schemas.microsoft.com/office/drawing/2014/main" id="{28D0E972-5FCF-46B9-B560-DC7C120B3FE7}"/>
               </a:ext>
             </a:extLst>
           </p:cNvPr>
@@ -38276,7 +38575,7 @@
           <p:nvPr/>
         </p:nvPicPr>
         <p:blipFill>
-          <a:blip xmlns:r="http://schemas.openxmlformats.org/officeDocument/2006/relationships" xmlns:a="http://schemas.openxmlformats.org/drawingml/2006/main" r:embed="R2f93ed74df164306"/>
+          <a:blip xmlns:r="http://schemas.openxmlformats.org/officeDocument/2006/relationships" xmlns:a="http://schemas.openxmlformats.org/drawingml/2006/main" r:embed="R33ce6aa8c3de435d"/>
           <a:stretch xmlns:a="http://schemas.openxmlformats.org/drawingml/2006/main"/>
         </p:blipFill>
         <p:spPr>
@@ -38294,7 +38593,7 @@
           <p:cNvPr id="10" name="footer-number">
             <a:extLst xmlns:a="http://schemas.openxmlformats.org/drawingml/2006/main">
               <a:ext uri="{FF2B5EF4-FFF2-40B4-BE49-F238E27FC236}">
-                <a16:creationId xmlns:a16="http://schemas.microsoft.com/office/drawing/2014/main" id="{9578D062-AA49-42BA-9C63-FDC6D049DB24}"/>
+                <a16:creationId xmlns:a16="http://schemas.microsoft.com/office/drawing/2014/main" id="{F2FF6A82-89DC-4BC4-8D9D-417DA9E3D50D}"/>
               </a:ext>
             </a:extLst>
           </p:cNvPr>
@@ -38350,7 +38649,7 @@
           <p:cNvPr id="11" name="field-label">
             <a:extLst xmlns:a="http://schemas.openxmlformats.org/drawingml/2006/main">
               <a:ext uri="{FF2B5EF4-FFF2-40B4-BE49-F238E27FC236}">
-                <a16:creationId xmlns:a16="http://schemas.microsoft.com/office/drawing/2014/main" id="{AE6D0AE1-26B6-4362-ADC3-A7CD47A78965}"/>
+                <a16:creationId xmlns:a16="http://schemas.microsoft.com/office/drawing/2014/main" id="{EDD12CE6-473E-4FD8-9086-FD1755A7576D}"/>
               </a:ext>
             </a:extLst>
           </p:cNvPr>
@@ -38406,7 +38705,7 @@
           <p:cNvPr id="12" name="field-후보 1">
             <a:extLst xmlns:a="http://schemas.openxmlformats.org/drawingml/2006/main">
               <a:ext uri="{FF2B5EF4-FFF2-40B4-BE49-F238E27FC236}">
-                <a16:creationId xmlns:a16="http://schemas.microsoft.com/office/drawing/2014/main" id="{06047039-8791-44BB-B298-89D6EA0A4F5F}"/>
+                <a16:creationId xmlns:a16="http://schemas.microsoft.com/office/drawing/2014/main" id="{F1D71899-28FD-464F-8A1C-8A65E7EAA2AD}"/>
               </a:ext>
             </a:extLst>
           </p:cNvPr>
@@ -38441,7 +38740,7 @@
           <p:cNvPr id="13" name="field-hint">
             <a:extLst xmlns:a="http://schemas.openxmlformats.org/drawingml/2006/main">
               <a:ext uri="{FF2B5EF4-FFF2-40B4-BE49-F238E27FC236}">
-                <a16:creationId xmlns:a16="http://schemas.microsoft.com/office/drawing/2014/main" id="{59D068A0-CE94-44A9-A360-0D86BD35DEC2}"/>
+                <a16:creationId xmlns:a16="http://schemas.microsoft.com/office/drawing/2014/main" id="{CEE290C3-7C67-4452-B200-234A15B5F249}"/>
               </a:ext>
             </a:extLst>
           </p:cNvPr>
@@ -38497,7 +38796,7 @@
           <p:cNvPr id="14" name="field-label">
             <a:extLst xmlns:a="http://schemas.openxmlformats.org/drawingml/2006/main">
               <a:ext uri="{FF2B5EF4-FFF2-40B4-BE49-F238E27FC236}">
-                <a16:creationId xmlns:a16="http://schemas.microsoft.com/office/drawing/2014/main" id="{B8BA4509-B8BE-44A2-8121-998CF989F93A}"/>
+                <a16:creationId xmlns:a16="http://schemas.microsoft.com/office/drawing/2014/main" id="{FE78EE5A-805D-40F2-BBDC-C79A0AA12927}"/>
               </a:ext>
             </a:extLst>
           </p:cNvPr>
@@ -38553,7 +38852,7 @@
           <p:cNvPr id="15" name="field-후보 2">
             <a:extLst xmlns:a="http://schemas.openxmlformats.org/drawingml/2006/main">
               <a:ext uri="{FF2B5EF4-FFF2-40B4-BE49-F238E27FC236}">
-                <a16:creationId xmlns:a16="http://schemas.microsoft.com/office/drawing/2014/main" id="{1372D153-CF33-4BA5-ADF7-4EDE6363FC17}"/>
+                <a16:creationId xmlns:a16="http://schemas.microsoft.com/office/drawing/2014/main" id="{DE732FB9-F5B6-4794-AC1F-4EB7C06667BE}"/>
               </a:ext>
             </a:extLst>
           </p:cNvPr>
@@ -38588,7 +38887,7 @@
           <p:cNvPr id="16" name="field-hint">
             <a:extLst xmlns:a="http://schemas.openxmlformats.org/drawingml/2006/main">
               <a:ext uri="{FF2B5EF4-FFF2-40B4-BE49-F238E27FC236}">
-                <a16:creationId xmlns:a16="http://schemas.microsoft.com/office/drawing/2014/main" id="{AE691F23-1CFB-41C9-9A15-1CB088E35525}"/>
+                <a16:creationId xmlns:a16="http://schemas.microsoft.com/office/drawing/2014/main" id="{2E7528BB-52B1-47E6-A6C2-BA6DBDB7525B}"/>
               </a:ext>
             </a:extLst>
           </p:cNvPr>
@@ -38644,7 +38943,7 @@
           <p:cNvPr id="17" name="field-label">
             <a:extLst xmlns:a="http://schemas.openxmlformats.org/drawingml/2006/main">
               <a:ext uri="{FF2B5EF4-FFF2-40B4-BE49-F238E27FC236}">
-                <a16:creationId xmlns:a16="http://schemas.microsoft.com/office/drawing/2014/main" id="{39B58CED-514F-42D5-87A6-FA68040F31A9}"/>
+                <a16:creationId xmlns:a16="http://schemas.microsoft.com/office/drawing/2014/main" id="{C4F86830-2B6F-452B-AB86-8735A62992D9}"/>
               </a:ext>
             </a:extLst>
           </p:cNvPr>
@@ -38700,7 +38999,7 @@
           <p:cNvPr id="18" name="field-후보 3">
             <a:extLst xmlns:a="http://schemas.openxmlformats.org/drawingml/2006/main">
               <a:ext uri="{FF2B5EF4-FFF2-40B4-BE49-F238E27FC236}">
-                <a16:creationId xmlns:a16="http://schemas.microsoft.com/office/drawing/2014/main" id="{76AA6E00-3596-4B39-9162-12B64CC08B29}"/>
+                <a16:creationId xmlns:a16="http://schemas.microsoft.com/office/drawing/2014/main" id="{3DA3E3E7-A18C-4761-B832-BF2087EB7051}"/>
               </a:ext>
             </a:extLst>
           </p:cNvPr>
@@ -38735,7 +39034,7 @@
           <p:cNvPr id="19" name="field-hint">
             <a:extLst xmlns:a="http://schemas.openxmlformats.org/drawingml/2006/main">
               <a:ext uri="{FF2B5EF4-FFF2-40B4-BE49-F238E27FC236}">
-                <a16:creationId xmlns:a16="http://schemas.microsoft.com/office/drawing/2014/main" id="{B18EE8F8-C795-4DC4-96A1-D5AA9426E4E9}"/>
+                <a16:creationId xmlns:a16="http://schemas.microsoft.com/office/drawing/2014/main" id="{A8D24F54-CBC8-47C1-B317-A89608305E34}"/>
               </a:ext>
             </a:extLst>
           </p:cNvPr>
@@ -38791,7 +39090,7 @@
           <p:cNvPr id="20" name="selection">
             <a:extLst xmlns:a="http://schemas.openxmlformats.org/drawingml/2006/main">
               <a:ext uri="{FF2B5EF4-FFF2-40B4-BE49-F238E27FC236}">
-                <a16:creationId xmlns:a16="http://schemas.microsoft.com/office/drawing/2014/main" id="{7B9ED458-C930-4BF7-B512-DF95E7B9220C}"/>
+                <a16:creationId xmlns:a16="http://schemas.microsoft.com/office/drawing/2014/main" id="{0482FC7D-BBDD-4B35-8B82-0951E1C74A9D}"/>
               </a:ext>
             </a:extLst>
           </p:cNvPr>
@@ -38845,7 +39144,7 @@
     </p:spTree>
     <p:extLst>
       <p:ext uri="{BB962C8B-B14F-4D97-AF65-F5344CB8AC3E}">
-        <p14:creationId xmlns:p14="http://schemas.microsoft.com/office/powerpoint/2010/main" val="1933369476"/>
+        <p14:creationId xmlns:p14="http://schemas.microsoft.com/office/powerpoint/2010/main" val="100478171"/>
       </p:ext>
     </p:extLst>
   </p:cSld>
@@ -38876,7 +39175,7 @@
           <p:cNvPr id="1" name="decor-ring-1">
             <a:extLst xmlns:a="http://schemas.openxmlformats.org/drawingml/2006/main">
               <a:ext uri="{FF2B5EF4-FFF2-40B4-BE49-F238E27FC236}">
-                <a16:creationId xmlns:a16="http://schemas.microsoft.com/office/drawing/2014/main" id="{2BAD7D8C-1EAD-40D7-9F65-B015CD6109D6}"/>
+                <a16:creationId xmlns:a16="http://schemas.microsoft.com/office/drawing/2014/main" id="{B2A23C11-84EB-49A2-B668-82591C3AE13B}"/>
               </a:ext>
             </a:extLst>
           </p:cNvPr>
@@ -38907,7 +39206,7 @@
           <p:cNvPr id="2" name="decor-ring-2">
             <a:extLst xmlns:a="http://schemas.openxmlformats.org/drawingml/2006/main">
               <a:ext uri="{FF2B5EF4-FFF2-40B4-BE49-F238E27FC236}">
-                <a16:creationId xmlns:a16="http://schemas.microsoft.com/office/drawing/2014/main" id="{8334FC06-3314-4B7E-B04E-7C636E783D73}"/>
+                <a16:creationId xmlns:a16="http://schemas.microsoft.com/office/drawing/2014/main" id="{C0ACD6DF-9E2D-4001-9C45-A136B8DF7ED8}"/>
               </a:ext>
             </a:extLst>
           </p:cNvPr>
@@ -38938,7 +39237,7 @@
           <p:cNvPr id="3" name="decor-orb-1">
             <a:extLst xmlns:a="http://schemas.openxmlformats.org/drawingml/2006/main">
               <a:ext uri="{FF2B5EF4-FFF2-40B4-BE49-F238E27FC236}">
-                <a16:creationId xmlns:a16="http://schemas.microsoft.com/office/drawing/2014/main" id="{1D7CF960-7626-4F7A-8E5B-A766423D28D9}"/>
+                <a16:creationId xmlns:a16="http://schemas.microsoft.com/office/drawing/2014/main" id="{BA29D3C5-DA5C-444F-8180-C4F405A38534}"/>
               </a:ext>
             </a:extLst>
           </p:cNvPr>
@@ -38969,7 +39268,7 @@
           <p:cNvPr id="4" name="decor-orb-2">
             <a:extLst xmlns:a="http://schemas.openxmlformats.org/drawingml/2006/main">
               <a:ext uri="{FF2B5EF4-FFF2-40B4-BE49-F238E27FC236}">
-                <a16:creationId xmlns:a16="http://schemas.microsoft.com/office/drawing/2014/main" id="{D6CCA1E5-27EE-4B7F-93B6-C62BAEC2EA7A}"/>
+                <a16:creationId xmlns:a16="http://schemas.microsoft.com/office/drawing/2014/main" id="{EC8894F1-530F-4324-9C6B-1BCD971FEBC4}"/>
               </a:ext>
             </a:extLst>
           </p:cNvPr>
@@ -39000,7 +39299,7 @@
           <p:cNvPr id="5" name="title-bar">
             <a:extLst xmlns:a="http://schemas.openxmlformats.org/drawingml/2006/main">
               <a:ext uri="{FF2B5EF4-FFF2-40B4-BE49-F238E27FC236}">
-                <a16:creationId xmlns:a16="http://schemas.microsoft.com/office/drawing/2014/main" id="{4022995A-F723-4A71-8DB5-A336F5925491}"/>
+                <a16:creationId xmlns:a16="http://schemas.microsoft.com/office/drawing/2014/main" id="{E1CB0B82-F203-49B1-BB3C-D27B313C788F}"/>
               </a:ext>
             </a:extLst>
           </p:cNvPr>
@@ -39031,7 +39330,7 @@
           <p:cNvPr id="6" name="kicker">
             <a:extLst xmlns:a="http://schemas.openxmlformats.org/drawingml/2006/main">
               <a:ext uri="{FF2B5EF4-FFF2-40B4-BE49-F238E27FC236}">
-                <a16:creationId xmlns:a16="http://schemas.microsoft.com/office/drawing/2014/main" id="{2A22CE24-B20E-47FC-910C-503790E348F4}"/>
+                <a16:creationId xmlns:a16="http://schemas.microsoft.com/office/drawing/2014/main" id="{8CF2A5BB-3E7B-4787-A654-C24ACB39D820}"/>
               </a:ext>
             </a:extLst>
           </p:cNvPr>
@@ -39087,7 +39386,7 @@
           <p:cNvPr id="7" name="title">
             <a:extLst xmlns:a="http://schemas.openxmlformats.org/drawingml/2006/main">
               <a:ext uri="{FF2B5EF4-FFF2-40B4-BE49-F238E27FC236}">
-                <a16:creationId xmlns:a16="http://schemas.microsoft.com/office/drawing/2014/main" id="{73C07E9E-DC34-4C94-8CBB-720724B31A0A}"/>
+                <a16:creationId xmlns:a16="http://schemas.microsoft.com/office/drawing/2014/main" id="{3C60A86B-9E5C-4BAD-9313-DE59C68CC2B8}"/>
               </a:ext>
             </a:extLst>
           </p:cNvPr>
@@ -39143,7 +39442,7 @@
           <p:cNvPr id="8" name="subtitle">
             <a:extLst xmlns:a="http://schemas.openxmlformats.org/drawingml/2006/main">
               <a:ext uri="{FF2B5EF4-FFF2-40B4-BE49-F238E27FC236}">
-                <a16:creationId xmlns:a16="http://schemas.microsoft.com/office/drawing/2014/main" id="{25A72A2B-82A4-414D-B421-4EE9A19D5222}"/>
+                <a16:creationId xmlns:a16="http://schemas.microsoft.com/office/drawing/2014/main" id="{AF271D59-EC35-4B5B-83D0-FD7348764318}"/>
               </a:ext>
             </a:extLst>
           </p:cNvPr>
@@ -39203,7 +39502,7 @@
           <p:nvPr/>
         </p:nvPicPr>
         <p:blipFill>
-          <a:blip xmlns:r="http://schemas.openxmlformats.org/officeDocument/2006/relationships" xmlns:a="http://schemas.openxmlformats.org/drawingml/2006/main" r:embed="R7554aaa290254192"/>
+          <a:blip xmlns:r="http://schemas.openxmlformats.org/officeDocument/2006/relationships" xmlns:a="http://schemas.openxmlformats.org/drawingml/2006/main" r:embed="Rdd44710367de49bf"/>
           <a:stretch xmlns:a="http://schemas.openxmlformats.org/drawingml/2006/main"/>
         </p:blipFill>
         <p:spPr>
@@ -39221,7 +39520,7 @@
           <p:cNvPr id="10" name="footer-number">
             <a:extLst xmlns:a="http://schemas.openxmlformats.org/drawingml/2006/main">
               <a:ext uri="{FF2B5EF4-FFF2-40B4-BE49-F238E27FC236}">
-                <a16:creationId xmlns:a16="http://schemas.microsoft.com/office/drawing/2014/main" id="{6B40AC22-F81E-482C-83C6-7D975C2286E4}"/>
+                <a16:creationId xmlns:a16="http://schemas.microsoft.com/office/drawing/2014/main" id="{F270103F-FA28-4470-91AC-A195165B2B54}"/>
               </a:ext>
             </a:extLst>
           </p:cNvPr>
@@ -39277,7 +39576,7 @@
           <p:cNvPr id="11" name="card-TYPE 1">
             <a:extLst xmlns:a="http://schemas.openxmlformats.org/drawingml/2006/main">
               <a:ext uri="{FF2B5EF4-FFF2-40B4-BE49-F238E27FC236}">
-                <a16:creationId xmlns:a16="http://schemas.microsoft.com/office/drawing/2014/main" id="{6D54C367-F178-4870-9CD3-D6090AE9AAA6}"/>
+                <a16:creationId xmlns:a16="http://schemas.microsoft.com/office/drawing/2014/main" id="{8C0AFD81-82B5-41FE-84F8-344DCC2224FD}"/>
               </a:ext>
             </a:extLst>
           </p:cNvPr>
@@ -39318,7 +39617,7 @@
           <p:cNvPr id="12" name="card-accent">
             <a:extLst xmlns:a="http://schemas.openxmlformats.org/drawingml/2006/main">
               <a:ext uri="{FF2B5EF4-FFF2-40B4-BE49-F238E27FC236}">
-                <a16:creationId xmlns:a16="http://schemas.microsoft.com/office/drawing/2014/main" id="{0532C4EE-070A-4AA6-8834-CFCC4D79C623}"/>
+                <a16:creationId xmlns:a16="http://schemas.microsoft.com/office/drawing/2014/main" id="{D55D886C-FF63-4676-93EC-7BB2FA3C819A}"/>
               </a:ext>
             </a:extLst>
           </p:cNvPr>
@@ -39349,7 +39648,7 @@
           <p:cNvPr id="13" name="card-label">
             <a:extLst xmlns:a="http://schemas.openxmlformats.org/drawingml/2006/main">
               <a:ext uri="{FF2B5EF4-FFF2-40B4-BE49-F238E27FC236}">
-                <a16:creationId xmlns:a16="http://schemas.microsoft.com/office/drawing/2014/main" id="{D45DD027-7F93-4242-8E81-C0ACF776795D}"/>
+                <a16:creationId xmlns:a16="http://schemas.microsoft.com/office/drawing/2014/main" id="{06B56405-7412-48AC-BF8C-FAE2ED3DD158}"/>
               </a:ext>
             </a:extLst>
           </p:cNvPr>
@@ -39405,7 +39704,7 @@
           <p:cNvPr id="14" name="card-title">
             <a:extLst xmlns:a="http://schemas.openxmlformats.org/drawingml/2006/main">
               <a:ext uri="{FF2B5EF4-FFF2-40B4-BE49-F238E27FC236}">
-                <a16:creationId xmlns:a16="http://schemas.microsoft.com/office/drawing/2014/main" id="{DC4D5837-C980-4703-AB38-A353F77E2404}"/>
+                <a16:creationId xmlns:a16="http://schemas.microsoft.com/office/drawing/2014/main" id="{E4F62035-3D1E-496F-B22C-75FC54880A1A}"/>
               </a:ext>
             </a:extLst>
           </p:cNvPr>
@@ -39461,7 +39760,7 @@
           <p:cNvPr id="15" name="card-body">
             <a:extLst xmlns:a="http://schemas.openxmlformats.org/drawingml/2006/main">
               <a:ext uri="{FF2B5EF4-FFF2-40B4-BE49-F238E27FC236}">
-                <a16:creationId xmlns:a16="http://schemas.microsoft.com/office/drawing/2014/main" id="{D3649346-9722-45F1-9D22-2F19365F9E84}"/>
+                <a16:creationId xmlns:a16="http://schemas.microsoft.com/office/drawing/2014/main" id="{BAABA16B-52DE-4D1B-813A-C6366291615A}"/>
               </a:ext>
             </a:extLst>
           </p:cNvPr>
@@ -39507,7 +39806,7 @@
                 <a:ea typeface="Pretendard"/>
                 <a:cs typeface="Pretendard"/>
               </a:rPr>
-              <a:t>현업 요청, 장애 티켓, 문의 메일을 유형별로 분류하고</a:t>
+              <a:t>현업 요청, 장애 티켓, 문의 메일을 유형별로</a:t>
             </a:r>
           </a:p>
           <a:p xmlns:a="http://schemas.openxmlformats.org/drawingml/2006/main">
@@ -39530,7 +39829,7 @@
                 <a:ea typeface="Pretendard"/>
                 <a:cs typeface="Pretendard"/>
               </a:rPr>
-              <a:t>다음 액션을 제안</a:t>
+              <a:t>분류하고 다음 액션을 제안</a:t>
             </a:r>
           </a:p>
         </p:txBody>
@@ -39540,7 +39839,7 @@
           <p:cNvPr id="16" name="card-TYPE 2">
             <a:extLst xmlns:a="http://schemas.openxmlformats.org/drawingml/2006/main">
               <a:ext uri="{FF2B5EF4-FFF2-40B4-BE49-F238E27FC236}">
-                <a16:creationId xmlns:a16="http://schemas.microsoft.com/office/drawing/2014/main" id="{FCC0B5A7-4899-4C99-87BB-59E6F6A942D8}"/>
+                <a16:creationId xmlns:a16="http://schemas.microsoft.com/office/drawing/2014/main" id="{632F2B89-6382-4E3F-866A-910691FECBA9}"/>
               </a:ext>
             </a:extLst>
           </p:cNvPr>
@@ -39581,7 +39880,7 @@
           <p:cNvPr id="17" name="card-accent">
             <a:extLst xmlns:a="http://schemas.openxmlformats.org/drawingml/2006/main">
               <a:ext uri="{FF2B5EF4-FFF2-40B4-BE49-F238E27FC236}">
-                <a16:creationId xmlns:a16="http://schemas.microsoft.com/office/drawing/2014/main" id="{0425A945-BCDA-4802-B317-B8F277CCC2F1}"/>
+                <a16:creationId xmlns:a16="http://schemas.microsoft.com/office/drawing/2014/main" id="{5BAF41E5-DCD4-4E47-BBDA-758ED69B90F3}"/>
               </a:ext>
             </a:extLst>
           </p:cNvPr>
@@ -39612,7 +39911,7 @@
           <p:cNvPr id="18" name="card-label">
             <a:extLst xmlns:a="http://schemas.openxmlformats.org/drawingml/2006/main">
               <a:ext uri="{FF2B5EF4-FFF2-40B4-BE49-F238E27FC236}">
-                <a16:creationId xmlns:a16="http://schemas.microsoft.com/office/drawing/2014/main" id="{096FABBB-CC6C-47F6-9A93-402BD860F750}"/>
+                <a16:creationId xmlns:a16="http://schemas.microsoft.com/office/drawing/2014/main" id="{7DE49950-CBDC-47D3-A1E3-F11E2EAFE091}"/>
               </a:ext>
             </a:extLst>
           </p:cNvPr>
@@ -39668,7 +39967,7 @@
           <p:cNvPr id="19" name="card-title">
             <a:extLst xmlns:a="http://schemas.openxmlformats.org/drawingml/2006/main">
               <a:ext uri="{FF2B5EF4-FFF2-40B4-BE49-F238E27FC236}">
-                <a16:creationId xmlns:a16="http://schemas.microsoft.com/office/drawing/2014/main" id="{53BDF6DB-B589-4570-A7BE-B2404C9E1D75}"/>
+                <a16:creationId xmlns:a16="http://schemas.microsoft.com/office/drawing/2014/main" id="{3705FF5A-BD83-49C1-91D6-5F3081920497}"/>
               </a:ext>
             </a:extLst>
           </p:cNvPr>
@@ -39724,7 +40023,7 @@
           <p:cNvPr id="20" name="card-body">
             <a:extLst xmlns:a="http://schemas.openxmlformats.org/drawingml/2006/main">
               <a:ext uri="{FF2B5EF4-FFF2-40B4-BE49-F238E27FC236}">
-                <a16:creationId xmlns:a16="http://schemas.microsoft.com/office/drawing/2014/main" id="{7CBF1419-A5AC-423C-AF48-B782C5C9A689}"/>
+                <a16:creationId xmlns:a16="http://schemas.microsoft.com/office/drawing/2014/main" id="{A1D60284-CE40-48AF-B23A-BACADD2020AD}"/>
               </a:ext>
             </a:extLst>
           </p:cNvPr>
@@ -39770,7 +40069,7 @@
                 <a:ea typeface="Pretendard"/>
                 <a:cs typeface="Pretendard"/>
               </a:rPr>
-              <a:t>회의록, 정책, 운영 매뉴얼, 계약/규정 초안을 요약하고</a:t>
+              <a:t>회의록, 정책, 운영 매뉴얼, 계약/규정 초안을</a:t>
             </a:r>
           </a:p>
           <a:p xmlns:a="http://schemas.openxmlformats.org/drawingml/2006/main">
@@ -39793,7 +40092,7 @@
                 <a:ea typeface="Pretendard"/>
                 <a:cs typeface="Pretendard"/>
               </a:rPr>
-              <a:t>체크포인트 추출</a:t>
+              <a:t>요약하고 체크포인트 추출</a:t>
             </a:r>
           </a:p>
         </p:txBody>
@@ -39803,7 +40102,7 @@
           <p:cNvPr id="21" name="card-TYPE 3">
             <a:extLst xmlns:a="http://schemas.openxmlformats.org/drawingml/2006/main">
               <a:ext uri="{FF2B5EF4-FFF2-40B4-BE49-F238E27FC236}">
-                <a16:creationId xmlns:a16="http://schemas.microsoft.com/office/drawing/2014/main" id="{2E081C18-90DB-438C-BC14-1B87944A9036}"/>
+                <a16:creationId xmlns:a16="http://schemas.microsoft.com/office/drawing/2014/main" id="{232DF9FE-E428-470C-9FD1-ABAF7672B081}"/>
               </a:ext>
             </a:extLst>
           </p:cNvPr>
@@ -39844,7 +40143,7 @@
           <p:cNvPr id="22" name="card-accent">
             <a:extLst xmlns:a="http://schemas.openxmlformats.org/drawingml/2006/main">
               <a:ext uri="{FF2B5EF4-FFF2-40B4-BE49-F238E27FC236}">
-                <a16:creationId xmlns:a16="http://schemas.microsoft.com/office/drawing/2014/main" id="{AA6E5256-991A-4874-97BC-62A06D281917}"/>
+                <a16:creationId xmlns:a16="http://schemas.microsoft.com/office/drawing/2014/main" id="{45E0905D-9B42-403A-9B75-48802C78E5AD}"/>
               </a:ext>
             </a:extLst>
           </p:cNvPr>
@@ -39875,7 +40174,7 @@
           <p:cNvPr id="23" name="card-label">
             <a:extLst xmlns:a="http://schemas.openxmlformats.org/drawingml/2006/main">
               <a:ext uri="{FF2B5EF4-FFF2-40B4-BE49-F238E27FC236}">
-                <a16:creationId xmlns:a16="http://schemas.microsoft.com/office/drawing/2014/main" id="{30C86469-A911-46CE-B183-0AD646905579}"/>
+                <a16:creationId xmlns:a16="http://schemas.microsoft.com/office/drawing/2014/main" id="{F6FFCA73-98A7-46F1-B226-7CD71DDB99CE}"/>
               </a:ext>
             </a:extLst>
           </p:cNvPr>
@@ -39931,7 +40230,7 @@
           <p:cNvPr id="24" name="card-title">
             <a:extLst xmlns:a="http://schemas.openxmlformats.org/drawingml/2006/main">
               <a:ext uri="{FF2B5EF4-FFF2-40B4-BE49-F238E27FC236}">
-                <a16:creationId xmlns:a16="http://schemas.microsoft.com/office/drawing/2014/main" id="{D3FF63FB-F275-47B1-84EB-9BA518D048C2}"/>
+                <a16:creationId xmlns:a16="http://schemas.microsoft.com/office/drawing/2014/main" id="{9CFCB741-7D9D-4F11-B91C-1EA9301D8A5C}"/>
               </a:ext>
             </a:extLst>
           </p:cNvPr>
@@ -39987,7 +40286,7 @@
           <p:cNvPr id="25" name="card-body">
             <a:extLst xmlns:a="http://schemas.openxmlformats.org/drawingml/2006/main">
               <a:ext uri="{FF2B5EF4-FFF2-40B4-BE49-F238E27FC236}">
-                <a16:creationId xmlns:a16="http://schemas.microsoft.com/office/drawing/2014/main" id="{B2C40890-2529-4ABC-B477-2872826CA94C}"/>
+                <a16:creationId xmlns:a16="http://schemas.microsoft.com/office/drawing/2014/main" id="{1E8619E3-179C-4E1F-9DC2-BFD1B6A74A06}"/>
               </a:ext>
             </a:extLst>
           </p:cNvPr>
@@ -40033,7 +40332,7 @@
                 <a:ea typeface="Pretendard"/>
                 <a:cs typeface="Pretendard"/>
               </a:rPr>
-              <a:t>주간 현황, 리스크, 비용/성과 데이터를 보고서 초안으로</a:t>
+              <a:t>주간 현황, 리스크, 비용/성과 데이터를</a:t>
             </a:r>
           </a:p>
           <a:p xmlns:a="http://schemas.openxmlformats.org/drawingml/2006/main">
@@ -40056,7 +40355,7 @@
                 <a:ea typeface="Pretendard"/>
                 <a:cs typeface="Pretendard"/>
               </a:rPr>
-              <a:t>정리</a:t>
+              <a:t>보고서 초안으로 정리</a:t>
             </a:r>
           </a:p>
         </p:txBody>
@@ -40066,7 +40365,7 @@
           <p:cNvPr id="26" name="card-TYPE 4">
             <a:extLst xmlns:a="http://schemas.openxmlformats.org/drawingml/2006/main">
               <a:ext uri="{FF2B5EF4-FFF2-40B4-BE49-F238E27FC236}">
-                <a16:creationId xmlns:a16="http://schemas.microsoft.com/office/drawing/2014/main" id="{36559EF1-1B40-403D-B088-8A10F5A467A0}"/>
+                <a16:creationId xmlns:a16="http://schemas.microsoft.com/office/drawing/2014/main" id="{340DBB61-BB85-481A-B49D-ABC83E16ABA9}"/>
               </a:ext>
             </a:extLst>
           </p:cNvPr>
@@ -40107,7 +40406,7 @@
           <p:cNvPr id="27" name="card-accent">
             <a:extLst xmlns:a="http://schemas.openxmlformats.org/drawingml/2006/main">
               <a:ext uri="{FF2B5EF4-FFF2-40B4-BE49-F238E27FC236}">
-                <a16:creationId xmlns:a16="http://schemas.microsoft.com/office/drawing/2014/main" id="{BF385C0D-43DB-4CB6-8773-E2A98D4C3368}"/>
+                <a16:creationId xmlns:a16="http://schemas.microsoft.com/office/drawing/2014/main" id="{21759D5A-BFD1-4D3A-BE19-B9EE79D7AFDD}"/>
               </a:ext>
             </a:extLst>
           </p:cNvPr>
@@ -40138,7 +40437,7 @@
           <p:cNvPr id="28" name="card-label">
             <a:extLst xmlns:a="http://schemas.openxmlformats.org/drawingml/2006/main">
               <a:ext uri="{FF2B5EF4-FFF2-40B4-BE49-F238E27FC236}">
-                <a16:creationId xmlns:a16="http://schemas.microsoft.com/office/drawing/2014/main" id="{63F4935B-690E-4703-9020-4FC43BF8CDA3}"/>
+                <a16:creationId xmlns:a16="http://schemas.microsoft.com/office/drawing/2014/main" id="{F4907645-833B-4575-9A3C-D93B7C38FB44}"/>
               </a:ext>
             </a:extLst>
           </p:cNvPr>
@@ -40194,7 +40493,7 @@
           <p:cNvPr id="29" name="card-title">
             <a:extLst xmlns:a="http://schemas.openxmlformats.org/drawingml/2006/main">
               <a:ext uri="{FF2B5EF4-FFF2-40B4-BE49-F238E27FC236}">
-                <a16:creationId xmlns:a16="http://schemas.microsoft.com/office/drawing/2014/main" id="{FEE48468-A380-4339-AD8F-A2CCFBCF394E}"/>
+                <a16:creationId xmlns:a16="http://schemas.microsoft.com/office/drawing/2014/main" id="{2B9D232B-FD25-494A-832C-CED22158B16B}"/>
               </a:ext>
             </a:extLst>
           </p:cNvPr>
@@ -40250,7 +40549,7 @@
           <p:cNvPr id="30" name="card-body">
             <a:extLst xmlns:a="http://schemas.openxmlformats.org/drawingml/2006/main">
               <a:ext uri="{FF2B5EF4-FFF2-40B4-BE49-F238E27FC236}">
-                <a16:creationId xmlns:a16="http://schemas.microsoft.com/office/drawing/2014/main" id="{92734E05-C9D4-4B3E-9972-07CF8F08896F}"/>
+                <a16:creationId xmlns:a16="http://schemas.microsoft.com/office/drawing/2014/main" id="{AD93C7C3-83CA-4607-82D5-2A52D972B974}"/>
               </a:ext>
             </a:extLst>
           </p:cNvPr>
@@ -40296,7 +40595,30 @@
                 <a:ea typeface="Pretendard"/>
                 <a:cs typeface="Pretendard"/>
               </a:rPr>
-              <a:t>품질, 준법, 보안, 승인 기준에 맞춰 누락 사항을 점검</a:t>
+              <a:t>품질, 준법, 보안, 승인 기준에 맞춰</a:t>
+            </a:r>
+          </a:p>
+          <a:p xmlns:a="http://schemas.openxmlformats.org/drawingml/2006/main">
+            <a:pPr algn="l">
+              <a:defRPr sz="1200" b="0">
+                <a:solidFill>
+                  <a:srgbClr val="4B5563"/>
+                </a:solidFill>
+                <a:latin typeface="Pretendard"/>
+                <a:ea typeface="Pretendard"/>
+                <a:cs typeface="Pretendard"/>
+              </a:defRPr>
+            </a:pPr>
+            <a:r>
+              <a:rPr sz="1200" b="0">
+                <a:solidFill>
+                  <a:srgbClr val="4B5563"/>
+                </a:solidFill>
+                <a:latin typeface="Pretendard"/>
+                <a:ea typeface="Pretendard"/>
+                <a:cs typeface="Pretendard"/>
+              </a:rPr>
+              <a:t>누락 사항을 점검</a:t>
             </a:r>
           </a:p>
         </p:txBody>
@@ -40306,7 +40628,7 @@
           <p:cNvPr id="31" name="card-TYPE 5">
             <a:extLst xmlns:a="http://schemas.openxmlformats.org/drawingml/2006/main">
               <a:ext uri="{FF2B5EF4-FFF2-40B4-BE49-F238E27FC236}">
-                <a16:creationId xmlns:a16="http://schemas.microsoft.com/office/drawing/2014/main" id="{3C6C4731-6C66-457C-9FE9-8AF9377A48C0}"/>
+                <a16:creationId xmlns:a16="http://schemas.microsoft.com/office/drawing/2014/main" id="{0E794C78-ED4E-4760-BD09-718D1D3BDB09}"/>
               </a:ext>
             </a:extLst>
           </p:cNvPr>
@@ -40347,7 +40669,7 @@
           <p:cNvPr id="32" name="card-accent">
             <a:extLst xmlns:a="http://schemas.openxmlformats.org/drawingml/2006/main">
               <a:ext uri="{FF2B5EF4-FFF2-40B4-BE49-F238E27FC236}">
-                <a16:creationId xmlns:a16="http://schemas.microsoft.com/office/drawing/2014/main" id="{BEDD4004-09AD-421B-86B2-BA0D75A1BCDA}"/>
+                <a16:creationId xmlns:a16="http://schemas.microsoft.com/office/drawing/2014/main" id="{4088095F-8EBC-4066-A9C3-CEE5D2AD47EC}"/>
               </a:ext>
             </a:extLst>
           </p:cNvPr>
@@ -40378,7 +40700,7 @@
           <p:cNvPr id="33" name="card-label">
             <a:extLst xmlns:a="http://schemas.openxmlformats.org/drawingml/2006/main">
               <a:ext uri="{FF2B5EF4-FFF2-40B4-BE49-F238E27FC236}">
-                <a16:creationId xmlns:a16="http://schemas.microsoft.com/office/drawing/2014/main" id="{523F3B96-B4BE-467D-978C-C7729BB71C52}"/>
+                <a16:creationId xmlns:a16="http://schemas.microsoft.com/office/drawing/2014/main" id="{3759054C-8B05-4A2B-A677-5A6FBB7318B8}"/>
               </a:ext>
             </a:extLst>
           </p:cNvPr>
@@ -40434,7 +40756,7 @@
           <p:cNvPr id="34" name="card-title">
             <a:extLst xmlns:a="http://schemas.openxmlformats.org/drawingml/2006/main">
               <a:ext uri="{FF2B5EF4-FFF2-40B4-BE49-F238E27FC236}">
-                <a16:creationId xmlns:a16="http://schemas.microsoft.com/office/drawing/2014/main" id="{7DF0420E-0A1F-4E18-9148-713DB1654D6A}"/>
+                <a16:creationId xmlns:a16="http://schemas.microsoft.com/office/drawing/2014/main" id="{E9A55455-D3A3-4EDE-9DA5-0DCC934D358E}"/>
               </a:ext>
             </a:extLst>
           </p:cNvPr>
@@ -40490,7 +40812,7 @@
           <p:cNvPr id="35" name="card-body">
             <a:extLst xmlns:a="http://schemas.openxmlformats.org/drawingml/2006/main">
               <a:ext uri="{FF2B5EF4-FFF2-40B4-BE49-F238E27FC236}">
-                <a16:creationId xmlns:a16="http://schemas.microsoft.com/office/drawing/2014/main" id="{4B93EA6F-EF97-4680-9EF4-ECD85ADD37E3}"/>
+                <a16:creationId xmlns:a16="http://schemas.microsoft.com/office/drawing/2014/main" id="{2E4B609B-FCFF-4D6E-B7CD-C0F02AAB977B}"/>
               </a:ext>
             </a:extLst>
           </p:cNvPr>
@@ -40536,7 +40858,30 @@
                 <a:ea typeface="Pretendard"/>
                 <a:cs typeface="Pretendard"/>
               </a:rPr>
-              <a:t>요구사항을 코드/테스트/Agent 흐름으로 빠르게 변환</a:t>
+              <a:t>요구사항을 코드/테스트/Agent</a:t>
+            </a:r>
+          </a:p>
+          <a:p xmlns:a="http://schemas.openxmlformats.org/drawingml/2006/main">
+            <a:pPr algn="l">
+              <a:defRPr sz="1200" b="0">
+                <a:solidFill>
+                  <a:srgbClr val="4B5563"/>
+                </a:solidFill>
+                <a:latin typeface="Pretendard"/>
+                <a:ea typeface="Pretendard"/>
+                <a:cs typeface="Pretendard"/>
+              </a:defRPr>
+            </a:pPr>
+            <a:r>
+              <a:rPr sz="1200" b="0">
+                <a:solidFill>
+                  <a:srgbClr val="4B5563"/>
+                </a:solidFill>
+                <a:latin typeface="Pretendard"/>
+                <a:ea typeface="Pretendard"/>
+                <a:cs typeface="Pretendard"/>
+              </a:rPr>
+              <a:t>흐름으로 빠르게 변환</a:t>
             </a:r>
           </a:p>
         </p:txBody>
@@ -40546,7 +40891,7 @@
           <p:cNvPr id="36" name="card-TYPE 6">
             <a:extLst xmlns:a="http://schemas.openxmlformats.org/drawingml/2006/main">
               <a:ext uri="{FF2B5EF4-FFF2-40B4-BE49-F238E27FC236}">
-                <a16:creationId xmlns:a16="http://schemas.microsoft.com/office/drawing/2014/main" id="{80031BB6-4FA0-4B29-8F21-203B7465D0B4}"/>
+                <a16:creationId xmlns:a16="http://schemas.microsoft.com/office/drawing/2014/main" id="{B288FBE0-8AB9-4A71-926E-23E7989C3710}"/>
               </a:ext>
             </a:extLst>
           </p:cNvPr>
@@ -40587,7 +40932,7 @@
           <p:cNvPr id="37" name="card-accent">
             <a:extLst xmlns:a="http://schemas.openxmlformats.org/drawingml/2006/main">
               <a:ext uri="{FF2B5EF4-FFF2-40B4-BE49-F238E27FC236}">
-                <a16:creationId xmlns:a16="http://schemas.microsoft.com/office/drawing/2014/main" id="{48778702-3AE1-4DBB-8092-DBBA2011EE50}"/>
+                <a16:creationId xmlns:a16="http://schemas.microsoft.com/office/drawing/2014/main" id="{C447D64B-08F5-4D21-A7C9-15026C8A2CA5}"/>
               </a:ext>
             </a:extLst>
           </p:cNvPr>
@@ -40618,7 +40963,7 @@
           <p:cNvPr id="38" name="card-label">
             <a:extLst xmlns:a="http://schemas.openxmlformats.org/drawingml/2006/main">
               <a:ext uri="{FF2B5EF4-FFF2-40B4-BE49-F238E27FC236}">
-                <a16:creationId xmlns:a16="http://schemas.microsoft.com/office/drawing/2014/main" id="{97CEC9DF-0505-4D88-BE02-8C1432CA30BC}"/>
+                <a16:creationId xmlns:a16="http://schemas.microsoft.com/office/drawing/2014/main" id="{3D45E70D-72D7-4FFA-8AC2-CC4DF1524778}"/>
               </a:ext>
             </a:extLst>
           </p:cNvPr>
@@ -40674,7 +41019,7 @@
           <p:cNvPr id="39" name="card-title">
             <a:extLst xmlns:a="http://schemas.openxmlformats.org/drawingml/2006/main">
               <a:ext uri="{FF2B5EF4-FFF2-40B4-BE49-F238E27FC236}">
-                <a16:creationId xmlns:a16="http://schemas.microsoft.com/office/drawing/2014/main" id="{52CFAF7E-BA66-490B-A233-F2DE0B66685C}"/>
+                <a16:creationId xmlns:a16="http://schemas.microsoft.com/office/drawing/2014/main" id="{E7293B4A-C9BA-4E96-B45B-BEE9BA0567B0}"/>
               </a:ext>
             </a:extLst>
           </p:cNvPr>
@@ -40730,7 +41075,7 @@
           <p:cNvPr id="40" name="card-body">
             <a:extLst xmlns:a="http://schemas.openxmlformats.org/drawingml/2006/main">
               <a:ext uri="{FF2B5EF4-FFF2-40B4-BE49-F238E27FC236}">
-                <a16:creationId xmlns:a16="http://schemas.microsoft.com/office/drawing/2014/main" id="{34E428F7-4B9B-4A93-B529-F3168F341A15}"/>
+                <a16:creationId xmlns:a16="http://schemas.microsoft.com/office/drawing/2014/main" id="{488272E1-16DB-4994-8252-71872071B9DB}"/>
               </a:ext>
             </a:extLst>
           </p:cNvPr>
@@ -40776,7 +41121,30 @@
                 <a:ea typeface="Pretendard"/>
                 <a:cs typeface="Pretendard"/>
               </a:rPr>
-              <a:t>사내 절차와 매뉴얼에서 근거를 찾아 응답 초안 작성</a:t>
+              <a:t>사내 절차와 매뉴얼에서 근거를 찾아</a:t>
+            </a:r>
+          </a:p>
+          <a:p xmlns:a="http://schemas.openxmlformats.org/drawingml/2006/main">
+            <a:pPr algn="l">
+              <a:defRPr sz="1200" b="0">
+                <a:solidFill>
+                  <a:srgbClr val="4B5563"/>
+                </a:solidFill>
+                <a:latin typeface="Pretendard"/>
+                <a:ea typeface="Pretendard"/>
+                <a:cs typeface="Pretendard"/>
+              </a:defRPr>
+            </a:pPr>
+            <a:r>
+              <a:rPr sz="1200" b="0">
+                <a:solidFill>
+                  <a:srgbClr val="4B5563"/>
+                </a:solidFill>
+                <a:latin typeface="Pretendard"/>
+                <a:ea typeface="Pretendard"/>
+                <a:cs typeface="Pretendard"/>
+              </a:rPr>
+              <a:t>응답 초안 작성</a:t>
             </a:r>
           </a:p>
         </p:txBody>
@@ -40784,7 +41152,7 @@
     </p:spTree>
     <p:extLst>
       <p:ext uri="{BB962C8B-B14F-4D97-AF65-F5344CB8AC3E}">
-        <p14:creationId xmlns:p14="http://schemas.microsoft.com/office/powerpoint/2010/main" val="1102515778"/>
+        <p14:creationId xmlns:p14="http://schemas.microsoft.com/office/powerpoint/2010/main" val="505607566"/>
       </p:ext>
     </p:extLst>
   </p:cSld>
@@ -40815,7 +41183,7 @@
           <p:cNvPr id="1" name="decor-ring-1">
             <a:extLst xmlns:a="http://schemas.openxmlformats.org/drawingml/2006/main">
               <a:ext uri="{FF2B5EF4-FFF2-40B4-BE49-F238E27FC236}">
-                <a16:creationId xmlns:a16="http://schemas.microsoft.com/office/drawing/2014/main" id="{5BEC8688-679C-4D62-9245-3356606596A7}"/>
+                <a16:creationId xmlns:a16="http://schemas.microsoft.com/office/drawing/2014/main" id="{3767007B-EF53-44C0-99B0-CE3244AE0267}"/>
               </a:ext>
             </a:extLst>
           </p:cNvPr>
@@ -40846,7 +41214,7 @@
           <p:cNvPr id="2" name="decor-ring-2">
             <a:extLst xmlns:a="http://schemas.openxmlformats.org/drawingml/2006/main">
               <a:ext uri="{FF2B5EF4-FFF2-40B4-BE49-F238E27FC236}">
-                <a16:creationId xmlns:a16="http://schemas.microsoft.com/office/drawing/2014/main" id="{FF80636E-A24A-427C-BF6D-7F25BEAEC123}"/>
+                <a16:creationId xmlns:a16="http://schemas.microsoft.com/office/drawing/2014/main" id="{7035F2E7-4AF9-499C-B1D3-E7AA488243D4}"/>
               </a:ext>
             </a:extLst>
           </p:cNvPr>
@@ -40877,7 +41245,7 @@
           <p:cNvPr id="3" name="decor-orb-1">
             <a:extLst xmlns:a="http://schemas.openxmlformats.org/drawingml/2006/main">
               <a:ext uri="{FF2B5EF4-FFF2-40B4-BE49-F238E27FC236}">
-                <a16:creationId xmlns:a16="http://schemas.microsoft.com/office/drawing/2014/main" id="{45ACF071-031D-4C8B-A349-B3B771957782}"/>
+                <a16:creationId xmlns:a16="http://schemas.microsoft.com/office/drawing/2014/main" id="{33FEA1E3-CC3B-4AB9-B3C1-145ED173A305}"/>
               </a:ext>
             </a:extLst>
           </p:cNvPr>
@@ -40908,7 +41276,7 @@
           <p:cNvPr id="4" name="decor-orb-2">
             <a:extLst xmlns:a="http://schemas.openxmlformats.org/drawingml/2006/main">
               <a:ext uri="{FF2B5EF4-FFF2-40B4-BE49-F238E27FC236}">
-                <a16:creationId xmlns:a16="http://schemas.microsoft.com/office/drawing/2014/main" id="{32CFAE5D-BD36-45FD-9EF7-5670AC952EAB}"/>
+                <a16:creationId xmlns:a16="http://schemas.microsoft.com/office/drawing/2014/main" id="{4ADC4841-5B48-4ED9-845D-BEC945F9B8E2}"/>
               </a:ext>
             </a:extLst>
           </p:cNvPr>
@@ -40939,7 +41307,7 @@
           <p:cNvPr id="5" name="title-bar">
             <a:extLst xmlns:a="http://schemas.openxmlformats.org/drawingml/2006/main">
               <a:ext uri="{FF2B5EF4-FFF2-40B4-BE49-F238E27FC236}">
-                <a16:creationId xmlns:a16="http://schemas.microsoft.com/office/drawing/2014/main" id="{42D09E0B-A458-498D-874F-4AA59A5186A4}"/>
+                <a16:creationId xmlns:a16="http://schemas.microsoft.com/office/drawing/2014/main" id="{8710B436-CB71-4626-9248-BFBF2261B767}"/>
               </a:ext>
             </a:extLst>
           </p:cNvPr>
@@ -40970,7 +41338,7 @@
           <p:cNvPr id="6" name="kicker">
             <a:extLst xmlns:a="http://schemas.openxmlformats.org/drawingml/2006/main">
               <a:ext uri="{FF2B5EF4-FFF2-40B4-BE49-F238E27FC236}">
-                <a16:creationId xmlns:a16="http://schemas.microsoft.com/office/drawing/2014/main" id="{9C01F66E-77F7-4787-8B1C-59624929874E}"/>
+                <a16:creationId xmlns:a16="http://schemas.microsoft.com/office/drawing/2014/main" id="{4CDD358D-0110-495F-820C-8E154BD07929}"/>
               </a:ext>
             </a:extLst>
           </p:cNvPr>
@@ -41026,7 +41394,7 @@
           <p:cNvPr id="7" name="title">
             <a:extLst xmlns:a="http://schemas.openxmlformats.org/drawingml/2006/main">
               <a:ext uri="{FF2B5EF4-FFF2-40B4-BE49-F238E27FC236}">
-                <a16:creationId xmlns:a16="http://schemas.microsoft.com/office/drawing/2014/main" id="{DC9AA3A1-D147-416B-9397-B2827A31AC54}"/>
+                <a16:creationId xmlns:a16="http://schemas.microsoft.com/office/drawing/2014/main" id="{A2569810-A0ED-4C1C-BA49-74B820FB2791}"/>
               </a:ext>
             </a:extLst>
           </p:cNvPr>
@@ -41082,7 +41450,7 @@
           <p:cNvPr id="8" name="subtitle">
             <a:extLst xmlns:a="http://schemas.openxmlformats.org/drawingml/2006/main">
               <a:ext uri="{FF2B5EF4-FFF2-40B4-BE49-F238E27FC236}">
-                <a16:creationId xmlns:a16="http://schemas.microsoft.com/office/drawing/2014/main" id="{A28A5689-7A27-41A0-B1C6-0D1854C8ED6B}"/>
+                <a16:creationId xmlns:a16="http://schemas.microsoft.com/office/drawing/2014/main" id="{C69906BE-EA2B-420D-84E1-F9C430BDE0FB}"/>
               </a:ext>
             </a:extLst>
           </p:cNvPr>
@@ -41142,7 +41510,7 @@
           <p:nvPr/>
         </p:nvPicPr>
         <p:blipFill>
-          <a:blip xmlns:r="http://schemas.openxmlformats.org/officeDocument/2006/relationships" xmlns:a="http://schemas.openxmlformats.org/drawingml/2006/main" r:embed="R8c381ebde1a249e1"/>
+          <a:blip xmlns:r="http://schemas.openxmlformats.org/officeDocument/2006/relationships" xmlns:a="http://schemas.openxmlformats.org/drawingml/2006/main" r:embed="Ra7507c5ff7534935"/>
           <a:stretch xmlns:a="http://schemas.openxmlformats.org/drawingml/2006/main"/>
         </p:blipFill>
         <p:spPr>
@@ -41160,7 +41528,7 @@
           <p:cNvPr id="10" name="footer-number">
             <a:extLst xmlns:a="http://schemas.openxmlformats.org/drawingml/2006/main">
               <a:ext uri="{FF2B5EF4-FFF2-40B4-BE49-F238E27FC236}">
-                <a16:creationId xmlns:a16="http://schemas.microsoft.com/office/drawing/2014/main" id="{18DDD2D6-A1AA-48F7-BC32-755415805711}"/>
+                <a16:creationId xmlns:a16="http://schemas.microsoft.com/office/drawing/2014/main" id="{BC3AA386-EBE9-4D82-9912-4ACDD63FC4B2}"/>
               </a:ext>
             </a:extLst>
           </p:cNvPr>
@@ -41216,7 +41584,7 @@
           <p:cNvPr id="11" name="card-진행 방법">
             <a:extLst xmlns:a="http://schemas.openxmlformats.org/drawingml/2006/main">
               <a:ext uri="{FF2B5EF4-FFF2-40B4-BE49-F238E27FC236}">
-                <a16:creationId xmlns:a16="http://schemas.microsoft.com/office/drawing/2014/main" id="{1D6314BF-403C-4BE2-95E4-93728E150CE7}"/>
+                <a16:creationId xmlns:a16="http://schemas.microsoft.com/office/drawing/2014/main" id="{DE82E12B-D7F9-4F0E-947C-7B25CE0BBAE5}"/>
               </a:ext>
             </a:extLst>
           </p:cNvPr>
@@ -41257,7 +41625,7 @@
           <p:cNvPr id="12" name="card-accent">
             <a:extLst xmlns:a="http://schemas.openxmlformats.org/drawingml/2006/main">
               <a:ext uri="{FF2B5EF4-FFF2-40B4-BE49-F238E27FC236}">
-                <a16:creationId xmlns:a16="http://schemas.microsoft.com/office/drawing/2014/main" id="{D71F6B0C-6034-42AD-88C3-98C09564C1D8}"/>
+                <a16:creationId xmlns:a16="http://schemas.microsoft.com/office/drawing/2014/main" id="{E7477346-152F-4CA3-AD6A-262DE7E74544}"/>
               </a:ext>
             </a:extLst>
           </p:cNvPr>
@@ -41288,7 +41656,7 @@
           <p:cNvPr id="13" name="card-label">
             <a:extLst xmlns:a="http://schemas.openxmlformats.org/drawingml/2006/main">
               <a:ext uri="{FF2B5EF4-FFF2-40B4-BE49-F238E27FC236}">
-                <a16:creationId xmlns:a16="http://schemas.microsoft.com/office/drawing/2014/main" id="{144475E8-65FD-4C9B-8C98-3AF332942676}"/>
+                <a16:creationId xmlns:a16="http://schemas.microsoft.com/office/drawing/2014/main" id="{802AAA09-4270-42D1-9399-B6FC02F38418}"/>
               </a:ext>
             </a:extLst>
           </p:cNvPr>
@@ -41344,7 +41712,7 @@
           <p:cNvPr id="14" name="card-title">
             <a:extLst xmlns:a="http://schemas.openxmlformats.org/drawingml/2006/main">
               <a:ext uri="{FF2B5EF4-FFF2-40B4-BE49-F238E27FC236}">
-                <a16:creationId xmlns:a16="http://schemas.microsoft.com/office/drawing/2014/main" id="{BE4E670C-2A8A-419B-AEFC-7E4104D22499}"/>
+                <a16:creationId xmlns:a16="http://schemas.microsoft.com/office/drawing/2014/main" id="{B993E941-53FA-4447-8D46-BC6B16973626}"/>
               </a:ext>
             </a:extLst>
           </p:cNvPr>
@@ -41400,7 +41768,7 @@
           <p:cNvPr id="15" name="card-body">
             <a:extLst xmlns:a="http://schemas.openxmlformats.org/drawingml/2006/main">
               <a:ext uri="{FF2B5EF4-FFF2-40B4-BE49-F238E27FC236}">
-                <a16:creationId xmlns:a16="http://schemas.microsoft.com/office/drawing/2014/main" id="{0D2D631C-C34A-4284-9BDD-A2E6ECFC5E7B}"/>
+                <a16:creationId xmlns:a16="http://schemas.microsoft.com/office/drawing/2014/main" id="{3C7369D4-9295-4EF1-AEB1-B98F7BAA2430}"/>
               </a:ext>
             </a:extLst>
           </p:cNvPr>
@@ -41446,7 +41814,7 @@
                 <a:ea typeface="Pretendard"/>
                 <a:cs typeface="Pretendard"/>
               </a:rPr>
-              <a:t>후보별 5개 기준 점수화 → 제외 조건 확인 →</a:t>
+              <a:t>후보별 5개 기준 점수화 → 제외 조건</a:t>
             </a:r>
           </a:p>
           <a:p xmlns:a="http://schemas.openxmlformats.org/drawingml/2006/main">
@@ -41469,7 +41837,7 @@
                 <a:ea typeface="Pretendard"/>
                 <a:cs typeface="Pretendard"/>
               </a:rPr>
-              <a:t>팀 토론용 후보 1-2개 선정</a:t>
+              <a:t>확인 → 팀 토론용 후보 1-2개 선정</a:t>
             </a:r>
           </a:p>
         </p:txBody>
@@ -41479,7 +41847,7 @@
           <p:cNvPr id="16" name="card-결과물">
             <a:extLst xmlns:a="http://schemas.openxmlformats.org/drawingml/2006/main">
               <a:ext uri="{FF2B5EF4-FFF2-40B4-BE49-F238E27FC236}">
-                <a16:creationId xmlns:a16="http://schemas.microsoft.com/office/drawing/2014/main" id="{2F141252-320D-45E7-A749-D0A23FA23AEF}"/>
+                <a16:creationId xmlns:a16="http://schemas.microsoft.com/office/drawing/2014/main" id="{FCAAE201-26E0-45C5-8BC4-31B2834959D5}"/>
               </a:ext>
             </a:extLst>
           </p:cNvPr>
@@ -41520,7 +41888,7 @@
           <p:cNvPr id="17" name="card-accent">
             <a:extLst xmlns:a="http://schemas.openxmlformats.org/drawingml/2006/main">
               <a:ext uri="{FF2B5EF4-FFF2-40B4-BE49-F238E27FC236}">
-                <a16:creationId xmlns:a16="http://schemas.microsoft.com/office/drawing/2014/main" id="{765E147E-B1C5-44C9-A439-A496280D9E4D}"/>
+                <a16:creationId xmlns:a16="http://schemas.microsoft.com/office/drawing/2014/main" id="{1724FF3E-6E53-4DF2-9497-A0D5CB249139}"/>
               </a:ext>
             </a:extLst>
           </p:cNvPr>
@@ -41551,7 +41919,7 @@
           <p:cNvPr id="18" name="card-label">
             <a:extLst xmlns:a="http://schemas.openxmlformats.org/drawingml/2006/main">
               <a:ext uri="{FF2B5EF4-FFF2-40B4-BE49-F238E27FC236}">
-                <a16:creationId xmlns:a16="http://schemas.microsoft.com/office/drawing/2014/main" id="{BEBC4F65-61A3-46D4-8C67-7C190A3C1B24}"/>
+                <a16:creationId xmlns:a16="http://schemas.microsoft.com/office/drawing/2014/main" id="{A93A40B2-0BFB-4CBA-AAC3-834606204126}"/>
               </a:ext>
             </a:extLst>
           </p:cNvPr>
@@ -41607,7 +41975,7 @@
           <p:cNvPr id="19" name="card-title">
             <a:extLst xmlns:a="http://schemas.openxmlformats.org/drawingml/2006/main">
               <a:ext uri="{FF2B5EF4-FFF2-40B4-BE49-F238E27FC236}">
-                <a16:creationId xmlns:a16="http://schemas.microsoft.com/office/drawing/2014/main" id="{B22593A6-07B0-4714-90E7-8389BC8F88C6}"/>
+                <a16:creationId xmlns:a16="http://schemas.microsoft.com/office/drawing/2014/main" id="{3067C840-0980-439D-9AAB-9E94617DCB5F}"/>
               </a:ext>
             </a:extLst>
           </p:cNvPr>
@@ -41663,7 +42031,7 @@
           <p:cNvPr id="20" name="card-body">
             <a:extLst xmlns:a="http://schemas.openxmlformats.org/drawingml/2006/main">
               <a:ext uri="{FF2B5EF4-FFF2-40B4-BE49-F238E27FC236}">
-                <a16:creationId xmlns:a16="http://schemas.microsoft.com/office/drawing/2014/main" id="{E692209C-B8DB-489F-B233-0C56E2F7FAAD}"/>
+                <a16:creationId xmlns:a16="http://schemas.microsoft.com/office/drawing/2014/main" id="{40B175F1-2726-476E-B1CC-BDBFA00736EA}"/>
               </a:ext>
             </a:extLst>
           </p:cNvPr>
@@ -41719,7 +42087,7 @@
           <p:cNvPr id="21" name="card-운영 팁">
             <a:extLst xmlns:a="http://schemas.openxmlformats.org/drawingml/2006/main">
               <a:ext uri="{FF2B5EF4-FFF2-40B4-BE49-F238E27FC236}">
-                <a16:creationId xmlns:a16="http://schemas.microsoft.com/office/drawing/2014/main" id="{88A9D4A2-09F5-4C02-ACBD-DFE7CEF59D42}"/>
+                <a16:creationId xmlns:a16="http://schemas.microsoft.com/office/drawing/2014/main" id="{0778DDAE-2D9D-4ECC-9397-D4CB067B38B7}"/>
               </a:ext>
             </a:extLst>
           </p:cNvPr>
@@ -41760,7 +42128,7 @@
           <p:cNvPr id="22" name="card-accent">
             <a:extLst xmlns:a="http://schemas.openxmlformats.org/drawingml/2006/main">
               <a:ext uri="{FF2B5EF4-FFF2-40B4-BE49-F238E27FC236}">
-                <a16:creationId xmlns:a16="http://schemas.microsoft.com/office/drawing/2014/main" id="{D28FE937-5DDB-4E55-98F9-EC080D0FD369}"/>
+                <a16:creationId xmlns:a16="http://schemas.microsoft.com/office/drawing/2014/main" id="{63C469D4-8827-4923-98A4-9F49FF8F75D0}"/>
               </a:ext>
             </a:extLst>
           </p:cNvPr>
@@ -41791,7 +42159,7 @@
           <p:cNvPr id="23" name="card-label">
             <a:extLst xmlns:a="http://schemas.openxmlformats.org/drawingml/2006/main">
               <a:ext uri="{FF2B5EF4-FFF2-40B4-BE49-F238E27FC236}">
-                <a16:creationId xmlns:a16="http://schemas.microsoft.com/office/drawing/2014/main" id="{890341A5-99BF-402A-82A8-4AF08258FD8A}"/>
+                <a16:creationId xmlns:a16="http://schemas.microsoft.com/office/drawing/2014/main" id="{5A5A59E3-2B01-437D-BABF-755CFFE640B6}"/>
               </a:ext>
             </a:extLst>
           </p:cNvPr>
@@ -41847,7 +42215,7 @@
           <p:cNvPr id="24" name="card-title">
             <a:extLst xmlns:a="http://schemas.openxmlformats.org/drawingml/2006/main">
               <a:ext uri="{FF2B5EF4-FFF2-40B4-BE49-F238E27FC236}">
-                <a16:creationId xmlns:a16="http://schemas.microsoft.com/office/drawing/2014/main" id="{D41C9DA6-0930-42DE-8D16-3217B1813300}"/>
+                <a16:creationId xmlns:a16="http://schemas.microsoft.com/office/drawing/2014/main" id="{2CA0ED0A-59E6-499D-91C8-6D4B733860AB}"/>
               </a:ext>
             </a:extLst>
           </p:cNvPr>
@@ -41903,7 +42271,7 @@
           <p:cNvPr id="25" name="card-body">
             <a:extLst xmlns:a="http://schemas.openxmlformats.org/drawingml/2006/main">
               <a:ext uri="{FF2B5EF4-FFF2-40B4-BE49-F238E27FC236}">
-                <a16:creationId xmlns:a16="http://schemas.microsoft.com/office/drawing/2014/main" id="{0D9455F6-BDD3-4BF7-88FB-E48AD5C0ACBE}"/>
+                <a16:creationId xmlns:a16="http://schemas.microsoft.com/office/drawing/2014/main" id="{CBE6A988-BD33-4EEE-A48C-C4A51026F06B}"/>
               </a:ext>
             </a:extLst>
           </p:cNvPr>
@@ -41949,7 +42317,7 @@
                 <a:ea typeface="Pretendard"/>
                 <a:cs typeface="Pretendard"/>
               </a:rPr>
-              <a:t>타이머를 보이게 두고, 각 팀의 산출물은</a:t>
+              <a:t>타이머를 보이게 두고, 각 팀의</a:t>
             </a:r>
           </a:p>
           <a:p xmlns:a="http://schemas.openxmlformats.org/drawingml/2006/main">
@@ -41972,7 +42340,30 @@
                 <a:ea typeface="Pretendard"/>
                 <a:cs typeface="Pretendard"/>
               </a:rPr>
-              <a:t>다음 단계 장표에 바로 옮겨 적게 합니다.</a:t>
+              <a:t>산출물은 다음 단계 장표에 바로</a:t>
+            </a:r>
+          </a:p>
+          <a:p xmlns:a="http://schemas.openxmlformats.org/drawingml/2006/main">
+            <a:pPr algn="l">
+              <a:defRPr sz="1350" b="0">
+                <a:solidFill>
+                  <a:srgbClr val="4B5563"/>
+                </a:solidFill>
+                <a:latin typeface="Pretendard"/>
+                <a:ea typeface="Pretendard"/>
+                <a:cs typeface="Pretendard"/>
+              </a:defRPr>
+            </a:pPr>
+            <a:r>
+              <a:rPr sz="1350" b="0">
+                <a:solidFill>
+                  <a:srgbClr val="4B5563"/>
+                </a:solidFill>
+                <a:latin typeface="Pretendard"/>
+                <a:ea typeface="Pretendard"/>
+                <a:cs typeface="Pretendard"/>
+              </a:rPr>
+              <a:t>옮겨 적게 합니다.</a:t>
             </a:r>
           </a:p>
         </p:txBody>
@@ -41980,7 +42371,7 @@
     </p:spTree>
     <p:extLst>
       <p:ext uri="{BB962C8B-B14F-4D97-AF65-F5344CB8AC3E}">
-        <p14:creationId xmlns:p14="http://schemas.microsoft.com/office/powerpoint/2010/main" val="1563870430"/>
+        <p14:creationId xmlns:p14="http://schemas.microsoft.com/office/powerpoint/2010/main" val="1740005880"/>
       </p:ext>
     </p:extLst>
   </p:cSld>
